--- a/presentation/presentation.pptx
+++ b/presentation/presentation.pptx
@@ -80,24 +80,25 @@
             <a:noAutofit/>
           </a:bodyPr>
           <a:p>
+            <a:pPr algn="ctr"/>
             <a:r>
-              <a:rPr b="0" lang="en-TR" sz="1800" strike="noStrike" u="none">
-                <a:solidFill>
-                  <a:schemeClr val="dk1"/>
-                </a:solidFill>
-                <a:effectLst/>
-                <a:uFillTx/>
-                <a:latin typeface="Calibri"/>
+              <a:rPr b="0" lang="en-TR" sz="4400" strike="noStrike" u="none">
+                <a:solidFill>
+                  <a:srgbClr val="000000"/>
+                </a:solidFill>
+                <a:effectLst/>
+                <a:uFillTx/>
+                <a:latin typeface="Arial"/>
               </a:rPr>
               <a:t>Click to move the slide</a:t>
             </a:r>
-            <a:endParaRPr b="0" lang="en-TR" sz="1800" strike="noStrike" u="none">
-              <a:solidFill>
-                <a:schemeClr val="dk1"/>
-              </a:solidFill>
-              <a:effectLst/>
-              <a:uFillTx/>
-              <a:latin typeface="Calibri"/>
+            <a:endParaRPr b="0" lang="en-TR" sz="4400" strike="noStrike" u="none">
+              <a:solidFill>
+                <a:srgbClr val="000000"/>
+              </a:solidFill>
+              <a:effectLst/>
+              <a:uFillTx/>
+              <a:latin typeface="Arial"/>
             </a:endParaRPr>
           </a:p>
         </p:txBody>
@@ -461,7 +462,7 @@
             <a:pPr indent="0" algn="r">
               <a:buNone/>
             </a:pPr>
-            <a:fld id="{51A4383C-2428-4539-A433-DB647C49D104}" type="slidenum">
+            <a:fld id="{B58E4E1C-5CA8-41D1-84E7-2025BFBB70CD}" type="slidenum">
               <a:rPr b="0" lang="en-TR" sz="1400" strike="noStrike" u="none">
                 <a:solidFill>
                   <a:srgbClr val="000000"/>
@@ -519,7 +520,7 @@
         <p:spPr>
           <a:xfrm>
             <a:off x="685800" y="1143000"/>
-            <a:ext cx="5486040" cy="3085920"/>
+            <a:ext cx="5485680" cy="3085560"/>
           </a:xfrm>
           <a:prstGeom prst="rect">
             <a:avLst/>
@@ -542,7 +543,7 @@
         <p:spPr>
           <a:xfrm>
             <a:off x="685800" y="4400640"/>
-            <a:ext cx="5486040" cy="3600000"/>
+            <a:ext cx="5485680" cy="3599640"/>
           </a:xfrm>
           <a:prstGeom prst="rect">
             <a:avLst/>
@@ -584,7 +585,7 @@
         <p:spPr>
           <a:xfrm>
             <a:off x="3884760" y="8685360"/>
-            <a:ext cx="2971440" cy="458280"/>
+            <a:ext cx="2971080" cy="457920"/>
           </a:xfrm>
           <a:prstGeom prst="rect">
             <a:avLst/>
@@ -604,6 +605,9 @@
                 <a:spcPct val="100000"/>
               </a:lnSpc>
               <a:buNone/>
+              <a:tabLst>
+                <a:tab algn="l" pos="0"/>
+              </a:tabLst>
               <a:defRPr b="0" lang="en-US" sz="1200" strike="noStrike" u="none">
                 <a:solidFill>
                   <a:schemeClr val="dk1"/>
@@ -621,8 +625,11 @@
                 <a:spcPct val="100000"/>
               </a:lnSpc>
               <a:buNone/>
-            </a:pPr>
-            <a:fld id="{8FFA7D0C-E4FF-425E-A42B-0E04BED29F85}" type="slidenum">
+              <a:tabLst>
+                <a:tab algn="l" pos="0"/>
+              </a:tabLst>
+            </a:pPr>
+            <a:fld id="{6FBBDD06-1352-4C7F-B447-9F0086BC94B4}" type="slidenum">
               <a:rPr b="0" lang="en-US" sz="1200" strike="noStrike" u="none">
                 <a:solidFill>
                   <a:schemeClr val="dk1"/>
@@ -680,7 +687,7 @@
         <p:spPr>
           <a:xfrm>
             <a:off x="685800" y="1143000"/>
-            <a:ext cx="5486040" cy="3085920"/>
+            <a:ext cx="5485680" cy="3085560"/>
           </a:xfrm>
           <a:prstGeom prst="rect">
             <a:avLst/>
@@ -703,7 +710,7 @@
         <p:spPr>
           <a:xfrm>
             <a:off x="685800" y="4400640"/>
-            <a:ext cx="5486040" cy="3600000"/>
+            <a:ext cx="5485680" cy="3599640"/>
           </a:xfrm>
           <a:prstGeom prst="rect">
             <a:avLst/>
@@ -745,7 +752,7 @@
         <p:spPr>
           <a:xfrm>
             <a:off x="3884760" y="8685360"/>
-            <a:ext cx="2971440" cy="458280"/>
+            <a:ext cx="2971080" cy="457920"/>
           </a:xfrm>
           <a:prstGeom prst="rect">
             <a:avLst/>
@@ -765,6 +772,9 @@
                 <a:spcPct val="100000"/>
               </a:lnSpc>
               <a:buNone/>
+              <a:tabLst>
+                <a:tab algn="l" pos="0"/>
+              </a:tabLst>
               <a:defRPr b="0" lang="en-US" sz="1200" strike="noStrike" u="none">
                 <a:solidFill>
                   <a:schemeClr val="dk1"/>
@@ -782,8 +792,11 @@
                 <a:spcPct val="100000"/>
               </a:lnSpc>
               <a:buNone/>
-            </a:pPr>
-            <a:fld id="{4F8D3931-6107-4114-9E43-520B923EEA02}" type="slidenum">
+              <a:tabLst>
+                <a:tab algn="l" pos="0"/>
+              </a:tabLst>
+            </a:pPr>
+            <a:fld id="{64A55F00-CBCA-40B2-B40B-EC541DA7F5F5}" type="slidenum">
               <a:rPr b="0" lang="en-US" sz="1200" strike="noStrike" u="none">
                 <a:solidFill>
                   <a:schemeClr val="dk1"/>
@@ -841,7 +854,7 @@
         <p:spPr>
           <a:xfrm>
             <a:off x="685800" y="1143000"/>
-            <a:ext cx="5486040" cy="3085920"/>
+            <a:ext cx="5485680" cy="3085560"/>
           </a:xfrm>
           <a:prstGeom prst="rect">
             <a:avLst/>
@@ -864,7 +877,7 @@
         <p:spPr>
           <a:xfrm>
             <a:off x="685800" y="4400640"/>
-            <a:ext cx="5486040" cy="3600000"/>
+            <a:ext cx="5485680" cy="3599640"/>
           </a:xfrm>
           <a:prstGeom prst="rect">
             <a:avLst/>
@@ -906,7 +919,7 @@
         <p:spPr>
           <a:xfrm>
             <a:off x="3884760" y="8685360"/>
-            <a:ext cx="2971440" cy="458280"/>
+            <a:ext cx="2971080" cy="457920"/>
           </a:xfrm>
           <a:prstGeom prst="rect">
             <a:avLst/>
@@ -926,6 +939,9 @@
                 <a:spcPct val="100000"/>
               </a:lnSpc>
               <a:buNone/>
+              <a:tabLst>
+                <a:tab algn="l" pos="0"/>
+              </a:tabLst>
               <a:defRPr b="0" lang="en-US" sz="1200" strike="noStrike" u="none">
                 <a:solidFill>
                   <a:schemeClr val="dk1"/>
@@ -943,8 +959,11 @@
                 <a:spcPct val="100000"/>
               </a:lnSpc>
               <a:buNone/>
-            </a:pPr>
-            <a:fld id="{8CB655B1-2F75-4566-916E-A04AFB9640CF}" type="slidenum">
+              <a:tabLst>
+                <a:tab algn="l" pos="0"/>
+              </a:tabLst>
+            </a:pPr>
+            <a:fld id="{07C758FC-5DE8-4EAE-9884-84222307F8D3}" type="slidenum">
               <a:rPr b="0" lang="en-US" sz="1200" strike="noStrike" u="none">
                 <a:solidFill>
                   <a:schemeClr val="dk1"/>
@@ -1002,7 +1021,7 @@
         <p:spPr>
           <a:xfrm>
             <a:off x="685800" y="1143000"/>
-            <a:ext cx="5486040" cy="3085920"/>
+            <a:ext cx="5485680" cy="3085560"/>
           </a:xfrm>
           <a:prstGeom prst="rect">
             <a:avLst/>
@@ -1025,7 +1044,7 @@
         <p:spPr>
           <a:xfrm>
             <a:off x="685800" y="4400640"/>
-            <a:ext cx="5486040" cy="3600000"/>
+            <a:ext cx="5485680" cy="3599640"/>
           </a:xfrm>
           <a:prstGeom prst="rect">
             <a:avLst/>
@@ -1067,7 +1086,7 @@
         <p:spPr>
           <a:xfrm>
             <a:off x="3884760" y="8685360"/>
-            <a:ext cx="2971440" cy="458280"/>
+            <a:ext cx="2971080" cy="457920"/>
           </a:xfrm>
           <a:prstGeom prst="rect">
             <a:avLst/>
@@ -1087,6 +1106,9 @@
                 <a:spcPct val="100000"/>
               </a:lnSpc>
               <a:buNone/>
+              <a:tabLst>
+                <a:tab algn="l" pos="0"/>
+              </a:tabLst>
               <a:defRPr b="0" lang="en-US" sz="1200" strike="noStrike" u="none">
                 <a:solidFill>
                   <a:schemeClr val="dk1"/>
@@ -1104,8 +1126,11 @@
                 <a:spcPct val="100000"/>
               </a:lnSpc>
               <a:buNone/>
-            </a:pPr>
-            <a:fld id="{D066999A-3545-43A0-941E-0381B92DCFE6}" type="slidenum">
+              <a:tabLst>
+                <a:tab algn="l" pos="0"/>
+              </a:tabLst>
+            </a:pPr>
+            <a:fld id="{1DF3B9C2-4983-48AF-B60D-9EFD85FFC6FD}" type="slidenum">
               <a:rPr b="0" lang="en-US" sz="1200" strike="noStrike" u="none">
                 <a:solidFill>
                   <a:schemeClr val="dk1"/>
@@ -1163,7 +1188,7 @@
         <p:spPr>
           <a:xfrm>
             <a:off x="685800" y="1143000"/>
-            <a:ext cx="5486040" cy="3085920"/>
+            <a:ext cx="5485680" cy="3085560"/>
           </a:xfrm>
           <a:prstGeom prst="rect">
             <a:avLst/>
@@ -1186,7 +1211,7 @@
         <p:spPr>
           <a:xfrm>
             <a:off x="685800" y="4400640"/>
-            <a:ext cx="5486040" cy="3600000"/>
+            <a:ext cx="5485680" cy="3599640"/>
           </a:xfrm>
           <a:prstGeom prst="rect">
             <a:avLst/>
@@ -1228,7 +1253,7 @@
         <p:spPr>
           <a:xfrm>
             <a:off x="3884760" y="8685360"/>
-            <a:ext cx="2971440" cy="458280"/>
+            <a:ext cx="2971080" cy="457920"/>
           </a:xfrm>
           <a:prstGeom prst="rect">
             <a:avLst/>
@@ -1248,6 +1273,9 @@
                 <a:spcPct val="100000"/>
               </a:lnSpc>
               <a:buNone/>
+              <a:tabLst>
+                <a:tab algn="l" pos="0"/>
+              </a:tabLst>
               <a:defRPr b="0" lang="en-US" sz="1200" strike="noStrike" u="none">
                 <a:solidFill>
                   <a:schemeClr val="dk1"/>
@@ -1265,8 +1293,11 @@
                 <a:spcPct val="100000"/>
               </a:lnSpc>
               <a:buNone/>
-            </a:pPr>
-            <a:fld id="{00913127-C8C7-4569-8A66-7F4C584A9371}" type="slidenum">
+              <a:tabLst>
+                <a:tab algn="l" pos="0"/>
+              </a:tabLst>
+            </a:pPr>
+            <a:fld id="{F7AD57DA-C0D4-429F-9C37-EE1F94600CE7}" type="slidenum">
               <a:rPr b="0" lang="en-US" sz="1200" strike="noStrike" u="none">
                 <a:solidFill>
                   <a:schemeClr val="dk1"/>
@@ -1324,7 +1355,7 @@
         <p:spPr>
           <a:xfrm>
             <a:off x="685800" y="1143000"/>
-            <a:ext cx="5486040" cy="3085920"/>
+            <a:ext cx="5485680" cy="3085560"/>
           </a:xfrm>
           <a:prstGeom prst="rect">
             <a:avLst/>
@@ -1347,7 +1378,7 @@
         <p:spPr>
           <a:xfrm>
             <a:off x="685800" y="4400640"/>
-            <a:ext cx="5486040" cy="3600000"/>
+            <a:ext cx="5485680" cy="3599640"/>
           </a:xfrm>
           <a:prstGeom prst="rect">
             <a:avLst/>
@@ -1389,7 +1420,7 @@
         <p:spPr>
           <a:xfrm>
             <a:off x="3884760" y="8685360"/>
-            <a:ext cx="2971440" cy="458280"/>
+            <a:ext cx="2971080" cy="457920"/>
           </a:xfrm>
           <a:prstGeom prst="rect">
             <a:avLst/>
@@ -1409,6 +1440,9 @@
                 <a:spcPct val="100000"/>
               </a:lnSpc>
               <a:buNone/>
+              <a:tabLst>
+                <a:tab algn="l" pos="0"/>
+              </a:tabLst>
               <a:defRPr b="0" lang="en-US" sz="1200" strike="noStrike" u="none">
                 <a:solidFill>
                   <a:schemeClr val="dk1"/>
@@ -1426,8 +1460,11 @@
                 <a:spcPct val="100000"/>
               </a:lnSpc>
               <a:buNone/>
-            </a:pPr>
-            <a:fld id="{0D92BC6B-D064-491F-A137-CA966B6F4F6D}" type="slidenum">
+              <a:tabLst>
+                <a:tab algn="l" pos="0"/>
+              </a:tabLst>
+            </a:pPr>
+            <a:fld id="{C72E38FB-5E07-4DFE-8C0B-DEDBFBFAB720}" type="slidenum">
               <a:rPr b="0" lang="en-US" sz="1200" strike="noStrike" u="none">
                 <a:solidFill>
                   <a:schemeClr val="dk1"/>
@@ -1485,7 +1522,7 @@
         <p:spPr>
           <a:xfrm>
             <a:off x="685800" y="1143000"/>
-            <a:ext cx="5486040" cy="3085920"/>
+            <a:ext cx="5485680" cy="3085560"/>
           </a:xfrm>
           <a:prstGeom prst="rect">
             <a:avLst/>
@@ -1508,7 +1545,7 @@
         <p:spPr>
           <a:xfrm>
             <a:off x="685800" y="4400640"/>
-            <a:ext cx="5486040" cy="3600000"/>
+            <a:ext cx="5485680" cy="3599640"/>
           </a:xfrm>
           <a:prstGeom prst="rect">
             <a:avLst/>
@@ -1550,7 +1587,7 @@
         <p:spPr>
           <a:xfrm>
             <a:off x="3884760" y="8685360"/>
-            <a:ext cx="2971440" cy="458280"/>
+            <a:ext cx="2971080" cy="457920"/>
           </a:xfrm>
           <a:prstGeom prst="rect">
             <a:avLst/>
@@ -1570,6 +1607,9 @@
                 <a:spcPct val="100000"/>
               </a:lnSpc>
               <a:buNone/>
+              <a:tabLst>
+                <a:tab algn="l" pos="0"/>
+              </a:tabLst>
               <a:defRPr b="0" lang="en-US" sz="1200" strike="noStrike" u="none">
                 <a:solidFill>
                   <a:schemeClr val="dk1"/>
@@ -1587,8 +1627,11 @@
                 <a:spcPct val="100000"/>
               </a:lnSpc>
               <a:buNone/>
-            </a:pPr>
-            <a:fld id="{5BE3912E-9A1B-4B42-9229-EE885A72A9CE}" type="slidenum">
+              <a:tabLst>
+                <a:tab algn="l" pos="0"/>
+              </a:tabLst>
+            </a:pPr>
+            <a:fld id="{9124819D-9A4E-4723-9A98-5414D019A421}" type="slidenum">
               <a:rPr b="0" lang="en-US" sz="1200" strike="noStrike" u="none">
                 <a:solidFill>
                   <a:schemeClr val="dk1"/>
@@ -1646,7 +1689,7 @@
         <p:spPr>
           <a:xfrm>
             <a:off x="685800" y="1143000"/>
-            <a:ext cx="5486040" cy="3085920"/>
+            <a:ext cx="5485680" cy="3085560"/>
           </a:xfrm>
           <a:prstGeom prst="rect">
             <a:avLst/>
@@ -1669,7 +1712,7 @@
         <p:spPr>
           <a:xfrm>
             <a:off x="685800" y="4400640"/>
-            <a:ext cx="5486040" cy="3600000"/>
+            <a:ext cx="5485680" cy="3599640"/>
           </a:xfrm>
           <a:prstGeom prst="rect">
             <a:avLst/>
@@ -1711,7 +1754,7 @@
         <p:spPr>
           <a:xfrm>
             <a:off x="3884760" y="8685360"/>
-            <a:ext cx="2971440" cy="458280"/>
+            <a:ext cx="2971080" cy="457920"/>
           </a:xfrm>
           <a:prstGeom prst="rect">
             <a:avLst/>
@@ -1731,6 +1774,9 @@
                 <a:spcPct val="100000"/>
               </a:lnSpc>
               <a:buNone/>
+              <a:tabLst>
+                <a:tab algn="l" pos="0"/>
+              </a:tabLst>
               <a:defRPr b="0" lang="en-US" sz="1200" strike="noStrike" u="none">
                 <a:solidFill>
                   <a:schemeClr val="dk1"/>
@@ -1748,8 +1794,11 @@
                 <a:spcPct val="100000"/>
               </a:lnSpc>
               <a:buNone/>
-            </a:pPr>
-            <a:fld id="{E5F576D6-3AE1-439D-99D4-3220E3AEFA7B}" type="slidenum">
+              <a:tabLst>
+                <a:tab algn="l" pos="0"/>
+              </a:tabLst>
+            </a:pPr>
+            <a:fld id="{E12238CD-D7B0-482B-8FBD-7030B154CAEF}" type="slidenum">
               <a:rPr b="0" lang="en-US" sz="1200" strike="noStrike" u="none">
                 <a:solidFill>
                   <a:schemeClr val="dk1"/>
@@ -1807,7 +1856,7 @@
         <p:spPr>
           <a:xfrm>
             <a:off x="685800" y="1143000"/>
-            <a:ext cx="5486040" cy="3085920"/>
+            <a:ext cx="5485680" cy="3085560"/>
           </a:xfrm>
           <a:prstGeom prst="rect">
             <a:avLst/>
@@ -1830,7 +1879,7 @@
         <p:spPr>
           <a:xfrm>
             <a:off x="685800" y="4400640"/>
-            <a:ext cx="5486040" cy="3600000"/>
+            <a:ext cx="5485680" cy="3599640"/>
           </a:xfrm>
           <a:prstGeom prst="rect">
             <a:avLst/>
@@ -1872,7 +1921,7 @@
         <p:spPr>
           <a:xfrm>
             <a:off x="3884760" y="8685360"/>
-            <a:ext cx="2971440" cy="458280"/>
+            <a:ext cx="2971080" cy="457920"/>
           </a:xfrm>
           <a:prstGeom prst="rect">
             <a:avLst/>
@@ -1892,6 +1941,9 @@
                 <a:spcPct val="100000"/>
               </a:lnSpc>
               <a:buNone/>
+              <a:tabLst>
+                <a:tab algn="l" pos="0"/>
+              </a:tabLst>
               <a:defRPr b="0" lang="en-US" sz="1200" strike="noStrike" u="none">
                 <a:solidFill>
                   <a:schemeClr val="dk1"/>
@@ -1909,8 +1961,11 @@
                 <a:spcPct val="100000"/>
               </a:lnSpc>
               <a:buNone/>
-            </a:pPr>
-            <a:fld id="{BDCA7431-6CC3-4848-8D77-A57687382E0F}" type="slidenum">
+              <a:tabLst>
+                <a:tab algn="l" pos="0"/>
+              </a:tabLst>
+            </a:pPr>
+            <a:fld id="{044CDA1F-52EC-4DD9-968C-8AAFDD1DA7DA}" type="slidenum">
               <a:rPr b="0" lang="en-US" sz="1200" strike="noStrike" u="none">
                 <a:solidFill>
                   <a:schemeClr val="dk1"/>
@@ -1968,7 +2023,7 @@
         <p:spPr>
           <a:xfrm>
             <a:off x="685800" y="1143000"/>
-            <a:ext cx="5486040" cy="3085920"/>
+            <a:ext cx="5485680" cy="3085560"/>
           </a:xfrm>
           <a:prstGeom prst="rect">
             <a:avLst/>
@@ -1991,7 +2046,7 @@
         <p:spPr>
           <a:xfrm>
             <a:off x="685800" y="4400640"/>
-            <a:ext cx="5486040" cy="3600000"/>
+            <a:ext cx="5485680" cy="3599640"/>
           </a:xfrm>
           <a:prstGeom prst="rect">
             <a:avLst/>
@@ -2033,7 +2088,7 @@
         <p:spPr>
           <a:xfrm>
             <a:off x="3884760" y="8685360"/>
-            <a:ext cx="2971440" cy="458280"/>
+            <a:ext cx="2971080" cy="457920"/>
           </a:xfrm>
           <a:prstGeom prst="rect">
             <a:avLst/>
@@ -2053,6 +2108,9 @@
                 <a:spcPct val="100000"/>
               </a:lnSpc>
               <a:buNone/>
+              <a:tabLst>
+                <a:tab algn="l" pos="0"/>
+              </a:tabLst>
               <a:defRPr b="0" lang="en-US" sz="1200" strike="noStrike" u="none">
                 <a:solidFill>
                   <a:schemeClr val="dk1"/>
@@ -2070,8 +2128,11 @@
                 <a:spcPct val="100000"/>
               </a:lnSpc>
               <a:buNone/>
-            </a:pPr>
-            <a:fld id="{7C6F4F88-1387-45BE-A260-AAAFC08BF7E7}" type="slidenum">
+              <a:tabLst>
+                <a:tab algn="l" pos="0"/>
+              </a:tabLst>
+            </a:pPr>
+            <a:fld id="{937F06F7-D5D8-4DD7-A63D-9D3C5344EE72}" type="slidenum">
               <a:rPr b="0" lang="en-US" sz="1200" strike="noStrike" u="none">
                 <a:solidFill>
                   <a:schemeClr val="dk1"/>
@@ -2129,7 +2190,7 @@
         <p:spPr>
           <a:xfrm>
             <a:off x="685800" y="1143000"/>
-            <a:ext cx="5486040" cy="3085920"/>
+            <a:ext cx="5485680" cy="3085560"/>
           </a:xfrm>
           <a:prstGeom prst="rect">
             <a:avLst/>
@@ -2152,7 +2213,7 @@
         <p:spPr>
           <a:xfrm>
             <a:off x="685800" y="4400640"/>
-            <a:ext cx="5486040" cy="3600000"/>
+            <a:ext cx="5485680" cy="3599640"/>
           </a:xfrm>
           <a:prstGeom prst="rect">
             <a:avLst/>
@@ -2194,7 +2255,7 @@
         <p:spPr>
           <a:xfrm>
             <a:off x="3884760" y="8685360"/>
-            <a:ext cx="2971440" cy="458280"/>
+            <a:ext cx="2971080" cy="457920"/>
           </a:xfrm>
           <a:prstGeom prst="rect">
             <a:avLst/>
@@ -2214,6 +2275,9 @@
                 <a:spcPct val="100000"/>
               </a:lnSpc>
               <a:buNone/>
+              <a:tabLst>
+                <a:tab algn="l" pos="0"/>
+              </a:tabLst>
               <a:defRPr b="0" lang="en-US" sz="1200" strike="noStrike" u="none">
                 <a:solidFill>
                   <a:schemeClr val="dk1"/>
@@ -2231,8 +2295,11 @@
                 <a:spcPct val="100000"/>
               </a:lnSpc>
               <a:buNone/>
-            </a:pPr>
-            <a:fld id="{2C2D37FB-513E-4FE0-A48E-480B912330DD}" type="slidenum">
+              <a:tabLst>
+                <a:tab algn="l" pos="0"/>
+              </a:tabLst>
+            </a:pPr>
+            <a:fld id="{B0C59A43-D29C-4ED5-858B-FD9B5A942662}" type="slidenum">
               <a:rPr b="0" lang="en-US" sz="1200" strike="noStrike" u="none">
                 <a:solidFill>
                   <a:schemeClr val="dk1"/>
@@ -2290,7 +2357,7 @@
         <p:spPr>
           <a:xfrm>
             <a:off x="685800" y="1143000"/>
-            <a:ext cx="5486040" cy="3085920"/>
+            <a:ext cx="5485680" cy="3085560"/>
           </a:xfrm>
           <a:prstGeom prst="rect">
             <a:avLst/>
@@ -2313,7 +2380,7 @@
         <p:spPr>
           <a:xfrm>
             <a:off x="685800" y="4400640"/>
-            <a:ext cx="5486040" cy="3600000"/>
+            <a:ext cx="5485680" cy="3599640"/>
           </a:xfrm>
           <a:prstGeom prst="rect">
             <a:avLst/>
@@ -2355,7 +2422,7 @@
         <p:spPr>
           <a:xfrm>
             <a:off x="3884760" y="8685360"/>
-            <a:ext cx="2971440" cy="458280"/>
+            <a:ext cx="2971080" cy="457920"/>
           </a:xfrm>
           <a:prstGeom prst="rect">
             <a:avLst/>
@@ -2375,6 +2442,9 @@
                 <a:spcPct val="100000"/>
               </a:lnSpc>
               <a:buNone/>
+              <a:tabLst>
+                <a:tab algn="l" pos="0"/>
+              </a:tabLst>
               <a:defRPr b="0" lang="en-US" sz="1200" strike="noStrike" u="none">
                 <a:solidFill>
                   <a:schemeClr val="dk1"/>
@@ -2392,8 +2462,11 @@
                 <a:spcPct val="100000"/>
               </a:lnSpc>
               <a:buNone/>
-            </a:pPr>
-            <a:fld id="{3E6638A5-731D-40C3-9504-CA5D662A33DA}" type="slidenum">
+              <a:tabLst>
+                <a:tab algn="l" pos="0"/>
+              </a:tabLst>
+            </a:pPr>
+            <a:fld id="{FD1890F5-3F93-4DF8-92A3-841C704A9904}" type="slidenum">
               <a:rPr b="0" lang="en-US" sz="1200" strike="noStrike" u="none">
                 <a:solidFill>
                   <a:schemeClr val="dk1"/>
@@ -2451,7 +2524,7 @@
         <p:spPr>
           <a:xfrm>
             <a:off x="685800" y="1143000"/>
-            <a:ext cx="5486040" cy="3085920"/>
+            <a:ext cx="5485680" cy="3085560"/>
           </a:xfrm>
           <a:prstGeom prst="rect">
             <a:avLst/>
@@ -2474,7 +2547,7 @@
         <p:spPr>
           <a:xfrm>
             <a:off x="685800" y="4400640"/>
-            <a:ext cx="5486040" cy="3600000"/>
+            <a:ext cx="5485680" cy="3599640"/>
           </a:xfrm>
           <a:prstGeom prst="rect">
             <a:avLst/>
@@ -2516,7 +2589,7 @@
         <p:spPr>
           <a:xfrm>
             <a:off x="3884760" y="8685360"/>
-            <a:ext cx="2971440" cy="458280"/>
+            <a:ext cx="2971080" cy="457920"/>
           </a:xfrm>
           <a:prstGeom prst="rect">
             <a:avLst/>
@@ -2536,6 +2609,9 @@
                 <a:spcPct val="100000"/>
               </a:lnSpc>
               <a:buNone/>
+              <a:tabLst>
+                <a:tab algn="l" pos="0"/>
+              </a:tabLst>
               <a:defRPr b="0" lang="en-US" sz="1200" strike="noStrike" u="none">
                 <a:solidFill>
                   <a:schemeClr val="dk1"/>
@@ -2553,8 +2629,11 @@
                 <a:spcPct val="100000"/>
               </a:lnSpc>
               <a:buNone/>
-            </a:pPr>
-            <a:fld id="{8ADD19A0-1451-4F1B-948E-EB5E3FB8F5B1}" type="slidenum">
+              <a:tabLst>
+                <a:tab algn="l" pos="0"/>
+              </a:tabLst>
+            </a:pPr>
+            <a:fld id="{DB71E5D0-028A-4669-80DD-294D2ADBCDA0}" type="slidenum">
               <a:rPr b="0" lang="en-US" sz="1200" strike="noStrike" u="none">
                 <a:solidFill>
                   <a:schemeClr val="dk1"/>
@@ -2612,7 +2691,7 @@
         <p:spPr>
           <a:xfrm>
             <a:off x="685800" y="1143000"/>
-            <a:ext cx="5486040" cy="3085920"/>
+            <a:ext cx="5485680" cy="3085560"/>
           </a:xfrm>
           <a:prstGeom prst="rect">
             <a:avLst/>
@@ -2635,7 +2714,7 @@
         <p:spPr>
           <a:xfrm>
             <a:off x="685800" y="4400640"/>
-            <a:ext cx="5486040" cy="3600000"/>
+            <a:ext cx="5485680" cy="3599640"/>
           </a:xfrm>
           <a:prstGeom prst="rect">
             <a:avLst/>
@@ -2677,7 +2756,7 @@
         <p:spPr>
           <a:xfrm>
             <a:off x="3884760" y="8685360"/>
-            <a:ext cx="2971440" cy="458280"/>
+            <a:ext cx="2971080" cy="457920"/>
           </a:xfrm>
           <a:prstGeom prst="rect">
             <a:avLst/>
@@ -2697,6 +2776,9 @@
                 <a:spcPct val="100000"/>
               </a:lnSpc>
               <a:buNone/>
+              <a:tabLst>
+                <a:tab algn="l" pos="0"/>
+              </a:tabLst>
               <a:defRPr b="0" lang="en-US" sz="1200" strike="noStrike" u="none">
                 <a:solidFill>
                   <a:schemeClr val="dk1"/>
@@ -2714,8 +2796,11 @@
                 <a:spcPct val="100000"/>
               </a:lnSpc>
               <a:buNone/>
-            </a:pPr>
-            <a:fld id="{97C02573-4961-40D5-B7AD-F16BB814617B}" type="slidenum">
+              <a:tabLst>
+                <a:tab algn="l" pos="0"/>
+              </a:tabLst>
+            </a:pPr>
+            <a:fld id="{6F359BB5-F42C-4B31-8297-F135925E8FCC}" type="slidenum">
               <a:rPr b="0" lang="en-US" sz="1200" strike="noStrike" u="none">
                 <a:solidFill>
                   <a:schemeClr val="dk1"/>
@@ -2773,7 +2858,7 @@
         <p:spPr>
           <a:xfrm>
             <a:off x="685800" y="1143000"/>
-            <a:ext cx="5486040" cy="3085920"/>
+            <a:ext cx="5485680" cy="3085560"/>
           </a:xfrm>
           <a:prstGeom prst="rect">
             <a:avLst/>
@@ -2796,7 +2881,7 @@
         <p:spPr>
           <a:xfrm>
             <a:off x="685800" y="4400640"/>
-            <a:ext cx="5486040" cy="3600000"/>
+            <a:ext cx="5485680" cy="3599640"/>
           </a:xfrm>
           <a:prstGeom prst="rect">
             <a:avLst/>
@@ -2838,7 +2923,7 @@
         <p:spPr>
           <a:xfrm>
             <a:off x="3884760" y="8685360"/>
-            <a:ext cx="2971440" cy="458280"/>
+            <a:ext cx="2971080" cy="457920"/>
           </a:xfrm>
           <a:prstGeom prst="rect">
             <a:avLst/>
@@ -2858,6 +2943,9 @@
                 <a:spcPct val="100000"/>
               </a:lnSpc>
               <a:buNone/>
+              <a:tabLst>
+                <a:tab algn="l" pos="0"/>
+              </a:tabLst>
               <a:defRPr b="0" lang="en-US" sz="1200" strike="noStrike" u="none">
                 <a:solidFill>
                   <a:schemeClr val="dk1"/>
@@ -2875,8 +2963,11 @@
                 <a:spcPct val="100000"/>
               </a:lnSpc>
               <a:buNone/>
-            </a:pPr>
-            <a:fld id="{0AB73798-995B-4191-83D4-F2CA455F1C30}" type="slidenum">
+              <a:tabLst>
+                <a:tab algn="l" pos="0"/>
+              </a:tabLst>
+            </a:pPr>
+            <a:fld id="{D8666F2C-6447-47EB-BC17-9B5A7A672620}" type="slidenum">
               <a:rPr b="0" lang="en-US" sz="1200" strike="noStrike" u="none">
                 <a:solidFill>
                   <a:schemeClr val="dk1"/>
@@ -2934,7 +3025,7 @@
         <p:spPr>
           <a:xfrm>
             <a:off x="685800" y="1143000"/>
-            <a:ext cx="5486040" cy="3085920"/>
+            <a:ext cx="5485680" cy="3085560"/>
           </a:xfrm>
           <a:prstGeom prst="rect">
             <a:avLst/>
@@ -2957,7 +3048,7 @@
         <p:spPr>
           <a:xfrm>
             <a:off x="685800" y="4400640"/>
-            <a:ext cx="5486040" cy="3600000"/>
+            <a:ext cx="5485680" cy="3599640"/>
           </a:xfrm>
           <a:prstGeom prst="rect">
             <a:avLst/>
@@ -2999,7 +3090,7 @@
         <p:spPr>
           <a:xfrm>
             <a:off x="3884760" y="8685360"/>
-            <a:ext cx="2971440" cy="458280"/>
+            <a:ext cx="2971080" cy="457920"/>
           </a:xfrm>
           <a:prstGeom prst="rect">
             <a:avLst/>
@@ -3019,6 +3110,9 @@
                 <a:spcPct val="100000"/>
               </a:lnSpc>
               <a:buNone/>
+              <a:tabLst>
+                <a:tab algn="l" pos="0"/>
+              </a:tabLst>
               <a:defRPr b="0" lang="en-US" sz="1200" strike="noStrike" u="none">
                 <a:solidFill>
                   <a:schemeClr val="dk1"/>
@@ -3036,8 +3130,11 @@
                 <a:spcPct val="100000"/>
               </a:lnSpc>
               <a:buNone/>
-            </a:pPr>
-            <a:fld id="{C47C77CB-4856-4BDD-BF2D-4A9495ED9748}" type="slidenum">
+              <a:tabLst>
+                <a:tab algn="l" pos="0"/>
+              </a:tabLst>
+            </a:pPr>
+            <a:fld id="{FC9852BB-D454-43D0-AA9D-FD20AA5F7DE3}" type="slidenum">
               <a:rPr b="0" lang="en-US" sz="1200" strike="noStrike" u="none">
                 <a:solidFill>
                   <a:schemeClr val="dk1"/>
@@ -3095,7 +3192,7 @@
         <p:spPr>
           <a:xfrm>
             <a:off x="685800" y="1143000"/>
-            <a:ext cx="5486040" cy="3085920"/>
+            <a:ext cx="5485680" cy="3085560"/>
           </a:xfrm>
           <a:prstGeom prst="rect">
             <a:avLst/>
@@ -3118,7 +3215,7 @@
         <p:spPr>
           <a:xfrm>
             <a:off x="685800" y="4400640"/>
-            <a:ext cx="5486040" cy="3600000"/>
+            <a:ext cx="5485680" cy="3599640"/>
           </a:xfrm>
           <a:prstGeom prst="rect">
             <a:avLst/>
@@ -3160,7 +3257,7 @@
         <p:spPr>
           <a:xfrm>
             <a:off x="3884760" y="8685360"/>
-            <a:ext cx="2971440" cy="458280"/>
+            <a:ext cx="2971080" cy="457920"/>
           </a:xfrm>
           <a:prstGeom prst="rect">
             <a:avLst/>
@@ -3180,6 +3277,9 @@
                 <a:spcPct val="100000"/>
               </a:lnSpc>
               <a:buNone/>
+              <a:tabLst>
+                <a:tab algn="l" pos="0"/>
+              </a:tabLst>
               <a:defRPr b="0" lang="en-US" sz="1200" strike="noStrike" u="none">
                 <a:solidFill>
                   <a:schemeClr val="dk1"/>
@@ -3197,8 +3297,11 @@
                 <a:spcPct val="100000"/>
               </a:lnSpc>
               <a:buNone/>
-            </a:pPr>
-            <a:fld id="{4979D672-B437-4BC2-93E0-1AB11F2A44BB}" type="slidenum">
+              <a:tabLst>
+                <a:tab algn="l" pos="0"/>
+              </a:tabLst>
+            </a:pPr>
+            <a:fld id="{9982CAB4-C397-4308-A6CC-C7B9439E9847}" type="slidenum">
               <a:rPr b="0" lang="en-US" sz="1200" strike="noStrike" u="none">
                 <a:solidFill>
                   <a:schemeClr val="dk1"/>
@@ -3256,7 +3359,7 @@
         <p:spPr>
           <a:xfrm>
             <a:off x="685800" y="1143000"/>
-            <a:ext cx="5486040" cy="3085920"/>
+            <a:ext cx="5485680" cy="3085560"/>
           </a:xfrm>
           <a:prstGeom prst="rect">
             <a:avLst/>
@@ -3279,7 +3382,7 @@
         <p:spPr>
           <a:xfrm>
             <a:off x="685800" y="4400640"/>
-            <a:ext cx="5486040" cy="3600000"/>
+            <a:ext cx="5485680" cy="3599640"/>
           </a:xfrm>
           <a:prstGeom prst="rect">
             <a:avLst/>
@@ -3321,7 +3424,7 @@
         <p:spPr>
           <a:xfrm>
             <a:off x="3884760" y="8685360"/>
-            <a:ext cx="2971440" cy="458280"/>
+            <a:ext cx="2971080" cy="457920"/>
           </a:xfrm>
           <a:prstGeom prst="rect">
             <a:avLst/>
@@ -3341,6 +3444,9 @@
                 <a:spcPct val="100000"/>
               </a:lnSpc>
               <a:buNone/>
+              <a:tabLst>
+                <a:tab algn="l" pos="0"/>
+              </a:tabLst>
               <a:defRPr b="0" lang="en-US" sz="1200" strike="noStrike" u="none">
                 <a:solidFill>
                   <a:schemeClr val="dk1"/>
@@ -3358,8 +3464,11 @@
                 <a:spcPct val="100000"/>
               </a:lnSpc>
               <a:buNone/>
-            </a:pPr>
-            <a:fld id="{85CB8E6F-7F92-4BAB-AC65-C51800C34866}" type="slidenum">
+              <a:tabLst>
+                <a:tab algn="l" pos="0"/>
+              </a:tabLst>
+            </a:pPr>
+            <a:fld id="{367E4B6F-9B29-4177-8888-D2D7E5B21E1B}" type="slidenum">
               <a:rPr b="0" lang="en-US" sz="1200" strike="noStrike" u="none">
                 <a:solidFill>
                   <a:schemeClr val="dk1"/>
@@ -3417,7 +3526,7 @@
         <p:spPr>
           <a:xfrm>
             <a:off x="685800" y="1143000"/>
-            <a:ext cx="5486040" cy="3085920"/>
+            <a:ext cx="5485680" cy="3085560"/>
           </a:xfrm>
           <a:prstGeom prst="rect">
             <a:avLst/>
@@ -3440,7 +3549,7 @@
         <p:spPr>
           <a:xfrm>
             <a:off x="685800" y="4400640"/>
-            <a:ext cx="5486040" cy="3600000"/>
+            <a:ext cx="5485680" cy="3599640"/>
           </a:xfrm>
           <a:prstGeom prst="rect">
             <a:avLst/>
@@ -3482,7 +3591,7 @@
         <p:spPr>
           <a:xfrm>
             <a:off x="3884760" y="8685360"/>
-            <a:ext cx="2971440" cy="458280"/>
+            <a:ext cx="2971080" cy="457920"/>
           </a:xfrm>
           <a:prstGeom prst="rect">
             <a:avLst/>
@@ -3502,6 +3611,9 @@
                 <a:spcPct val="100000"/>
               </a:lnSpc>
               <a:buNone/>
+              <a:tabLst>
+                <a:tab algn="l" pos="0"/>
+              </a:tabLst>
               <a:defRPr b="0" lang="en-US" sz="1200" strike="noStrike" u="none">
                 <a:solidFill>
                   <a:schemeClr val="dk1"/>
@@ -3519,8 +3631,11 @@
                 <a:spcPct val="100000"/>
               </a:lnSpc>
               <a:buNone/>
-            </a:pPr>
-            <a:fld id="{AD0693B6-6C46-4D43-8A8C-6DFB26E8C3FD}" type="slidenum">
+              <a:tabLst>
+                <a:tab algn="l" pos="0"/>
+              </a:tabLst>
+            </a:pPr>
+            <a:fld id="{8C2E7D0A-1994-4D4A-B92D-3DF1615E8233}" type="slidenum">
               <a:rPr b="0" lang="en-US" sz="1200" strike="noStrike" u="none">
                 <a:solidFill>
                   <a:schemeClr val="dk1"/>
@@ -3578,7 +3693,7 @@
         <p:spPr>
           <a:xfrm>
             <a:off x="685800" y="1143000"/>
-            <a:ext cx="5486040" cy="3085920"/>
+            <a:ext cx="5485680" cy="3085560"/>
           </a:xfrm>
           <a:prstGeom prst="rect">
             <a:avLst/>
@@ -3601,7 +3716,7 @@
         <p:spPr>
           <a:xfrm>
             <a:off x="685800" y="4400640"/>
-            <a:ext cx="5486040" cy="3600000"/>
+            <a:ext cx="5485680" cy="3599640"/>
           </a:xfrm>
           <a:prstGeom prst="rect">
             <a:avLst/>
@@ -3643,7 +3758,7 @@
         <p:spPr>
           <a:xfrm>
             <a:off x="3884760" y="8685360"/>
-            <a:ext cx="2971440" cy="458280"/>
+            <a:ext cx="2971080" cy="457920"/>
           </a:xfrm>
           <a:prstGeom prst="rect">
             <a:avLst/>
@@ -3663,6 +3778,9 @@
                 <a:spcPct val="100000"/>
               </a:lnSpc>
               <a:buNone/>
+              <a:tabLst>
+                <a:tab algn="l" pos="0"/>
+              </a:tabLst>
               <a:defRPr b="0" lang="en-US" sz="1200" strike="noStrike" u="none">
                 <a:solidFill>
                   <a:schemeClr val="dk1"/>
@@ -3680,8 +3798,11 @@
                 <a:spcPct val="100000"/>
               </a:lnSpc>
               <a:buNone/>
-            </a:pPr>
-            <a:fld id="{1B015AB2-6977-4A77-8BE4-04568D508B42}" type="slidenum">
+              <a:tabLst>
+                <a:tab algn="l" pos="0"/>
+              </a:tabLst>
+            </a:pPr>
+            <a:fld id="{79444CE8-1AB7-4CA6-AFDD-AFCF24BDFA45}" type="slidenum">
               <a:rPr b="0" lang="en-US" sz="1200" strike="noStrike" u="none">
                 <a:solidFill>
                   <a:schemeClr val="dk1"/>
@@ -3739,7 +3860,7 @@
         <p:spPr>
           <a:xfrm>
             <a:off x="685800" y="1143000"/>
-            <a:ext cx="5486040" cy="3085920"/>
+            <a:ext cx="5485680" cy="3085560"/>
           </a:xfrm>
           <a:prstGeom prst="rect">
             <a:avLst/>
@@ -3762,7 +3883,7 @@
         <p:spPr>
           <a:xfrm>
             <a:off x="685800" y="4400640"/>
-            <a:ext cx="5486040" cy="3600000"/>
+            <a:ext cx="5485680" cy="3599640"/>
           </a:xfrm>
           <a:prstGeom prst="rect">
             <a:avLst/>
@@ -3804,7 +3925,7 @@
         <p:spPr>
           <a:xfrm>
             <a:off x="3884760" y="8685360"/>
-            <a:ext cx="2971440" cy="458280"/>
+            <a:ext cx="2971080" cy="457920"/>
           </a:xfrm>
           <a:prstGeom prst="rect">
             <a:avLst/>
@@ -3824,6 +3945,9 @@
                 <a:spcPct val="100000"/>
               </a:lnSpc>
               <a:buNone/>
+              <a:tabLst>
+                <a:tab algn="l" pos="0"/>
+              </a:tabLst>
               <a:defRPr b="0" lang="en-US" sz="1200" strike="noStrike" u="none">
                 <a:solidFill>
                   <a:schemeClr val="dk1"/>
@@ -3841,8 +3965,11 @@
                 <a:spcPct val="100000"/>
               </a:lnSpc>
               <a:buNone/>
-            </a:pPr>
-            <a:fld id="{2CCFB830-BF89-42F7-AECA-8BB778C812E8}" type="slidenum">
+              <a:tabLst>
+                <a:tab algn="l" pos="0"/>
+              </a:tabLst>
+            </a:pPr>
+            <a:fld id="{5551AD2B-67B0-474C-A3CD-0653C291416E}" type="slidenum">
               <a:rPr b="0" lang="en-US" sz="1200" strike="noStrike" u="none">
                 <a:solidFill>
                   <a:schemeClr val="dk1"/>
@@ -3944,27 +4071,27 @@
             <a:noAutofit/>
           </a:bodyPr>
           <a:p>
-            <a:pPr indent="0">
+            <a:pPr indent="0" algn="ctr">
               <a:buNone/>
             </a:pPr>
             <a:r>
-              <a:rPr b="0" lang="en-TR" sz="1800" strike="noStrike" u="none">
-                <a:solidFill>
-                  <a:schemeClr val="dk1"/>
-                </a:solidFill>
-                <a:effectLst/>
-                <a:uFillTx/>
-                <a:latin typeface="Calibri"/>
+              <a:rPr b="0" lang="en-TR" sz="4400" strike="noStrike" u="none">
+                <a:solidFill>
+                  <a:srgbClr val="000000"/>
+                </a:solidFill>
+                <a:effectLst/>
+                <a:uFillTx/>
+                <a:latin typeface="Arial"/>
               </a:rPr>
               <a:t>Click to edit the title text format</a:t>
             </a:r>
-            <a:endParaRPr b="0" lang="en-TR" sz="1800" strike="noStrike" u="none">
-              <a:solidFill>
-                <a:schemeClr val="dk1"/>
-              </a:solidFill>
-              <a:effectLst/>
-              <a:uFillTx/>
-              <a:latin typeface="Calibri"/>
+            <a:endParaRPr b="0" lang="en-TR" sz="4400" strike="noStrike" u="none">
+              <a:solidFill>
+                <a:srgbClr val="000000"/>
+              </a:solidFill>
+              <a:effectLst/>
+              <a:uFillTx/>
+              <a:latin typeface="Arial"/>
             </a:endParaRPr>
           </a:p>
         </p:txBody>
@@ -4011,21 +4138,21 @@
             <a:r>
               <a:rPr b="0" lang="en-TR" sz="3200" strike="noStrike" u="none">
                 <a:solidFill>
-                  <a:schemeClr val="dk1"/>
-                </a:solidFill>
-                <a:effectLst/>
-                <a:uFillTx/>
-                <a:latin typeface="Calibri"/>
+                  <a:srgbClr val="000000"/>
+                </a:solidFill>
+                <a:effectLst/>
+                <a:uFillTx/>
+                <a:latin typeface="Arial"/>
               </a:rPr>
               <a:t>Click to edit the outline text format</a:t>
             </a:r>
             <a:endParaRPr b="0" lang="en-TR" sz="3200" strike="noStrike" u="none">
               <a:solidFill>
-                <a:schemeClr val="dk1"/>
-              </a:solidFill>
-              <a:effectLst/>
-              <a:uFillTx/>
-              <a:latin typeface="Calibri"/>
+                <a:srgbClr val="000000"/>
+              </a:solidFill>
+              <a:effectLst/>
+              <a:uFillTx/>
+              <a:latin typeface="Arial"/>
             </a:endParaRPr>
           </a:p>
           <a:p>
@@ -4041,23 +4168,23 @@
               <a:buChar char=""/>
             </a:pPr>
             <a:r>
-              <a:rPr b="0" lang="en-TR" sz="2400" strike="noStrike" u="none">
-                <a:solidFill>
-                  <a:schemeClr val="dk1"/>
-                </a:solidFill>
-                <a:effectLst/>
-                <a:uFillTx/>
-                <a:latin typeface="Calibri"/>
+              <a:rPr b="0" lang="en-TR" sz="2800" strike="noStrike" u="none">
+                <a:solidFill>
+                  <a:srgbClr val="000000"/>
+                </a:solidFill>
+                <a:effectLst/>
+                <a:uFillTx/>
+                <a:latin typeface="Arial"/>
               </a:rPr>
               <a:t>Second Outline Level</a:t>
             </a:r>
-            <a:endParaRPr b="0" lang="en-TR" sz="2400" strike="noStrike" u="none">
-              <a:solidFill>
-                <a:schemeClr val="dk1"/>
-              </a:solidFill>
-              <a:effectLst/>
-              <a:uFillTx/>
-              <a:latin typeface="Calibri"/>
+            <a:endParaRPr b="0" lang="en-TR" sz="2800" strike="noStrike" u="none">
+              <a:solidFill>
+                <a:srgbClr val="000000"/>
+              </a:solidFill>
+              <a:effectLst/>
+              <a:uFillTx/>
+              <a:latin typeface="Arial"/>
             </a:endParaRPr>
           </a:p>
           <a:p>
@@ -4073,23 +4200,23 @@
               <a:buChar char=""/>
             </a:pPr>
             <a:r>
-              <a:rPr b="0" lang="en-TR" sz="2000" strike="noStrike" u="none">
-                <a:solidFill>
-                  <a:schemeClr val="dk1"/>
-                </a:solidFill>
-                <a:effectLst/>
-                <a:uFillTx/>
-                <a:latin typeface="Calibri"/>
+              <a:rPr b="0" lang="en-TR" sz="2400" strike="noStrike" u="none">
+                <a:solidFill>
+                  <a:srgbClr val="000000"/>
+                </a:solidFill>
+                <a:effectLst/>
+                <a:uFillTx/>
+                <a:latin typeface="Arial"/>
               </a:rPr>
               <a:t>Third Outline Level</a:t>
             </a:r>
-            <a:endParaRPr b="0" lang="en-TR" sz="2000" strike="noStrike" u="none">
-              <a:solidFill>
-                <a:schemeClr val="dk1"/>
-              </a:solidFill>
-              <a:effectLst/>
-              <a:uFillTx/>
-              <a:latin typeface="Calibri"/>
+            <a:endParaRPr b="0" lang="en-TR" sz="2400" strike="noStrike" u="none">
+              <a:solidFill>
+                <a:srgbClr val="000000"/>
+              </a:solidFill>
+              <a:effectLst/>
+              <a:uFillTx/>
+              <a:latin typeface="Arial"/>
             </a:endParaRPr>
           </a:p>
           <a:p>
@@ -4107,21 +4234,21 @@
             <a:r>
               <a:rPr b="0" lang="en-TR" sz="2000" strike="noStrike" u="none">
                 <a:solidFill>
-                  <a:schemeClr val="dk1"/>
-                </a:solidFill>
-                <a:effectLst/>
-                <a:uFillTx/>
-                <a:latin typeface="Calibri"/>
+                  <a:srgbClr val="000000"/>
+                </a:solidFill>
+                <a:effectLst/>
+                <a:uFillTx/>
+                <a:latin typeface="Arial"/>
               </a:rPr>
               <a:t>Fourth Outline Level</a:t>
             </a:r>
             <a:endParaRPr b="0" lang="en-TR" sz="2000" strike="noStrike" u="none">
               <a:solidFill>
-                <a:schemeClr val="dk1"/>
-              </a:solidFill>
-              <a:effectLst/>
-              <a:uFillTx/>
-              <a:latin typeface="Calibri"/>
+                <a:srgbClr val="000000"/>
+              </a:solidFill>
+              <a:effectLst/>
+              <a:uFillTx/>
+              <a:latin typeface="Arial"/>
             </a:endParaRPr>
           </a:p>
           <a:p>
@@ -4139,21 +4266,21 @@
             <a:r>
               <a:rPr b="0" lang="en-TR" sz="2000" strike="noStrike" u="none">
                 <a:solidFill>
-                  <a:schemeClr val="dk1"/>
-                </a:solidFill>
-                <a:effectLst/>
-                <a:uFillTx/>
-                <a:latin typeface="Calibri"/>
+                  <a:srgbClr val="000000"/>
+                </a:solidFill>
+                <a:effectLst/>
+                <a:uFillTx/>
+                <a:latin typeface="Arial"/>
               </a:rPr>
               <a:t>Fifth Outline Level</a:t>
             </a:r>
             <a:endParaRPr b="0" lang="en-TR" sz="2000" strike="noStrike" u="none">
               <a:solidFill>
-                <a:schemeClr val="dk1"/>
-              </a:solidFill>
-              <a:effectLst/>
-              <a:uFillTx/>
-              <a:latin typeface="Calibri"/>
+                <a:srgbClr val="000000"/>
+              </a:solidFill>
+              <a:effectLst/>
+              <a:uFillTx/>
+              <a:latin typeface="Arial"/>
             </a:endParaRPr>
           </a:p>
           <a:p>
@@ -4171,21 +4298,21 @@
             <a:r>
               <a:rPr b="0" lang="en-TR" sz="2000" strike="noStrike" u="none">
                 <a:solidFill>
-                  <a:schemeClr val="dk1"/>
-                </a:solidFill>
-                <a:effectLst/>
-                <a:uFillTx/>
-                <a:latin typeface="Calibri"/>
+                  <a:srgbClr val="000000"/>
+                </a:solidFill>
+                <a:effectLst/>
+                <a:uFillTx/>
+                <a:latin typeface="Arial"/>
               </a:rPr>
               <a:t>Sixth Outline Level</a:t>
             </a:r>
             <a:endParaRPr b="0" lang="en-TR" sz="2000" strike="noStrike" u="none">
               <a:solidFill>
-                <a:schemeClr val="dk1"/>
-              </a:solidFill>
-              <a:effectLst/>
-              <a:uFillTx/>
-              <a:latin typeface="Calibri"/>
+                <a:srgbClr val="000000"/>
+              </a:solidFill>
+              <a:effectLst/>
+              <a:uFillTx/>
+              <a:latin typeface="Arial"/>
             </a:endParaRPr>
           </a:p>
           <a:p>
@@ -4203,21 +4330,21 @@
             <a:r>
               <a:rPr b="0" lang="en-TR" sz="2000" strike="noStrike" u="none">
                 <a:solidFill>
-                  <a:schemeClr val="dk1"/>
-                </a:solidFill>
-                <a:effectLst/>
-                <a:uFillTx/>
-                <a:latin typeface="Calibri"/>
+                  <a:srgbClr val="000000"/>
+                </a:solidFill>
+                <a:effectLst/>
+                <a:uFillTx/>
+                <a:latin typeface="Arial"/>
               </a:rPr>
               <a:t>Seventh Outline Level</a:t>
             </a:r>
             <a:endParaRPr b="0" lang="en-TR" sz="2000" strike="noStrike" u="none">
               <a:solidFill>
-                <a:schemeClr val="dk1"/>
-              </a:solidFill>
-              <a:effectLst/>
-              <a:uFillTx/>
-              <a:latin typeface="Calibri"/>
+                <a:srgbClr val="000000"/>
+              </a:solidFill>
+              <a:effectLst/>
+              <a:uFillTx/>
+              <a:latin typeface="Arial"/>
             </a:endParaRPr>
           </a:p>
         </p:txBody>
@@ -4264,7 +4391,7 @@
         <p:spPr>
           <a:xfrm>
             <a:off x="11064240" y="5760720"/>
-            <a:ext cx="2194200" cy="2194200"/>
+            <a:ext cx="2193840" cy="2193840"/>
           </a:xfrm>
           <a:prstGeom prst="ellipse">
             <a:avLst/>
@@ -4292,6 +4419,11 @@
             <a:noAutofit/>
           </a:bodyPr>
           <a:p>
+            <a:pPr>
+              <a:lnSpc>
+                <a:spcPct val="100000"/>
+              </a:lnSpc>
+            </a:pPr>
             <a:endParaRPr b="0" lang="en-TR" sz="1800" strike="noStrike" u="none">
               <a:solidFill>
                 <a:srgbClr val="ffffff"/>
@@ -4312,7 +4444,7 @@
         <p:spPr>
           <a:xfrm>
             <a:off x="10332720" y="5029200"/>
-            <a:ext cx="3657240" cy="3657240"/>
+            <a:ext cx="3656880" cy="3656880"/>
           </a:xfrm>
           <a:prstGeom prst="ellipse">
             <a:avLst/>
@@ -4340,6 +4472,11 @@
             <a:noAutofit/>
           </a:bodyPr>
           <a:p>
+            <a:pPr>
+              <a:lnSpc>
+                <a:spcPct val="100000"/>
+              </a:lnSpc>
+            </a:pPr>
             <a:endParaRPr b="0" lang="en-TR" sz="1800" strike="noStrike" u="none">
               <a:solidFill>
                 <a:srgbClr val="ffffff"/>
@@ -4360,7 +4497,7 @@
         <p:spPr>
           <a:xfrm>
             <a:off x="9601200" y="4297680"/>
-            <a:ext cx="5120280" cy="5120280"/>
+            <a:ext cx="5119920" cy="5119920"/>
           </a:xfrm>
           <a:prstGeom prst="ellipse">
             <a:avLst/>
@@ -4388,6 +4525,11 @@
             <a:noAutofit/>
           </a:bodyPr>
           <a:p>
+            <a:pPr>
+              <a:lnSpc>
+                <a:spcPct val="100000"/>
+              </a:lnSpc>
+            </a:pPr>
             <a:endParaRPr b="0" lang="en-TR" sz="1800" strike="noStrike" u="none">
               <a:solidFill>
                 <a:srgbClr val="ffffff"/>
@@ -4408,7 +4550,7 @@
         <p:spPr>
           <a:xfrm>
             <a:off x="8869680" y="3566160"/>
-            <a:ext cx="6583320" cy="6583320"/>
+            <a:ext cx="6582960" cy="6582960"/>
           </a:xfrm>
           <a:prstGeom prst="ellipse">
             <a:avLst/>
@@ -4436,6 +4578,11 @@
             <a:noAutofit/>
           </a:bodyPr>
           <a:p>
+            <a:pPr>
+              <a:lnSpc>
+                <a:spcPct val="100000"/>
+              </a:lnSpc>
+            </a:pPr>
             <a:endParaRPr b="0" lang="en-TR" sz="1800" strike="noStrike" u="none">
               <a:solidFill>
                 <a:srgbClr val="ffffff"/>
@@ -4456,7 +4603,7 @@
         <p:spPr>
           <a:xfrm>
             <a:off x="8138160" y="2834640"/>
-            <a:ext cx="8046360" cy="8046360"/>
+            <a:ext cx="8046000" cy="8046000"/>
           </a:xfrm>
           <a:prstGeom prst="ellipse">
             <a:avLst/>
@@ -4484,6 +4631,11 @@
             <a:noAutofit/>
           </a:bodyPr>
           <a:p>
+            <a:pPr>
+              <a:lnSpc>
+                <a:spcPct val="100000"/>
+              </a:lnSpc>
+            </a:pPr>
             <a:endParaRPr b="0" lang="en-TR" sz="1800" strike="noStrike" u="none">
               <a:solidFill>
                 <a:srgbClr val="ffffff"/>
@@ -4504,7 +4656,7 @@
         <p:spPr>
           <a:xfrm>
             <a:off x="11658600" y="6355080"/>
-            <a:ext cx="411120" cy="411120"/>
+            <a:ext cx="410760" cy="410760"/>
           </a:xfrm>
           <a:prstGeom prst="ellipse">
             <a:avLst/>
@@ -4530,6 +4682,11 @@
             <a:noAutofit/>
           </a:bodyPr>
           <a:p>
+            <a:pPr>
+              <a:lnSpc>
+                <a:spcPct val="100000"/>
+              </a:lnSpc>
+            </a:pPr>
             <a:endParaRPr b="0" lang="en-TR" sz="1800" strike="noStrike" u="none">
               <a:solidFill>
                 <a:srgbClr val="000000"/>
@@ -4550,7 +4707,7 @@
         <p:spPr>
           <a:xfrm>
             <a:off x="731520" y="914400"/>
-            <a:ext cx="10058040" cy="365400"/>
+            <a:ext cx="10057680" cy="365040"/>
           </a:xfrm>
           <a:prstGeom prst="rect">
             <a:avLst/>
@@ -4611,7 +4768,7 @@
         <p:spPr>
           <a:xfrm>
             <a:off x="731520" y="1417320"/>
-            <a:ext cx="639720" cy="54360"/>
+            <a:ext cx="639360" cy="54000"/>
           </a:xfrm>
           <a:prstGeom prst="rect">
             <a:avLst/>
@@ -4637,6 +4794,11 @@
             <a:noAutofit/>
           </a:bodyPr>
           <a:p>
+            <a:pPr>
+              <a:lnSpc>
+                <a:spcPct val="100000"/>
+              </a:lnSpc>
+            </a:pPr>
             <a:endParaRPr b="0" lang="en-TR" sz="1800" strike="noStrike" u="none">
               <a:solidFill>
                 <a:srgbClr val="000000"/>
@@ -4657,7 +4819,7 @@
         <p:spPr>
           <a:xfrm>
             <a:off x="731520" y="1645920"/>
-            <a:ext cx="10515240" cy="959760"/>
+            <a:ext cx="10514880" cy="959400"/>
           </a:xfrm>
           <a:prstGeom prst="rect">
             <a:avLst/>
@@ -4718,7 +4880,7 @@
         <p:spPr>
           <a:xfrm>
             <a:off x="731520" y="2606040"/>
-            <a:ext cx="10515240" cy="639720"/>
+            <a:ext cx="10514880" cy="639360"/>
           </a:xfrm>
           <a:prstGeom prst="rect">
             <a:avLst/>
@@ -4779,7 +4941,7 @@
         <p:spPr>
           <a:xfrm>
             <a:off x="731520" y="3154680"/>
-            <a:ext cx="10515240" cy="639720"/>
+            <a:ext cx="10514880" cy="639360"/>
           </a:xfrm>
           <a:prstGeom prst="rect">
             <a:avLst/>
@@ -4840,7 +5002,7 @@
         <p:spPr>
           <a:xfrm>
             <a:off x="731520" y="4572000"/>
-            <a:ext cx="63720" cy="1462680"/>
+            <a:ext cx="63360" cy="1462320"/>
           </a:xfrm>
           <a:prstGeom prst="rect">
             <a:avLst/>
@@ -4866,6 +5028,11 @@
             <a:noAutofit/>
           </a:bodyPr>
           <a:p>
+            <a:pPr>
+              <a:lnSpc>
+                <a:spcPct val="100000"/>
+              </a:lnSpc>
+            </a:pPr>
             <a:endParaRPr b="0" lang="en-TR" sz="1800" strike="noStrike" u="none">
               <a:solidFill>
                 <a:srgbClr val="000000"/>
@@ -4886,7 +5053,7 @@
         <p:spPr>
           <a:xfrm>
             <a:off x="960120" y="4572000"/>
-            <a:ext cx="7314840" cy="1462680"/>
+            <a:ext cx="7314480" cy="1462320"/>
           </a:xfrm>
           <a:prstGeom prst="rect">
             <a:avLst/>
@@ -4925,7 +5092,7 @@
                 <a:latin typeface="Calibri"/>
                 <a:ea typeface="Calibri"/>
               </a:rPr>
-              <a:t>Omer Dikyol</a:t>
+              <a:t>Ömer Dikyol</a:t>
             </a:r>
             <a:endParaRPr b="0" lang="en-TR" sz="2000" strike="noStrike" u="none">
               <a:solidFill>
@@ -5044,7 +5211,7 @@
         <p:spPr>
           <a:xfrm>
             <a:off x="548640" y="411480"/>
-            <a:ext cx="10972440" cy="273960"/>
+            <a:ext cx="10972080" cy="273600"/>
           </a:xfrm>
           <a:prstGeom prst="rect">
             <a:avLst/>
@@ -5105,7 +5272,7 @@
         <p:spPr>
           <a:xfrm>
             <a:off x="548640" y="713160"/>
-            <a:ext cx="10972440" cy="776880"/>
+            <a:ext cx="10972080" cy="776520"/>
           </a:xfrm>
           <a:prstGeom prst="rect">
             <a:avLst/>
@@ -5166,7 +5333,7 @@
         <p:spPr>
           <a:xfrm>
             <a:off x="548640" y="1600200"/>
-            <a:ext cx="5531760" cy="4525920"/>
+            <a:ext cx="5531400" cy="4525560"/>
           </a:xfrm>
           <a:prstGeom prst="rect">
             <a:avLst/>
@@ -5192,6 +5359,11 @@
             <a:noAutofit/>
           </a:bodyPr>
           <a:p>
+            <a:pPr>
+              <a:lnSpc>
+                <a:spcPct val="100000"/>
+              </a:lnSpc>
+            </a:pPr>
             <a:endParaRPr b="0" lang="en-TR" sz="1800" strike="noStrike" u="none">
               <a:solidFill>
                 <a:srgbClr val="000000"/>
@@ -5212,7 +5384,7 @@
         <p:spPr>
           <a:xfrm>
             <a:off x="548640" y="1600200"/>
-            <a:ext cx="63720" cy="4525920"/>
+            <a:ext cx="63360" cy="4525560"/>
           </a:xfrm>
           <a:prstGeom prst="rect">
             <a:avLst/>
@@ -5238,6 +5410,11 @@
             <a:noAutofit/>
           </a:bodyPr>
           <a:p>
+            <a:pPr>
+              <a:lnSpc>
+                <a:spcPct val="100000"/>
+              </a:lnSpc>
+            </a:pPr>
             <a:endParaRPr b="0" lang="en-TR" sz="1800" strike="noStrike" u="none">
               <a:solidFill>
                 <a:srgbClr val="ffffff"/>
@@ -5262,7 +5439,7 @@
         <p:spPr>
           <a:xfrm>
             <a:off x="822960" y="1783080"/>
-            <a:ext cx="365400" cy="365400"/>
+            <a:ext cx="365040" cy="365040"/>
           </a:xfrm>
           <a:prstGeom prst="rect">
             <a:avLst/>
@@ -5282,7 +5459,7 @@
         <p:spPr>
           <a:xfrm>
             <a:off x="1325880" y="1783080"/>
-            <a:ext cx="4617360" cy="365400"/>
+            <a:ext cx="4617000" cy="365040"/>
           </a:xfrm>
           <a:prstGeom prst="rect">
             <a:avLst/>
@@ -5343,7 +5520,7 @@
         <p:spPr>
           <a:xfrm>
             <a:off x="822960" y="2377440"/>
-            <a:ext cx="4983120" cy="1325520"/>
+            <a:ext cx="4982760" cy="1325160"/>
           </a:xfrm>
           <a:prstGeom prst="rect">
             <a:avLst/>
@@ -5369,6 +5546,11 @@
             <a:noAutofit/>
           </a:bodyPr>
           <a:p>
+            <a:pPr>
+              <a:lnSpc>
+                <a:spcPct val="100000"/>
+              </a:lnSpc>
+            </a:pPr>
             <a:endParaRPr b="0" lang="en-TR" sz="1800" strike="noStrike" u="none">
               <a:solidFill>
                 <a:srgbClr val="000000"/>
@@ -5389,7 +5571,7 @@
         <p:spPr>
           <a:xfrm>
             <a:off x="914400" y="2468880"/>
-            <a:ext cx="4800240" cy="1188360"/>
+            <a:ext cx="4799880" cy="1188000"/>
           </a:xfrm>
           <a:prstGeom prst="rect">
             <a:avLst/>
@@ -5498,7 +5680,7 @@
         <p:spPr>
           <a:xfrm>
             <a:off x="822960" y="3840480"/>
-            <a:ext cx="4983120" cy="1188360"/>
+            <a:ext cx="4982760" cy="1188000"/>
           </a:xfrm>
           <a:prstGeom prst="rect">
             <a:avLst/>
@@ -5599,7 +5781,7 @@
         <p:spPr>
           <a:xfrm>
             <a:off x="822960" y="5212080"/>
-            <a:ext cx="4983120" cy="776880"/>
+            <a:ext cx="4982760" cy="776520"/>
           </a:xfrm>
           <a:prstGeom prst="rect">
             <a:avLst/>
@@ -5625,6 +5807,11 @@
             <a:noAutofit/>
           </a:bodyPr>
           <a:p>
+            <a:pPr>
+              <a:lnSpc>
+                <a:spcPct val="100000"/>
+              </a:lnSpc>
+            </a:pPr>
             <a:endParaRPr b="0" lang="en-TR" sz="1800" strike="noStrike" u="none">
               <a:solidFill>
                 <a:srgbClr val="000000"/>
@@ -5645,7 +5832,7 @@
         <p:spPr>
           <a:xfrm>
             <a:off x="960120" y="5212080"/>
-            <a:ext cx="4754520" cy="776880"/>
+            <a:ext cx="4754160" cy="776520"/>
           </a:xfrm>
           <a:prstGeom prst="rect">
             <a:avLst/>
@@ -5706,7 +5893,7 @@
         <p:spPr>
           <a:xfrm>
             <a:off x="6263640" y="1600200"/>
-            <a:ext cx="5531760" cy="4525920"/>
+            <a:ext cx="5531400" cy="4525560"/>
           </a:xfrm>
           <a:prstGeom prst="rect">
             <a:avLst/>
@@ -5732,6 +5919,11 @@
             <a:noAutofit/>
           </a:bodyPr>
           <a:p>
+            <a:pPr>
+              <a:lnSpc>
+                <a:spcPct val="100000"/>
+              </a:lnSpc>
+            </a:pPr>
             <a:endParaRPr b="0" lang="en-TR" sz="1800" strike="noStrike" u="none">
               <a:solidFill>
                 <a:srgbClr val="000000"/>
@@ -5752,7 +5944,7 @@
         <p:spPr>
           <a:xfrm>
             <a:off x="6263640" y="1600200"/>
-            <a:ext cx="63720" cy="4525920"/>
+            <a:ext cx="63360" cy="4525560"/>
           </a:xfrm>
           <a:prstGeom prst="rect">
             <a:avLst/>
@@ -5778,6 +5970,11 @@
             <a:noAutofit/>
           </a:bodyPr>
           <a:p>
+            <a:pPr>
+              <a:lnSpc>
+                <a:spcPct val="100000"/>
+              </a:lnSpc>
+            </a:pPr>
             <a:endParaRPr b="0" lang="en-TR" sz="1800" strike="noStrike" u="none">
               <a:solidFill>
                 <a:srgbClr val="000000"/>
@@ -5802,7 +5999,7 @@
         <p:spPr>
           <a:xfrm>
             <a:off x="6537960" y="1783080"/>
-            <a:ext cx="365400" cy="365400"/>
+            <a:ext cx="365040" cy="365040"/>
           </a:xfrm>
           <a:prstGeom prst="rect">
             <a:avLst/>
@@ -5822,7 +6019,7 @@
         <p:spPr>
           <a:xfrm>
             <a:off x="7040880" y="1783080"/>
-            <a:ext cx="4617360" cy="365400"/>
+            <a:ext cx="4617000" cy="365040"/>
           </a:xfrm>
           <a:prstGeom prst="rect">
             <a:avLst/>
@@ -5883,7 +6080,7 @@
         <p:spPr>
           <a:xfrm>
             <a:off x="6537960" y="2377440"/>
-            <a:ext cx="4983120" cy="1325520"/>
+            <a:ext cx="4982760" cy="1325160"/>
           </a:xfrm>
           <a:prstGeom prst="rect">
             <a:avLst/>
@@ -5909,6 +6106,11 @@
             <a:noAutofit/>
           </a:bodyPr>
           <a:p>
+            <a:pPr>
+              <a:lnSpc>
+                <a:spcPct val="100000"/>
+              </a:lnSpc>
+            </a:pPr>
             <a:endParaRPr b="0" lang="en-TR" sz="1800" strike="noStrike" u="none">
               <a:solidFill>
                 <a:srgbClr val="000000"/>
@@ -5929,7 +6131,7 @@
         <p:spPr>
           <a:xfrm>
             <a:off x="6629400" y="2468880"/>
-            <a:ext cx="4800240" cy="1188360"/>
+            <a:ext cx="4799880" cy="1188000"/>
           </a:xfrm>
           <a:prstGeom prst="rect">
             <a:avLst/>
@@ -5990,7 +6192,7 @@
         <p:spPr>
           <a:xfrm>
             <a:off x="6537960" y="3840480"/>
-            <a:ext cx="4983120" cy="2194200"/>
+            <a:ext cx="4982760" cy="2193840"/>
           </a:xfrm>
           <a:prstGeom prst="rect">
             <a:avLst/>
@@ -6126,7 +6328,7 @@
         <p:spPr>
           <a:xfrm>
             <a:off x="548640" y="6355080"/>
-            <a:ext cx="11063880" cy="10440"/>
+            <a:ext cx="11063520" cy="10080"/>
           </a:xfrm>
           <a:prstGeom prst="rect">
             <a:avLst/>
@@ -6152,6 +6354,11 @@
             <a:noAutofit/>
           </a:bodyPr>
           <a:p>
+            <a:pPr>
+              <a:lnSpc>
+                <a:spcPct val="100000"/>
+              </a:lnSpc>
+            </a:pPr>
             <a:endParaRPr b="0" lang="en-TR" sz="1800" strike="noStrike" u="none">
               <a:solidFill>
                 <a:srgbClr val="000000"/>
@@ -6172,7 +6379,7 @@
         <p:spPr>
           <a:xfrm>
             <a:off x="548640" y="6446520"/>
-            <a:ext cx="7314840" cy="273960"/>
+            <a:ext cx="7314480" cy="273600"/>
           </a:xfrm>
           <a:prstGeom prst="rect">
             <a:avLst/>
@@ -6233,7 +6440,7 @@
         <p:spPr>
           <a:xfrm>
             <a:off x="10698480" y="6446520"/>
-            <a:ext cx="914040" cy="273960"/>
+            <a:ext cx="913680" cy="273600"/>
           </a:xfrm>
           <a:prstGeom prst="rect">
             <a:avLst/>
@@ -6331,7 +6538,7 @@
         <p:spPr>
           <a:xfrm>
             <a:off x="548640" y="411480"/>
-            <a:ext cx="10972440" cy="273960"/>
+            <a:ext cx="10972080" cy="273600"/>
           </a:xfrm>
           <a:prstGeom prst="rect">
             <a:avLst/>
@@ -6392,7 +6599,7 @@
         <p:spPr>
           <a:xfrm>
             <a:off x="548640" y="713160"/>
-            <a:ext cx="10972440" cy="776880"/>
+            <a:ext cx="10972080" cy="776520"/>
           </a:xfrm>
           <a:prstGeom prst="rect">
             <a:avLst/>
@@ -6453,7 +6660,7 @@
         <p:spPr>
           <a:xfrm>
             <a:off x="548640" y="1554480"/>
-            <a:ext cx="11063880" cy="1051200"/>
+            <a:ext cx="11063520" cy="1050840"/>
           </a:xfrm>
           <a:prstGeom prst="rect">
             <a:avLst/>
@@ -6479,6 +6686,11 @@
             <a:noAutofit/>
           </a:bodyPr>
           <a:p>
+            <a:pPr>
+              <a:lnSpc>
+                <a:spcPct val="100000"/>
+              </a:lnSpc>
+            </a:pPr>
             <a:endParaRPr b="0" lang="en-TR" sz="1800" strike="noStrike" u="none">
               <a:solidFill>
                 <a:srgbClr val="000000"/>
@@ -6499,7 +6711,7 @@
         <p:spPr>
           <a:xfrm>
             <a:off x="548640" y="1554480"/>
-            <a:ext cx="63720" cy="1051200"/>
+            <a:ext cx="63360" cy="1050840"/>
           </a:xfrm>
           <a:prstGeom prst="rect">
             <a:avLst/>
@@ -6525,6 +6737,11 @@
             <a:noAutofit/>
           </a:bodyPr>
           <a:p>
+            <a:pPr>
+              <a:lnSpc>
+                <a:spcPct val="100000"/>
+              </a:lnSpc>
+            </a:pPr>
             <a:endParaRPr b="0" lang="en-TR" sz="1800" strike="noStrike" u="none">
               <a:solidFill>
                 <a:srgbClr val="ffffff"/>
@@ -6545,7 +6762,7 @@
         <p:spPr>
           <a:xfrm>
             <a:off x="777240" y="1627560"/>
-            <a:ext cx="3657240" cy="365400"/>
+            <a:ext cx="3656880" cy="365040"/>
           </a:xfrm>
           <a:prstGeom prst="rect">
             <a:avLst/>
@@ -6606,7 +6823,7 @@
         <p:spPr>
           <a:xfrm>
             <a:off x="777240" y="1993320"/>
-            <a:ext cx="10515240" cy="548280"/>
+            <a:ext cx="10514880" cy="547920"/>
           </a:xfrm>
           <a:prstGeom prst="rect">
             <a:avLst/>
@@ -6667,7 +6884,7 @@
         <p:spPr>
           <a:xfrm>
             <a:off x="548640" y="2743200"/>
-            <a:ext cx="5531760" cy="3382920"/>
+            <a:ext cx="5531400" cy="3382560"/>
           </a:xfrm>
           <a:prstGeom prst="rect">
             <a:avLst/>
@@ -6693,6 +6910,11 @@
             <a:noAutofit/>
           </a:bodyPr>
           <a:p>
+            <a:pPr>
+              <a:lnSpc>
+                <a:spcPct val="100000"/>
+              </a:lnSpc>
+            </a:pPr>
             <a:endParaRPr b="0" lang="en-TR" sz="1800" strike="noStrike" u="none">
               <a:solidFill>
                 <a:srgbClr val="000000"/>
@@ -6713,7 +6935,7 @@
         <p:spPr>
           <a:xfrm>
             <a:off x="548640" y="2743200"/>
-            <a:ext cx="63720" cy="3382920"/>
+            <a:ext cx="63360" cy="3382560"/>
           </a:xfrm>
           <a:prstGeom prst="rect">
             <a:avLst/>
@@ -6739,6 +6961,11 @@
             <a:noAutofit/>
           </a:bodyPr>
           <a:p>
+            <a:pPr>
+              <a:lnSpc>
+                <a:spcPct val="100000"/>
+              </a:lnSpc>
+            </a:pPr>
             <a:endParaRPr b="0" lang="en-TR" sz="1800" strike="noStrike" u="none">
               <a:solidFill>
                 <a:srgbClr val="000000"/>
@@ -6759,7 +6986,7 @@
         <p:spPr>
           <a:xfrm>
             <a:off x="777240" y="2834640"/>
-            <a:ext cx="5120280" cy="365400"/>
+            <a:ext cx="5119920" cy="365040"/>
           </a:xfrm>
           <a:prstGeom prst="rect">
             <a:avLst/>
@@ -6820,7 +7047,7 @@
         <p:spPr>
           <a:xfrm>
             <a:off x="777240" y="3246120"/>
-            <a:ext cx="5074560" cy="1416960"/>
+            <a:ext cx="5074200" cy="1416600"/>
           </a:xfrm>
           <a:prstGeom prst="rect">
             <a:avLst/>
@@ -6846,6 +7073,11 @@
             <a:noAutofit/>
           </a:bodyPr>
           <a:p>
+            <a:pPr>
+              <a:lnSpc>
+                <a:spcPct val="100000"/>
+              </a:lnSpc>
+            </a:pPr>
             <a:endParaRPr b="0" lang="en-TR" sz="1800" strike="noStrike" u="none">
               <a:solidFill>
                 <a:srgbClr val="000000"/>
@@ -6866,7 +7098,7 @@
         <p:spPr>
           <a:xfrm>
             <a:off x="914400" y="3291840"/>
-            <a:ext cx="4845960" cy="1325520"/>
+            <a:ext cx="4845600" cy="1325160"/>
           </a:xfrm>
           <a:prstGeom prst="rect">
             <a:avLst/>
@@ -7017,7 +7249,7 @@
         <p:spPr>
           <a:xfrm>
             <a:off x="777240" y="4800600"/>
-            <a:ext cx="1627200" cy="1142640"/>
+            <a:ext cx="1626840" cy="1142280"/>
           </a:xfrm>
           <a:prstGeom prst="roundRect">
             <a:avLst>
@@ -7045,6 +7277,11 @@
             <a:noAutofit/>
           </a:bodyPr>
           <a:p>
+            <a:pPr>
+              <a:lnSpc>
+                <a:spcPct val="100000"/>
+              </a:lnSpc>
+            </a:pPr>
             <a:endParaRPr b="0" lang="en-TR" sz="1800" strike="noStrike" u="none">
               <a:solidFill>
                 <a:srgbClr val="000000"/>
@@ -7065,7 +7302,7 @@
         <p:spPr>
           <a:xfrm>
             <a:off x="777240" y="4846320"/>
-            <a:ext cx="1627200" cy="411120"/>
+            <a:ext cx="1626840" cy="410760"/>
           </a:xfrm>
           <a:prstGeom prst="rect">
             <a:avLst/>
@@ -7126,7 +7363,7 @@
         <p:spPr>
           <a:xfrm>
             <a:off x="777240" y="5212080"/>
-            <a:ext cx="1627200" cy="365400"/>
+            <a:ext cx="1626840" cy="365040"/>
           </a:xfrm>
           <a:prstGeom prst="rect">
             <a:avLst/>
@@ -7187,7 +7424,7 @@
         <p:spPr>
           <a:xfrm>
             <a:off x="822960" y="5577840"/>
-            <a:ext cx="1535760" cy="319680"/>
+            <a:ext cx="1535400" cy="319320"/>
           </a:xfrm>
           <a:prstGeom prst="rect">
             <a:avLst/>
@@ -7248,7 +7485,7 @@
         <p:spPr>
           <a:xfrm>
             <a:off x="2496240" y="4800600"/>
-            <a:ext cx="1627200" cy="1142640"/>
+            <a:ext cx="1626840" cy="1142280"/>
           </a:xfrm>
           <a:prstGeom prst="roundRect">
             <a:avLst>
@@ -7276,6 +7513,11 @@
             <a:noAutofit/>
           </a:bodyPr>
           <a:p>
+            <a:pPr>
+              <a:lnSpc>
+                <a:spcPct val="100000"/>
+              </a:lnSpc>
+            </a:pPr>
             <a:endParaRPr b="0" lang="en-TR" sz="1800" strike="noStrike" u="none">
               <a:solidFill>
                 <a:srgbClr val="000000"/>
@@ -7296,7 +7538,7 @@
         <p:spPr>
           <a:xfrm>
             <a:off x="2496240" y="4846320"/>
-            <a:ext cx="1627200" cy="411120"/>
+            <a:ext cx="1626840" cy="410760"/>
           </a:xfrm>
           <a:prstGeom prst="rect">
             <a:avLst/>
@@ -7357,7 +7599,7 @@
         <p:spPr>
           <a:xfrm>
             <a:off x="2496240" y="5212080"/>
-            <a:ext cx="1627200" cy="365400"/>
+            <a:ext cx="1626840" cy="365040"/>
           </a:xfrm>
           <a:prstGeom prst="rect">
             <a:avLst/>
@@ -7418,7 +7660,7 @@
         <p:spPr>
           <a:xfrm>
             <a:off x="2541960" y="5577840"/>
-            <a:ext cx="1535760" cy="319680"/>
+            <a:ext cx="1535400" cy="319320"/>
           </a:xfrm>
           <a:prstGeom prst="rect">
             <a:avLst/>
@@ -7479,7 +7721,7 @@
         <p:spPr>
           <a:xfrm>
             <a:off x="4215240" y="4800600"/>
-            <a:ext cx="1627200" cy="1142640"/>
+            <a:ext cx="1626840" cy="1142280"/>
           </a:xfrm>
           <a:prstGeom prst="roundRect">
             <a:avLst>
@@ -7507,6 +7749,11 @@
             <a:noAutofit/>
           </a:bodyPr>
           <a:p>
+            <a:pPr>
+              <a:lnSpc>
+                <a:spcPct val="100000"/>
+              </a:lnSpc>
+            </a:pPr>
             <a:endParaRPr b="0" lang="en-TR" sz="1800" strike="noStrike" u="none">
               <a:solidFill>
                 <a:srgbClr val="000000"/>
@@ -7527,7 +7774,7 @@
         <p:spPr>
           <a:xfrm>
             <a:off x="4215240" y="4846320"/>
-            <a:ext cx="1627200" cy="411120"/>
+            <a:ext cx="1626840" cy="410760"/>
           </a:xfrm>
           <a:prstGeom prst="rect">
             <a:avLst/>
@@ -7588,7 +7835,7 @@
         <p:spPr>
           <a:xfrm>
             <a:off x="4215240" y="5212080"/>
-            <a:ext cx="1627200" cy="365400"/>
+            <a:ext cx="1626840" cy="365040"/>
           </a:xfrm>
           <a:prstGeom prst="rect">
             <a:avLst/>
@@ -7649,7 +7896,7 @@
         <p:spPr>
           <a:xfrm>
             <a:off x="4260960" y="5577840"/>
-            <a:ext cx="1535760" cy="319680"/>
+            <a:ext cx="1535400" cy="319320"/>
           </a:xfrm>
           <a:prstGeom prst="rect">
             <a:avLst/>
@@ -7710,7 +7957,7 @@
         <p:spPr>
           <a:xfrm>
             <a:off x="6263640" y="2743200"/>
-            <a:ext cx="5531760" cy="1599840"/>
+            <a:ext cx="5531400" cy="1599480"/>
           </a:xfrm>
           <a:prstGeom prst="rect">
             <a:avLst/>
@@ -7736,6 +7983,11 @@
             <a:noAutofit/>
           </a:bodyPr>
           <a:p>
+            <a:pPr>
+              <a:lnSpc>
+                <a:spcPct val="100000"/>
+              </a:lnSpc>
+            </a:pPr>
             <a:endParaRPr b="0" lang="en-TR" sz="1800" strike="noStrike" u="none">
               <a:solidFill>
                 <a:srgbClr val="000000"/>
@@ -7756,7 +8008,7 @@
         <p:spPr>
           <a:xfrm>
             <a:off x="6263640" y="2743200"/>
-            <a:ext cx="63720" cy="1599840"/>
+            <a:ext cx="63360" cy="1599480"/>
           </a:xfrm>
           <a:prstGeom prst="rect">
             <a:avLst/>
@@ -7782,6 +8034,11 @@
             <a:noAutofit/>
           </a:bodyPr>
           <a:p>
+            <a:pPr>
+              <a:lnSpc>
+                <a:spcPct val="100000"/>
+              </a:lnSpc>
+            </a:pPr>
             <a:endParaRPr b="0" lang="en-TR" sz="1800" strike="noStrike" u="none">
               <a:solidFill>
                 <a:srgbClr val="ffffff"/>
@@ -7802,7 +8059,7 @@
         <p:spPr>
           <a:xfrm>
             <a:off x="6492240" y="2834640"/>
-            <a:ext cx="5166000" cy="365400"/>
+            <a:ext cx="5165640" cy="365040"/>
           </a:xfrm>
           <a:prstGeom prst="rect">
             <a:avLst/>
@@ -7863,7 +8120,7 @@
         <p:spPr>
           <a:xfrm>
             <a:off x="6537960" y="3246120"/>
-            <a:ext cx="5074560" cy="1005480"/>
+            <a:ext cx="5074200" cy="1005120"/>
           </a:xfrm>
           <a:prstGeom prst="rect">
             <a:avLst/>
@@ -7964,7 +8221,7 @@
         <p:spPr>
           <a:xfrm>
             <a:off x="6263640" y="4526280"/>
-            <a:ext cx="5531760" cy="1599840"/>
+            <a:ext cx="5531400" cy="1599480"/>
           </a:xfrm>
           <a:prstGeom prst="rect">
             <a:avLst/>
@@ -7990,6 +8247,11 @@
             <a:noAutofit/>
           </a:bodyPr>
           <a:p>
+            <a:pPr>
+              <a:lnSpc>
+                <a:spcPct val="100000"/>
+              </a:lnSpc>
+            </a:pPr>
             <a:endParaRPr b="0" lang="en-TR" sz="1800" strike="noStrike" u="none">
               <a:solidFill>
                 <a:srgbClr val="000000"/>
@@ -8010,7 +8272,7 @@
         <p:spPr>
           <a:xfrm>
             <a:off x="6263640" y="4526280"/>
-            <a:ext cx="63720" cy="1599840"/>
+            <a:ext cx="63360" cy="1599480"/>
           </a:xfrm>
           <a:prstGeom prst="rect">
             <a:avLst/>
@@ -8036,6 +8298,11 @@
             <a:noAutofit/>
           </a:bodyPr>
           <a:p>
+            <a:pPr>
+              <a:lnSpc>
+                <a:spcPct val="100000"/>
+              </a:lnSpc>
+            </a:pPr>
             <a:endParaRPr b="0" lang="en-TR" sz="1800" strike="noStrike" u="none">
               <a:solidFill>
                 <a:srgbClr val="ffffff"/>
@@ -8056,7 +8323,7 @@
         <p:spPr>
           <a:xfrm>
             <a:off x="6492240" y="4617720"/>
-            <a:ext cx="5166000" cy="365400"/>
+            <a:ext cx="5165640" cy="365040"/>
           </a:xfrm>
           <a:prstGeom prst="rect">
             <a:avLst/>
@@ -8117,7 +8384,7 @@
         <p:spPr>
           <a:xfrm>
             <a:off x="6537960" y="5029200"/>
-            <a:ext cx="5074560" cy="1005480"/>
+            <a:ext cx="5074200" cy="1005120"/>
           </a:xfrm>
           <a:prstGeom prst="rect">
             <a:avLst/>
@@ -8218,7 +8485,7 @@
         <p:spPr>
           <a:xfrm>
             <a:off x="548640" y="6355080"/>
-            <a:ext cx="11063880" cy="10440"/>
+            <a:ext cx="11063520" cy="10080"/>
           </a:xfrm>
           <a:prstGeom prst="rect">
             <a:avLst/>
@@ -8244,6 +8511,11 @@
             <a:noAutofit/>
           </a:bodyPr>
           <a:p>
+            <a:pPr>
+              <a:lnSpc>
+                <a:spcPct val="100000"/>
+              </a:lnSpc>
+            </a:pPr>
             <a:endParaRPr b="0" lang="en-TR" sz="1800" strike="noStrike" u="none">
               <a:solidFill>
                 <a:srgbClr val="000000"/>
@@ -8264,7 +8536,7 @@
         <p:spPr>
           <a:xfrm>
             <a:off x="548640" y="6446520"/>
-            <a:ext cx="7314840" cy="273960"/>
+            <a:ext cx="7314480" cy="273600"/>
           </a:xfrm>
           <a:prstGeom prst="rect">
             <a:avLst/>
@@ -8325,7 +8597,7 @@
         <p:spPr>
           <a:xfrm>
             <a:off x="10698480" y="6446520"/>
-            <a:ext cx="914040" cy="273960"/>
+            <a:ext cx="913680" cy="273600"/>
           </a:xfrm>
           <a:prstGeom prst="rect">
             <a:avLst/>
@@ -8423,7 +8695,7 @@
         <p:spPr>
           <a:xfrm>
             <a:off x="548640" y="411480"/>
-            <a:ext cx="10972440" cy="273960"/>
+            <a:ext cx="10972080" cy="273600"/>
           </a:xfrm>
           <a:prstGeom prst="rect">
             <a:avLst/>
@@ -8484,7 +8756,7 @@
         <p:spPr>
           <a:xfrm>
             <a:off x="548640" y="713160"/>
-            <a:ext cx="10972440" cy="776880"/>
+            <a:ext cx="10972080" cy="776520"/>
           </a:xfrm>
           <a:prstGeom prst="rect">
             <a:avLst/>
@@ -8545,7 +8817,7 @@
         <p:spPr>
           <a:xfrm>
             <a:off x="548640" y="1600200"/>
-            <a:ext cx="6949080" cy="4525920"/>
+            <a:ext cx="6948720" cy="4525560"/>
           </a:xfrm>
           <a:prstGeom prst="rect">
             <a:avLst/>
@@ -8571,6 +8843,11 @@
             <a:noAutofit/>
           </a:bodyPr>
           <a:p>
+            <a:pPr>
+              <a:lnSpc>
+                <a:spcPct val="100000"/>
+              </a:lnSpc>
+            </a:pPr>
             <a:endParaRPr b="0" lang="en-TR" sz="1800" strike="noStrike" u="none">
               <a:solidFill>
                 <a:srgbClr val="ffffff"/>
@@ -8595,7 +8872,7 @@
         <p:spPr>
           <a:xfrm>
             <a:off x="777240" y="1783080"/>
-            <a:ext cx="365400" cy="365400"/>
+            <a:ext cx="365040" cy="365040"/>
           </a:xfrm>
           <a:prstGeom prst="rect">
             <a:avLst/>
@@ -8615,7 +8892,7 @@
         <p:spPr>
           <a:xfrm>
             <a:off x="1280160" y="1783080"/>
-            <a:ext cx="6034680" cy="365400"/>
+            <a:ext cx="6034320" cy="365040"/>
           </a:xfrm>
           <a:prstGeom prst="rect">
             <a:avLst/>
@@ -8676,7 +8953,7 @@
         <p:spPr>
           <a:xfrm>
             <a:off x="822960" y="2286000"/>
-            <a:ext cx="6491880" cy="3702960"/>
+            <a:ext cx="6491520" cy="3702600"/>
           </a:xfrm>
           <a:prstGeom prst="rect">
             <a:avLst/>
@@ -9004,7 +9281,7 @@
         <p:spPr>
           <a:xfrm>
             <a:off x="7680960" y="1600200"/>
-            <a:ext cx="4114440" cy="4525920"/>
+            <a:ext cx="4114080" cy="4525560"/>
           </a:xfrm>
           <a:prstGeom prst="rect">
             <a:avLst/>
@@ -9030,6 +9307,11 @@
             <a:noAutofit/>
           </a:bodyPr>
           <a:p>
+            <a:pPr>
+              <a:lnSpc>
+                <a:spcPct val="100000"/>
+              </a:lnSpc>
+            </a:pPr>
             <a:endParaRPr b="0" lang="en-TR" sz="1800" strike="noStrike" u="none">
               <a:solidFill>
                 <a:srgbClr val="000000"/>
@@ -9050,7 +9332,7 @@
         <p:spPr>
           <a:xfrm>
             <a:off x="7909560" y="1737360"/>
-            <a:ext cx="3748680" cy="319680"/>
+            <a:ext cx="3748320" cy="319320"/>
           </a:xfrm>
           <a:prstGeom prst="rect">
             <a:avLst/>
@@ -9111,7 +9393,7 @@
         <p:spPr>
           <a:xfrm>
             <a:off x="7909560" y="2240280"/>
-            <a:ext cx="3657240" cy="1508400"/>
+            <a:ext cx="3656880" cy="1508040"/>
           </a:xfrm>
           <a:prstGeom prst="roundRect">
             <a:avLst>
@@ -9139,6 +9421,11 @@
             <a:noAutofit/>
           </a:bodyPr>
           <a:p>
+            <a:pPr>
+              <a:lnSpc>
+                <a:spcPct val="100000"/>
+              </a:lnSpc>
+            </a:pPr>
             <a:endParaRPr b="0" lang="en-TR" sz="1800" strike="noStrike" u="none">
               <a:solidFill>
                 <a:srgbClr val="000000"/>
@@ -9159,7 +9446,7 @@
         <p:spPr>
           <a:xfrm>
             <a:off x="8046720" y="2313360"/>
-            <a:ext cx="3474360" cy="319680"/>
+            <a:ext cx="3474000" cy="319320"/>
           </a:xfrm>
           <a:prstGeom prst="rect">
             <a:avLst/>
@@ -9220,7 +9507,7 @@
         <p:spPr>
           <a:xfrm>
             <a:off x="8046720" y="2587680"/>
-            <a:ext cx="3474360" cy="502560"/>
+            <a:ext cx="3474000" cy="502200"/>
           </a:xfrm>
           <a:prstGeom prst="rect">
             <a:avLst/>
@@ -9281,7 +9568,7 @@
         <p:spPr>
           <a:xfrm>
             <a:off x="8046720" y="3154680"/>
-            <a:ext cx="3474360" cy="594000"/>
+            <a:ext cx="3474000" cy="593640"/>
           </a:xfrm>
           <a:prstGeom prst="rect">
             <a:avLst/>
@@ -9342,7 +9629,7 @@
         <p:spPr>
           <a:xfrm>
             <a:off x="7909560" y="3931920"/>
-            <a:ext cx="3657240" cy="1508400"/>
+            <a:ext cx="3656880" cy="1508040"/>
           </a:xfrm>
           <a:prstGeom prst="roundRect">
             <a:avLst>
@@ -9370,6 +9657,11 @@
             <a:noAutofit/>
           </a:bodyPr>
           <a:p>
+            <a:pPr>
+              <a:lnSpc>
+                <a:spcPct val="100000"/>
+              </a:lnSpc>
+            </a:pPr>
             <a:endParaRPr b="0" lang="en-TR" sz="1800" strike="noStrike" u="none">
               <a:solidFill>
                 <a:srgbClr val="000000"/>
@@ -9390,7 +9682,7 @@
         <p:spPr>
           <a:xfrm>
             <a:off x="8046720" y="4005000"/>
-            <a:ext cx="3474360" cy="319680"/>
+            <a:ext cx="3474000" cy="319320"/>
           </a:xfrm>
           <a:prstGeom prst="rect">
             <a:avLst/>
@@ -9451,7 +9743,7 @@
         <p:spPr>
           <a:xfrm>
             <a:off x="8046720" y="4279320"/>
-            <a:ext cx="3474360" cy="502560"/>
+            <a:ext cx="3474000" cy="502200"/>
           </a:xfrm>
           <a:prstGeom prst="rect">
             <a:avLst/>
@@ -9512,7 +9804,7 @@
         <p:spPr>
           <a:xfrm>
             <a:off x="8046720" y="4846320"/>
-            <a:ext cx="3474360" cy="594000"/>
+            <a:ext cx="3474000" cy="593640"/>
           </a:xfrm>
           <a:prstGeom prst="rect">
             <a:avLst/>
@@ -9573,7 +9865,7 @@
         <p:spPr>
           <a:xfrm>
             <a:off x="7909560" y="5623560"/>
-            <a:ext cx="3657240" cy="365400"/>
+            <a:ext cx="3656880" cy="365040"/>
           </a:xfrm>
           <a:prstGeom prst="rect">
             <a:avLst/>
@@ -9634,7 +9926,7 @@
         <p:spPr>
           <a:xfrm>
             <a:off x="548640" y="6355080"/>
-            <a:ext cx="11063880" cy="10440"/>
+            <a:ext cx="11063520" cy="10080"/>
           </a:xfrm>
           <a:prstGeom prst="rect">
             <a:avLst/>
@@ -9660,6 +9952,11 @@
             <a:noAutofit/>
           </a:bodyPr>
           <a:p>
+            <a:pPr>
+              <a:lnSpc>
+                <a:spcPct val="100000"/>
+              </a:lnSpc>
+            </a:pPr>
             <a:endParaRPr b="0" lang="en-TR" sz="1800" strike="noStrike" u="none">
               <a:solidFill>
                 <a:srgbClr val="000000"/>
@@ -9680,7 +9977,7 @@
         <p:spPr>
           <a:xfrm>
             <a:off x="548640" y="6446520"/>
-            <a:ext cx="7314840" cy="273960"/>
+            <a:ext cx="7314480" cy="273600"/>
           </a:xfrm>
           <a:prstGeom prst="rect">
             <a:avLst/>
@@ -9741,7 +10038,7 @@
         <p:spPr>
           <a:xfrm>
             <a:off x="10698480" y="6446520"/>
-            <a:ext cx="914040" cy="273960"/>
+            <a:ext cx="913680" cy="273600"/>
           </a:xfrm>
           <a:prstGeom prst="rect">
             <a:avLst/>
@@ -9839,7 +10136,7 @@
         <p:spPr>
           <a:xfrm>
             <a:off x="548640" y="411480"/>
-            <a:ext cx="10972440" cy="273960"/>
+            <a:ext cx="10972080" cy="273600"/>
           </a:xfrm>
           <a:prstGeom prst="rect">
             <a:avLst/>
@@ -9900,7 +10197,7 @@
         <p:spPr>
           <a:xfrm>
             <a:off x="548640" y="713160"/>
-            <a:ext cx="10972440" cy="776880"/>
+            <a:ext cx="10972080" cy="776520"/>
           </a:xfrm>
           <a:prstGeom prst="rect">
             <a:avLst/>
@@ -9961,7 +10258,7 @@
         <p:spPr>
           <a:xfrm>
             <a:off x="548640" y="1600200"/>
-            <a:ext cx="5531760" cy="4525920"/>
+            <a:ext cx="5531400" cy="4525560"/>
           </a:xfrm>
           <a:prstGeom prst="rect">
             <a:avLst/>
@@ -9987,6 +10284,11 @@
             <a:noAutofit/>
           </a:bodyPr>
           <a:p>
+            <a:pPr>
+              <a:lnSpc>
+                <a:spcPct val="100000"/>
+              </a:lnSpc>
+            </a:pPr>
             <a:endParaRPr b="0" lang="en-TR" sz="1800" strike="noStrike" u="none">
               <a:solidFill>
                 <a:srgbClr val="000000"/>
@@ -10007,7 +10309,7 @@
         <p:spPr>
           <a:xfrm>
             <a:off x="548640" y="1600200"/>
-            <a:ext cx="63720" cy="4525920"/>
+            <a:ext cx="63360" cy="4525560"/>
           </a:xfrm>
           <a:prstGeom prst="rect">
             <a:avLst/>
@@ -10033,6 +10335,11 @@
             <a:noAutofit/>
           </a:bodyPr>
           <a:p>
+            <a:pPr>
+              <a:lnSpc>
+                <a:spcPct val="100000"/>
+              </a:lnSpc>
+            </a:pPr>
             <a:endParaRPr b="0" lang="en-TR" sz="1800" strike="noStrike" u="none">
               <a:solidFill>
                 <a:srgbClr val="ffffff"/>
@@ -10057,7 +10364,7 @@
         <p:spPr>
           <a:xfrm>
             <a:off x="822960" y="1783080"/>
-            <a:ext cx="365400" cy="365400"/>
+            <a:ext cx="365040" cy="365040"/>
           </a:xfrm>
           <a:prstGeom prst="rect">
             <a:avLst/>
@@ -10077,7 +10384,7 @@
         <p:spPr>
           <a:xfrm>
             <a:off x="1325880" y="1783080"/>
-            <a:ext cx="4617360" cy="365400"/>
+            <a:ext cx="4617000" cy="365040"/>
           </a:xfrm>
           <a:prstGeom prst="rect">
             <a:avLst/>
@@ -10138,7 +10445,7 @@
         <p:spPr>
           <a:xfrm>
             <a:off x="822960" y="2377440"/>
-            <a:ext cx="4983120" cy="1828440"/>
+            <a:ext cx="4982760" cy="1828080"/>
           </a:xfrm>
           <a:prstGeom prst="rect">
             <a:avLst/>
@@ -10309,7 +10616,7 @@
         <p:spPr>
           <a:xfrm>
             <a:off x="822960" y="4389120"/>
-            <a:ext cx="4983120" cy="319680"/>
+            <a:ext cx="4982760" cy="319320"/>
           </a:xfrm>
           <a:prstGeom prst="rect">
             <a:avLst/>
@@ -10370,7 +10677,7 @@
         <p:spPr>
           <a:xfrm>
             <a:off x="822960" y="4846320"/>
-            <a:ext cx="164160" cy="164160"/>
+            <a:ext cx="163800" cy="163800"/>
           </a:xfrm>
           <a:prstGeom prst="ellipse">
             <a:avLst/>
@@ -10396,6 +10703,11 @@
             <a:noAutofit/>
           </a:bodyPr>
           <a:p>
+            <a:pPr>
+              <a:lnSpc>
+                <a:spcPct val="100000"/>
+              </a:lnSpc>
+            </a:pPr>
             <a:endParaRPr b="0" lang="en-TR" sz="1800" strike="noStrike" u="none">
               <a:solidFill>
                 <a:srgbClr val="ffffff"/>
@@ -10416,7 +10728,7 @@
         <p:spPr>
           <a:xfrm>
             <a:off x="1097280" y="4754880"/>
-            <a:ext cx="2468520" cy="365400"/>
+            <a:ext cx="2468160" cy="365040"/>
           </a:xfrm>
           <a:prstGeom prst="rect">
             <a:avLst/>
@@ -10477,7 +10789,7 @@
         <p:spPr>
           <a:xfrm>
             <a:off x="3566160" y="4754880"/>
-            <a:ext cx="2239920" cy="365400"/>
+            <a:ext cx="2239560" cy="365040"/>
           </a:xfrm>
           <a:prstGeom prst="rect">
             <a:avLst/>
@@ -10538,7 +10850,7 @@
         <p:spPr>
           <a:xfrm>
             <a:off x="822960" y="5303520"/>
-            <a:ext cx="164160" cy="164160"/>
+            <a:ext cx="163800" cy="163800"/>
           </a:xfrm>
           <a:prstGeom prst="ellipse">
             <a:avLst/>
@@ -10564,6 +10876,11 @@
             <a:noAutofit/>
           </a:bodyPr>
           <a:p>
+            <a:pPr>
+              <a:lnSpc>
+                <a:spcPct val="100000"/>
+              </a:lnSpc>
+            </a:pPr>
             <a:endParaRPr b="0" lang="en-TR" sz="1800" strike="noStrike" u="none">
               <a:solidFill>
                 <a:srgbClr val="ffffff"/>
@@ -10584,7 +10901,7 @@
         <p:spPr>
           <a:xfrm>
             <a:off x="1097280" y="5212080"/>
-            <a:ext cx="2468520" cy="365400"/>
+            <a:ext cx="2468160" cy="365040"/>
           </a:xfrm>
           <a:prstGeom prst="rect">
             <a:avLst/>
@@ -10645,7 +10962,7 @@
         <p:spPr>
           <a:xfrm>
             <a:off x="3566160" y="5212080"/>
-            <a:ext cx="2239920" cy="365400"/>
+            <a:ext cx="2239560" cy="365040"/>
           </a:xfrm>
           <a:prstGeom prst="rect">
             <a:avLst/>
@@ -10706,7 +11023,7 @@
         <p:spPr>
           <a:xfrm>
             <a:off x="822960" y="5760720"/>
-            <a:ext cx="164160" cy="164160"/>
+            <a:ext cx="163800" cy="163800"/>
           </a:xfrm>
           <a:prstGeom prst="ellipse">
             <a:avLst/>
@@ -10732,6 +11049,11 @@
             <a:noAutofit/>
           </a:bodyPr>
           <a:p>
+            <a:pPr>
+              <a:lnSpc>
+                <a:spcPct val="100000"/>
+              </a:lnSpc>
+            </a:pPr>
             <a:endParaRPr b="0" lang="en-TR" sz="1800" strike="noStrike" u="none">
               <a:solidFill>
                 <a:srgbClr val="ffffff"/>
@@ -10752,7 +11074,7 @@
         <p:spPr>
           <a:xfrm>
             <a:off x="1097280" y="5669280"/>
-            <a:ext cx="2468520" cy="365400"/>
+            <a:ext cx="2468160" cy="365040"/>
           </a:xfrm>
           <a:prstGeom prst="rect">
             <a:avLst/>
@@ -10813,7 +11135,7 @@
         <p:spPr>
           <a:xfrm>
             <a:off x="3566160" y="5669280"/>
-            <a:ext cx="2239920" cy="365400"/>
+            <a:ext cx="2239560" cy="365040"/>
           </a:xfrm>
           <a:prstGeom prst="rect">
             <a:avLst/>
@@ -10874,7 +11196,7 @@
         <p:spPr>
           <a:xfrm>
             <a:off x="6263640" y="1600200"/>
-            <a:ext cx="5531760" cy="4525920"/>
+            <a:ext cx="5531400" cy="4525560"/>
           </a:xfrm>
           <a:prstGeom prst="rect">
             <a:avLst/>
@@ -10900,6 +11222,11 @@
             <a:noAutofit/>
           </a:bodyPr>
           <a:p>
+            <a:pPr>
+              <a:lnSpc>
+                <a:spcPct val="100000"/>
+              </a:lnSpc>
+            </a:pPr>
             <a:endParaRPr b="0" lang="en-TR" sz="1800" strike="noStrike" u="none">
               <a:solidFill>
                 <a:srgbClr val="000000"/>
@@ -10920,7 +11247,7 @@
         <p:spPr>
           <a:xfrm>
             <a:off x="6263640" y="1600200"/>
-            <a:ext cx="63720" cy="4525920"/>
+            <a:ext cx="63360" cy="4525560"/>
           </a:xfrm>
           <a:prstGeom prst="rect">
             <a:avLst/>
@@ -10946,6 +11273,11 @@
             <a:noAutofit/>
           </a:bodyPr>
           <a:p>
+            <a:pPr>
+              <a:lnSpc>
+                <a:spcPct val="100000"/>
+              </a:lnSpc>
+            </a:pPr>
             <a:endParaRPr b="0" lang="en-TR" sz="1800" strike="noStrike" u="none">
               <a:solidFill>
                 <a:srgbClr val="ffffff"/>
@@ -10966,7 +11298,7 @@
         <p:spPr>
           <a:xfrm>
             <a:off x="6537960" y="1783080"/>
-            <a:ext cx="5074560" cy="365400"/>
+            <a:ext cx="5074200" cy="365040"/>
           </a:xfrm>
           <a:prstGeom prst="rect">
             <a:avLst/>
@@ -11026,7 +11358,7 @@
         </p:nvGraphicFramePr>
         <p:xfrm>
           <a:off x="6537960" y="2286000"/>
-          <a:ext cx="4983120" cy="3071880"/>
+          <a:ext cx="4983120" cy="3070080"/>
         </p:xfrm>
         <a:graphic>
           <a:graphicData uri="http://schemas.openxmlformats.org/drawingml/2006/table">
@@ -12608,7 +12940,7 @@
         <p:spPr>
           <a:xfrm>
             <a:off x="548640" y="6355080"/>
-            <a:ext cx="11063880" cy="10440"/>
+            <a:ext cx="11063520" cy="10080"/>
           </a:xfrm>
           <a:prstGeom prst="rect">
             <a:avLst/>
@@ -12634,6 +12966,11 @@
             <a:noAutofit/>
           </a:bodyPr>
           <a:p>
+            <a:pPr>
+              <a:lnSpc>
+                <a:spcPct val="100000"/>
+              </a:lnSpc>
+            </a:pPr>
             <a:endParaRPr b="0" lang="en-TR" sz="1800" strike="noStrike" u="none">
               <a:solidFill>
                 <a:srgbClr val="000000"/>
@@ -12654,7 +12991,7 @@
         <p:spPr>
           <a:xfrm>
             <a:off x="548640" y="6446520"/>
-            <a:ext cx="7314840" cy="273960"/>
+            <a:ext cx="7314480" cy="273600"/>
           </a:xfrm>
           <a:prstGeom prst="rect">
             <a:avLst/>
@@ -12715,7 +13052,7 @@
         <p:spPr>
           <a:xfrm>
             <a:off x="10698480" y="6446520"/>
-            <a:ext cx="914040" cy="273960"/>
+            <a:ext cx="913680" cy="273600"/>
           </a:xfrm>
           <a:prstGeom prst="rect">
             <a:avLst/>
@@ -12817,7 +13154,7 @@
         <p:spPr>
           <a:xfrm>
             <a:off x="1112400" y="1371600"/>
-            <a:ext cx="9966960" cy="3833280"/>
+            <a:ext cx="9966600" cy="3832920"/>
           </a:xfrm>
           <a:prstGeom prst="rect">
             <a:avLst/>
@@ -12837,7 +13174,7 @@
         <p:spPr>
           <a:xfrm>
             <a:off x="548640" y="411480"/>
-            <a:ext cx="10972440" cy="273960"/>
+            <a:ext cx="10972080" cy="273600"/>
           </a:xfrm>
           <a:prstGeom prst="rect">
             <a:avLst/>
@@ -12898,7 +13235,7 @@
         <p:spPr>
           <a:xfrm>
             <a:off x="548640" y="713160"/>
-            <a:ext cx="10972440" cy="776880"/>
+            <a:ext cx="10972080" cy="776520"/>
           </a:xfrm>
           <a:prstGeom prst="rect">
             <a:avLst/>
@@ -12959,7 +13296,7 @@
         <p:spPr>
           <a:xfrm>
             <a:off x="548640" y="5257800"/>
-            <a:ext cx="3565800" cy="1051200"/>
+            <a:ext cx="3565440" cy="1050840"/>
           </a:xfrm>
           <a:prstGeom prst="rect">
             <a:avLst/>
@@ -12985,6 +13322,11 @@
             <a:noAutofit/>
           </a:bodyPr>
           <a:p>
+            <a:pPr>
+              <a:lnSpc>
+                <a:spcPct val="100000"/>
+              </a:lnSpc>
+            </a:pPr>
             <a:endParaRPr b="0" lang="en-TR" sz="1800" strike="noStrike" u="none">
               <a:solidFill>
                 <a:srgbClr val="000000"/>
@@ -13005,7 +13347,7 @@
         <p:spPr>
           <a:xfrm>
             <a:off x="548640" y="5257800"/>
-            <a:ext cx="63720" cy="1051200"/>
+            <a:ext cx="63360" cy="1050840"/>
           </a:xfrm>
           <a:prstGeom prst="rect">
             <a:avLst/>
@@ -13031,6 +13373,11 @@
             <a:noAutofit/>
           </a:bodyPr>
           <a:p>
+            <a:pPr>
+              <a:lnSpc>
+                <a:spcPct val="100000"/>
+              </a:lnSpc>
+            </a:pPr>
             <a:endParaRPr b="0" lang="en-TR" sz="1800" strike="noStrike" u="none">
               <a:solidFill>
                 <a:srgbClr val="ffffff"/>
@@ -13051,7 +13398,7 @@
         <p:spPr>
           <a:xfrm>
             <a:off x="731520" y="5303520"/>
-            <a:ext cx="3291480" cy="639720"/>
+            <a:ext cx="3291120" cy="639360"/>
           </a:xfrm>
           <a:prstGeom prst="rect">
             <a:avLst/>
@@ -13112,7 +13459,7 @@
         <p:spPr>
           <a:xfrm>
             <a:off x="731520" y="5897880"/>
-            <a:ext cx="3291480" cy="365400"/>
+            <a:ext cx="3291120" cy="365040"/>
           </a:xfrm>
           <a:prstGeom prst="rect">
             <a:avLst/>
@@ -13173,7 +13520,7 @@
         <p:spPr>
           <a:xfrm>
             <a:off x="4297680" y="5257800"/>
-            <a:ext cx="3565800" cy="1051200"/>
+            <a:ext cx="3565440" cy="1050840"/>
           </a:xfrm>
           <a:prstGeom prst="rect">
             <a:avLst/>
@@ -13199,6 +13546,11 @@
             <a:noAutofit/>
           </a:bodyPr>
           <a:p>
+            <a:pPr>
+              <a:lnSpc>
+                <a:spcPct val="100000"/>
+              </a:lnSpc>
+            </a:pPr>
             <a:endParaRPr b="0" lang="en-TR" sz="1800" strike="noStrike" u="none">
               <a:solidFill>
                 <a:srgbClr val="000000"/>
@@ -13219,7 +13571,7 @@
         <p:spPr>
           <a:xfrm>
             <a:off x="4297680" y="5257800"/>
-            <a:ext cx="63720" cy="1051200"/>
+            <a:ext cx="63360" cy="1050840"/>
           </a:xfrm>
           <a:prstGeom prst="rect">
             <a:avLst/>
@@ -13245,6 +13597,11 @@
             <a:noAutofit/>
           </a:bodyPr>
           <a:p>
+            <a:pPr>
+              <a:lnSpc>
+                <a:spcPct val="100000"/>
+              </a:lnSpc>
+            </a:pPr>
             <a:endParaRPr b="0" lang="en-TR" sz="1800" strike="noStrike" u="none">
               <a:solidFill>
                 <a:srgbClr val="ffffff"/>
@@ -13265,7 +13622,7 @@
         <p:spPr>
           <a:xfrm>
             <a:off x="4480560" y="5312520"/>
-            <a:ext cx="3291480" cy="273960"/>
+            <a:ext cx="3291120" cy="273600"/>
           </a:xfrm>
           <a:prstGeom prst="rect">
             <a:avLst/>
@@ -13326,7 +13683,7 @@
         <p:spPr>
           <a:xfrm>
             <a:off x="4480560" y="5623560"/>
-            <a:ext cx="1810080" cy="639720"/>
+            <a:ext cx="1809720" cy="639360"/>
           </a:xfrm>
           <a:prstGeom prst="rect">
             <a:avLst/>
@@ -13423,7 +13780,7 @@
         <p:spPr>
           <a:xfrm>
             <a:off x="6291000" y="5623560"/>
-            <a:ext cx="1481040" cy="639720"/>
+            <a:ext cx="1480680" cy="639360"/>
           </a:xfrm>
           <a:prstGeom prst="rect">
             <a:avLst/>
@@ -13520,7 +13877,7 @@
         <p:spPr>
           <a:xfrm>
             <a:off x="8046720" y="5257800"/>
-            <a:ext cx="3565800" cy="1051200"/>
+            <a:ext cx="3565440" cy="1050840"/>
           </a:xfrm>
           <a:prstGeom prst="rect">
             <a:avLst/>
@@ -13546,6 +13903,11 @@
             <a:noAutofit/>
           </a:bodyPr>
           <a:p>
+            <a:pPr>
+              <a:lnSpc>
+                <a:spcPct val="100000"/>
+              </a:lnSpc>
+            </a:pPr>
             <a:endParaRPr b="0" lang="en-TR" sz="1800" strike="noStrike" u="none">
               <a:solidFill>
                 <a:srgbClr val="000000"/>
@@ -13566,7 +13928,7 @@
         <p:spPr>
           <a:xfrm>
             <a:off x="8046720" y="5257800"/>
-            <a:ext cx="63720" cy="1051200"/>
+            <a:ext cx="63360" cy="1050840"/>
           </a:xfrm>
           <a:prstGeom prst="rect">
             <a:avLst/>
@@ -13592,6 +13954,11 @@
             <a:noAutofit/>
           </a:bodyPr>
           <a:p>
+            <a:pPr>
+              <a:lnSpc>
+                <a:spcPct val="100000"/>
+              </a:lnSpc>
+            </a:pPr>
             <a:endParaRPr b="0" lang="en-TR" sz="1800" strike="noStrike" u="none">
               <a:solidFill>
                 <a:srgbClr val="000000"/>
@@ -13612,7 +13979,7 @@
         <p:spPr>
           <a:xfrm>
             <a:off x="8229600" y="5312520"/>
-            <a:ext cx="3291480" cy="273960"/>
+            <a:ext cx="3291120" cy="273600"/>
           </a:xfrm>
           <a:prstGeom prst="rect">
             <a:avLst/>
@@ -13673,7 +14040,7 @@
         <p:spPr>
           <a:xfrm>
             <a:off x="8229600" y="5586840"/>
-            <a:ext cx="3291480" cy="685440"/>
+            <a:ext cx="3291120" cy="685080"/>
           </a:xfrm>
           <a:prstGeom prst="rect">
             <a:avLst/>
@@ -13734,7 +14101,7 @@
         <p:spPr>
           <a:xfrm>
             <a:off x="548640" y="6355080"/>
-            <a:ext cx="11063880" cy="10440"/>
+            <a:ext cx="11063520" cy="10080"/>
           </a:xfrm>
           <a:prstGeom prst="rect">
             <a:avLst/>
@@ -13760,6 +14127,11 @@
             <a:noAutofit/>
           </a:bodyPr>
           <a:p>
+            <a:pPr>
+              <a:lnSpc>
+                <a:spcPct val="100000"/>
+              </a:lnSpc>
+            </a:pPr>
             <a:endParaRPr b="0" lang="en-TR" sz="1800" strike="noStrike" u="none">
               <a:solidFill>
                 <a:srgbClr val="000000"/>
@@ -13780,7 +14152,7 @@
         <p:spPr>
           <a:xfrm>
             <a:off x="548640" y="6446520"/>
-            <a:ext cx="7314840" cy="273960"/>
+            <a:ext cx="7314480" cy="273600"/>
           </a:xfrm>
           <a:prstGeom prst="rect">
             <a:avLst/>
@@ -13841,7 +14213,7 @@
         <p:spPr>
           <a:xfrm>
             <a:off x="10698480" y="6446520"/>
-            <a:ext cx="914040" cy="273960"/>
+            <a:ext cx="913680" cy="273600"/>
           </a:xfrm>
           <a:prstGeom prst="rect">
             <a:avLst/>
@@ -13939,7 +14311,7 @@
         <p:spPr>
           <a:xfrm>
             <a:off x="548640" y="411480"/>
-            <a:ext cx="10972440" cy="273960"/>
+            <a:ext cx="10972080" cy="273600"/>
           </a:xfrm>
           <a:prstGeom prst="rect">
             <a:avLst/>
@@ -14000,7 +14372,7 @@
         <p:spPr>
           <a:xfrm>
             <a:off x="548640" y="713160"/>
-            <a:ext cx="10972440" cy="776880"/>
+            <a:ext cx="10972080" cy="776520"/>
           </a:xfrm>
           <a:prstGeom prst="rect">
             <a:avLst/>
@@ -14061,7 +14433,7 @@
         <p:spPr>
           <a:xfrm>
             <a:off x="548640" y="5257800"/>
-            <a:ext cx="3565800" cy="1051200"/>
+            <a:ext cx="3565440" cy="1050840"/>
           </a:xfrm>
           <a:prstGeom prst="rect">
             <a:avLst/>
@@ -14087,6 +14459,11 @@
             <a:noAutofit/>
           </a:bodyPr>
           <a:p>
+            <a:pPr>
+              <a:lnSpc>
+                <a:spcPct val="100000"/>
+              </a:lnSpc>
+            </a:pPr>
             <a:endParaRPr b="0" lang="en-TR" sz="1800" strike="noStrike" u="none">
               <a:solidFill>
                 <a:srgbClr val="000000"/>
@@ -14107,7 +14484,7 @@
         <p:spPr>
           <a:xfrm>
             <a:off x="548640" y="5257800"/>
-            <a:ext cx="63720" cy="1051200"/>
+            <a:ext cx="63360" cy="1050840"/>
           </a:xfrm>
           <a:prstGeom prst="rect">
             <a:avLst/>
@@ -14133,6 +14510,11 @@
             <a:noAutofit/>
           </a:bodyPr>
           <a:p>
+            <a:pPr>
+              <a:lnSpc>
+                <a:spcPct val="100000"/>
+              </a:lnSpc>
+            </a:pPr>
             <a:endParaRPr b="0" lang="en-TR" sz="1800" strike="noStrike" u="none">
               <a:solidFill>
                 <a:srgbClr val="ffffff"/>
@@ -14153,7 +14535,7 @@
         <p:spPr>
           <a:xfrm>
             <a:off x="713160" y="5294520"/>
-            <a:ext cx="3309840" cy="255600"/>
+            <a:ext cx="3309480" cy="255240"/>
           </a:xfrm>
           <a:prstGeom prst="rect">
             <a:avLst/>
@@ -14214,7 +14596,7 @@
         <p:spPr>
           <a:xfrm>
             <a:off x="713160" y="5550480"/>
-            <a:ext cx="1820160" cy="776880"/>
+            <a:ext cx="1819800" cy="776520"/>
           </a:xfrm>
           <a:prstGeom prst="rect">
             <a:avLst/>
@@ -14344,7 +14726,7 @@
         <p:spPr>
           <a:xfrm>
             <a:off x="2533680" y="5550480"/>
-            <a:ext cx="1489320" cy="776880"/>
+            <a:ext cx="1488960" cy="776520"/>
           </a:xfrm>
           <a:prstGeom prst="rect">
             <a:avLst/>
@@ -14474,7 +14856,7 @@
         <p:spPr>
           <a:xfrm>
             <a:off x="4297680" y="5257800"/>
-            <a:ext cx="3565800" cy="1051200"/>
+            <a:ext cx="3565440" cy="1050840"/>
           </a:xfrm>
           <a:prstGeom prst="rect">
             <a:avLst/>
@@ -14500,6 +14882,11 @@
             <a:noAutofit/>
           </a:bodyPr>
           <a:p>
+            <a:pPr>
+              <a:lnSpc>
+                <a:spcPct val="100000"/>
+              </a:lnSpc>
+            </a:pPr>
             <a:endParaRPr b="0" lang="en-TR" sz="1800" strike="noStrike" u="none">
               <a:solidFill>
                 <a:srgbClr val="000000"/>
@@ -14520,7 +14907,7 @@
         <p:spPr>
           <a:xfrm>
             <a:off x="4297680" y="5257800"/>
-            <a:ext cx="63720" cy="1051200"/>
+            <a:ext cx="63360" cy="1050840"/>
           </a:xfrm>
           <a:prstGeom prst="rect">
             <a:avLst/>
@@ -14546,6 +14933,11 @@
             <a:noAutofit/>
           </a:bodyPr>
           <a:p>
+            <a:pPr>
+              <a:lnSpc>
+                <a:spcPct val="100000"/>
+              </a:lnSpc>
+            </a:pPr>
             <a:endParaRPr b="0" lang="en-TR" sz="1800" strike="noStrike" u="none">
               <a:solidFill>
                 <a:srgbClr val="ffffff"/>
@@ -14566,7 +14958,7 @@
         <p:spPr>
           <a:xfrm>
             <a:off x="4462200" y="5257800"/>
-            <a:ext cx="3309840" cy="639720"/>
+            <a:ext cx="3309480" cy="639360"/>
           </a:xfrm>
           <a:prstGeom prst="rect">
             <a:avLst/>
@@ -14627,7 +15019,7 @@
         <p:spPr>
           <a:xfrm>
             <a:off x="4462200" y="5806440"/>
-            <a:ext cx="3309840" cy="456840"/>
+            <a:ext cx="3309480" cy="456480"/>
           </a:xfrm>
           <a:prstGeom prst="rect">
             <a:avLst/>
@@ -14688,7 +15080,7 @@
         <p:spPr>
           <a:xfrm>
             <a:off x="8046720" y="5257800"/>
-            <a:ext cx="3565800" cy="1051200"/>
+            <a:ext cx="3565440" cy="1050840"/>
           </a:xfrm>
           <a:prstGeom prst="rect">
             <a:avLst/>
@@ -14714,6 +15106,11 @@
             <a:noAutofit/>
           </a:bodyPr>
           <a:p>
+            <a:pPr>
+              <a:lnSpc>
+                <a:spcPct val="100000"/>
+              </a:lnSpc>
+            </a:pPr>
             <a:endParaRPr b="0" lang="en-TR" sz="1800" strike="noStrike" u="none">
               <a:solidFill>
                 <a:srgbClr val="000000"/>
@@ -14734,7 +15131,7 @@
         <p:spPr>
           <a:xfrm>
             <a:off x="8046720" y="5257800"/>
-            <a:ext cx="63720" cy="1051200"/>
+            <a:ext cx="63360" cy="1050840"/>
           </a:xfrm>
           <a:prstGeom prst="rect">
             <a:avLst/>
@@ -14760,6 +15157,11 @@
             <a:noAutofit/>
           </a:bodyPr>
           <a:p>
+            <a:pPr>
+              <a:lnSpc>
+                <a:spcPct val="100000"/>
+              </a:lnSpc>
+            </a:pPr>
             <a:endParaRPr b="0" lang="en-TR" sz="1800" strike="noStrike" u="none">
               <a:solidFill>
                 <a:srgbClr val="000000"/>
@@ -14780,7 +15182,7 @@
         <p:spPr>
           <a:xfrm>
             <a:off x="8211240" y="5294520"/>
-            <a:ext cx="3309840" cy="255600"/>
+            <a:ext cx="3309480" cy="255240"/>
           </a:xfrm>
           <a:prstGeom prst="rect">
             <a:avLst/>
@@ -14841,7 +15243,7 @@
         <p:spPr>
           <a:xfrm>
             <a:off x="8211240" y="5550480"/>
-            <a:ext cx="3309840" cy="776880"/>
+            <a:ext cx="3309480" cy="776520"/>
           </a:xfrm>
           <a:prstGeom prst="rect">
             <a:avLst/>
@@ -14942,7 +15344,7 @@
         <p:spPr>
           <a:xfrm>
             <a:off x="548640" y="6355080"/>
-            <a:ext cx="11063880" cy="10440"/>
+            <a:ext cx="11063520" cy="10080"/>
           </a:xfrm>
           <a:prstGeom prst="rect">
             <a:avLst/>
@@ -14968,6 +15370,11 @@
             <a:noAutofit/>
           </a:bodyPr>
           <a:p>
+            <a:pPr>
+              <a:lnSpc>
+                <a:spcPct val="100000"/>
+              </a:lnSpc>
+            </a:pPr>
             <a:endParaRPr b="0" lang="en-TR" sz="1800" strike="noStrike" u="none">
               <a:solidFill>
                 <a:srgbClr val="000000"/>
@@ -14988,7 +15395,7 @@
         <p:spPr>
           <a:xfrm>
             <a:off x="548640" y="6446520"/>
-            <a:ext cx="7314840" cy="273960"/>
+            <a:ext cx="7314480" cy="273600"/>
           </a:xfrm>
           <a:prstGeom prst="rect">
             <a:avLst/>
@@ -15049,7 +15456,7 @@
         <p:spPr>
           <a:xfrm>
             <a:off x="10698480" y="6446520"/>
-            <a:ext cx="914040" cy="273960"/>
+            <a:ext cx="913680" cy="273600"/>
           </a:xfrm>
           <a:prstGeom prst="rect">
             <a:avLst/>
@@ -15114,7 +15521,7 @@
         <p:spPr>
           <a:xfrm>
             <a:off x="1149120" y="1363320"/>
-            <a:ext cx="9893520" cy="3804840"/>
+            <a:ext cx="9893160" cy="3804480"/>
           </a:xfrm>
           <a:prstGeom prst="rect">
             <a:avLst/>
@@ -15171,7 +15578,7 @@
         <p:spPr>
           <a:xfrm>
             <a:off x="548640" y="411480"/>
-            <a:ext cx="10972440" cy="273960"/>
+            <a:ext cx="10972080" cy="273600"/>
           </a:xfrm>
           <a:prstGeom prst="rect">
             <a:avLst/>
@@ -15232,7 +15639,7 @@
         <p:spPr>
           <a:xfrm>
             <a:off x="548640" y="713160"/>
-            <a:ext cx="10972440" cy="776880"/>
+            <a:ext cx="10972080" cy="776520"/>
           </a:xfrm>
           <a:prstGeom prst="rect">
             <a:avLst/>
@@ -15293,7 +15700,7 @@
         <p:spPr>
           <a:xfrm>
             <a:off x="548640" y="5257800"/>
-            <a:ext cx="3565800" cy="1051200"/>
+            <a:ext cx="3565440" cy="1050840"/>
           </a:xfrm>
           <a:prstGeom prst="rect">
             <a:avLst/>
@@ -15319,6 +15726,11 @@
             <a:noAutofit/>
           </a:bodyPr>
           <a:p>
+            <a:pPr>
+              <a:lnSpc>
+                <a:spcPct val="100000"/>
+              </a:lnSpc>
+            </a:pPr>
             <a:endParaRPr b="0" lang="en-TR" sz="1800" strike="noStrike" u="none">
               <a:solidFill>
                 <a:srgbClr val="000000"/>
@@ -15339,7 +15751,7 @@
         <p:spPr>
           <a:xfrm>
             <a:off x="548640" y="5257800"/>
-            <a:ext cx="63720" cy="1051200"/>
+            <a:ext cx="63360" cy="1050840"/>
           </a:xfrm>
           <a:prstGeom prst="rect">
             <a:avLst/>
@@ -15365,6 +15777,11 @@
             <a:noAutofit/>
           </a:bodyPr>
           <a:p>
+            <a:pPr>
+              <a:lnSpc>
+                <a:spcPct val="100000"/>
+              </a:lnSpc>
+            </a:pPr>
             <a:endParaRPr b="0" lang="en-TR" sz="1800" strike="noStrike" u="none">
               <a:solidFill>
                 <a:srgbClr val="ffffff"/>
@@ -15385,7 +15802,7 @@
         <p:spPr>
           <a:xfrm>
             <a:off x="713160" y="5294520"/>
-            <a:ext cx="3309840" cy="273960"/>
+            <a:ext cx="3309480" cy="273600"/>
           </a:xfrm>
           <a:prstGeom prst="rect">
             <a:avLst/>
@@ -15446,7 +15863,7 @@
         <p:spPr>
           <a:xfrm>
             <a:off x="713160" y="5568840"/>
-            <a:ext cx="3309840" cy="731160"/>
+            <a:ext cx="3309480" cy="730800"/>
           </a:xfrm>
           <a:prstGeom prst="rect">
             <a:avLst/>
@@ -15507,7 +15924,7 @@
         <p:spPr>
           <a:xfrm>
             <a:off x="4297680" y="5257800"/>
-            <a:ext cx="3565800" cy="1051200"/>
+            <a:ext cx="3565440" cy="1050840"/>
           </a:xfrm>
           <a:prstGeom prst="rect">
             <a:avLst/>
@@ -15533,6 +15950,11 @@
             <a:noAutofit/>
           </a:bodyPr>
           <a:p>
+            <a:pPr>
+              <a:lnSpc>
+                <a:spcPct val="100000"/>
+              </a:lnSpc>
+            </a:pPr>
             <a:endParaRPr b="0" lang="en-TR" sz="1800" strike="noStrike" u="none">
               <a:solidFill>
                 <a:srgbClr val="000000"/>
@@ -15553,7 +15975,7 @@
         <p:spPr>
           <a:xfrm>
             <a:off x="4297680" y="5257800"/>
-            <a:ext cx="63720" cy="1051200"/>
+            <a:ext cx="63360" cy="1050840"/>
           </a:xfrm>
           <a:prstGeom prst="rect">
             <a:avLst/>
@@ -15579,6 +16001,11 @@
             <a:noAutofit/>
           </a:bodyPr>
           <a:p>
+            <a:pPr>
+              <a:lnSpc>
+                <a:spcPct val="100000"/>
+              </a:lnSpc>
+            </a:pPr>
             <a:endParaRPr b="0" lang="en-TR" sz="1800" strike="noStrike" u="none">
               <a:solidFill>
                 <a:srgbClr val="ffffff"/>
@@ -15599,7 +16026,7 @@
         <p:spPr>
           <a:xfrm>
             <a:off x="4462200" y="5294520"/>
-            <a:ext cx="3309840" cy="273960"/>
+            <a:ext cx="3309480" cy="273600"/>
           </a:xfrm>
           <a:prstGeom prst="rect">
             <a:avLst/>
@@ -15660,7 +16087,7 @@
         <p:spPr>
           <a:xfrm>
             <a:off x="4462200" y="5568840"/>
-            <a:ext cx="3309840" cy="731160"/>
+            <a:ext cx="3309480" cy="730800"/>
           </a:xfrm>
           <a:prstGeom prst="rect">
             <a:avLst/>
@@ -15721,7 +16148,7 @@
         <p:spPr>
           <a:xfrm>
             <a:off x="8046720" y="5257800"/>
-            <a:ext cx="3565800" cy="1051200"/>
+            <a:ext cx="3565440" cy="1050840"/>
           </a:xfrm>
           <a:prstGeom prst="rect">
             <a:avLst/>
@@ -15747,6 +16174,11 @@
             <a:noAutofit/>
           </a:bodyPr>
           <a:p>
+            <a:pPr>
+              <a:lnSpc>
+                <a:spcPct val="100000"/>
+              </a:lnSpc>
+            </a:pPr>
             <a:endParaRPr b="0" lang="en-TR" sz="1800" strike="noStrike" u="none">
               <a:solidFill>
                 <a:srgbClr val="000000"/>
@@ -15767,7 +16199,7 @@
         <p:spPr>
           <a:xfrm>
             <a:off x="8046720" y="5257800"/>
-            <a:ext cx="63720" cy="1051200"/>
+            <a:ext cx="63360" cy="1050840"/>
           </a:xfrm>
           <a:prstGeom prst="rect">
             <a:avLst/>
@@ -15793,6 +16225,11 @@
             <a:noAutofit/>
           </a:bodyPr>
           <a:p>
+            <a:pPr>
+              <a:lnSpc>
+                <a:spcPct val="100000"/>
+              </a:lnSpc>
+            </a:pPr>
             <a:endParaRPr b="0" lang="en-TR" sz="1800" strike="noStrike" u="none">
               <a:solidFill>
                 <a:srgbClr val="000000"/>
@@ -15813,7 +16250,7 @@
         <p:spPr>
           <a:xfrm>
             <a:off x="8211240" y="5294520"/>
-            <a:ext cx="3309840" cy="273960"/>
+            <a:ext cx="3309480" cy="273600"/>
           </a:xfrm>
           <a:prstGeom prst="rect">
             <a:avLst/>
@@ -15874,7 +16311,7 @@
         <p:spPr>
           <a:xfrm>
             <a:off x="8211240" y="5550480"/>
-            <a:ext cx="3309840" cy="776880"/>
+            <a:ext cx="3309480" cy="776520"/>
           </a:xfrm>
           <a:prstGeom prst="rect">
             <a:avLst/>
@@ -15975,7 +16412,7 @@
         <p:spPr>
           <a:xfrm>
             <a:off x="548640" y="6355080"/>
-            <a:ext cx="11063880" cy="10440"/>
+            <a:ext cx="11063520" cy="10080"/>
           </a:xfrm>
           <a:prstGeom prst="rect">
             <a:avLst/>
@@ -16001,6 +16438,11 @@
             <a:noAutofit/>
           </a:bodyPr>
           <a:p>
+            <a:pPr>
+              <a:lnSpc>
+                <a:spcPct val="100000"/>
+              </a:lnSpc>
+            </a:pPr>
             <a:endParaRPr b="0" lang="en-TR" sz="1800" strike="noStrike" u="none">
               <a:solidFill>
                 <a:srgbClr val="000000"/>
@@ -16021,7 +16463,7 @@
         <p:spPr>
           <a:xfrm>
             <a:off x="548640" y="6446520"/>
-            <a:ext cx="7314840" cy="273960"/>
+            <a:ext cx="7314480" cy="273600"/>
           </a:xfrm>
           <a:prstGeom prst="rect">
             <a:avLst/>
@@ -16082,7 +16524,7 @@
         <p:spPr>
           <a:xfrm>
             <a:off x="10698480" y="6446520"/>
-            <a:ext cx="914040" cy="273960"/>
+            <a:ext cx="913680" cy="273600"/>
           </a:xfrm>
           <a:prstGeom prst="rect">
             <a:avLst/>
@@ -16147,7 +16589,7 @@
         <p:spPr>
           <a:xfrm>
             <a:off x="1866960" y="1371600"/>
-            <a:ext cx="8458200" cy="3844080"/>
+            <a:ext cx="8457840" cy="3843720"/>
           </a:xfrm>
           <a:prstGeom prst="rect">
             <a:avLst/>
@@ -16204,7 +16646,7 @@
         <p:spPr>
           <a:xfrm>
             <a:off x="548640" y="411480"/>
-            <a:ext cx="10972440" cy="273960"/>
+            <a:ext cx="10972080" cy="273600"/>
           </a:xfrm>
           <a:prstGeom prst="rect">
             <a:avLst/>
@@ -16265,7 +16707,7 @@
         <p:spPr>
           <a:xfrm>
             <a:off x="548640" y="713160"/>
-            <a:ext cx="10972440" cy="776880"/>
+            <a:ext cx="10972080" cy="776520"/>
           </a:xfrm>
           <a:prstGeom prst="rect">
             <a:avLst/>
@@ -16326,7 +16768,7 @@
         <p:spPr>
           <a:xfrm>
             <a:off x="548640" y="5257800"/>
-            <a:ext cx="3565800" cy="1051200"/>
+            <a:ext cx="3565440" cy="1050840"/>
           </a:xfrm>
           <a:prstGeom prst="rect">
             <a:avLst/>
@@ -16352,6 +16794,11 @@
             <a:noAutofit/>
           </a:bodyPr>
           <a:p>
+            <a:pPr>
+              <a:lnSpc>
+                <a:spcPct val="100000"/>
+              </a:lnSpc>
+            </a:pPr>
             <a:endParaRPr b="0" lang="en-TR" sz="1800" strike="noStrike" u="none">
               <a:solidFill>
                 <a:srgbClr val="000000"/>
@@ -16372,7 +16819,7 @@
         <p:spPr>
           <a:xfrm>
             <a:off x="548640" y="5257800"/>
-            <a:ext cx="63720" cy="1051200"/>
+            <a:ext cx="63360" cy="1050840"/>
           </a:xfrm>
           <a:prstGeom prst="rect">
             <a:avLst/>
@@ -16398,6 +16845,11 @@
             <a:noAutofit/>
           </a:bodyPr>
           <a:p>
+            <a:pPr>
+              <a:lnSpc>
+                <a:spcPct val="100000"/>
+              </a:lnSpc>
+            </a:pPr>
             <a:endParaRPr b="0" lang="en-TR" sz="1800" strike="noStrike" u="none">
               <a:solidFill>
                 <a:srgbClr val="000000"/>
@@ -16418,7 +16870,7 @@
         <p:spPr>
           <a:xfrm>
             <a:off x="713160" y="5294520"/>
-            <a:ext cx="3309840" cy="273960"/>
+            <a:ext cx="3309480" cy="273600"/>
           </a:xfrm>
           <a:prstGeom prst="rect">
             <a:avLst/>
@@ -16479,7 +16931,7 @@
         <p:spPr>
           <a:xfrm>
             <a:off x="713160" y="5586840"/>
-            <a:ext cx="3309840" cy="411120"/>
+            <a:ext cx="3309480" cy="410760"/>
           </a:xfrm>
           <a:prstGeom prst="rect">
             <a:avLst/>
@@ -16540,7 +16992,7 @@
         <p:spPr>
           <a:xfrm>
             <a:off x="713160" y="6007680"/>
-            <a:ext cx="3309840" cy="273960"/>
+            <a:ext cx="3309480" cy="273600"/>
           </a:xfrm>
           <a:prstGeom prst="rect">
             <a:avLst/>
@@ -16601,7 +17053,7 @@
         <p:spPr>
           <a:xfrm>
             <a:off x="4297680" y="5257800"/>
-            <a:ext cx="3565800" cy="1051200"/>
+            <a:ext cx="3565440" cy="1050840"/>
           </a:xfrm>
           <a:prstGeom prst="rect">
             <a:avLst/>
@@ -16627,6 +17079,11 @@
             <a:noAutofit/>
           </a:bodyPr>
           <a:p>
+            <a:pPr>
+              <a:lnSpc>
+                <a:spcPct val="100000"/>
+              </a:lnSpc>
+            </a:pPr>
             <a:endParaRPr b="0" lang="en-TR" sz="1800" strike="noStrike" u="none">
               <a:solidFill>
                 <a:srgbClr val="000000"/>
@@ -16647,7 +17104,7 @@
         <p:spPr>
           <a:xfrm>
             <a:off x="4297680" y="5257800"/>
-            <a:ext cx="63720" cy="1051200"/>
+            <a:ext cx="63360" cy="1050840"/>
           </a:xfrm>
           <a:prstGeom prst="rect">
             <a:avLst/>
@@ -16673,6 +17130,11 @@
             <a:noAutofit/>
           </a:bodyPr>
           <a:p>
+            <a:pPr>
+              <a:lnSpc>
+                <a:spcPct val="100000"/>
+              </a:lnSpc>
+            </a:pPr>
             <a:endParaRPr b="0" lang="en-TR" sz="1800" strike="noStrike" u="none">
               <a:solidFill>
                 <a:srgbClr val="ffffff"/>
@@ -16693,7 +17155,7 @@
         <p:spPr>
           <a:xfrm>
             <a:off x="4462200" y="5294520"/>
-            <a:ext cx="3309840" cy="273960"/>
+            <a:ext cx="3309480" cy="273600"/>
           </a:xfrm>
           <a:prstGeom prst="rect">
             <a:avLst/>
@@ -16754,7 +17216,7 @@
         <p:spPr>
           <a:xfrm>
             <a:off x="4462200" y="5550480"/>
-            <a:ext cx="3309840" cy="776880"/>
+            <a:ext cx="3309480" cy="776520"/>
           </a:xfrm>
           <a:prstGeom prst="rect">
             <a:avLst/>
@@ -16890,7 +17352,7 @@
         <p:spPr>
           <a:xfrm>
             <a:off x="8046720" y="5257800"/>
-            <a:ext cx="3565800" cy="1051200"/>
+            <a:ext cx="3565440" cy="1050840"/>
           </a:xfrm>
           <a:prstGeom prst="rect">
             <a:avLst/>
@@ -16916,6 +17378,11 @@
             <a:noAutofit/>
           </a:bodyPr>
           <a:p>
+            <a:pPr>
+              <a:lnSpc>
+                <a:spcPct val="100000"/>
+              </a:lnSpc>
+            </a:pPr>
             <a:endParaRPr b="0" lang="en-TR" sz="1800" strike="noStrike" u="none">
               <a:solidFill>
                 <a:srgbClr val="000000"/>
@@ -16936,7 +17403,7 @@
         <p:spPr>
           <a:xfrm>
             <a:off x="8046720" y="5257800"/>
-            <a:ext cx="63720" cy="1051200"/>
+            <a:ext cx="63360" cy="1050840"/>
           </a:xfrm>
           <a:prstGeom prst="rect">
             <a:avLst/>
@@ -16962,6 +17429,11 @@
             <a:noAutofit/>
           </a:bodyPr>
           <a:p>
+            <a:pPr>
+              <a:lnSpc>
+                <a:spcPct val="100000"/>
+              </a:lnSpc>
+            </a:pPr>
             <a:endParaRPr b="0" lang="en-TR" sz="1800" strike="noStrike" u="none">
               <a:solidFill>
                 <a:srgbClr val="ffffff"/>
@@ -16982,7 +17454,7 @@
         <p:spPr>
           <a:xfrm>
             <a:off x="8211240" y="5294520"/>
-            <a:ext cx="3309840" cy="273960"/>
+            <a:ext cx="3309480" cy="273600"/>
           </a:xfrm>
           <a:prstGeom prst="rect">
             <a:avLst/>
@@ -17043,7 +17515,7 @@
         <p:spPr>
           <a:xfrm>
             <a:off x="8211240" y="5532120"/>
-            <a:ext cx="3309840" cy="411120"/>
+            <a:ext cx="3309480" cy="410760"/>
           </a:xfrm>
           <a:prstGeom prst="rect">
             <a:avLst/>
@@ -17104,7 +17576,7 @@
         <p:spPr>
           <a:xfrm>
             <a:off x="8211240" y="5970960"/>
-            <a:ext cx="3309840" cy="365400"/>
+            <a:ext cx="3309480" cy="365040"/>
           </a:xfrm>
           <a:prstGeom prst="rect">
             <a:avLst/>
@@ -17165,7 +17637,7 @@
         <p:spPr>
           <a:xfrm>
             <a:off x="548640" y="6355080"/>
-            <a:ext cx="11063880" cy="10440"/>
+            <a:ext cx="11063520" cy="10080"/>
           </a:xfrm>
           <a:prstGeom prst="rect">
             <a:avLst/>
@@ -17191,6 +17663,11 @@
             <a:noAutofit/>
           </a:bodyPr>
           <a:p>
+            <a:pPr>
+              <a:lnSpc>
+                <a:spcPct val="100000"/>
+              </a:lnSpc>
+            </a:pPr>
             <a:endParaRPr b="0" lang="en-TR" sz="1800" strike="noStrike" u="none">
               <a:solidFill>
                 <a:srgbClr val="000000"/>
@@ -17211,7 +17688,7 @@
         <p:spPr>
           <a:xfrm>
             <a:off x="548640" y="6446520"/>
-            <a:ext cx="7314840" cy="273960"/>
+            <a:ext cx="7314480" cy="273600"/>
           </a:xfrm>
           <a:prstGeom prst="rect">
             <a:avLst/>
@@ -17272,7 +17749,7 @@
         <p:spPr>
           <a:xfrm>
             <a:off x="10698480" y="6446520"/>
-            <a:ext cx="914040" cy="273960"/>
+            <a:ext cx="913680" cy="273600"/>
           </a:xfrm>
           <a:prstGeom prst="rect">
             <a:avLst/>
@@ -17337,7 +17814,7 @@
         <p:spPr>
           <a:xfrm>
             <a:off x="0" y="1371600"/>
-            <a:ext cx="12191760" cy="3483000"/>
+            <a:ext cx="12191400" cy="3482640"/>
           </a:xfrm>
           <a:prstGeom prst="rect">
             <a:avLst/>
@@ -17394,7 +17871,7 @@
         <p:spPr>
           <a:xfrm>
             <a:off x="548640" y="411480"/>
-            <a:ext cx="10972440" cy="273960"/>
+            <a:ext cx="10972080" cy="273600"/>
           </a:xfrm>
           <a:prstGeom prst="rect">
             <a:avLst/>
@@ -17455,7 +17932,7 @@
         <p:spPr>
           <a:xfrm>
             <a:off x="548640" y="713160"/>
-            <a:ext cx="10972440" cy="776880"/>
+            <a:ext cx="10972080" cy="776520"/>
           </a:xfrm>
           <a:prstGeom prst="rect">
             <a:avLst/>
@@ -17516,7 +17993,7 @@
         <p:spPr>
           <a:xfrm>
             <a:off x="548640" y="1600200"/>
-            <a:ext cx="5943240" cy="4525920"/>
+            <a:ext cx="5942880" cy="4525560"/>
           </a:xfrm>
           <a:prstGeom prst="rect">
             <a:avLst/>
@@ -17542,6 +18019,11 @@
             <a:noAutofit/>
           </a:bodyPr>
           <a:p>
+            <a:pPr>
+              <a:lnSpc>
+                <a:spcPct val="100000"/>
+              </a:lnSpc>
+            </a:pPr>
             <a:endParaRPr b="0" lang="en-TR" sz="1800" strike="noStrike" u="none">
               <a:solidFill>
                 <a:srgbClr val="000000"/>
@@ -17562,7 +18044,7 @@
         <p:spPr>
           <a:xfrm>
             <a:off x="822960" y="1737360"/>
-            <a:ext cx="5486040" cy="365400"/>
+            <a:ext cx="5485680" cy="365040"/>
           </a:xfrm>
           <a:prstGeom prst="rect">
             <a:avLst/>
@@ -17623,7 +18105,7 @@
         <p:spPr>
           <a:xfrm>
             <a:off x="1005840" y="2240280"/>
-            <a:ext cx="5028840" cy="868320"/>
+            <a:ext cx="5028480" cy="867960"/>
           </a:xfrm>
           <a:prstGeom prst="roundRect">
             <a:avLst>
@@ -17651,6 +18133,11 @@
             <a:noAutofit/>
           </a:bodyPr>
           <a:p>
+            <a:pPr>
+              <a:lnSpc>
+                <a:spcPct val="100000"/>
+              </a:lnSpc>
+            </a:pPr>
             <a:endParaRPr b="0" lang="en-TR" sz="1800" strike="noStrike" u="none">
               <a:solidFill>
                 <a:srgbClr val="ffffff"/>
@@ -17671,7 +18158,7 @@
         <p:spPr>
           <a:xfrm>
             <a:off x="1005840" y="2240280"/>
-            <a:ext cx="5028840" cy="868320"/>
+            <a:ext cx="5028480" cy="867960"/>
           </a:xfrm>
           <a:prstGeom prst="rect">
             <a:avLst/>
@@ -17806,7 +18293,7 @@
         <p:spPr>
           <a:xfrm>
             <a:off x="3611880" y="3154680"/>
-            <a:ext cx="914040" cy="273960"/>
+            <a:ext cx="913680" cy="273600"/>
           </a:xfrm>
           <a:prstGeom prst="rect">
             <a:avLst/>
@@ -17867,7 +18354,7 @@
         <p:spPr>
           <a:xfrm>
             <a:off x="1005840" y="3520440"/>
-            <a:ext cx="5028840" cy="868320"/>
+            <a:ext cx="5028480" cy="867960"/>
           </a:xfrm>
           <a:prstGeom prst="roundRect">
             <a:avLst>
@@ -17895,6 +18382,11 @@
             <a:noAutofit/>
           </a:bodyPr>
           <a:p>
+            <a:pPr>
+              <a:lnSpc>
+                <a:spcPct val="100000"/>
+              </a:lnSpc>
+            </a:pPr>
             <a:endParaRPr b="0" lang="en-TR" sz="1800" strike="noStrike" u="none">
               <a:solidFill>
                 <a:srgbClr val="ffffff"/>
@@ -17915,7 +18407,7 @@
         <p:spPr>
           <a:xfrm>
             <a:off x="1005840" y="3520440"/>
-            <a:ext cx="5028840" cy="868320"/>
+            <a:ext cx="5028480" cy="867960"/>
           </a:xfrm>
           <a:prstGeom prst="rect">
             <a:avLst/>
@@ -18050,7 +18542,7 @@
         <p:spPr>
           <a:xfrm>
             <a:off x="1280160" y="4480560"/>
-            <a:ext cx="1554120" cy="273960"/>
+            <a:ext cx="1553760" cy="273600"/>
           </a:xfrm>
           <a:prstGeom prst="rect">
             <a:avLst/>
@@ -18156,7 +18648,7 @@
         <p:spPr>
           <a:xfrm>
             <a:off x="4069080" y="4480560"/>
-            <a:ext cx="1554120" cy="273960"/>
+            <a:ext cx="1553760" cy="273600"/>
           </a:xfrm>
           <a:prstGeom prst="rect">
             <a:avLst/>
@@ -18217,7 +18709,7 @@
         <p:spPr>
           <a:xfrm>
             <a:off x="1005840" y="4983480"/>
-            <a:ext cx="5028840" cy="868320"/>
+            <a:ext cx="5028480" cy="867960"/>
           </a:xfrm>
           <a:prstGeom prst="roundRect">
             <a:avLst>
@@ -18245,6 +18737,11 @@
             <a:noAutofit/>
           </a:bodyPr>
           <a:p>
+            <a:pPr>
+              <a:lnSpc>
+                <a:spcPct val="100000"/>
+              </a:lnSpc>
+            </a:pPr>
             <a:endParaRPr b="0" lang="en-TR" sz="1800" strike="noStrike" u="none">
               <a:solidFill>
                 <a:srgbClr val="ffffff"/>
@@ -18265,7 +18762,7 @@
         <p:spPr>
           <a:xfrm>
             <a:off x="1005840" y="4983480"/>
-            <a:ext cx="5028840" cy="868320"/>
+            <a:ext cx="5028480" cy="867960"/>
           </a:xfrm>
           <a:prstGeom prst="rect">
             <a:avLst/>
@@ -18356,7 +18853,7 @@
         <p:spPr>
           <a:xfrm>
             <a:off x="6720840" y="1600200"/>
-            <a:ext cx="5074560" cy="4525920"/>
+            <a:ext cx="5074200" cy="4525560"/>
           </a:xfrm>
           <a:prstGeom prst="rect">
             <a:avLst/>
@@ -18382,6 +18879,11 @@
             <a:noAutofit/>
           </a:bodyPr>
           <a:p>
+            <a:pPr>
+              <a:lnSpc>
+                <a:spcPct val="100000"/>
+              </a:lnSpc>
+            </a:pPr>
             <a:endParaRPr b="0" lang="en-TR" sz="1800" strike="noStrike" u="none">
               <a:solidFill>
                 <a:srgbClr val="000000"/>
@@ -18402,7 +18904,7 @@
         <p:spPr>
           <a:xfrm>
             <a:off x="6720840" y="1600200"/>
-            <a:ext cx="63720" cy="4525920"/>
+            <a:ext cx="63360" cy="4525560"/>
           </a:xfrm>
           <a:prstGeom prst="rect">
             <a:avLst/>
@@ -18428,6 +18930,11 @@
             <a:noAutofit/>
           </a:bodyPr>
           <a:p>
+            <a:pPr>
+              <a:lnSpc>
+                <a:spcPct val="100000"/>
+              </a:lnSpc>
+            </a:pPr>
             <a:endParaRPr b="0" lang="en-TR" sz="1800" strike="noStrike" u="none">
               <a:solidFill>
                 <a:srgbClr val="000000"/>
@@ -18452,7 +18959,7 @@
         <p:spPr>
           <a:xfrm>
             <a:off x="6995160" y="1783080"/>
-            <a:ext cx="365400" cy="365400"/>
+            <a:ext cx="365040" cy="365040"/>
           </a:xfrm>
           <a:prstGeom prst="rect">
             <a:avLst/>
@@ -18472,7 +18979,7 @@
         <p:spPr>
           <a:xfrm>
             <a:off x="7498080" y="1783080"/>
-            <a:ext cx="4160160" cy="365400"/>
+            <a:ext cx="4159800" cy="365040"/>
           </a:xfrm>
           <a:prstGeom prst="rect">
             <a:avLst/>
@@ -18533,7 +19040,7 @@
         <p:spPr>
           <a:xfrm>
             <a:off x="6995160" y="2377440"/>
-            <a:ext cx="4525920" cy="2742840"/>
+            <a:ext cx="4525560" cy="2742480"/>
           </a:xfrm>
           <a:prstGeom prst="rect">
             <a:avLst/>
@@ -18704,7 +19211,7 @@
         <p:spPr>
           <a:xfrm>
             <a:off x="6995160" y="5303520"/>
-            <a:ext cx="4525920" cy="639720"/>
+            <a:ext cx="4525560" cy="639360"/>
           </a:xfrm>
           <a:prstGeom prst="rect">
             <a:avLst/>
@@ -18730,6 +19237,11 @@
             <a:noAutofit/>
           </a:bodyPr>
           <a:p>
+            <a:pPr>
+              <a:lnSpc>
+                <a:spcPct val="100000"/>
+              </a:lnSpc>
+            </a:pPr>
             <a:endParaRPr b="0" lang="en-TR" sz="1800" strike="noStrike" u="none">
               <a:solidFill>
                 <a:srgbClr val="000000"/>
@@ -18750,7 +19262,7 @@
         <p:spPr>
           <a:xfrm>
             <a:off x="7132320" y="5303520"/>
-            <a:ext cx="4251600" cy="639720"/>
+            <a:ext cx="4251240" cy="639360"/>
           </a:xfrm>
           <a:prstGeom prst="rect">
             <a:avLst/>
@@ -18811,7 +19323,7 @@
         <p:spPr>
           <a:xfrm>
             <a:off x="548640" y="6355080"/>
-            <a:ext cx="11063880" cy="10440"/>
+            <a:ext cx="11063520" cy="10080"/>
           </a:xfrm>
           <a:prstGeom prst="rect">
             <a:avLst/>
@@ -18837,6 +19349,11 @@
             <a:noAutofit/>
           </a:bodyPr>
           <a:p>
+            <a:pPr>
+              <a:lnSpc>
+                <a:spcPct val="100000"/>
+              </a:lnSpc>
+            </a:pPr>
             <a:endParaRPr b="0" lang="en-TR" sz="1800" strike="noStrike" u="none">
               <a:solidFill>
                 <a:srgbClr val="000000"/>
@@ -18857,7 +19374,7 @@
         <p:spPr>
           <a:xfrm>
             <a:off x="548640" y="6446520"/>
-            <a:ext cx="7314840" cy="273960"/>
+            <a:ext cx="7314480" cy="273600"/>
           </a:xfrm>
           <a:prstGeom prst="rect">
             <a:avLst/>
@@ -18918,7 +19435,7 @@
         <p:spPr>
           <a:xfrm>
             <a:off x="10698480" y="6446520"/>
-            <a:ext cx="914040" cy="273960"/>
+            <a:ext cx="913680" cy="273600"/>
           </a:xfrm>
           <a:prstGeom prst="rect">
             <a:avLst/>
@@ -19016,7 +19533,7 @@
         <p:spPr>
           <a:xfrm>
             <a:off x="548640" y="411480"/>
-            <a:ext cx="10972440" cy="273960"/>
+            <a:ext cx="10972080" cy="273600"/>
           </a:xfrm>
           <a:prstGeom prst="rect">
             <a:avLst/>
@@ -19077,7 +19594,7 @@
         <p:spPr>
           <a:xfrm>
             <a:off x="548640" y="713160"/>
-            <a:ext cx="10972440" cy="776880"/>
+            <a:ext cx="10972080" cy="776520"/>
           </a:xfrm>
           <a:prstGeom prst="rect">
             <a:avLst/>
@@ -19138,7 +19655,7 @@
         <p:spPr>
           <a:xfrm>
             <a:off x="548640" y="1600200"/>
-            <a:ext cx="3611520" cy="1416960"/>
+            <a:ext cx="3611160" cy="1416600"/>
           </a:xfrm>
           <a:prstGeom prst="rect">
             <a:avLst/>
@@ -19164,6 +19681,11 @@
             <a:noAutofit/>
           </a:bodyPr>
           <a:p>
+            <a:pPr>
+              <a:lnSpc>
+                <a:spcPct val="100000"/>
+              </a:lnSpc>
+            </a:pPr>
             <a:endParaRPr b="0" lang="en-TR" sz="1800" strike="noStrike" u="none">
               <a:solidFill>
                 <a:srgbClr val="000000"/>
@@ -19184,7 +19706,7 @@
         <p:spPr>
           <a:xfrm>
             <a:off x="548640" y="1600200"/>
-            <a:ext cx="63720" cy="1416960"/>
+            <a:ext cx="63360" cy="1416600"/>
           </a:xfrm>
           <a:prstGeom prst="rect">
             <a:avLst/>
@@ -19210,6 +19732,11 @@
             <a:noAutofit/>
           </a:bodyPr>
           <a:p>
+            <a:pPr>
+              <a:lnSpc>
+                <a:spcPct val="100000"/>
+              </a:lnSpc>
+            </a:pPr>
             <a:endParaRPr b="0" lang="en-TR" sz="1800" strike="noStrike" u="none">
               <a:solidFill>
                 <a:srgbClr val="ffffff"/>
@@ -19230,7 +19757,7 @@
         <p:spPr>
           <a:xfrm>
             <a:off x="777240" y="1691640"/>
-            <a:ext cx="3245760" cy="639720"/>
+            <a:ext cx="3245400" cy="639360"/>
           </a:xfrm>
           <a:prstGeom prst="rect">
             <a:avLst/>
@@ -19291,7 +19818,7 @@
         <p:spPr>
           <a:xfrm>
             <a:off x="777240" y="2377440"/>
-            <a:ext cx="3245760" cy="594000"/>
+            <a:ext cx="3245400" cy="593640"/>
           </a:xfrm>
           <a:prstGeom prst="rect">
             <a:avLst/>
@@ -19352,7 +19879,7 @@
         <p:spPr>
           <a:xfrm>
             <a:off x="4434840" y="1600200"/>
-            <a:ext cx="3611520" cy="1416960"/>
+            <a:ext cx="3611160" cy="1416600"/>
           </a:xfrm>
           <a:prstGeom prst="rect">
             <a:avLst/>
@@ -19378,6 +19905,11 @@
             <a:noAutofit/>
           </a:bodyPr>
           <a:p>
+            <a:pPr>
+              <a:lnSpc>
+                <a:spcPct val="100000"/>
+              </a:lnSpc>
+            </a:pPr>
             <a:endParaRPr b="0" lang="en-TR" sz="1800" strike="noStrike" u="none">
               <a:solidFill>
                 <a:srgbClr val="000000"/>
@@ -19398,7 +19930,7 @@
         <p:spPr>
           <a:xfrm>
             <a:off x="4434840" y="1600200"/>
-            <a:ext cx="63720" cy="1416960"/>
+            <a:ext cx="63360" cy="1416600"/>
           </a:xfrm>
           <a:prstGeom prst="rect">
             <a:avLst/>
@@ -19424,6 +19956,11 @@
             <a:noAutofit/>
           </a:bodyPr>
           <a:p>
+            <a:pPr>
+              <a:lnSpc>
+                <a:spcPct val="100000"/>
+              </a:lnSpc>
+            </a:pPr>
             <a:endParaRPr b="0" lang="en-TR" sz="1800" strike="noStrike" u="none">
               <a:solidFill>
                 <a:srgbClr val="ffffff"/>
@@ -19444,7 +19981,7 @@
         <p:spPr>
           <a:xfrm>
             <a:off x="4663440" y="1691640"/>
-            <a:ext cx="3245760" cy="639720"/>
+            <a:ext cx="3245400" cy="639360"/>
           </a:xfrm>
           <a:prstGeom prst="rect">
             <a:avLst/>
@@ -19505,7 +20042,7 @@
         <p:spPr>
           <a:xfrm>
             <a:off x="4663440" y="2377440"/>
-            <a:ext cx="3245760" cy="594000"/>
+            <a:ext cx="3245400" cy="593640"/>
           </a:xfrm>
           <a:prstGeom prst="rect">
             <a:avLst/>
@@ -19566,7 +20103,7 @@
         <p:spPr>
           <a:xfrm>
             <a:off x="8321040" y="1600200"/>
-            <a:ext cx="3611520" cy="1416960"/>
+            <a:ext cx="3611160" cy="1416600"/>
           </a:xfrm>
           <a:prstGeom prst="rect">
             <a:avLst/>
@@ -19592,6 +20129,11 @@
             <a:noAutofit/>
           </a:bodyPr>
           <a:p>
+            <a:pPr>
+              <a:lnSpc>
+                <a:spcPct val="100000"/>
+              </a:lnSpc>
+            </a:pPr>
             <a:endParaRPr b="0" lang="en-TR" sz="1800" strike="noStrike" u="none">
               <a:solidFill>
                 <a:srgbClr val="000000"/>
@@ -19612,7 +20154,7 @@
         <p:spPr>
           <a:xfrm>
             <a:off x="8321040" y="1600200"/>
-            <a:ext cx="63720" cy="1416960"/>
+            <a:ext cx="63360" cy="1416600"/>
           </a:xfrm>
           <a:prstGeom prst="rect">
             <a:avLst/>
@@ -19638,6 +20180,11 @@
             <a:noAutofit/>
           </a:bodyPr>
           <a:p>
+            <a:pPr>
+              <a:lnSpc>
+                <a:spcPct val="100000"/>
+              </a:lnSpc>
+            </a:pPr>
             <a:endParaRPr b="0" lang="en-TR" sz="1800" strike="noStrike" u="none">
               <a:solidFill>
                 <a:srgbClr val="000000"/>
@@ -19658,7 +20205,7 @@
         <p:spPr>
           <a:xfrm>
             <a:off x="8549640" y="1691640"/>
-            <a:ext cx="3245760" cy="639720"/>
+            <a:ext cx="3245400" cy="639360"/>
           </a:xfrm>
           <a:prstGeom prst="rect">
             <a:avLst/>
@@ -19719,7 +20266,7 @@
         <p:spPr>
           <a:xfrm>
             <a:off x="8549640" y="2377440"/>
-            <a:ext cx="3245760" cy="594000"/>
+            <a:ext cx="3245400" cy="593640"/>
           </a:xfrm>
           <a:prstGeom prst="rect">
             <a:avLst/>
@@ -19780,7 +20327,7 @@
         <p:spPr>
           <a:xfrm>
             <a:off x="548640" y="3200400"/>
-            <a:ext cx="11063880" cy="731160"/>
+            <a:ext cx="11063520" cy="730800"/>
           </a:xfrm>
           <a:prstGeom prst="rect">
             <a:avLst/>
@@ -19806,6 +20353,11 @@
             <a:noAutofit/>
           </a:bodyPr>
           <a:p>
+            <a:pPr>
+              <a:lnSpc>
+                <a:spcPct val="100000"/>
+              </a:lnSpc>
+            </a:pPr>
             <a:endParaRPr b="0" lang="en-TR" sz="1800" strike="noStrike" u="none">
               <a:solidFill>
                 <a:srgbClr val="ffffff"/>
@@ -19830,7 +20382,7 @@
         <p:spPr>
           <a:xfrm>
             <a:off x="713160" y="3337560"/>
-            <a:ext cx="456840" cy="456840"/>
+            <a:ext cx="456480" cy="456480"/>
           </a:xfrm>
           <a:prstGeom prst="rect">
             <a:avLst/>
@@ -19850,7 +20402,7 @@
         <p:spPr>
           <a:xfrm>
             <a:off x="1280160" y="3200400"/>
-            <a:ext cx="10240920" cy="731160"/>
+            <a:ext cx="10240560" cy="730800"/>
           </a:xfrm>
           <a:prstGeom prst="rect">
             <a:avLst/>
@@ -19911,7 +20463,7 @@
         <p:spPr>
           <a:xfrm>
             <a:off x="548640" y="4160520"/>
-            <a:ext cx="5486040" cy="1965600"/>
+            <a:ext cx="5485680" cy="1965240"/>
           </a:xfrm>
           <a:prstGeom prst="rect">
             <a:avLst/>
@@ -19937,6 +20489,11 @@
             <a:noAutofit/>
           </a:bodyPr>
           <a:p>
+            <a:pPr>
+              <a:lnSpc>
+                <a:spcPct val="100000"/>
+              </a:lnSpc>
+            </a:pPr>
             <a:endParaRPr b="0" lang="en-TR" sz="1800" strike="noStrike" u="none">
               <a:solidFill>
                 <a:srgbClr val="000000"/>
@@ -19957,7 +20514,7 @@
         <p:spPr>
           <a:xfrm>
             <a:off x="548640" y="4160520"/>
-            <a:ext cx="63720" cy="1965600"/>
+            <a:ext cx="63360" cy="1965240"/>
           </a:xfrm>
           <a:prstGeom prst="rect">
             <a:avLst/>
@@ -19983,6 +20540,11 @@
             <a:noAutofit/>
           </a:bodyPr>
           <a:p>
+            <a:pPr>
+              <a:lnSpc>
+                <a:spcPct val="100000"/>
+              </a:lnSpc>
+            </a:pPr>
             <a:endParaRPr b="0" lang="en-TR" sz="1800" strike="noStrike" u="none">
               <a:solidFill>
                 <a:srgbClr val="ffffff"/>
@@ -20003,7 +20565,7 @@
         <p:spPr>
           <a:xfrm>
             <a:off x="777240" y="4297680"/>
-            <a:ext cx="5120280" cy="365400"/>
+            <a:ext cx="5119920" cy="365040"/>
           </a:xfrm>
           <a:prstGeom prst="rect">
             <a:avLst/>
@@ -20064,7 +20626,7 @@
         <p:spPr>
           <a:xfrm>
             <a:off x="777240" y="4709160"/>
-            <a:ext cx="5120280" cy="1371240"/>
+            <a:ext cx="5119920" cy="1370880"/>
           </a:xfrm>
           <a:prstGeom prst="rect">
             <a:avLst/>
@@ -20125,7 +20687,7 @@
         <p:spPr>
           <a:xfrm>
             <a:off x="6263640" y="4160520"/>
-            <a:ext cx="5486040" cy="1965600"/>
+            <a:ext cx="5485680" cy="1965240"/>
           </a:xfrm>
           <a:prstGeom prst="rect">
             <a:avLst/>
@@ -20151,6 +20713,11 @@
             <a:noAutofit/>
           </a:bodyPr>
           <a:p>
+            <a:pPr>
+              <a:lnSpc>
+                <a:spcPct val="100000"/>
+              </a:lnSpc>
+            </a:pPr>
             <a:endParaRPr b="0" lang="en-TR" sz="1800" strike="noStrike" u="none">
               <a:solidFill>
                 <a:srgbClr val="000000"/>
@@ -20171,7 +20738,7 @@
         <p:spPr>
           <a:xfrm>
             <a:off x="6263640" y="4160520"/>
-            <a:ext cx="63720" cy="1965600"/>
+            <a:ext cx="63360" cy="1965240"/>
           </a:xfrm>
           <a:prstGeom prst="rect">
             <a:avLst/>
@@ -20197,6 +20764,11 @@
             <a:noAutofit/>
           </a:bodyPr>
           <a:p>
+            <a:pPr>
+              <a:lnSpc>
+                <a:spcPct val="100000"/>
+              </a:lnSpc>
+            </a:pPr>
             <a:endParaRPr b="0" lang="en-TR" sz="1800" strike="noStrike" u="none">
               <a:solidFill>
                 <a:srgbClr val="000000"/>
@@ -20217,7 +20789,7 @@
         <p:spPr>
           <a:xfrm>
             <a:off x="6492240" y="4297680"/>
-            <a:ext cx="5120280" cy="365400"/>
+            <a:ext cx="5119920" cy="365040"/>
           </a:xfrm>
           <a:prstGeom prst="rect">
             <a:avLst/>
@@ -20278,7 +20850,7 @@
         <p:spPr>
           <a:xfrm>
             <a:off x="6492240" y="4709160"/>
-            <a:ext cx="5120280" cy="1371240"/>
+            <a:ext cx="5119920" cy="1370880"/>
           </a:xfrm>
           <a:prstGeom prst="rect">
             <a:avLst/>
@@ -20339,7 +20911,7 @@
         <p:spPr>
           <a:xfrm>
             <a:off x="548640" y="6355080"/>
-            <a:ext cx="11063880" cy="10440"/>
+            <a:ext cx="11063520" cy="10080"/>
           </a:xfrm>
           <a:prstGeom prst="rect">
             <a:avLst/>
@@ -20365,6 +20937,11 @@
             <a:noAutofit/>
           </a:bodyPr>
           <a:p>
+            <a:pPr>
+              <a:lnSpc>
+                <a:spcPct val="100000"/>
+              </a:lnSpc>
+            </a:pPr>
             <a:endParaRPr b="0" lang="en-TR" sz="1800" strike="noStrike" u="none">
               <a:solidFill>
                 <a:srgbClr val="000000"/>
@@ -20385,7 +20962,7 @@
         <p:spPr>
           <a:xfrm>
             <a:off x="548640" y="6446520"/>
-            <a:ext cx="7314840" cy="273960"/>
+            <a:ext cx="7314480" cy="273600"/>
           </a:xfrm>
           <a:prstGeom prst="rect">
             <a:avLst/>
@@ -20446,7 +21023,7 @@
         <p:spPr>
           <a:xfrm>
             <a:off x="10698480" y="6446520"/>
-            <a:ext cx="914040" cy="273960"/>
+            <a:ext cx="913680" cy="273600"/>
           </a:xfrm>
           <a:prstGeom prst="rect">
             <a:avLst/>
@@ -20544,7 +21121,7 @@
         <p:spPr>
           <a:xfrm>
             <a:off x="548640" y="411480"/>
-            <a:ext cx="10972440" cy="273960"/>
+            <a:ext cx="10972080" cy="273600"/>
           </a:xfrm>
           <a:prstGeom prst="rect">
             <a:avLst/>
@@ -20605,7 +21182,7 @@
         <p:spPr>
           <a:xfrm>
             <a:off x="548640" y="713160"/>
-            <a:ext cx="10972440" cy="776880"/>
+            <a:ext cx="10972080" cy="776520"/>
           </a:xfrm>
           <a:prstGeom prst="rect">
             <a:avLst/>
@@ -20666,7 +21243,7 @@
         <p:spPr>
           <a:xfrm>
             <a:off x="731520" y="1874520"/>
-            <a:ext cx="548280" cy="548280"/>
+            <a:ext cx="547920" cy="547920"/>
           </a:xfrm>
           <a:prstGeom prst="ellipse">
             <a:avLst/>
@@ -20692,6 +21269,11 @@
             <a:noAutofit/>
           </a:bodyPr>
           <a:p>
+            <a:pPr>
+              <a:lnSpc>
+                <a:spcPct val="100000"/>
+              </a:lnSpc>
+            </a:pPr>
             <a:endParaRPr b="0" lang="en-TR" sz="1800" strike="noStrike" u="none">
               <a:solidFill>
                 <a:srgbClr val="ffffff"/>
@@ -20712,7 +21294,7 @@
         <p:spPr>
           <a:xfrm>
             <a:off x="731520" y="1874520"/>
-            <a:ext cx="548280" cy="548280"/>
+            <a:ext cx="547920" cy="547920"/>
           </a:xfrm>
           <a:prstGeom prst="rect">
             <a:avLst/>
@@ -20773,7 +21355,7 @@
         <p:spPr>
           <a:xfrm>
             <a:off x="1508760" y="1828800"/>
-            <a:ext cx="9600840" cy="365400"/>
+            <a:ext cx="9600480" cy="365040"/>
           </a:xfrm>
           <a:prstGeom prst="rect">
             <a:avLst/>
@@ -20834,7 +21416,7 @@
         <p:spPr>
           <a:xfrm>
             <a:off x="1508760" y="2167200"/>
-            <a:ext cx="9600840" cy="319680"/>
+            <a:ext cx="9600480" cy="319320"/>
           </a:xfrm>
           <a:prstGeom prst="rect">
             <a:avLst/>
@@ -20895,7 +21477,7 @@
         <p:spPr>
           <a:xfrm>
             <a:off x="1508760" y="2541960"/>
-            <a:ext cx="9600840" cy="4320"/>
+            <a:ext cx="9600480" cy="3960"/>
           </a:xfrm>
           <a:prstGeom prst="rect">
             <a:avLst/>
@@ -20921,6 +21503,11 @@
             <a:noAutofit/>
           </a:bodyPr>
           <a:p>
+            <a:pPr>
+              <a:lnSpc>
+                <a:spcPct val="100000"/>
+              </a:lnSpc>
+            </a:pPr>
             <a:endParaRPr b="0" lang="en-TR" sz="1800" strike="noStrike" u="none">
               <a:solidFill>
                 <a:srgbClr val="000000"/>
@@ -20941,7 +21528,7 @@
         <p:spPr>
           <a:xfrm>
             <a:off x="731520" y="2651760"/>
-            <a:ext cx="548280" cy="548280"/>
+            <a:ext cx="547920" cy="547920"/>
           </a:xfrm>
           <a:prstGeom prst="ellipse">
             <a:avLst/>
@@ -20967,6 +21554,11 @@
             <a:noAutofit/>
           </a:bodyPr>
           <a:p>
+            <a:pPr>
+              <a:lnSpc>
+                <a:spcPct val="100000"/>
+              </a:lnSpc>
+            </a:pPr>
             <a:endParaRPr b="0" lang="en-TR" sz="1800" strike="noStrike" u="none">
               <a:solidFill>
                 <a:srgbClr val="ffffff"/>
@@ -20987,7 +21579,7 @@
         <p:spPr>
           <a:xfrm>
             <a:off x="731520" y="2651760"/>
-            <a:ext cx="548280" cy="548280"/>
+            <a:ext cx="547920" cy="547920"/>
           </a:xfrm>
           <a:prstGeom prst="rect">
             <a:avLst/>
@@ -21048,7 +21640,7 @@
         <p:spPr>
           <a:xfrm>
             <a:off x="1508760" y="2606040"/>
-            <a:ext cx="9600840" cy="365400"/>
+            <a:ext cx="9600480" cy="365040"/>
           </a:xfrm>
           <a:prstGeom prst="rect">
             <a:avLst/>
@@ -21109,7 +21701,7 @@
         <p:spPr>
           <a:xfrm>
             <a:off x="1508760" y="2944440"/>
-            <a:ext cx="9600840" cy="319680"/>
+            <a:ext cx="9600480" cy="319320"/>
           </a:xfrm>
           <a:prstGeom prst="rect">
             <a:avLst/>
@@ -21170,7 +21762,7 @@
         <p:spPr>
           <a:xfrm>
             <a:off x="1508760" y="3319200"/>
-            <a:ext cx="9600840" cy="4320"/>
+            <a:ext cx="9600480" cy="3960"/>
           </a:xfrm>
           <a:prstGeom prst="rect">
             <a:avLst/>
@@ -21196,6 +21788,11 @@
             <a:noAutofit/>
           </a:bodyPr>
           <a:p>
+            <a:pPr>
+              <a:lnSpc>
+                <a:spcPct val="100000"/>
+              </a:lnSpc>
+            </a:pPr>
             <a:endParaRPr b="0" lang="en-TR" sz="1800" strike="noStrike" u="none">
               <a:solidFill>
                 <a:srgbClr val="000000"/>
@@ -21216,7 +21813,7 @@
         <p:spPr>
           <a:xfrm>
             <a:off x="731520" y="3429000"/>
-            <a:ext cx="548280" cy="548280"/>
+            <a:ext cx="547920" cy="547920"/>
           </a:xfrm>
           <a:prstGeom prst="ellipse">
             <a:avLst/>
@@ -21242,6 +21839,11 @@
             <a:noAutofit/>
           </a:bodyPr>
           <a:p>
+            <a:pPr>
+              <a:lnSpc>
+                <a:spcPct val="100000"/>
+              </a:lnSpc>
+            </a:pPr>
             <a:endParaRPr b="0" lang="en-TR" sz="1800" strike="noStrike" u="none">
               <a:solidFill>
                 <a:srgbClr val="ffffff"/>
@@ -21262,7 +21864,7 @@
         <p:spPr>
           <a:xfrm>
             <a:off x="731520" y="3429000"/>
-            <a:ext cx="548280" cy="548280"/>
+            <a:ext cx="547920" cy="547920"/>
           </a:xfrm>
           <a:prstGeom prst="rect">
             <a:avLst/>
@@ -21323,7 +21925,7 @@
         <p:spPr>
           <a:xfrm>
             <a:off x="1508760" y="3383280"/>
-            <a:ext cx="9600840" cy="365400"/>
+            <a:ext cx="9600480" cy="365040"/>
           </a:xfrm>
           <a:prstGeom prst="rect">
             <a:avLst/>
@@ -21384,7 +21986,7 @@
         <p:spPr>
           <a:xfrm>
             <a:off x="1508760" y="3721680"/>
-            <a:ext cx="9600840" cy="319680"/>
+            <a:ext cx="9600480" cy="319320"/>
           </a:xfrm>
           <a:prstGeom prst="rect">
             <a:avLst/>
@@ -21445,7 +22047,7 @@
         <p:spPr>
           <a:xfrm>
             <a:off x="1508760" y="4096440"/>
-            <a:ext cx="9600840" cy="4320"/>
+            <a:ext cx="9600480" cy="3960"/>
           </a:xfrm>
           <a:prstGeom prst="rect">
             <a:avLst/>
@@ -21471,6 +22073,11 @@
             <a:noAutofit/>
           </a:bodyPr>
           <a:p>
+            <a:pPr>
+              <a:lnSpc>
+                <a:spcPct val="100000"/>
+              </a:lnSpc>
+            </a:pPr>
             <a:endParaRPr b="0" lang="en-TR" sz="1800" strike="noStrike" u="none">
               <a:solidFill>
                 <a:srgbClr val="000000"/>
@@ -21491,7 +22098,7 @@
         <p:spPr>
           <a:xfrm>
             <a:off x="731520" y="4206240"/>
-            <a:ext cx="548280" cy="548280"/>
+            <a:ext cx="547920" cy="547920"/>
           </a:xfrm>
           <a:prstGeom prst="ellipse">
             <a:avLst/>
@@ -21517,6 +22124,11 @@
             <a:noAutofit/>
           </a:bodyPr>
           <a:p>
+            <a:pPr>
+              <a:lnSpc>
+                <a:spcPct val="100000"/>
+              </a:lnSpc>
+            </a:pPr>
             <a:endParaRPr b="0" lang="en-TR" sz="1800" strike="noStrike" u="none">
               <a:solidFill>
                 <a:srgbClr val="ffffff"/>
@@ -21537,7 +22149,7 @@
         <p:spPr>
           <a:xfrm>
             <a:off x="731520" y="4206240"/>
-            <a:ext cx="548280" cy="548280"/>
+            <a:ext cx="547920" cy="547920"/>
           </a:xfrm>
           <a:prstGeom prst="rect">
             <a:avLst/>
@@ -21598,7 +22210,7 @@
         <p:spPr>
           <a:xfrm>
             <a:off x="1508760" y="4160520"/>
-            <a:ext cx="9600840" cy="365400"/>
+            <a:ext cx="9600480" cy="365040"/>
           </a:xfrm>
           <a:prstGeom prst="rect">
             <a:avLst/>
@@ -21659,7 +22271,7 @@
         <p:spPr>
           <a:xfrm>
             <a:off x="1508760" y="4498920"/>
-            <a:ext cx="9600840" cy="319680"/>
+            <a:ext cx="9600480" cy="319320"/>
           </a:xfrm>
           <a:prstGeom prst="rect">
             <a:avLst/>
@@ -21720,7 +22332,7 @@
         <p:spPr>
           <a:xfrm>
             <a:off x="1508760" y="4873680"/>
-            <a:ext cx="9600840" cy="4320"/>
+            <a:ext cx="9600480" cy="3960"/>
           </a:xfrm>
           <a:prstGeom prst="rect">
             <a:avLst/>
@@ -21746,6 +22358,11 @@
             <a:noAutofit/>
           </a:bodyPr>
           <a:p>
+            <a:pPr>
+              <a:lnSpc>
+                <a:spcPct val="100000"/>
+              </a:lnSpc>
+            </a:pPr>
             <a:endParaRPr b="0" lang="en-TR" sz="1800" strike="noStrike" u="none">
               <a:solidFill>
                 <a:srgbClr val="000000"/>
@@ -21766,7 +22383,7 @@
         <p:spPr>
           <a:xfrm>
             <a:off x="731520" y="4983480"/>
-            <a:ext cx="548280" cy="548280"/>
+            <a:ext cx="547920" cy="547920"/>
           </a:xfrm>
           <a:prstGeom prst="ellipse">
             <a:avLst/>
@@ -21792,6 +22409,11 @@
             <a:noAutofit/>
           </a:bodyPr>
           <a:p>
+            <a:pPr>
+              <a:lnSpc>
+                <a:spcPct val="100000"/>
+              </a:lnSpc>
+            </a:pPr>
             <a:endParaRPr b="0" lang="en-TR" sz="1800" strike="noStrike" u="none">
               <a:solidFill>
                 <a:srgbClr val="ffffff"/>
@@ -21812,7 +22434,7 @@
         <p:spPr>
           <a:xfrm>
             <a:off x="731520" y="4983480"/>
-            <a:ext cx="548280" cy="548280"/>
+            <a:ext cx="547920" cy="547920"/>
           </a:xfrm>
           <a:prstGeom prst="rect">
             <a:avLst/>
@@ -21873,7 +22495,7 @@
         <p:spPr>
           <a:xfrm>
             <a:off x="1508760" y="4937760"/>
-            <a:ext cx="9600840" cy="365400"/>
+            <a:ext cx="9600480" cy="365040"/>
           </a:xfrm>
           <a:prstGeom prst="rect">
             <a:avLst/>
@@ -21934,7 +22556,7 @@
         <p:spPr>
           <a:xfrm>
             <a:off x="1508760" y="5276160"/>
-            <a:ext cx="9600840" cy="319680"/>
+            <a:ext cx="9600480" cy="319320"/>
           </a:xfrm>
           <a:prstGeom prst="rect">
             <a:avLst/>
@@ -21995,7 +22617,7 @@
         <p:spPr>
           <a:xfrm>
             <a:off x="548640" y="6355080"/>
-            <a:ext cx="11063880" cy="10440"/>
+            <a:ext cx="11063520" cy="10080"/>
           </a:xfrm>
           <a:prstGeom prst="rect">
             <a:avLst/>
@@ -22021,6 +22643,11 @@
             <a:noAutofit/>
           </a:bodyPr>
           <a:p>
+            <a:pPr>
+              <a:lnSpc>
+                <a:spcPct val="100000"/>
+              </a:lnSpc>
+            </a:pPr>
             <a:endParaRPr b="0" lang="en-TR" sz="1800" strike="noStrike" u="none">
               <a:solidFill>
                 <a:srgbClr val="000000"/>
@@ -22041,7 +22668,7 @@
         <p:spPr>
           <a:xfrm>
             <a:off x="548640" y="6446520"/>
-            <a:ext cx="7314840" cy="273960"/>
+            <a:ext cx="7314480" cy="273600"/>
           </a:xfrm>
           <a:prstGeom prst="rect">
             <a:avLst/>
@@ -22102,7 +22729,7 @@
         <p:spPr>
           <a:xfrm>
             <a:off x="10698480" y="6446520"/>
-            <a:ext cx="914040" cy="273960"/>
+            <a:ext cx="913680" cy="273600"/>
           </a:xfrm>
           <a:prstGeom prst="rect">
             <a:avLst/>
@@ -22200,7 +22827,7 @@
         <p:spPr>
           <a:xfrm>
             <a:off x="914400" y="2194560"/>
-            <a:ext cx="2377080" cy="2377080"/>
+            <a:ext cx="2376720" cy="2376720"/>
           </a:xfrm>
           <a:prstGeom prst="ellipse">
             <a:avLst/>
@@ -22226,6 +22853,11 @@
             <a:noAutofit/>
           </a:bodyPr>
           <a:p>
+            <a:pPr>
+              <a:lnSpc>
+                <a:spcPct val="100000"/>
+              </a:lnSpc>
+            </a:pPr>
             <a:endParaRPr b="0" lang="en-TR" sz="1800" strike="noStrike" u="none">
               <a:solidFill>
                 <a:srgbClr val="000000"/>
@@ -22246,7 +22878,7 @@
         <p:spPr>
           <a:xfrm>
             <a:off x="914400" y="2148840"/>
-            <a:ext cx="2377080" cy="2468520"/>
+            <a:ext cx="2376720" cy="2468160"/>
           </a:xfrm>
           <a:prstGeom prst="rect">
             <a:avLst/>
@@ -22307,7 +22939,7 @@
         <p:spPr>
           <a:xfrm>
             <a:off x="4023360" y="2194560"/>
-            <a:ext cx="63720" cy="2742840"/>
+            <a:ext cx="63360" cy="2742480"/>
           </a:xfrm>
           <a:prstGeom prst="rect">
             <a:avLst/>
@@ -22333,6 +22965,11 @@
             <a:noAutofit/>
           </a:bodyPr>
           <a:p>
+            <a:pPr>
+              <a:lnSpc>
+                <a:spcPct val="100000"/>
+              </a:lnSpc>
+            </a:pPr>
             <a:endParaRPr b="0" lang="en-TR" sz="1800" strike="noStrike" u="none">
               <a:solidFill>
                 <a:srgbClr val="000000"/>
@@ -22353,7 +22990,7 @@
         <p:spPr>
           <a:xfrm>
             <a:off x="4297680" y="2194560"/>
-            <a:ext cx="7497720" cy="914040"/>
+            <a:ext cx="7497360" cy="913680"/>
           </a:xfrm>
           <a:prstGeom prst="rect">
             <a:avLst/>
@@ -22414,7 +23051,7 @@
         <p:spPr>
           <a:xfrm>
             <a:off x="4297680" y="3154680"/>
-            <a:ext cx="7497720" cy="1096920"/>
+            <a:ext cx="7497360" cy="1096560"/>
           </a:xfrm>
           <a:prstGeom prst="rect">
             <a:avLst/>
@@ -22475,7 +23112,7 @@
         <p:spPr>
           <a:xfrm>
             <a:off x="4297680" y="4572000"/>
-            <a:ext cx="7497720" cy="1279800"/>
+            <a:ext cx="7497360" cy="1279440"/>
           </a:xfrm>
           <a:prstGeom prst="rect">
             <a:avLst/>
@@ -22514,7 +23151,7 @@
                 <a:latin typeface="Calibri"/>
                 <a:ea typeface="Calibri"/>
               </a:rPr>
-              <a:t>Omer Dikyol</a:t>
+              <a:t>Ömer Dikyol</a:t>
             </a:r>
             <a:endParaRPr b="0" lang="en-TR" sz="1600" strike="noStrike" u="none">
               <a:solidFill>
@@ -22633,7 +23270,7 @@
         <p:spPr>
           <a:xfrm>
             <a:off x="548640" y="411480"/>
-            <a:ext cx="10972440" cy="273960"/>
+            <a:ext cx="10972080" cy="273600"/>
           </a:xfrm>
           <a:prstGeom prst="rect">
             <a:avLst/>
@@ -22694,7 +23331,7 @@
         <p:spPr>
           <a:xfrm>
             <a:off x="548640" y="713160"/>
-            <a:ext cx="10972440" cy="776880"/>
+            <a:ext cx="10972080" cy="776520"/>
           </a:xfrm>
           <a:prstGeom prst="rect">
             <a:avLst/>
@@ -22755,7 +23392,7 @@
         <p:spPr>
           <a:xfrm>
             <a:off x="548640" y="1691640"/>
-            <a:ext cx="594000" cy="383760"/>
+            <a:ext cx="593640" cy="383400"/>
           </a:xfrm>
           <a:prstGeom prst="rect">
             <a:avLst/>
@@ -22816,7 +23453,7 @@
         <p:spPr>
           <a:xfrm>
             <a:off x="1143000" y="1691640"/>
-            <a:ext cx="4845960" cy="475200"/>
+            <a:ext cx="4845600" cy="474840"/>
           </a:xfrm>
           <a:prstGeom prst="rect">
             <a:avLst/>
@@ -22877,7 +23514,7 @@
         <p:spPr>
           <a:xfrm>
             <a:off x="548640" y="2167200"/>
-            <a:ext cx="594000" cy="383760"/>
+            <a:ext cx="593640" cy="383400"/>
           </a:xfrm>
           <a:prstGeom prst="rect">
             <a:avLst/>
@@ -22938,7 +23575,7 @@
         <p:spPr>
           <a:xfrm>
             <a:off x="1143000" y="2167200"/>
-            <a:ext cx="4845960" cy="475200"/>
+            <a:ext cx="4845600" cy="474840"/>
           </a:xfrm>
           <a:prstGeom prst="rect">
             <a:avLst/>
@@ -22999,7 +23636,7 @@
         <p:spPr>
           <a:xfrm>
             <a:off x="548640" y="2642760"/>
-            <a:ext cx="594000" cy="383760"/>
+            <a:ext cx="593640" cy="383400"/>
           </a:xfrm>
           <a:prstGeom prst="rect">
             <a:avLst/>
@@ -23060,7 +23697,7 @@
         <p:spPr>
           <a:xfrm>
             <a:off x="1143000" y="2642760"/>
-            <a:ext cx="4845960" cy="475200"/>
+            <a:ext cx="4845600" cy="474840"/>
           </a:xfrm>
           <a:prstGeom prst="rect">
             <a:avLst/>
@@ -23121,7 +23758,7 @@
         <p:spPr>
           <a:xfrm>
             <a:off x="548640" y="3117960"/>
-            <a:ext cx="594000" cy="383760"/>
+            <a:ext cx="593640" cy="383400"/>
           </a:xfrm>
           <a:prstGeom prst="rect">
             <a:avLst/>
@@ -23182,7 +23819,7 @@
         <p:spPr>
           <a:xfrm>
             <a:off x="1143000" y="3117960"/>
-            <a:ext cx="4845960" cy="475200"/>
+            <a:ext cx="4845600" cy="474840"/>
           </a:xfrm>
           <a:prstGeom prst="rect">
             <a:avLst/>
@@ -23243,7 +23880,7 @@
         <p:spPr>
           <a:xfrm>
             <a:off x="548640" y="3593520"/>
-            <a:ext cx="594000" cy="383760"/>
+            <a:ext cx="593640" cy="383400"/>
           </a:xfrm>
           <a:prstGeom prst="rect">
             <a:avLst/>
@@ -23304,7 +23941,7 @@
         <p:spPr>
           <a:xfrm>
             <a:off x="1143000" y="3593520"/>
-            <a:ext cx="4845960" cy="475200"/>
+            <a:ext cx="4845600" cy="474840"/>
           </a:xfrm>
           <a:prstGeom prst="rect">
             <a:avLst/>
@@ -23365,7 +24002,7 @@
         <p:spPr>
           <a:xfrm>
             <a:off x="548640" y="4069080"/>
-            <a:ext cx="594000" cy="383760"/>
+            <a:ext cx="593640" cy="383400"/>
           </a:xfrm>
           <a:prstGeom prst="rect">
             <a:avLst/>
@@ -23426,7 +24063,7 @@
         <p:spPr>
           <a:xfrm>
             <a:off x="1143000" y="4069080"/>
-            <a:ext cx="4845960" cy="475200"/>
+            <a:ext cx="4845600" cy="474840"/>
           </a:xfrm>
           <a:prstGeom prst="rect">
             <a:avLst/>
@@ -23487,7 +24124,7 @@
         <p:spPr>
           <a:xfrm>
             <a:off x="6172200" y="1691640"/>
-            <a:ext cx="594000" cy="383760"/>
+            <a:ext cx="593640" cy="383400"/>
           </a:xfrm>
           <a:prstGeom prst="rect">
             <a:avLst/>
@@ -23548,7 +24185,7 @@
         <p:spPr>
           <a:xfrm>
             <a:off x="6766560" y="1691640"/>
-            <a:ext cx="4845960" cy="475200"/>
+            <a:ext cx="4845600" cy="474840"/>
           </a:xfrm>
           <a:prstGeom prst="rect">
             <a:avLst/>
@@ -23609,7 +24246,7 @@
         <p:spPr>
           <a:xfrm>
             <a:off x="6172200" y="2167200"/>
-            <a:ext cx="594000" cy="383760"/>
+            <a:ext cx="593640" cy="383400"/>
           </a:xfrm>
           <a:prstGeom prst="rect">
             <a:avLst/>
@@ -23670,7 +24307,7 @@
         <p:spPr>
           <a:xfrm>
             <a:off x="6766560" y="2167200"/>
-            <a:ext cx="4845960" cy="475200"/>
+            <a:ext cx="4845600" cy="474840"/>
           </a:xfrm>
           <a:prstGeom prst="rect">
             <a:avLst/>
@@ -23731,7 +24368,7 @@
         <p:spPr>
           <a:xfrm>
             <a:off x="6172200" y="2642760"/>
-            <a:ext cx="594000" cy="383760"/>
+            <a:ext cx="593640" cy="383400"/>
           </a:xfrm>
           <a:prstGeom prst="rect">
             <a:avLst/>
@@ -23792,7 +24429,7 @@
         <p:spPr>
           <a:xfrm>
             <a:off x="6766560" y="2642760"/>
-            <a:ext cx="4845960" cy="475200"/>
+            <a:ext cx="4845600" cy="474840"/>
           </a:xfrm>
           <a:prstGeom prst="rect">
             <a:avLst/>
@@ -23853,7 +24490,7 @@
         <p:spPr>
           <a:xfrm>
             <a:off x="6172200" y="3117960"/>
-            <a:ext cx="594000" cy="383760"/>
+            <a:ext cx="593640" cy="383400"/>
           </a:xfrm>
           <a:prstGeom prst="rect">
             <a:avLst/>
@@ -23914,7 +24551,7 @@
         <p:spPr>
           <a:xfrm>
             <a:off x="6766560" y="3117960"/>
-            <a:ext cx="4845960" cy="475200"/>
+            <a:ext cx="4845600" cy="474840"/>
           </a:xfrm>
           <a:prstGeom prst="rect">
             <a:avLst/>
@@ -23975,7 +24612,7 @@
         <p:spPr>
           <a:xfrm>
             <a:off x="6172200" y="3593520"/>
-            <a:ext cx="594000" cy="383760"/>
+            <a:ext cx="593640" cy="383400"/>
           </a:xfrm>
           <a:prstGeom prst="rect">
             <a:avLst/>
@@ -24036,7 +24673,7 @@
         <p:spPr>
           <a:xfrm>
             <a:off x="6766560" y="3593520"/>
-            <a:ext cx="4845960" cy="475200"/>
+            <a:ext cx="4845600" cy="474840"/>
           </a:xfrm>
           <a:prstGeom prst="rect">
             <a:avLst/>
@@ -24097,7 +24734,7 @@
         <p:spPr>
           <a:xfrm>
             <a:off x="548640" y="6355080"/>
-            <a:ext cx="11063880" cy="10440"/>
+            <a:ext cx="11063520" cy="10080"/>
           </a:xfrm>
           <a:prstGeom prst="rect">
             <a:avLst/>
@@ -24123,6 +24760,11 @@
             <a:noAutofit/>
           </a:bodyPr>
           <a:p>
+            <a:pPr>
+              <a:lnSpc>
+                <a:spcPct val="100000"/>
+              </a:lnSpc>
+            </a:pPr>
             <a:endParaRPr b="0" lang="en-TR" sz="1800" strike="noStrike" u="none">
               <a:solidFill>
                 <a:srgbClr val="000000"/>
@@ -24143,7 +24785,7 @@
         <p:spPr>
           <a:xfrm>
             <a:off x="548640" y="6446520"/>
-            <a:ext cx="7314840" cy="273960"/>
+            <a:ext cx="7314480" cy="273600"/>
           </a:xfrm>
           <a:prstGeom prst="rect">
             <a:avLst/>
@@ -24204,7 +24846,7 @@
         <p:spPr>
           <a:xfrm>
             <a:off x="10698480" y="6446520"/>
-            <a:ext cx="914040" cy="273960"/>
+            <a:ext cx="913680" cy="273600"/>
           </a:xfrm>
           <a:prstGeom prst="rect">
             <a:avLst/>
@@ -24302,7 +24944,7 @@
         <p:spPr>
           <a:xfrm>
             <a:off x="548640" y="411480"/>
-            <a:ext cx="10972440" cy="273960"/>
+            <a:ext cx="10972080" cy="273600"/>
           </a:xfrm>
           <a:prstGeom prst="rect">
             <a:avLst/>
@@ -24363,7 +25005,7 @@
         <p:spPr>
           <a:xfrm>
             <a:off x="548640" y="713160"/>
-            <a:ext cx="10972440" cy="776880"/>
+            <a:ext cx="10972080" cy="776520"/>
           </a:xfrm>
           <a:prstGeom prst="rect">
             <a:avLst/>
@@ -24424,7 +25066,7 @@
         <p:spPr>
           <a:xfrm>
             <a:off x="548640" y="1554480"/>
-            <a:ext cx="10972440" cy="456840"/>
+            <a:ext cx="10972080" cy="456480"/>
           </a:xfrm>
           <a:prstGeom prst="rect">
             <a:avLst/>
@@ -24485,7 +25127,7 @@
         <p:spPr>
           <a:xfrm>
             <a:off x="548640" y="2194560"/>
-            <a:ext cx="3565800" cy="1462680"/>
+            <a:ext cx="3565440" cy="1462320"/>
           </a:xfrm>
           <a:prstGeom prst="rect">
             <a:avLst/>
@@ -24511,6 +25153,11 @@
             <a:noAutofit/>
           </a:bodyPr>
           <a:p>
+            <a:pPr>
+              <a:lnSpc>
+                <a:spcPct val="100000"/>
+              </a:lnSpc>
+            </a:pPr>
             <a:endParaRPr b="0" lang="en-TR" sz="1800" strike="noStrike" u="none">
               <a:solidFill>
                 <a:srgbClr val="000000"/>
@@ -24531,7 +25178,7 @@
         <p:spPr>
           <a:xfrm>
             <a:off x="548640" y="2194560"/>
-            <a:ext cx="63720" cy="1462680"/>
+            <a:ext cx="63360" cy="1462320"/>
           </a:xfrm>
           <a:prstGeom prst="rect">
             <a:avLst/>
@@ -24557,6 +25204,11 @@
             <a:noAutofit/>
           </a:bodyPr>
           <a:p>
+            <a:pPr>
+              <a:lnSpc>
+                <a:spcPct val="100000"/>
+              </a:lnSpc>
+            </a:pPr>
             <a:endParaRPr b="0" lang="en-TR" sz="1800" strike="noStrike" u="none">
               <a:solidFill>
                 <a:srgbClr val="ffffff"/>
@@ -24577,7 +25229,7 @@
         <p:spPr>
           <a:xfrm>
             <a:off x="777240" y="2331720"/>
-            <a:ext cx="3200040" cy="639720"/>
+            <a:ext cx="3199680" cy="639360"/>
           </a:xfrm>
           <a:prstGeom prst="rect">
             <a:avLst/>
@@ -24638,7 +25290,7 @@
         <p:spPr>
           <a:xfrm>
             <a:off x="777240" y="2971800"/>
-            <a:ext cx="3200040" cy="639720"/>
+            <a:ext cx="3199680" cy="639360"/>
           </a:xfrm>
           <a:prstGeom prst="rect">
             <a:avLst/>
@@ -24699,7 +25351,7 @@
         <p:spPr>
           <a:xfrm>
             <a:off x="4434840" y="2194560"/>
-            <a:ext cx="3565800" cy="1462680"/>
+            <a:ext cx="3565440" cy="1462320"/>
           </a:xfrm>
           <a:prstGeom prst="rect">
             <a:avLst/>
@@ -24725,6 +25377,11 @@
             <a:noAutofit/>
           </a:bodyPr>
           <a:p>
+            <a:pPr>
+              <a:lnSpc>
+                <a:spcPct val="100000"/>
+              </a:lnSpc>
+            </a:pPr>
             <a:endParaRPr b="0" lang="en-TR" sz="1800" strike="noStrike" u="none">
               <a:solidFill>
                 <a:srgbClr val="000000"/>
@@ -24745,7 +25402,7 @@
         <p:spPr>
           <a:xfrm>
             <a:off x="4434840" y="2194560"/>
-            <a:ext cx="63720" cy="1462680"/>
+            <a:ext cx="63360" cy="1462320"/>
           </a:xfrm>
           <a:prstGeom prst="rect">
             <a:avLst/>
@@ -24771,6 +25428,11 @@
             <a:noAutofit/>
           </a:bodyPr>
           <a:p>
+            <a:pPr>
+              <a:lnSpc>
+                <a:spcPct val="100000"/>
+              </a:lnSpc>
+            </a:pPr>
             <a:endParaRPr b="0" lang="en-TR" sz="1800" strike="noStrike" u="none">
               <a:solidFill>
                 <a:srgbClr val="ffffff"/>
@@ -24791,7 +25453,7 @@
         <p:spPr>
           <a:xfrm>
             <a:off x="4663440" y="2331720"/>
-            <a:ext cx="3200040" cy="639720"/>
+            <a:ext cx="3199680" cy="639360"/>
           </a:xfrm>
           <a:prstGeom prst="rect">
             <a:avLst/>
@@ -24852,7 +25514,7 @@
         <p:spPr>
           <a:xfrm>
             <a:off x="4663440" y="2971800"/>
-            <a:ext cx="3200040" cy="639720"/>
+            <a:ext cx="3199680" cy="639360"/>
           </a:xfrm>
           <a:prstGeom prst="rect">
             <a:avLst/>
@@ -24913,7 +25575,7 @@
         <p:spPr>
           <a:xfrm>
             <a:off x="8321040" y="2194560"/>
-            <a:ext cx="3565800" cy="1462680"/>
+            <a:ext cx="3565440" cy="1462320"/>
           </a:xfrm>
           <a:prstGeom prst="rect">
             <a:avLst/>
@@ -24939,6 +25601,11 @@
             <a:noAutofit/>
           </a:bodyPr>
           <a:p>
+            <a:pPr>
+              <a:lnSpc>
+                <a:spcPct val="100000"/>
+              </a:lnSpc>
+            </a:pPr>
             <a:endParaRPr b="0" lang="en-TR" sz="1800" strike="noStrike" u="none">
               <a:solidFill>
                 <a:srgbClr val="000000"/>
@@ -24959,7 +25626,7 @@
         <p:spPr>
           <a:xfrm>
             <a:off x="8321040" y="2194560"/>
-            <a:ext cx="63720" cy="1462680"/>
+            <a:ext cx="63360" cy="1462320"/>
           </a:xfrm>
           <a:prstGeom prst="rect">
             <a:avLst/>
@@ -24985,6 +25652,11 @@
             <a:noAutofit/>
           </a:bodyPr>
           <a:p>
+            <a:pPr>
+              <a:lnSpc>
+                <a:spcPct val="100000"/>
+              </a:lnSpc>
+            </a:pPr>
             <a:endParaRPr b="0" lang="en-TR" sz="1800" strike="noStrike" u="none">
               <a:solidFill>
                 <a:srgbClr val="ffffff"/>
@@ -25005,7 +25677,7 @@
         <p:spPr>
           <a:xfrm>
             <a:off x="8549640" y="2331720"/>
-            <a:ext cx="3200040" cy="639720"/>
+            <a:ext cx="3199680" cy="639360"/>
           </a:xfrm>
           <a:prstGeom prst="rect">
             <a:avLst/>
@@ -25066,7 +25738,7 @@
         <p:spPr>
           <a:xfrm>
             <a:off x="8549640" y="2971800"/>
-            <a:ext cx="3200040" cy="639720"/>
+            <a:ext cx="3199680" cy="639360"/>
           </a:xfrm>
           <a:prstGeom prst="rect">
             <a:avLst/>
@@ -25127,7 +25799,7 @@
         <p:spPr>
           <a:xfrm>
             <a:off x="548640" y="3931920"/>
-            <a:ext cx="7314840" cy="365400"/>
+            <a:ext cx="7314480" cy="365040"/>
           </a:xfrm>
           <a:prstGeom prst="rect">
             <a:avLst/>
@@ -25188,7 +25860,7 @@
         <p:spPr>
           <a:xfrm>
             <a:off x="548640" y="4389120"/>
-            <a:ext cx="3565800" cy="868320"/>
+            <a:ext cx="3565440" cy="867960"/>
           </a:xfrm>
           <a:prstGeom prst="rect">
             <a:avLst/>
@@ -25214,6 +25886,11 @@
             <a:noAutofit/>
           </a:bodyPr>
           <a:p>
+            <a:pPr>
+              <a:lnSpc>
+                <a:spcPct val="100000"/>
+              </a:lnSpc>
+            </a:pPr>
             <a:endParaRPr b="0" lang="en-TR" sz="1800" strike="noStrike" u="none">
               <a:solidFill>
                 <a:srgbClr val="000000"/>
@@ -25234,7 +25911,7 @@
         <p:spPr>
           <a:xfrm>
             <a:off x="777240" y="4480560"/>
-            <a:ext cx="3200040" cy="365400"/>
+            <a:ext cx="3199680" cy="365040"/>
           </a:xfrm>
           <a:prstGeom prst="rect">
             <a:avLst/>
@@ -25295,7 +25972,7 @@
         <p:spPr>
           <a:xfrm>
             <a:off x="777240" y="4846320"/>
-            <a:ext cx="3200040" cy="365400"/>
+            <a:ext cx="3199680" cy="365040"/>
           </a:xfrm>
           <a:prstGeom prst="rect">
             <a:avLst/>
@@ -25356,7 +26033,7 @@
         <p:spPr>
           <a:xfrm>
             <a:off x="4434840" y="4389120"/>
-            <a:ext cx="3565800" cy="868320"/>
+            <a:ext cx="3565440" cy="867960"/>
           </a:xfrm>
           <a:prstGeom prst="rect">
             <a:avLst/>
@@ -25382,6 +26059,11 @@
             <a:noAutofit/>
           </a:bodyPr>
           <a:p>
+            <a:pPr>
+              <a:lnSpc>
+                <a:spcPct val="100000"/>
+              </a:lnSpc>
+            </a:pPr>
             <a:endParaRPr b="0" lang="en-TR" sz="1800" strike="noStrike" u="none">
               <a:solidFill>
                 <a:srgbClr val="000000"/>
@@ -25402,7 +26084,7 @@
         <p:spPr>
           <a:xfrm>
             <a:off x="4663440" y="4480560"/>
-            <a:ext cx="3200040" cy="365400"/>
+            <a:ext cx="3199680" cy="365040"/>
           </a:xfrm>
           <a:prstGeom prst="rect">
             <a:avLst/>
@@ -25463,7 +26145,7 @@
         <p:spPr>
           <a:xfrm>
             <a:off x="4663440" y="4846320"/>
-            <a:ext cx="3200040" cy="365400"/>
+            <a:ext cx="3199680" cy="365040"/>
           </a:xfrm>
           <a:prstGeom prst="rect">
             <a:avLst/>
@@ -25524,7 +26206,7 @@
         <p:spPr>
           <a:xfrm>
             <a:off x="8321040" y="4389120"/>
-            <a:ext cx="3565800" cy="868320"/>
+            <a:ext cx="3565440" cy="867960"/>
           </a:xfrm>
           <a:prstGeom prst="rect">
             <a:avLst/>
@@ -25550,6 +26232,11 @@
             <a:noAutofit/>
           </a:bodyPr>
           <a:p>
+            <a:pPr>
+              <a:lnSpc>
+                <a:spcPct val="100000"/>
+              </a:lnSpc>
+            </a:pPr>
             <a:endParaRPr b="0" lang="en-TR" sz="1800" strike="noStrike" u="none">
               <a:solidFill>
                 <a:srgbClr val="000000"/>
@@ -25570,7 +26257,7 @@
         <p:spPr>
           <a:xfrm>
             <a:off x="8549640" y="4480560"/>
-            <a:ext cx="3200040" cy="365400"/>
+            <a:ext cx="3199680" cy="365040"/>
           </a:xfrm>
           <a:prstGeom prst="rect">
             <a:avLst/>
@@ -25631,7 +26318,7 @@
         <p:spPr>
           <a:xfrm>
             <a:off x="8549640" y="4846320"/>
-            <a:ext cx="3200040" cy="365400"/>
+            <a:ext cx="3199680" cy="365040"/>
           </a:xfrm>
           <a:prstGeom prst="rect">
             <a:avLst/>
@@ -25692,7 +26379,7 @@
         <p:spPr>
           <a:xfrm>
             <a:off x="548640" y="5532120"/>
-            <a:ext cx="11063880" cy="594000"/>
+            <a:ext cx="11063520" cy="593640"/>
           </a:xfrm>
           <a:prstGeom prst="rect">
             <a:avLst/>
@@ -25718,6 +26405,11 @@
             <a:noAutofit/>
           </a:bodyPr>
           <a:p>
+            <a:pPr>
+              <a:lnSpc>
+                <a:spcPct val="100000"/>
+              </a:lnSpc>
+            </a:pPr>
             <a:endParaRPr b="0" lang="en-TR" sz="1800" strike="noStrike" u="none">
               <a:solidFill>
                 <a:srgbClr val="000000"/>
@@ -25742,7 +26434,7 @@
         <p:spPr>
           <a:xfrm>
             <a:off x="713160" y="5650920"/>
-            <a:ext cx="365400" cy="365400"/>
+            <a:ext cx="365040" cy="365040"/>
           </a:xfrm>
           <a:prstGeom prst="rect">
             <a:avLst/>
@@ -25762,7 +26454,7 @@
         <p:spPr>
           <a:xfrm>
             <a:off x="1188720" y="5532120"/>
-            <a:ext cx="10332360" cy="594000"/>
+            <a:ext cx="10332000" cy="593640"/>
           </a:xfrm>
           <a:prstGeom prst="rect">
             <a:avLst/>
@@ -25823,7 +26515,7 @@
         <p:spPr>
           <a:xfrm>
             <a:off x="548640" y="6355080"/>
-            <a:ext cx="11063880" cy="10440"/>
+            <a:ext cx="11063520" cy="10080"/>
           </a:xfrm>
           <a:prstGeom prst="rect">
             <a:avLst/>
@@ -25849,6 +26541,11 @@
             <a:noAutofit/>
           </a:bodyPr>
           <a:p>
+            <a:pPr>
+              <a:lnSpc>
+                <a:spcPct val="100000"/>
+              </a:lnSpc>
+            </a:pPr>
             <a:endParaRPr b="0" lang="en-TR" sz="1800" strike="noStrike" u="none">
               <a:solidFill>
                 <a:srgbClr val="000000"/>
@@ -25869,7 +26566,7 @@
         <p:spPr>
           <a:xfrm>
             <a:off x="548640" y="6446520"/>
-            <a:ext cx="7314840" cy="273960"/>
+            <a:ext cx="7314480" cy="273600"/>
           </a:xfrm>
           <a:prstGeom prst="rect">
             <a:avLst/>
@@ -25930,7 +26627,7 @@
         <p:spPr>
           <a:xfrm>
             <a:off x="10698480" y="6446520"/>
-            <a:ext cx="914040" cy="273960"/>
+            <a:ext cx="913680" cy="273600"/>
           </a:xfrm>
           <a:prstGeom prst="rect">
             <a:avLst/>
@@ -26028,7 +26725,7 @@
         <p:spPr>
           <a:xfrm>
             <a:off x="548640" y="411480"/>
-            <a:ext cx="10972440" cy="273960"/>
+            <a:ext cx="10972080" cy="273600"/>
           </a:xfrm>
           <a:prstGeom prst="rect">
             <a:avLst/>
@@ -26089,7 +26786,7 @@
         <p:spPr>
           <a:xfrm>
             <a:off x="548640" y="713160"/>
-            <a:ext cx="10972440" cy="776880"/>
+            <a:ext cx="10972080" cy="776520"/>
           </a:xfrm>
           <a:prstGeom prst="rect">
             <a:avLst/>
@@ -26150,7 +26847,7 @@
         <p:spPr>
           <a:xfrm>
             <a:off x="548640" y="1600200"/>
-            <a:ext cx="6126120" cy="4525920"/>
+            <a:ext cx="6125760" cy="4525560"/>
           </a:xfrm>
           <a:prstGeom prst="rect">
             <a:avLst/>
@@ -26176,6 +26873,11 @@
             <a:noAutofit/>
           </a:bodyPr>
           <a:p>
+            <a:pPr>
+              <a:lnSpc>
+                <a:spcPct val="100000"/>
+              </a:lnSpc>
+            </a:pPr>
             <a:endParaRPr b="0" lang="en-TR" sz="1800" strike="noStrike" u="none">
               <a:solidFill>
                 <a:srgbClr val="000000"/>
@@ -26196,7 +26898,7 @@
         <p:spPr>
           <a:xfrm>
             <a:off x="548640" y="1600200"/>
-            <a:ext cx="63720" cy="4525920"/>
+            <a:ext cx="63360" cy="4525560"/>
           </a:xfrm>
           <a:prstGeom prst="rect">
             <a:avLst/>
@@ -26222,6 +26924,11 @@
             <a:noAutofit/>
           </a:bodyPr>
           <a:p>
+            <a:pPr>
+              <a:lnSpc>
+                <a:spcPct val="100000"/>
+              </a:lnSpc>
+            </a:pPr>
             <a:endParaRPr b="0" lang="en-TR" sz="1800" strike="noStrike" u="none">
               <a:solidFill>
                 <a:srgbClr val="ffffff"/>
@@ -26242,7 +26949,7 @@
         <p:spPr>
           <a:xfrm>
             <a:off x="822960" y="1737360"/>
-            <a:ext cx="5668920" cy="365400"/>
+            <a:ext cx="5668560" cy="365040"/>
           </a:xfrm>
           <a:prstGeom prst="rect">
             <a:avLst/>
@@ -26303,7 +27010,7 @@
         <p:spPr>
           <a:xfrm>
             <a:off x="822960" y="2103120"/>
-            <a:ext cx="5668920" cy="639720"/>
+            <a:ext cx="5668560" cy="639360"/>
           </a:xfrm>
           <a:prstGeom prst="rect">
             <a:avLst/>
@@ -26364,7 +27071,7 @@
         <p:spPr>
           <a:xfrm>
             <a:off x="822960" y="2834640"/>
-            <a:ext cx="5668920" cy="319680"/>
+            <a:ext cx="5668560" cy="319320"/>
           </a:xfrm>
           <a:prstGeom prst="rect">
             <a:avLst/>
@@ -26425,7 +27132,7 @@
         <p:spPr>
           <a:xfrm>
             <a:off x="822960" y="3154680"/>
-            <a:ext cx="5668920" cy="2011320"/>
+            <a:ext cx="5668560" cy="2010960"/>
           </a:xfrm>
           <a:prstGeom prst="rect">
             <a:avLst/>
@@ -26631,7 +27338,7 @@
         <p:spPr>
           <a:xfrm>
             <a:off x="822960" y="5394960"/>
-            <a:ext cx="5577480" cy="594000"/>
+            <a:ext cx="5577120" cy="593640"/>
           </a:xfrm>
           <a:prstGeom prst="rect">
             <a:avLst/>
@@ -26657,6 +27364,11 @@
             <a:noAutofit/>
           </a:bodyPr>
           <a:p>
+            <a:pPr>
+              <a:lnSpc>
+                <a:spcPct val="100000"/>
+              </a:lnSpc>
+            </a:pPr>
             <a:endParaRPr b="0" lang="en-TR" sz="1800" strike="noStrike" u="none">
               <a:solidFill>
                 <a:srgbClr val="000000"/>
@@ -26677,7 +27389,7 @@
         <p:spPr>
           <a:xfrm>
             <a:off x="960120" y="5394960"/>
-            <a:ext cx="5348880" cy="594000"/>
+            <a:ext cx="5348520" cy="593640"/>
           </a:xfrm>
           <a:prstGeom prst="rect">
             <a:avLst/>
@@ -26738,7 +27450,7 @@
         <p:spPr>
           <a:xfrm>
             <a:off x="6903720" y="1600200"/>
-            <a:ext cx="4708800" cy="4525920"/>
+            <a:ext cx="4708440" cy="4525560"/>
           </a:xfrm>
           <a:prstGeom prst="rect">
             <a:avLst/>
@@ -26764,6 +27476,11 @@
             <a:noAutofit/>
           </a:bodyPr>
           <a:p>
+            <a:pPr>
+              <a:lnSpc>
+                <a:spcPct val="100000"/>
+              </a:lnSpc>
+            </a:pPr>
             <a:endParaRPr b="0" lang="en-TR" sz="1800" strike="noStrike" u="none">
               <a:solidFill>
                 <a:srgbClr val="000000"/>
@@ -26784,7 +27501,7 @@
         <p:spPr>
           <a:xfrm>
             <a:off x="7178040" y="1737360"/>
-            <a:ext cx="4251600" cy="319680"/>
+            <a:ext cx="4251240" cy="319320"/>
           </a:xfrm>
           <a:prstGeom prst="rect">
             <a:avLst/>
@@ -26845,7 +27562,7 @@
         <p:spPr>
           <a:xfrm>
             <a:off x="7086600" y="2103120"/>
-            <a:ext cx="1279800" cy="365400"/>
+            <a:ext cx="1279440" cy="365040"/>
           </a:xfrm>
           <a:prstGeom prst="roundRect">
             <a:avLst>
@@ -26873,6 +27590,11 @@
             <a:noAutofit/>
           </a:bodyPr>
           <a:p>
+            <a:pPr>
+              <a:lnSpc>
+                <a:spcPct val="100000"/>
+              </a:lnSpc>
+            </a:pPr>
             <a:endParaRPr b="0" lang="en-TR" sz="1800" strike="noStrike" u="none">
               <a:solidFill>
                 <a:srgbClr val="ffffff"/>
@@ -26893,7 +27615,7 @@
         <p:spPr>
           <a:xfrm>
             <a:off x="7086600" y="2103120"/>
-            <a:ext cx="1279800" cy="365400"/>
+            <a:ext cx="1279440" cy="365040"/>
           </a:xfrm>
           <a:prstGeom prst="rect">
             <a:avLst/>
@@ -26954,7 +27676,7 @@
         <p:spPr>
           <a:xfrm>
             <a:off x="9966960" y="2103120"/>
-            <a:ext cx="1279800" cy="365400"/>
+            <a:ext cx="1279440" cy="365040"/>
           </a:xfrm>
           <a:prstGeom prst="roundRect">
             <a:avLst>
@@ -26982,6 +27704,11 @@
             <a:noAutofit/>
           </a:bodyPr>
           <a:p>
+            <a:pPr>
+              <a:lnSpc>
+                <a:spcPct val="100000"/>
+              </a:lnSpc>
+            </a:pPr>
             <a:endParaRPr b="0" lang="en-TR" sz="1800" strike="noStrike" u="none">
               <a:solidFill>
                 <a:srgbClr val="ffffff"/>
@@ -27002,7 +27729,7 @@
         <p:spPr>
           <a:xfrm>
             <a:off x="9966960" y="2103120"/>
-            <a:ext cx="1279800" cy="365400"/>
+            <a:ext cx="1279440" cy="365040"/>
           </a:xfrm>
           <a:prstGeom prst="rect">
             <a:avLst/>
@@ -27151,7 +27878,7 @@
         <p:spPr>
           <a:xfrm>
             <a:off x="7726680" y="2496240"/>
-            <a:ext cx="2880000" cy="228240"/>
+            <a:ext cx="2879640" cy="227880"/>
           </a:xfrm>
           <a:prstGeom prst="rect">
             <a:avLst/>
@@ -27256,7 +27983,7 @@
         <p:spPr>
           <a:xfrm>
             <a:off x="7726680" y="3182040"/>
-            <a:ext cx="2880000" cy="228240"/>
+            <a:ext cx="2879640" cy="227880"/>
           </a:xfrm>
           <a:prstGeom prst="rect">
             <a:avLst/>
@@ -27361,7 +28088,7 @@
         <p:spPr>
           <a:xfrm>
             <a:off x="7726680" y="3867840"/>
-            <a:ext cx="2880000" cy="228240"/>
+            <a:ext cx="2879640" cy="227880"/>
           </a:xfrm>
           <a:prstGeom prst="rect">
             <a:avLst/>
@@ -27466,7 +28193,7 @@
         <p:spPr>
           <a:xfrm>
             <a:off x="7726680" y="4553640"/>
-            <a:ext cx="2880000" cy="228240"/>
+            <a:ext cx="2879640" cy="227880"/>
           </a:xfrm>
           <a:prstGeom prst="rect">
             <a:avLst/>
@@ -27571,7 +28298,7 @@
         <p:spPr>
           <a:xfrm>
             <a:off x="8618400" y="5806440"/>
-            <a:ext cx="1279800" cy="319680"/>
+            <a:ext cx="1279440" cy="319320"/>
           </a:xfrm>
           <a:prstGeom prst="roundRect">
             <a:avLst>
@@ -27599,6 +28326,11 @@
             <a:noAutofit/>
           </a:bodyPr>
           <a:p>
+            <a:pPr>
+              <a:lnSpc>
+                <a:spcPct val="100000"/>
+              </a:lnSpc>
+            </a:pPr>
             <a:endParaRPr b="0" lang="en-TR" sz="1800" strike="noStrike" u="none">
               <a:solidFill>
                 <a:srgbClr val="ffffff"/>
@@ -27619,7 +28351,7 @@
         <p:spPr>
           <a:xfrm>
             <a:off x="8618400" y="5806440"/>
-            <a:ext cx="1279800" cy="319680"/>
+            <a:ext cx="1279440" cy="319320"/>
           </a:xfrm>
           <a:prstGeom prst="rect">
             <a:avLst/>
@@ -27680,7 +28412,7 @@
         <p:spPr>
           <a:xfrm>
             <a:off x="548640" y="6355080"/>
-            <a:ext cx="11063880" cy="10440"/>
+            <a:ext cx="11063520" cy="10080"/>
           </a:xfrm>
           <a:prstGeom prst="rect">
             <a:avLst/>
@@ -27706,6 +28438,11 @@
             <a:noAutofit/>
           </a:bodyPr>
           <a:p>
+            <a:pPr>
+              <a:lnSpc>
+                <a:spcPct val="100000"/>
+              </a:lnSpc>
+            </a:pPr>
             <a:endParaRPr b="0" lang="en-TR" sz="1800" strike="noStrike" u="none">
               <a:solidFill>
                 <a:srgbClr val="000000"/>
@@ -27726,7 +28463,7 @@
         <p:spPr>
           <a:xfrm>
             <a:off x="548640" y="6446520"/>
-            <a:ext cx="7314840" cy="273960"/>
+            <a:ext cx="7314480" cy="273600"/>
           </a:xfrm>
           <a:prstGeom prst="rect">
             <a:avLst/>
@@ -27787,7 +28524,7 @@
         <p:spPr>
           <a:xfrm>
             <a:off x="10698480" y="6446520"/>
-            <a:ext cx="914040" cy="273960"/>
+            <a:ext cx="913680" cy="273600"/>
           </a:xfrm>
           <a:prstGeom prst="rect">
             <a:avLst/>
@@ -27885,7 +28622,7 @@
         <p:spPr>
           <a:xfrm>
             <a:off x="548640" y="411480"/>
-            <a:ext cx="10972440" cy="273960"/>
+            <a:ext cx="10972080" cy="273600"/>
           </a:xfrm>
           <a:prstGeom prst="rect">
             <a:avLst/>
@@ -27946,7 +28683,7 @@
         <p:spPr>
           <a:xfrm>
             <a:off x="548640" y="713160"/>
-            <a:ext cx="10972440" cy="776880"/>
+            <a:ext cx="10972080" cy="776520"/>
           </a:xfrm>
           <a:prstGeom prst="rect">
             <a:avLst/>
@@ -28007,7 +28744,7 @@
         <p:spPr>
           <a:xfrm>
             <a:off x="548640" y="1600200"/>
-            <a:ext cx="5943240" cy="4525920"/>
+            <a:ext cx="5942880" cy="4525560"/>
           </a:xfrm>
           <a:prstGeom prst="rect">
             <a:avLst/>
@@ -28033,6 +28770,11 @@
             <a:noAutofit/>
           </a:bodyPr>
           <a:p>
+            <a:pPr>
+              <a:lnSpc>
+                <a:spcPct val="100000"/>
+              </a:lnSpc>
+            </a:pPr>
             <a:endParaRPr b="0" lang="en-TR" sz="1800" strike="noStrike" u="none">
               <a:solidFill>
                 <a:srgbClr val="000000"/>
@@ -28053,7 +28795,7 @@
         <p:spPr>
           <a:xfrm>
             <a:off x="548640" y="1600200"/>
-            <a:ext cx="63720" cy="4525920"/>
+            <a:ext cx="63360" cy="4525560"/>
           </a:xfrm>
           <a:prstGeom prst="rect">
             <a:avLst/>
@@ -28079,6 +28821,11 @@
             <a:noAutofit/>
           </a:bodyPr>
           <a:p>
+            <a:pPr>
+              <a:lnSpc>
+                <a:spcPct val="100000"/>
+              </a:lnSpc>
+            </a:pPr>
             <a:endParaRPr b="0" lang="en-TR" sz="1800" strike="noStrike" u="none">
               <a:solidFill>
                 <a:srgbClr val="ffffff"/>
@@ -28103,7 +28850,7 @@
         <p:spPr>
           <a:xfrm>
             <a:off x="822960" y="1783080"/>
-            <a:ext cx="411120" cy="411120"/>
+            <a:ext cx="410760" cy="410760"/>
           </a:xfrm>
           <a:prstGeom prst="rect">
             <a:avLst/>
@@ -28123,7 +28870,7 @@
         <p:spPr>
           <a:xfrm>
             <a:off x="1325880" y="1783080"/>
-            <a:ext cx="5028840" cy="411120"/>
+            <a:ext cx="5028480" cy="410760"/>
           </a:xfrm>
           <a:prstGeom prst="rect">
             <a:avLst/>
@@ -28184,7 +28931,7 @@
         <p:spPr>
           <a:xfrm>
             <a:off x="822960" y="2377440"/>
-            <a:ext cx="5394600" cy="2377080"/>
+            <a:ext cx="5394240" cy="2376720"/>
           </a:xfrm>
           <a:prstGeom prst="rect">
             <a:avLst/>
@@ -28390,7 +29137,7 @@
         <p:spPr>
           <a:xfrm>
             <a:off x="822960" y="4846320"/>
-            <a:ext cx="5394600" cy="365400"/>
+            <a:ext cx="5394240" cy="365040"/>
           </a:xfrm>
           <a:prstGeom prst="rect">
             <a:avLst/>
@@ -28451,7 +29198,7 @@
         <p:spPr>
           <a:xfrm>
             <a:off x="822960" y="5394960"/>
-            <a:ext cx="5394600" cy="594000"/>
+            <a:ext cx="5394240" cy="593640"/>
           </a:xfrm>
           <a:prstGeom prst="rect">
             <a:avLst/>
@@ -28477,6 +29224,11 @@
             <a:noAutofit/>
           </a:bodyPr>
           <a:p>
+            <a:pPr>
+              <a:lnSpc>
+                <a:spcPct val="100000"/>
+              </a:lnSpc>
+            </a:pPr>
             <a:endParaRPr b="0" lang="en-TR" sz="1800" strike="noStrike" u="none">
               <a:solidFill>
                 <a:srgbClr val="000000"/>
@@ -28497,7 +29249,7 @@
         <p:spPr>
           <a:xfrm>
             <a:off x="960120" y="5394960"/>
-            <a:ext cx="5120280" cy="594000"/>
+            <a:ext cx="5119920" cy="593640"/>
           </a:xfrm>
           <a:prstGeom prst="rect">
             <a:avLst/>
@@ -28558,7 +29310,7 @@
         <p:spPr>
           <a:xfrm>
             <a:off x="6766560" y="1600200"/>
-            <a:ext cx="4845960" cy="4525920"/>
+            <a:ext cx="4845600" cy="4525560"/>
           </a:xfrm>
           <a:prstGeom prst="rect">
             <a:avLst/>
@@ -28584,6 +29336,11 @@
             <a:noAutofit/>
           </a:bodyPr>
           <a:p>
+            <a:pPr>
+              <a:lnSpc>
+                <a:spcPct val="100000"/>
+              </a:lnSpc>
+            </a:pPr>
             <a:endParaRPr b="0" lang="en-TR" sz="1800" strike="noStrike" u="none">
               <a:solidFill>
                 <a:srgbClr val="000000"/>
@@ -28604,7 +29361,7 @@
         <p:spPr>
           <a:xfrm>
             <a:off x="7040880" y="1737360"/>
-            <a:ext cx="4388760" cy="319680"/>
+            <a:ext cx="4388400" cy="319320"/>
           </a:xfrm>
           <a:prstGeom prst="rect">
             <a:avLst/>
@@ -28665,7 +29422,7 @@
         <p:spPr>
           <a:xfrm>
             <a:off x="8183880" y="2194560"/>
-            <a:ext cx="2011320" cy="776880"/>
+            <a:ext cx="2010960" cy="776520"/>
           </a:xfrm>
           <a:prstGeom prst="roundRect">
             <a:avLst>
@@ -28693,6 +29450,11 @@
             <a:noAutofit/>
           </a:bodyPr>
           <a:p>
+            <a:pPr>
+              <a:lnSpc>
+                <a:spcPct val="100000"/>
+              </a:lnSpc>
+            </a:pPr>
             <a:endParaRPr b="0" lang="en-TR" sz="1800" strike="noStrike" u="none">
               <a:solidFill>
                 <a:srgbClr val="ffffff"/>
@@ -28713,7 +29475,7 @@
         <p:spPr>
           <a:xfrm>
             <a:off x="8183880" y="2194560"/>
-            <a:ext cx="2011320" cy="776880"/>
+            <a:ext cx="2010960" cy="776520"/>
           </a:xfrm>
           <a:prstGeom prst="rect">
             <a:avLst/>
@@ -28804,7 +29566,7 @@
         <p:spPr>
           <a:xfrm>
             <a:off x="7909560" y="3611880"/>
-            <a:ext cx="2559960" cy="868320"/>
+            <a:ext cx="2559600" cy="867960"/>
           </a:xfrm>
           <a:prstGeom prst="roundRect">
             <a:avLst>
@@ -28832,6 +29594,11 @@
             <a:noAutofit/>
           </a:bodyPr>
           <a:p>
+            <a:pPr>
+              <a:lnSpc>
+                <a:spcPct val="100000"/>
+              </a:lnSpc>
+            </a:pPr>
             <a:endParaRPr b="0" lang="en-TR" sz="1800" strike="noStrike" u="none">
               <a:solidFill>
                 <a:srgbClr val="ffffff"/>
@@ -28852,7 +29619,7 @@
         <p:spPr>
           <a:xfrm>
             <a:off x="7909560" y="3611880"/>
-            <a:ext cx="2559960" cy="868320"/>
+            <a:ext cx="2559600" cy="867960"/>
           </a:xfrm>
           <a:prstGeom prst="rect">
             <a:avLst/>
@@ -28943,7 +29710,7 @@
         <p:spPr>
           <a:xfrm>
             <a:off x="8001000" y="5120640"/>
-            <a:ext cx="2377080" cy="776880"/>
+            <a:ext cx="2376720" cy="776520"/>
           </a:xfrm>
           <a:prstGeom prst="roundRect">
             <a:avLst>
@@ -28971,6 +29738,11 @@
             <a:noAutofit/>
           </a:bodyPr>
           <a:p>
+            <a:pPr>
+              <a:lnSpc>
+                <a:spcPct val="100000"/>
+              </a:lnSpc>
+            </a:pPr>
             <a:endParaRPr b="0" lang="en-TR" sz="1800" strike="noStrike" u="none">
               <a:solidFill>
                 <a:srgbClr val="000000"/>
@@ -28991,7 +29763,7 @@
         <p:spPr>
           <a:xfrm>
             <a:off x="8001000" y="5120640"/>
-            <a:ext cx="2377080" cy="776880"/>
+            <a:ext cx="2376720" cy="776520"/>
           </a:xfrm>
           <a:prstGeom prst="rect">
             <a:avLst/>
@@ -29096,7 +29868,7 @@
         <p:spPr>
           <a:xfrm>
             <a:off x="8092440" y="3063240"/>
-            <a:ext cx="914040" cy="273960"/>
+            <a:ext cx="913680" cy="273600"/>
           </a:xfrm>
           <a:prstGeom prst="rect">
             <a:avLst/>
@@ -29157,7 +29929,7 @@
         <p:spPr>
           <a:xfrm>
             <a:off x="9372600" y="3063240"/>
-            <a:ext cx="1828440" cy="273960"/>
+            <a:ext cx="1828080" cy="273600"/>
           </a:xfrm>
           <a:prstGeom prst="rect">
             <a:avLst/>
@@ -29263,7 +30035,7 @@
         <p:spPr>
           <a:xfrm>
             <a:off x="9281160" y="4617720"/>
-            <a:ext cx="1096920" cy="273960"/>
+            <a:ext cx="1096560" cy="273600"/>
           </a:xfrm>
           <a:prstGeom prst="rect">
             <a:avLst/>
@@ -29324,7 +30096,7 @@
         <p:spPr>
           <a:xfrm>
             <a:off x="548640" y="6355080"/>
-            <a:ext cx="11063880" cy="10440"/>
+            <a:ext cx="11063520" cy="10080"/>
           </a:xfrm>
           <a:prstGeom prst="rect">
             <a:avLst/>
@@ -29350,6 +30122,11 @@
             <a:noAutofit/>
           </a:bodyPr>
           <a:p>
+            <a:pPr>
+              <a:lnSpc>
+                <a:spcPct val="100000"/>
+              </a:lnSpc>
+            </a:pPr>
             <a:endParaRPr b="0" lang="en-TR" sz="1800" strike="noStrike" u="none">
               <a:solidFill>
                 <a:srgbClr val="000000"/>
@@ -29370,7 +30147,7 @@
         <p:spPr>
           <a:xfrm>
             <a:off x="548640" y="6446520"/>
-            <a:ext cx="7314840" cy="273960"/>
+            <a:ext cx="7314480" cy="273600"/>
           </a:xfrm>
           <a:prstGeom prst="rect">
             <a:avLst/>
@@ -29431,7 +30208,7 @@
         <p:spPr>
           <a:xfrm>
             <a:off x="10698480" y="6446520"/>
-            <a:ext cx="914040" cy="273960"/>
+            <a:ext cx="913680" cy="273600"/>
           </a:xfrm>
           <a:prstGeom prst="rect">
             <a:avLst/>
@@ -29529,7 +30306,7 @@
         <p:spPr>
           <a:xfrm>
             <a:off x="548640" y="411480"/>
-            <a:ext cx="10972440" cy="273960"/>
+            <a:ext cx="10972080" cy="273600"/>
           </a:xfrm>
           <a:prstGeom prst="rect">
             <a:avLst/>
@@ -29590,7 +30367,7 @@
         <p:spPr>
           <a:xfrm>
             <a:off x="548640" y="713160"/>
-            <a:ext cx="10972440" cy="776880"/>
+            <a:ext cx="10972080" cy="776520"/>
           </a:xfrm>
           <a:prstGeom prst="rect">
             <a:avLst/>
@@ -29651,7 +30428,7 @@
         <p:spPr>
           <a:xfrm>
             <a:off x="548640" y="1554480"/>
-            <a:ext cx="10972440" cy="365400"/>
+            <a:ext cx="10972080" cy="365040"/>
           </a:xfrm>
           <a:prstGeom prst="rect">
             <a:avLst/>
@@ -29755,7 +30532,7 @@
         <p:spPr>
           <a:xfrm>
             <a:off x="594360" y="2788920"/>
-            <a:ext cx="273960" cy="273960"/>
+            <a:ext cx="273600" cy="273600"/>
           </a:xfrm>
           <a:prstGeom prst="ellipse">
             <a:avLst/>
@@ -29781,6 +30558,11 @@
             <a:noAutofit/>
           </a:bodyPr>
           <a:p>
+            <a:pPr>
+              <a:lnSpc>
+                <a:spcPct val="100000"/>
+              </a:lnSpc>
+            </a:pPr>
             <a:endParaRPr b="0" lang="en-TR" sz="1800" strike="noStrike" u="none">
               <a:solidFill>
                 <a:srgbClr val="ffffff"/>
@@ -29801,7 +30583,7 @@
         <p:spPr>
           <a:xfrm>
             <a:off x="-548640" y="3154680"/>
-            <a:ext cx="2559960" cy="456840"/>
+            <a:ext cx="2559600" cy="456480"/>
           </a:xfrm>
           <a:prstGeom prst="rect">
             <a:avLst/>
@@ -29862,7 +30644,7 @@
         <p:spPr>
           <a:xfrm>
             <a:off x="3803760" y="2788920"/>
-            <a:ext cx="273960" cy="273960"/>
+            <a:ext cx="273600" cy="273600"/>
           </a:xfrm>
           <a:prstGeom prst="ellipse">
             <a:avLst/>
@@ -29888,6 +30670,11 @@
             <a:noAutofit/>
           </a:bodyPr>
           <a:p>
+            <a:pPr>
+              <a:lnSpc>
+                <a:spcPct val="100000"/>
+              </a:lnSpc>
+            </a:pPr>
             <a:endParaRPr b="0" lang="en-TR" sz="1800" strike="noStrike" u="none">
               <a:solidFill>
                 <a:srgbClr val="ffffff"/>
@@ -29908,7 +30695,7 @@
         <p:spPr>
           <a:xfrm>
             <a:off x="2660760" y="3154680"/>
-            <a:ext cx="2559960" cy="456840"/>
+            <a:ext cx="2559600" cy="456480"/>
           </a:xfrm>
           <a:prstGeom prst="rect">
             <a:avLst/>
@@ -29969,7 +30756,7 @@
         <p:spPr>
           <a:xfrm>
             <a:off x="7013520" y="2788920"/>
-            <a:ext cx="273960" cy="273960"/>
+            <a:ext cx="273600" cy="273600"/>
           </a:xfrm>
           <a:prstGeom prst="ellipse">
             <a:avLst/>
@@ -29995,6 +30782,11 @@
             <a:noAutofit/>
           </a:bodyPr>
           <a:p>
+            <a:pPr>
+              <a:lnSpc>
+                <a:spcPct val="100000"/>
+              </a:lnSpc>
+            </a:pPr>
             <a:endParaRPr b="0" lang="en-TR" sz="1800" strike="noStrike" u="none">
               <a:solidFill>
                 <a:srgbClr val="000000"/>
@@ -30015,7 +30807,7 @@
         <p:spPr>
           <a:xfrm>
             <a:off x="5870520" y="3154680"/>
-            <a:ext cx="2559960" cy="456840"/>
+            <a:ext cx="2559600" cy="456480"/>
           </a:xfrm>
           <a:prstGeom prst="rect">
             <a:avLst/>
@@ -30076,7 +30868,7 @@
         <p:spPr>
           <a:xfrm>
             <a:off x="10437120" y="2788920"/>
-            <a:ext cx="273960" cy="273960"/>
+            <a:ext cx="273600" cy="273600"/>
           </a:xfrm>
           <a:prstGeom prst="ellipse">
             <a:avLst/>
@@ -30102,6 +30894,11 @@
             <a:noAutofit/>
           </a:bodyPr>
           <a:p>
+            <a:pPr>
+              <a:lnSpc>
+                <a:spcPct val="100000"/>
+              </a:lnSpc>
+            </a:pPr>
             <a:endParaRPr b="0" lang="en-TR" sz="1800" strike="noStrike" u="none">
               <a:solidFill>
                 <a:srgbClr val="ffffff"/>
@@ -30122,7 +30919,7 @@
         <p:spPr>
           <a:xfrm>
             <a:off x="9294120" y="3154680"/>
-            <a:ext cx="2559960" cy="456840"/>
+            <a:ext cx="2559600" cy="456480"/>
           </a:xfrm>
           <a:prstGeom prst="rect">
             <a:avLst/>
@@ -30183,7 +30980,7 @@
         <p:spPr>
           <a:xfrm>
             <a:off x="7150680" y="2286000"/>
-            <a:ext cx="3423240" cy="456840"/>
+            <a:ext cx="3422880" cy="456480"/>
           </a:xfrm>
           <a:prstGeom prst="rect">
             <a:avLst/>
@@ -30212,6 +31009,11 @@
             <a:noAutofit/>
           </a:bodyPr>
           <a:p>
+            <a:pPr>
+              <a:lnSpc>
+                <a:spcPct val="100000"/>
+              </a:lnSpc>
+            </a:pPr>
             <a:endParaRPr b="0" lang="en-TR" sz="1800" strike="noStrike" u="none">
               <a:solidFill>
                 <a:srgbClr val="000000"/>
@@ -30232,7 +31034,7 @@
         <p:spPr>
           <a:xfrm>
             <a:off x="7150680" y="2331720"/>
-            <a:ext cx="3423240" cy="411120"/>
+            <a:ext cx="3422880" cy="410760"/>
           </a:xfrm>
           <a:prstGeom prst="rect">
             <a:avLst/>
@@ -30293,7 +31095,7 @@
         <p:spPr>
           <a:xfrm>
             <a:off x="548640" y="3931920"/>
-            <a:ext cx="5486040" cy="2102760"/>
+            <a:ext cx="5485680" cy="2102400"/>
           </a:xfrm>
           <a:prstGeom prst="rect">
             <a:avLst/>
@@ -30319,6 +31121,11 @@
             <a:noAutofit/>
           </a:bodyPr>
           <a:p>
+            <a:pPr>
+              <a:lnSpc>
+                <a:spcPct val="100000"/>
+              </a:lnSpc>
+            </a:pPr>
             <a:endParaRPr b="0" lang="en-TR" sz="1800" strike="noStrike" u="none">
               <a:solidFill>
                 <a:srgbClr val="000000"/>
@@ -30339,7 +31146,7 @@
         <p:spPr>
           <a:xfrm>
             <a:off x="548640" y="3931920"/>
-            <a:ext cx="63720" cy="2102760"/>
+            <a:ext cx="63360" cy="2102400"/>
           </a:xfrm>
           <a:prstGeom prst="rect">
             <a:avLst/>
@@ -30365,6 +31172,11 @@
             <a:noAutofit/>
           </a:bodyPr>
           <a:p>
+            <a:pPr>
+              <a:lnSpc>
+                <a:spcPct val="100000"/>
+              </a:lnSpc>
+            </a:pPr>
             <a:endParaRPr b="0" lang="en-TR" sz="1800" strike="noStrike" u="none">
               <a:solidFill>
                 <a:srgbClr val="ffffff"/>
@@ -30385,7 +31197,7 @@
         <p:spPr>
           <a:xfrm>
             <a:off x="777240" y="4069080"/>
-            <a:ext cx="5120280" cy="365400"/>
+            <a:ext cx="5119920" cy="365040"/>
           </a:xfrm>
           <a:prstGeom prst="rect">
             <a:avLst/>
@@ -30446,7 +31258,7 @@
         <p:spPr>
           <a:xfrm>
             <a:off x="777240" y="4480560"/>
-            <a:ext cx="5120280" cy="1462680"/>
+            <a:ext cx="5119920" cy="1462320"/>
           </a:xfrm>
           <a:prstGeom prst="rect">
             <a:avLst/>
@@ -30507,7 +31319,7 @@
         <p:spPr>
           <a:xfrm>
             <a:off x="6263640" y="3931920"/>
-            <a:ext cx="5486040" cy="2102760"/>
+            <a:ext cx="5485680" cy="2102400"/>
           </a:xfrm>
           <a:prstGeom prst="rect">
             <a:avLst/>
@@ -30533,6 +31345,11 @@
             <a:noAutofit/>
           </a:bodyPr>
           <a:p>
+            <a:pPr>
+              <a:lnSpc>
+                <a:spcPct val="100000"/>
+              </a:lnSpc>
+            </a:pPr>
             <a:endParaRPr b="0" lang="en-TR" sz="1800" strike="noStrike" u="none">
               <a:solidFill>
                 <a:srgbClr val="000000"/>
@@ -30553,7 +31370,7 @@
         <p:spPr>
           <a:xfrm>
             <a:off x="6263640" y="3931920"/>
-            <a:ext cx="63720" cy="2102760"/>
+            <a:ext cx="63360" cy="2102400"/>
           </a:xfrm>
           <a:prstGeom prst="rect">
             <a:avLst/>
@@ -30579,6 +31396,11 @@
             <a:noAutofit/>
           </a:bodyPr>
           <a:p>
+            <a:pPr>
+              <a:lnSpc>
+                <a:spcPct val="100000"/>
+              </a:lnSpc>
+            </a:pPr>
             <a:endParaRPr b="0" lang="en-TR" sz="1800" strike="noStrike" u="none">
               <a:solidFill>
                 <a:srgbClr val="000000"/>
@@ -30599,7 +31421,7 @@
         <p:spPr>
           <a:xfrm>
             <a:off x="6492240" y="4069080"/>
-            <a:ext cx="5120280" cy="365400"/>
+            <a:ext cx="5119920" cy="365040"/>
           </a:xfrm>
           <a:prstGeom prst="rect">
             <a:avLst/>
@@ -30660,7 +31482,7 @@
         <p:spPr>
           <a:xfrm>
             <a:off x="6492240" y="4480560"/>
-            <a:ext cx="5120280" cy="1462680"/>
+            <a:ext cx="5119920" cy="1462320"/>
           </a:xfrm>
           <a:prstGeom prst="rect">
             <a:avLst/>
@@ -30721,7 +31543,7 @@
         <p:spPr>
           <a:xfrm>
             <a:off x="548640" y="6355080"/>
-            <a:ext cx="11063880" cy="10440"/>
+            <a:ext cx="11063520" cy="10080"/>
           </a:xfrm>
           <a:prstGeom prst="rect">
             <a:avLst/>
@@ -30747,6 +31569,11 @@
             <a:noAutofit/>
           </a:bodyPr>
           <a:p>
+            <a:pPr>
+              <a:lnSpc>
+                <a:spcPct val="100000"/>
+              </a:lnSpc>
+            </a:pPr>
             <a:endParaRPr b="0" lang="en-TR" sz="1800" strike="noStrike" u="none">
               <a:solidFill>
                 <a:srgbClr val="000000"/>
@@ -30767,7 +31594,7 @@
         <p:spPr>
           <a:xfrm>
             <a:off x="548640" y="6446520"/>
-            <a:ext cx="7314840" cy="273960"/>
+            <a:ext cx="7314480" cy="273600"/>
           </a:xfrm>
           <a:prstGeom prst="rect">
             <a:avLst/>
@@ -30828,7 +31655,7 @@
         <p:spPr>
           <a:xfrm>
             <a:off x="10698480" y="6446520"/>
-            <a:ext cx="914040" cy="273960"/>
+            <a:ext cx="913680" cy="273600"/>
           </a:xfrm>
           <a:prstGeom prst="rect">
             <a:avLst/>
@@ -30926,7 +31753,7 @@
         <p:spPr>
           <a:xfrm>
             <a:off x="548640" y="411480"/>
-            <a:ext cx="10972440" cy="273960"/>
+            <a:ext cx="10972080" cy="273600"/>
           </a:xfrm>
           <a:prstGeom prst="rect">
             <a:avLst/>
@@ -30987,7 +31814,7 @@
         <p:spPr>
           <a:xfrm>
             <a:off x="548640" y="713160"/>
-            <a:ext cx="10972440" cy="776880"/>
+            <a:ext cx="10972080" cy="776520"/>
           </a:xfrm>
           <a:prstGeom prst="rect">
             <a:avLst/>
@@ -31048,7 +31875,486 @@
         <p:spPr>
           <a:xfrm>
             <a:off x="548640" y="1691640"/>
-            <a:ext cx="3611520" cy="3657240"/>
+            <a:ext cx="3611160" cy="3656880"/>
+          </a:xfrm>
+          <a:prstGeom prst="rect">
+            <a:avLst/>
+          </a:prstGeom>
+          <a:solidFill>
+            <a:srgbClr val="ffffff"/>
+          </a:solidFill>
+          <a:ln w="9525">
+            <a:noFill/>
+          </a:ln>
+        </p:spPr>
+        <p:style>
+          <a:lnRef idx="0"/>
+          <a:fillRef idx="0"/>
+          <a:effectRef idx="0"/>
+          <a:fontRef idx="minor"/>
+        </p:style>
+        <p:txBody>
+          <a:bodyPr lIns="90000" rIns="90000" tIns="45000" bIns="45000" anchor="t">
+            <a:noAutofit/>
+          </a:bodyPr>
+          <a:p>
+            <a:pPr>
+              <a:lnSpc>
+                <a:spcPct val="100000"/>
+              </a:lnSpc>
+            </a:pPr>
+            <a:endParaRPr b="0" lang="en-TR" sz="1800" strike="noStrike" u="none">
+              <a:solidFill>
+                <a:srgbClr val="000000"/>
+              </a:solidFill>
+              <a:effectLst/>
+              <a:uFillTx/>
+              <a:latin typeface="Arial"/>
+            </a:endParaRPr>
+          </a:p>
+        </p:txBody>
+      </p:sp>
+      <p:sp>
+        <p:nvSpPr>
+          <p:cNvPr id="166" name="Shape 3"/>
+          <p:cNvSpPr/>
+          <p:nvPr/>
+        </p:nvSpPr>
+        <p:spPr>
+          <a:xfrm>
+            <a:off x="548640" y="1691640"/>
+            <a:ext cx="3611160" cy="502200"/>
+          </a:xfrm>
+          <a:prstGeom prst="rect">
+            <a:avLst/>
+          </a:prstGeom>
+          <a:solidFill>
+            <a:srgbClr val="065a82"/>
+          </a:solidFill>
+          <a:ln w="12700">
+            <a:solidFill>
+              <a:srgbClr val="065a82"/>
+            </a:solidFill>
+            <a:round/>
+          </a:ln>
+        </p:spPr>
+        <p:style>
+          <a:lnRef idx="0"/>
+          <a:fillRef idx="0"/>
+          <a:effectRef idx="0"/>
+          <a:fontRef idx="minor"/>
+        </p:style>
+        <p:txBody>
+          <a:bodyPr lIns="90000" rIns="90000" tIns="45000" bIns="45000" anchor="t">
+            <a:noAutofit/>
+          </a:bodyPr>
+          <a:p>
+            <a:pPr>
+              <a:lnSpc>
+                <a:spcPct val="100000"/>
+              </a:lnSpc>
+            </a:pPr>
+            <a:endParaRPr b="0" lang="en-TR" sz="1800" strike="noStrike" u="none">
+              <a:solidFill>
+                <a:srgbClr val="ffffff"/>
+              </a:solidFill>
+              <a:effectLst/>
+              <a:uFillTx/>
+              <a:latin typeface="Arial"/>
+            </a:endParaRPr>
+          </a:p>
+        </p:txBody>
+      </p:sp>
+      <p:pic>
+        <p:nvPicPr>
+          <p:cNvPr id="167" name="Image 0" descr="preencoded.png"/>
+          <p:cNvPicPr/>
+          <p:nvPr/>
+        </p:nvPicPr>
+        <p:blipFill>
+          <a:blip r:embed="rId1"/>
+          <a:stretch/>
+        </p:blipFill>
+        <p:spPr>
+          <a:xfrm>
+            <a:off x="777240" y="1801440"/>
+            <a:ext cx="291960" cy="291960"/>
+          </a:xfrm>
+          <a:prstGeom prst="rect">
+            <a:avLst/>
+          </a:prstGeom>
+          <a:noFill/>
+          <a:ln w="0">
+            <a:noFill/>
+          </a:ln>
+        </p:spPr>
+      </p:pic>
+      <p:sp>
+        <p:nvSpPr>
+          <p:cNvPr id="168" name="Text 4"/>
+          <p:cNvSpPr/>
+          <p:nvPr/>
+        </p:nvSpPr>
+        <p:spPr>
+          <a:xfrm>
+            <a:off x="1143000" y="1691640"/>
+            <a:ext cx="2971080" cy="502200"/>
+          </a:xfrm>
+          <a:prstGeom prst="rect">
+            <a:avLst/>
+          </a:prstGeom>
+          <a:noFill/>
+          <a:ln w="0">
+            <a:noFill/>
+          </a:ln>
+        </p:spPr>
+        <p:style>
+          <a:lnRef idx="0"/>
+          <a:fillRef idx="0"/>
+          <a:effectRef idx="0"/>
+          <a:fontRef idx="minor"/>
+        </p:style>
+        <p:txBody>
+          <a:bodyPr lIns="0" rIns="0" tIns="0" bIns="0" anchor="ctr">
+            <a:noAutofit/>
+          </a:bodyPr>
+          <a:p>
+            <a:pPr defTabSz="914400">
+              <a:lnSpc>
+                <a:spcPct val="100000"/>
+              </a:lnSpc>
+              <a:tabLst>
+                <a:tab algn="l" pos="0"/>
+              </a:tabLst>
+            </a:pPr>
+            <a:r>
+              <a:rPr b="1" lang="en-US" sz="1400" strike="noStrike" u="none">
+                <a:solidFill>
+                  <a:srgbClr val="ffffff"/>
+                </a:solidFill>
+                <a:effectLst/>
+                <a:uFillTx/>
+                <a:latin typeface="Cambria"/>
+                <a:ea typeface="Cambria"/>
+              </a:rPr>
+              <a:t>Reactive ACB / UAC</a:t>
+            </a:r>
+            <a:endParaRPr b="0" lang="en-TR" sz="1400" strike="noStrike" u="none">
+              <a:solidFill>
+                <a:srgbClr val="000000"/>
+              </a:solidFill>
+              <a:effectLst/>
+              <a:uFillTx/>
+              <a:latin typeface="Arial"/>
+            </a:endParaRPr>
+          </a:p>
+        </p:txBody>
+      </p:sp>
+      <p:sp>
+        <p:nvSpPr>
+          <p:cNvPr id="169" name="Text 5"/>
+          <p:cNvSpPr/>
+          <p:nvPr/>
+        </p:nvSpPr>
+        <p:spPr>
+          <a:xfrm>
+            <a:off x="777240" y="2437560"/>
+            <a:ext cx="3153960" cy="254160"/>
+          </a:xfrm>
+          <a:prstGeom prst="rect">
+            <a:avLst/>
+          </a:prstGeom>
+          <a:noFill/>
+          <a:ln w="0">
+            <a:noFill/>
+          </a:ln>
+        </p:spPr>
+        <p:style>
+          <a:lnRef idx="0"/>
+          <a:fillRef idx="0"/>
+          <a:effectRef idx="0"/>
+          <a:fontRef idx="minor"/>
+        </p:style>
+        <p:txBody>
+          <a:bodyPr lIns="90000" rIns="90000" tIns="45000" bIns="45000" anchor="t">
+            <a:spAutoFit/>
+          </a:bodyPr>
+          <a:p>
+            <a:pPr defTabSz="914400">
+              <a:lnSpc>
+                <a:spcPct val="100000"/>
+              </a:lnSpc>
+              <a:tabLst>
+                <a:tab algn="l" pos="0"/>
+              </a:tabLst>
+            </a:pPr>
+            <a:r>
+              <a:rPr b="1" lang="en-US" sz="1300" strike="noStrike" u="none">
+                <a:solidFill>
+                  <a:srgbClr val="0e8a6b"/>
+                </a:solidFill>
+                <a:effectLst/>
+                <a:uFillTx/>
+                <a:latin typeface="Calibri"/>
+                <a:ea typeface="Calibri"/>
+              </a:rPr>
+              <a:t>Strength</a:t>
+            </a:r>
+            <a:endParaRPr b="0" lang="en-TR" sz="1300" strike="noStrike" u="none">
+              <a:solidFill>
+                <a:srgbClr val="000000"/>
+              </a:solidFill>
+              <a:effectLst/>
+              <a:uFillTx/>
+              <a:latin typeface="Arial"/>
+            </a:endParaRPr>
+          </a:p>
+        </p:txBody>
+      </p:sp>
+      <p:sp>
+        <p:nvSpPr>
+          <p:cNvPr id="170" name="Text 6"/>
+          <p:cNvSpPr/>
+          <p:nvPr/>
+        </p:nvSpPr>
+        <p:spPr>
+          <a:xfrm>
+            <a:off x="777240" y="2651760"/>
+            <a:ext cx="3153960" cy="822240"/>
+          </a:xfrm>
+          <a:prstGeom prst="rect">
+            <a:avLst/>
+          </a:prstGeom>
+          <a:noFill/>
+          <a:ln w="0">
+            <a:noFill/>
+          </a:ln>
+        </p:spPr>
+        <p:style>
+          <a:lnRef idx="0"/>
+          <a:fillRef idx="0"/>
+          <a:effectRef idx="0"/>
+          <a:fontRef idx="minor"/>
+        </p:style>
+        <p:txBody>
+          <a:bodyPr lIns="0" rIns="0" tIns="0" bIns="0" anchor="ctr">
+            <a:noAutofit/>
+          </a:bodyPr>
+          <a:p>
+            <a:pPr defTabSz="914400">
+              <a:lnSpc>
+                <a:spcPct val="100000"/>
+              </a:lnSpc>
+              <a:tabLst>
+                <a:tab algn="l" pos="0"/>
+              </a:tabLst>
+            </a:pPr>
+            <a:r>
+              <a:rPr b="0" lang="en-US" sz="1200" strike="noStrike" u="none">
+                <a:solidFill>
+                  <a:srgbClr val="334155"/>
+                </a:solidFill>
+                <a:effectLst/>
+                <a:uFillTx/>
+                <a:latin typeface="Calibri"/>
+                <a:ea typeface="Calibri"/>
+              </a:rPr>
+              <a:t>Simple, standards-compliant</a:t>
+            </a:r>
+            <a:endParaRPr b="0" lang="en-TR" sz="1200" strike="noStrike" u="none">
+              <a:solidFill>
+                <a:srgbClr val="000000"/>
+              </a:solidFill>
+              <a:effectLst/>
+              <a:uFillTx/>
+              <a:latin typeface="Arial"/>
+            </a:endParaRPr>
+          </a:p>
+        </p:txBody>
+      </p:sp>
+      <p:sp>
+        <p:nvSpPr>
+          <p:cNvPr id="171" name="Shape 7"/>
+          <p:cNvSpPr/>
+          <p:nvPr/>
+        </p:nvSpPr>
+        <p:spPr>
+          <a:xfrm>
+            <a:off x="777240" y="3566160"/>
+            <a:ext cx="3153960" cy="3960"/>
+          </a:xfrm>
+          <a:prstGeom prst="rect">
+            <a:avLst/>
+          </a:prstGeom>
+          <a:solidFill>
+            <a:srgbClr val="e2e8f0"/>
+          </a:solidFill>
+          <a:ln w="12700">
+            <a:solidFill>
+              <a:srgbClr val="e2e8f0"/>
+            </a:solidFill>
+            <a:round/>
+          </a:ln>
+        </p:spPr>
+        <p:style>
+          <a:lnRef idx="0"/>
+          <a:fillRef idx="0"/>
+          <a:effectRef idx="0"/>
+          <a:fontRef idx="minor"/>
+        </p:style>
+        <p:txBody>
+          <a:bodyPr lIns="90000" rIns="90000" tIns="-40320" bIns="-40320" anchor="t">
+            <a:noAutofit/>
+          </a:bodyPr>
+          <a:p>
+            <a:pPr>
+              <a:lnSpc>
+                <a:spcPct val="100000"/>
+              </a:lnSpc>
+            </a:pPr>
+            <a:endParaRPr b="0" lang="en-TR" sz="1800" strike="noStrike" u="none">
+              <a:solidFill>
+                <a:srgbClr val="000000"/>
+              </a:solidFill>
+              <a:effectLst/>
+              <a:uFillTx/>
+              <a:latin typeface="Arial"/>
+            </a:endParaRPr>
+          </a:p>
+        </p:txBody>
+      </p:sp>
+      <p:sp>
+        <p:nvSpPr>
+          <p:cNvPr id="172" name="Text 8"/>
+          <p:cNvSpPr/>
+          <p:nvPr/>
+        </p:nvSpPr>
+        <p:spPr>
+          <a:xfrm>
+            <a:off x="777240" y="3657600"/>
+            <a:ext cx="3153960" cy="273600"/>
+          </a:xfrm>
+          <a:prstGeom prst="rect">
+            <a:avLst/>
+          </a:prstGeom>
+          <a:noFill/>
+          <a:ln w="0">
+            <a:noFill/>
+          </a:ln>
+        </p:spPr>
+        <p:style>
+          <a:lnRef idx="0"/>
+          <a:fillRef idx="0"/>
+          <a:effectRef idx="0"/>
+          <a:fontRef idx="minor"/>
+        </p:style>
+        <p:txBody>
+          <a:bodyPr lIns="0" rIns="0" tIns="0" bIns="0" anchor="ctr">
+            <a:noAutofit/>
+          </a:bodyPr>
+          <a:p>
+            <a:pPr defTabSz="914400">
+              <a:lnSpc>
+                <a:spcPct val="100000"/>
+              </a:lnSpc>
+              <a:tabLst>
+                <a:tab algn="l" pos="0"/>
+              </a:tabLst>
+            </a:pPr>
+            <a:r>
+              <a:rPr b="1" lang="en-US" sz="1300" strike="noStrike" u="none">
+                <a:solidFill>
+                  <a:srgbClr val="c0392b"/>
+                </a:solidFill>
+                <a:effectLst/>
+                <a:uFillTx/>
+                <a:latin typeface="Calibri"/>
+                <a:ea typeface="Calibri"/>
+              </a:rPr>
+              <a:t>Limitation</a:t>
+            </a:r>
+            <a:endParaRPr b="0" lang="en-TR" sz="1300" strike="noStrike" u="none">
+              <a:solidFill>
+                <a:srgbClr val="000000"/>
+              </a:solidFill>
+              <a:effectLst/>
+              <a:uFillTx/>
+              <a:latin typeface="Arial"/>
+            </a:endParaRPr>
+          </a:p>
+        </p:txBody>
+      </p:sp>
+      <p:sp>
+        <p:nvSpPr>
+          <p:cNvPr id="173" name="Text 9"/>
+          <p:cNvSpPr/>
+          <p:nvPr/>
+        </p:nvSpPr>
+        <p:spPr>
+          <a:xfrm>
+            <a:off x="777240" y="3931920"/>
+            <a:ext cx="3153960" cy="1325160"/>
+          </a:xfrm>
+          <a:prstGeom prst="rect">
+            <a:avLst/>
+          </a:prstGeom>
+          <a:noFill/>
+          <a:ln w="0">
+            <a:noFill/>
+          </a:ln>
+        </p:spPr>
+        <p:style>
+          <a:lnRef idx="0"/>
+          <a:fillRef idx="0"/>
+          <a:effectRef idx="0"/>
+          <a:fontRef idx="minor"/>
+        </p:style>
+        <p:txBody>
+          <a:bodyPr lIns="0" rIns="0" tIns="0" bIns="0" anchor="ctr">
+            <a:noAutofit/>
+          </a:bodyPr>
+          <a:p>
+            <a:pPr defTabSz="914400">
+              <a:lnSpc>
+                <a:spcPct val="100000"/>
+              </a:lnSpc>
+              <a:tabLst>
+                <a:tab algn="l" pos="0"/>
+              </a:tabLst>
+            </a:pPr>
+            <a:r>
+              <a:rPr b="0" lang="en-US" sz="1200" strike="noStrike" u="none">
+                <a:solidFill>
+                  <a:srgbClr val="334155"/>
+                </a:solidFill>
+                <a:effectLst/>
+                <a:uFillTx/>
+                <a:latin typeface="Calibri"/>
+                <a:ea typeface="Calibri"/>
+              </a:rPr>
+              <a:t>Reacts after saturation; inherent control-loop latency</a:t>
+            </a:r>
+            <a:endParaRPr b="0" lang="en-TR" sz="1200" strike="noStrike" u="none">
+              <a:solidFill>
+                <a:srgbClr val="000000"/>
+              </a:solidFill>
+              <a:effectLst/>
+              <a:uFillTx/>
+              <a:latin typeface="Arial"/>
+            </a:endParaRPr>
+          </a:p>
+        </p:txBody>
+      </p:sp>
+      <p:sp>
+        <p:nvSpPr>
+          <p:cNvPr id="174" name="Shape 10"/>
+          <p:cNvSpPr/>
+          <p:nvPr/>
+        </p:nvSpPr>
+        <p:spPr>
+          <a:xfrm>
+            <a:off x="4434840" y="1691640"/>
+            <a:ext cx="3611160" cy="3656880"/>
           </a:xfrm>
           <a:prstGeom prst="rect">
             <a:avLst/>
@@ -31074,6 +32380,11 @@
             <a:noAutofit/>
           </a:bodyPr>
           <a:p>
+            <a:pPr>
+              <a:lnSpc>
+                <a:spcPct val="100000"/>
+              </a:lnSpc>
+            </a:pPr>
             <a:endParaRPr b="0" lang="en-TR" sz="1800" strike="noStrike" u="none">
               <a:solidFill>
                 <a:srgbClr val="000000"/>
@@ -31087,24 +32398,24 @@
       </p:sp>
       <p:sp>
         <p:nvSpPr>
-          <p:cNvPr id="166" name="Shape 3"/>
-          <p:cNvSpPr/>
-          <p:nvPr/>
-        </p:nvSpPr>
-        <p:spPr>
-          <a:xfrm>
-            <a:off x="548640" y="1691640"/>
-            <a:ext cx="3611520" cy="502560"/>
+          <p:cNvPr id="175" name="Shape 11"/>
+          <p:cNvSpPr/>
+          <p:nvPr/>
+        </p:nvSpPr>
+        <p:spPr>
+          <a:xfrm>
+            <a:off x="4434840" y="1691640"/>
+            <a:ext cx="3611160" cy="502200"/>
           </a:xfrm>
           <a:prstGeom prst="rect">
             <a:avLst/>
           </a:prstGeom>
           <a:solidFill>
-            <a:srgbClr val="065a82"/>
+            <a:srgbClr val="1c7293"/>
           </a:solidFill>
           <a:ln w="12700">
             <a:solidFill>
-              <a:srgbClr val="065a82"/>
+              <a:srgbClr val="1c7293"/>
             </a:solidFill>
             <a:round/>
           </a:ln>
@@ -31120,6 +32431,11 @@
             <a:noAutofit/>
           </a:bodyPr>
           <a:p>
+            <a:pPr>
+              <a:lnSpc>
+                <a:spcPct val="100000"/>
+              </a:lnSpc>
+            </a:pPr>
             <a:endParaRPr b="0" lang="en-TR" sz="1800" strike="noStrike" u="none">
               <a:solidFill>
                 <a:srgbClr val="ffffff"/>
@@ -31133,18 +32449,18 @@
       </p:sp>
       <p:pic>
         <p:nvPicPr>
-          <p:cNvPr id="167" name="Image 0" descr="preencoded.png"/>
+          <p:cNvPr id="176" name="Image 1" descr="preencoded.png"/>
           <p:cNvPicPr/>
           <p:nvPr/>
         </p:nvPicPr>
         <p:blipFill>
-          <a:blip r:embed="rId1"/>
+          <a:blip r:embed="rId2"/>
           <a:stretch/>
         </p:blipFill>
         <p:spPr>
           <a:xfrm>
-            <a:off x="777240" y="1801440"/>
-            <a:ext cx="292320" cy="292320"/>
+            <a:off x="4663440" y="1801440"/>
+            <a:ext cx="291960" cy="291960"/>
           </a:xfrm>
           <a:prstGeom prst="rect">
             <a:avLst/>
@@ -31157,14 +32473,14 @@
       </p:pic>
       <p:sp>
         <p:nvSpPr>
-          <p:cNvPr id="168" name="Text 4"/>
-          <p:cNvSpPr/>
-          <p:nvPr/>
-        </p:nvSpPr>
-        <p:spPr>
-          <a:xfrm>
-            <a:off x="1143000" y="1691640"/>
-            <a:ext cx="2971440" cy="502560"/>
+          <p:cNvPr id="177" name="Text 12"/>
+          <p:cNvSpPr/>
+          <p:nvPr/>
+        </p:nvSpPr>
+        <p:spPr>
+          <a:xfrm>
+            <a:off x="5029200" y="1691640"/>
+            <a:ext cx="2971080" cy="502200"/>
           </a:xfrm>
           <a:prstGeom prst="rect">
             <a:avLst/>
@@ -31203,7 +32519,7 @@
                 <a:latin typeface="Cambria"/>
                 <a:ea typeface="Cambria"/>
               </a:rPr>
-              <a:t>Reactive ACB / UAC</a:t>
+              <a:t>ML / DNN predictors</a:t>
             </a:r>
             <a:endParaRPr b="0" lang="en-TR" sz="1400" strike="noStrike" u="none">
               <a:solidFill>
@@ -31218,14 +32534,14 @@
       </p:sp>
       <p:sp>
         <p:nvSpPr>
-          <p:cNvPr id="169" name="Text 5"/>
-          <p:cNvSpPr/>
-          <p:nvPr/>
-        </p:nvSpPr>
-        <p:spPr>
-          <a:xfrm>
-            <a:off x="777240" y="2377440"/>
-            <a:ext cx="3154320" cy="273960"/>
+          <p:cNvPr id="178" name="Text 13"/>
+          <p:cNvSpPr/>
+          <p:nvPr/>
+        </p:nvSpPr>
+        <p:spPr>
+          <a:xfrm>
+            <a:off x="4663440" y="2377440"/>
+            <a:ext cx="3153960" cy="273600"/>
           </a:xfrm>
           <a:prstGeom prst="rect">
             <a:avLst/>
@@ -31255,7 +32571,7 @@
               </a:tabLst>
             </a:pPr>
             <a:r>
-              <a:rPr b="1" lang="en-US" sz="1000" spc="300" strike="noStrike" u="none">
+              <a:rPr b="1" lang="en-US" sz="1300" strike="noStrike" u="none">
                 <a:solidFill>
                   <a:srgbClr val="0e8a6b"/>
                 </a:solidFill>
@@ -31266,27 +32582,27 @@
               </a:rPr>
               <a:t>Strength</a:t>
             </a:r>
-            <a:endParaRPr b="0" lang="en-TR" sz="1000" strike="noStrike" u="none">
-              <a:solidFill>
-                <a:srgbClr val="000000"/>
-              </a:solidFill>
-              <a:effectLst/>
-              <a:uFillTx/>
-              <a:latin typeface="Arial"/>
-            </a:endParaRPr>
-          </a:p>
-        </p:txBody>
-      </p:sp>
-      <p:sp>
-        <p:nvSpPr>
-          <p:cNvPr id="170" name="Text 6"/>
-          <p:cNvSpPr/>
-          <p:nvPr/>
-        </p:nvSpPr>
-        <p:spPr>
-          <a:xfrm>
-            <a:off x="777240" y="2651760"/>
-            <a:ext cx="3154320" cy="822600"/>
+            <a:endParaRPr b="0" lang="en-TR" sz="1300" strike="noStrike" u="none">
+              <a:solidFill>
+                <a:srgbClr val="000000"/>
+              </a:solidFill>
+              <a:effectLst/>
+              <a:uFillTx/>
+              <a:latin typeface="Arial"/>
+            </a:endParaRPr>
+          </a:p>
+        </p:txBody>
+      </p:sp>
+      <p:sp>
+        <p:nvSpPr>
+          <p:cNvPr id="179" name="Text 14"/>
+          <p:cNvSpPr/>
+          <p:nvPr/>
+        </p:nvSpPr>
+        <p:spPr>
+          <a:xfrm>
+            <a:off x="4663440" y="2651760"/>
+            <a:ext cx="3153960" cy="822240"/>
           </a:xfrm>
           <a:prstGeom prst="rect">
             <a:avLst/>
@@ -31325,7 +32641,7 @@
                 <a:latin typeface="Calibri"/>
                 <a:ea typeface="Calibri"/>
               </a:rPr>
-              <a:t>Simple, standards-compliant</a:t>
+              <a:t>High accuracy on stationary traffic</a:t>
             </a:r>
             <a:endParaRPr b="0" lang="en-TR" sz="1200" strike="noStrike" u="none">
               <a:solidFill>
@@ -31340,14 +32656,14 @@
       </p:sp>
       <p:sp>
         <p:nvSpPr>
-          <p:cNvPr id="171" name="Shape 7"/>
-          <p:cNvSpPr/>
-          <p:nvPr/>
-        </p:nvSpPr>
-        <p:spPr>
-          <a:xfrm>
-            <a:off x="777240" y="3566160"/>
-            <a:ext cx="3154320" cy="4320"/>
+          <p:cNvPr id="180" name="Shape 15"/>
+          <p:cNvSpPr/>
+          <p:nvPr/>
+        </p:nvSpPr>
+        <p:spPr>
+          <a:xfrm>
+            <a:off x="4663440" y="3566160"/>
+            <a:ext cx="3153960" cy="3960"/>
           </a:xfrm>
           <a:prstGeom prst="rect">
             <a:avLst/>
@@ -31373,6 +32689,11 @@
             <a:noAutofit/>
           </a:bodyPr>
           <a:p>
+            <a:pPr>
+              <a:lnSpc>
+                <a:spcPct val="100000"/>
+              </a:lnSpc>
+            </a:pPr>
             <a:endParaRPr b="0" lang="en-TR" sz="1800" strike="noStrike" u="none">
               <a:solidFill>
                 <a:srgbClr val="000000"/>
@@ -31386,14 +32707,14 @@
       </p:sp>
       <p:sp>
         <p:nvSpPr>
-          <p:cNvPr id="172" name="Text 8"/>
-          <p:cNvSpPr/>
-          <p:nvPr/>
-        </p:nvSpPr>
-        <p:spPr>
-          <a:xfrm>
-            <a:off x="777240" y="3657600"/>
-            <a:ext cx="3154320" cy="273960"/>
+          <p:cNvPr id="181" name="Text 16"/>
+          <p:cNvSpPr/>
+          <p:nvPr/>
+        </p:nvSpPr>
+        <p:spPr>
+          <a:xfrm>
+            <a:off x="4663440" y="3657600"/>
+            <a:ext cx="3153960" cy="273600"/>
           </a:xfrm>
           <a:prstGeom prst="rect">
             <a:avLst/>
@@ -31423,7 +32744,7 @@
               </a:tabLst>
             </a:pPr>
             <a:r>
-              <a:rPr b="1" lang="en-US" sz="1000" spc="300" strike="noStrike" u="none">
+              <a:rPr b="1" lang="en-US" sz="1300" strike="noStrike" u="none">
                 <a:solidFill>
                   <a:srgbClr val="c0392b"/>
                 </a:solidFill>
@@ -31434,27 +32755,31 @@
               </a:rPr>
               <a:t>Limitation</a:t>
             </a:r>
-            <a:endParaRPr b="0" lang="en-TR" sz="1000" strike="noStrike" u="none">
-              <a:solidFill>
-                <a:srgbClr val="000000"/>
-              </a:solidFill>
-              <a:effectLst/>
-              <a:uFillTx/>
-              <a:latin typeface="Arial"/>
-            </a:endParaRPr>
-          </a:p>
-        </p:txBody>
-      </p:sp>
-      <p:sp>
-        <p:nvSpPr>
-          <p:cNvPr id="173" name="Text 9"/>
-          <p:cNvSpPr/>
-          <p:nvPr/>
-        </p:nvSpPr>
-        <p:spPr>
-          <a:xfrm>
-            <a:off x="777240" y="3931920"/>
-            <a:ext cx="3154320" cy="1325520"/>
+            <a:endParaRPr b="0" lang="en-TR" sz="1300" strike="noStrike" u="none">
+              <a:solidFill>
+                <a:srgbClr val="000000"/>
+              </a:solidFill>
+              <a:effectLst/>
+              <a:highlight>
+                <a:srgbClr val="ffff00"/>
+              </a:highlight>
+              <a:uFillTx/>
+              <a:latin typeface="Arial"/>
+              <a:ea typeface="Arial Unicode MS"/>
+            </a:endParaRPr>
+          </a:p>
+        </p:txBody>
+      </p:sp>
+      <p:sp>
+        <p:nvSpPr>
+          <p:cNvPr id="182" name="Text 17"/>
+          <p:cNvSpPr/>
+          <p:nvPr/>
+        </p:nvSpPr>
+        <p:spPr>
+          <a:xfrm>
+            <a:off x="4663440" y="3931920"/>
+            <a:ext cx="3153960" cy="1325160"/>
           </a:xfrm>
           <a:prstGeom prst="rect">
             <a:avLst/>
@@ -31493,7 +32818,7 @@
                 <a:latin typeface="Calibri"/>
                 <a:ea typeface="Calibri"/>
               </a:rPr>
-              <a:t>Reacts after saturation; inherent control-loop latency</a:t>
+              <a:t>O(W) inference, W ~ 10⁵–10⁷; ms latency — impractical on gNB hardware</a:t>
             </a:r>
             <a:endParaRPr b="0" lang="en-TR" sz="1200" strike="noStrike" u="none">
               <a:solidFill>
@@ -31508,14 +32833,14 @@
       </p:sp>
       <p:sp>
         <p:nvSpPr>
-          <p:cNvPr id="174" name="Shape 10"/>
-          <p:cNvSpPr/>
-          <p:nvPr/>
-        </p:nvSpPr>
-        <p:spPr>
-          <a:xfrm>
-            <a:off x="4434840" y="1691640"/>
-            <a:ext cx="3611520" cy="3657240"/>
+          <p:cNvPr id="183" name="Shape 18"/>
+          <p:cNvSpPr/>
+          <p:nvPr/>
+        </p:nvSpPr>
+        <p:spPr>
+          <a:xfrm>
+            <a:off x="8321040" y="1691640"/>
+            <a:ext cx="3611160" cy="3656880"/>
           </a:xfrm>
           <a:prstGeom prst="rect">
             <a:avLst/>
@@ -31541,6 +32866,11 @@
             <a:noAutofit/>
           </a:bodyPr>
           <a:p>
+            <a:pPr>
+              <a:lnSpc>
+                <a:spcPct val="100000"/>
+              </a:lnSpc>
+            </a:pPr>
             <a:endParaRPr b="0" lang="en-TR" sz="1800" strike="noStrike" u="none">
               <a:solidFill>
                 <a:srgbClr val="000000"/>
@@ -31554,24 +32884,24 @@
       </p:sp>
       <p:sp>
         <p:nvSpPr>
-          <p:cNvPr id="175" name="Shape 11"/>
-          <p:cNvSpPr/>
-          <p:nvPr/>
-        </p:nvSpPr>
-        <p:spPr>
-          <a:xfrm>
-            <a:off x="4434840" y="1691640"/>
-            <a:ext cx="3611520" cy="502560"/>
+          <p:cNvPr id="184" name="Shape 19"/>
+          <p:cNvSpPr/>
+          <p:nvPr/>
+        </p:nvSpPr>
+        <p:spPr>
+          <a:xfrm>
+            <a:off x="8321040" y="1691640"/>
+            <a:ext cx="3611160" cy="502200"/>
           </a:xfrm>
           <a:prstGeom prst="rect">
             <a:avLst/>
           </a:prstGeom>
           <a:solidFill>
-            <a:srgbClr val="1c7293"/>
+            <a:srgbClr val="f4a11a"/>
           </a:solidFill>
           <a:ln w="12700">
             <a:solidFill>
-              <a:srgbClr val="1c7293"/>
+              <a:srgbClr val="f4a11a"/>
             </a:solidFill>
             <a:round/>
           </a:ln>
@@ -31587,9 +32917,14 @@
             <a:noAutofit/>
           </a:bodyPr>
           <a:p>
+            <a:pPr>
+              <a:lnSpc>
+                <a:spcPct val="100000"/>
+              </a:lnSpc>
+            </a:pPr>
             <a:endParaRPr b="0" lang="en-TR" sz="1800" strike="noStrike" u="none">
               <a:solidFill>
-                <a:srgbClr val="ffffff"/>
+                <a:srgbClr val="000000"/>
               </a:solidFill>
               <a:effectLst/>
               <a:uFillTx/>
@@ -31600,18 +32935,18 @@
       </p:sp>
       <p:pic>
         <p:nvPicPr>
-          <p:cNvPr id="176" name="Image 1" descr="preencoded.png"/>
+          <p:cNvPr id="185" name="Image 2" descr="preencoded.png"/>
           <p:cNvPicPr/>
           <p:nvPr/>
         </p:nvPicPr>
         <p:blipFill>
-          <a:blip r:embed="rId2"/>
+          <a:blip r:embed="rId3"/>
           <a:stretch/>
         </p:blipFill>
         <p:spPr>
           <a:xfrm>
-            <a:off x="4663440" y="1801440"/>
-            <a:ext cx="292320" cy="292320"/>
+            <a:off x="8549640" y="1801440"/>
+            <a:ext cx="291960" cy="291960"/>
           </a:xfrm>
           <a:prstGeom prst="rect">
             <a:avLst/>
@@ -31624,14 +32959,14 @@
       </p:pic>
       <p:sp>
         <p:nvSpPr>
-          <p:cNvPr id="177" name="Text 12"/>
-          <p:cNvSpPr/>
-          <p:nvPr/>
-        </p:nvSpPr>
-        <p:spPr>
-          <a:xfrm>
-            <a:off x="5029200" y="1691640"/>
-            <a:ext cx="2971440" cy="502560"/>
+          <p:cNvPr id="186" name="Text 20"/>
+          <p:cNvSpPr/>
+          <p:nvPr/>
+        </p:nvSpPr>
+        <p:spPr>
+          <a:xfrm>
+            <a:off x="8915400" y="1691640"/>
+            <a:ext cx="2971080" cy="502200"/>
           </a:xfrm>
           <a:prstGeom prst="rect">
             <a:avLst/>
@@ -31670,7 +33005,7 @@
                 <a:latin typeface="Cambria"/>
                 <a:ea typeface="Cambria"/>
               </a:rPr>
-              <a:t>ML / DNN predictors</a:t>
+              <a:t>Standard Digital Twin</a:t>
             </a:r>
             <a:endParaRPr b="0" lang="en-TR" sz="1400" strike="noStrike" u="none">
               <a:solidFill>
@@ -31685,14 +33020,14 @@
       </p:sp>
       <p:sp>
         <p:nvSpPr>
-          <p:cNvPr id="178" name="Text 13"/>
-          <p:cNvSpPr/>
-          <p:nvPr/>
-        </p:nvSpPr>
-        <p:spPr>
-          <a:xfrm>
-            <a:off x="4663440" y="2377440"/>
-            <a:ext cx="3154320" cy="273960"/>
+          <p:cNvPr id="187" name="Text 21"/>
+          <p:cNvSpPr/>
+          <p:nvPr/>
+        </p:nvSpPr>
+        <p:spPr>
+          <a:xfrm>
+            <a:off x="8549640" y="2377440"/>
+            <a:ext cx="3153960" cy="273600"/>
           </a:xfrm>
           <a:prstGeom prst="rect">
             <a:avLst/>
@@ -31722,7 +33057,7 @@
               </a:tabLst>
             </a:pPr>
             <a:r>
-              <a:rPr b="1" lang="en-US" sz="1000" spc="300" strike="noStrike" u="none">
+              <a:rPr b="1" lang="en-US" sz="1300" strike="noStrike" u="none">
                 <a:solidFill>
                   <a:srgbClr val="0e8a6b"/>
                 </a:solidFill>
@@ -31733,27 +33068,27 @@
               </a:rPr>
               <a:t>Strength</a:t>
             </a:r>
-            <a:endParaRPr b="0" lang="en-TR" sz="1000" strike="noStrike" u="none">
-              <a:solidFill>
-                <a:srgbClr val="000000"/>
-              </a:solidFill>
-              <a:effectLst/>
-              <a:uFillTx/>
-              <a:latin typeface="Arial"/>
-            </a:endParaRPr>
-          </a:p>
-        </p:txBody>
-      </p:sp>
-      <p:sp>
-        <p:nvSpPr>
-          <p:cNvPr id="179" name="Text 14"/>
-          <p:cNvSpPr/>
-          <p:nvPr/>
-        </p:nvSpPr>
-        <p:spPr>
-          <a:xfrm>
-            <a:off x="4663440" y="2651760"/>
-            <a:ext cx="3154320" cy="822600"/>
+            <a:endParaRPr b="0" lang="en-TR" sz="1300" strike="noStrike" u="none">
+              <a:solidFill>
+                <a:srgbClr val="000000"/>
+              </a:solidFill>
+              <a:effectLst/>
+              <a:uFillTx/>
+              <a:latin typeface="Arial"/>
+            </a:endParaRPr>
+          </a:p>
+        </p:txBody>
+      </p:sp>
+      <p:sp>
+        <p:nvSpPr>
+          <p:cNvPr id="188" name="Text 22"/>
+          <p:cNvSpPr/>
+          <p:nvPr/>
+        </p:nvSpPr>
+        <p:spPr>
+          <a:xfrm>
+            <a:off x="8549640" y="2651760"/>
+            <a:ext cx="3153960" cy="822240"/>
           </a:xfrm>
           <a:prstGeom prst="rect">
             <a:avLst/>
@@ -31792,7 +33127,7 @@
                 <a:latin typeface="Calibri"/>
                 <a:ea typeface="Calibri"/>
               </a:rPr>
-              <a:t>High accuracy on stationary traffic</a:t>
+              <a:t>Proactive control possible</a:t>
             </a:r>
             <a:endParaRPr b="0" lang="en-TR" sz="1200" strike="noStrike" u="none">
               <a:solidFill>
@@ -31807,14 +33142,14 @@
       </p:sp>
       <p:sp>
         <p:nvSpPr>
-          <p:cNvPr id="180" name="Shape 15"/>
-          <p:cNvSpPr/>
-          <p:nvPr/>
-        </p:nvSpPr>
-        <p:spPr>
-          <a:xfrm>
-            <a:off x="4663440" y="3566160"/>
-            <a:ext cx="3154320" cy="4320"/>
+          <p:cNvPr id="189" name="Shape 23"/>
+          <p:cNvSpPr/>
+          <p:nvPr/>
+        </p:nvSpPr>
+        <p:spPr>
+          <a:xfrm>
+            <a:off x="8549640" y="3566160"/>
+            <a:ext cx="3153960" cy="3960"/>
           </a:xfrm>
           <a:prstGeom prst="rect">
             <a:avLst/>
@@ -31840,6 +33175,11 @@
             <a:noAutofit/>
           </a:bodyPr>
           <a:p>
+            <a:pPr>
+              <a:lnSpc>
+                <a:spcPct val="100000"/>
+              </a:lnSpc>
+            </a:pPr>
             <a:endParaRPr b="0" lang="en-TR" sz="1800" strike="noStrike" u="none">
               <a:solidFill>
                 <a:srgbClr val="000000"/>
@@ -31853,14 +33193,14 @@
       </p:sp>
       <p:sp>
         <p:nvSpPr>
-          <p:cNvPr id="181" name="Text 16"/>
-          <p:cNvSpPr/>
-          <p:nvPr/>
-        </p:nvSpPr>
-        <p:spPr>
-          <a:xfrm>
-            <a:off x="4663440" y="3657600"/>
-            <a:ext cx="3154320" cy="273960"/>
+          <p:cNvPr id="190" name="Text 24"/>
+          <p:cNvSpPr/>
+          <p:nvPr/>
+        </p:nvSpPr>
+        <p:spPr>
+          <a:xfrm>
+            <a:off x="8549640" y="3657600"/>
+            <a:ext cx="3153960" cy="273600"/>
           </a:xfrm>
           <a:prstGeom prst="rect">
             <a:avLst/>
@@ -31890,7 +33230,7 @@
               </a:tabLst>
             </a:pPr>
             <a:r>
-              <a:rPr b="1" lang="en-US" sz="1000" spc="300" strike="noStrike" u="none">
+              <a:rPr b="1" lang="en-US" sz="1300" strike="noStrike" u="none">
                 <a:solidFill>
                   <a:srgbClr val="c0392b"/>
                 </a:solidFill>
@@ -31901,27 +33241,27 @@
               </a:rPr>
               <a:t>Limitation</a:t>
             </a:r>
-            <a:endParaRPr b="0" lang="en-TR" sz="1000" strike="noStrike" u="none">
-              <a:solidFill>
-                <a:srgbClr val="000000"/>
-              </a:solidFill>
-              <a:effectLst/>
-              <a:uFillTx/>
-              <a:latin typeface="Arial"/>
-            </a:endParaRPr>
-          </a:p>
-        </p:txBody>
-      </p:sp>
-      <p:sp>
-        <p:nvSpPr>
-          <p:cNvPr id="182" name="Text 17"/>
-          <p:cNvSpPr/>
-          <p:nvPr/>
-        </p:nvSpPr>
-        <p:spPr>
-          <a:xfrm>
-            <a:off x="4663440" y="3931920"/>
-            <a:ext cx="3154320" cy="1325520"/>
+            <a:endParaRPr b="0" lang="en-TR" sz="1300" strike="noStrike" u="none">
+              <a:solidFill>
+                <a:srgbClr val="000000"/>
+              </a:solidFill>
+              <a:effectLst/>
+              <a:uFillTx/>
+              <a:latin typeface="Arial"/>
+            </a:endParaRPr>
+          </a:p>
+        </p:txBody>
+      </p:sp>
+      <p:sp>
+        <p:nvSpPr>
+          <p:cNvPr id="191" name="Text 25"/>
+          <p:cNvSpPr/>
+          <p:nvPr/>
+        </p:nvSpPr>
+        <p:spPr>
+          <a:xfrm>
+            <a:off x="8549640" y="3931920"/>
+            <a:ext cx="3153960" cy="1325160"/>
           </a:xfrm>
           <a:prstGeom prst="rect">
             <a:avLst/>
@@ -31960,7 +33300,7 @@
                 <a:latin typeface="Calibri"/>
                 <a:ea typeface="Calibri"/>
               </a:rPr>
-              <a:t>O(W) inference, W ~ 10⁵–10⁷; ms latency — impractical on gNB hardware</a:t>
+              <a:t>Model drift under non-stationary traffic; mirroring error grows unbounded</a:t>
             </a:r>
             <a:endParaRPr b="0" lang="en-TR" sz="1200" strike="noStrike" u="none">
               <a:solidFill>
@@ -31975,70 +33315,24 @@
       </p:sp>
       <p:sp>
         <p:nvSpPr>
-          <p:cNvPr id="183" name="Shape 18"/>
-          <p:cNvSpPr/>
-          <p:nvPr/>
-        </p:nvSpPr>
-        <p:spPr>
-          <a:xfrm>
-            <a:off x="8321040" y="1691640"/>
-            <a:ext cx="3611520" cy="3657240"/>
+          <p:cNvPr id="192" name="Shape 26"/>
+          <p:cNvSpPr/>
+          <p:nvPr/>
+        </p:nvSpPr>
+        <p:spPr>
+          <a:xfrm>
+            <a:off x="548640" y="5532120"/>
+            <a:ext cx="11063520" cy="593640"/>
           </a:xfrm>
           <a:prstGeom prst="rect">
             <a:avLst/>
           </a:prstGeom>
           <a:solidFill>
-            <a:srgbClr val="ffffff"/>
-          </a:solidFill>
-          <a:ln w="9525">
-            <a:solidFill>
-              <a:srgbClr val="dce3ec"/>
-            </a:solidFill>
-            <a:round/>
-          </a:ln>
-        </p:spPr>
-        <p:style>
-          <a:lnRef idx="0"/>
-          <a:fillRef idx="0"/>
-          <a:effectRef idx="0"/>
-          <a:fontRef idx="minor"/>
-        </p:style>
-        <p:txBody>
-          <a:bodyPr lIns="90000" rIns="90000" tIns="45000" bIns="45000" anchor="t">
-            <a:noAutofit/>
-          </a:bodyPr>
-          <a:p>
-            <a:endParaRPr b="0" lang="en-TR" sz="1800" strike="noStrike" u="none">
-              <a:solidFill>
-                <a:srgbClr val="000000"/>
-              </a:solidFill>
-              <a:effectLst/>
-              <a:uFillTx/>
-              <a:latin typeface="Arial"/>
-            </a:endParaRPr>
-          </a:p>
-        </p:txBody>
-      </p:sp>
-      <p:sp>
-        <p:nvSpPr>
-          <p:cNvPr id="184" name="Shape 19"/>
-          <p:cNvSpPr/>
-          <p:nvPr/>
-        </p:nvSpPr>
-        <p:spPr>
-          <a:xfrm>
-            <a:off x="8321040" y="1691640"/>
-            <a:ext cx="3611520" cy="502560"/>
-          </a:xfrm>
-          <a:prstGeom prst="rect">
-            <a:avLst/>
-          </a:prstGeom>
-          <a:solidFill>
-            <a:srgbClr val="f4a11a"/>
+            <a:srgbClr val="0b1e3f"/>
           </a:solidFill>
           <a:ln w="12700">
             <a:solidFill>
-              <a:srgbClr val="f4a11a"/>
+              <a:srgbClr val="0b1e3f"/>
             </a:solidFill>
             <a:round/>
           </a:ln>
@@ -32054,9 +33348,14 @@
             <a:noAutofit/>
           </a:bodyPr>
           <a:p>
+            <a:pPr>
+              <a:lnSpc>
+                <a:spcPct val="100000"/>
+              </a:lnSpc>
+            </a:pPr>
             <a:endParaRPr b="0" lang="en-TR" sz="1800" strike="noStrike" u="none">
               <a:solidFill>
-                <a:srgbClr val="000000"/>
+                <a:srgbClr val="ffffff"/>
               </a:solidFill>
               <a:effectLst/>
               <a:uFillTx/>
@@ -32067,18 +33366,18 @@
       </p:sp>
       <p:pic>
         <p:nvPicPr>
-          <p:cNvPr id="185" name="Image 2" descr="preencoded.png"/>
+          <p:cNvPr id="193" name="Image 3" descr="preencoded.png"/>
           <p:cNvPicPr/>
           <p:nvPr/>
         </p:nvPicPr>
         <p:blipFill>
-          <a:blip r:embed="rId3"/>
+          <a:blip r:embed="rId4"/>
           <a:stretch/>
         </p:blipFill>
         <p:spPr>
           <a:xfrm>
-            <a:off x="8549640" y="1801440"/>
-            <a:ext cx="292320" cy="292320"/>
+            <a:off x="713160" y="5650920"/>
+            <a:ext cx="365040" cy="365040"/>
           </a:xfrm>
           <a:prstGeom prst="rect">
             <a:avLst/>
@@ -32091,14 +33390,14 @@
       </p:pic>
       <p:sp>
         <p:nvSpPr>
-          <p:cNvPr id="186" name="Text 20"/>
-          <p:cNvSpPr/>
-          <p:nvPr/>
-        </p:nvSpPr>
-        <p:spPr>
-          <a:xfrm>
-            <a:off x="8915400" y="1691640"/>
-            <a:ext cx="2971440" cy="502560"/>
+          <p:cNvPr id="194" name="Text 27"/>
+          <p:cNvSpPr/>
+          <p:nvPr/>
+        </p:nvSpPr>
+        <p:spPr>
+          <a:xfrm>
+            <a:off x="1188720" y="5532120"/>
+            <a:ext cx="10332000" cy="593640"/>
           </a:xfrm>
           <a:prstGeom prst="rect">
             <a:avLst/>
@@ -32128,160 +33427,38 @@
               </a:tabLst>
             </a:pPr>
             <a:r>
-              <a:rPr b="1" lang="en-US" sz="1400" strike="noStrike" u="none">
+              <a:rPr b="1" lang="en-US" sz="1250" strike="noStrike" u="none">
                 <a:solidFill>
                   <a:srgbClr val="ffffff"/>
-                </a:solidFill>
-                <a:effectLst/>
-                <a:uFillTx/>
-                <a:latin typeface="Cambria"/>
-                <a:ea typeface="Cambria"/>
-              </a:rPr>
-              <a:t>Standard Digital Twin</a:t>
-            </a:r>
-            <a:endParaRPr b="0" lang="en-TR" sz="1400" strike="noStrike" u="none">
-              <a:solidFill>
-                <a:srgbClr val="000000"/>
-              </a:solidFill>
-              <a:effectLst/>
-              <a:uFillTx/>
-              <a:latin typeface="Arial"/>
-            </a:endParaRPr>
-          </a:p>
-        </p:txBody>
-      </p:sp>
-      <p:sp>
-        <p:nvSpPr>
-          <p:cNvPr id="187" name="Text 21"/>
-          <p:cNvSpPr/>
-          <p:nvPr/>
-        </p:nvSpPr>
-        <p:spPr>
-          <a:xfrm>
-            <a:off x="8549640" y="2377440"/>
-            <a:ext cx="3154320" cy="273960"/>
-          </a:xfrm>
-          <a:prstGeom prst="rect">
-            <a:avLst/>
-          </a:prstGeom>
-          <a:noFill/>
-          <a:ln w="0">
-            <a:noFill/>
-          </a:ln>
-        </p:spPr>
-        <p:style>
-          <a:lnRef idx="0"/>
-          <a:fillRef idx="0"/>
-          <a:effectRef idx="0"/>
-          <a:fontRef idx="minor"/>
-        </p:style>
-        <p:txBody>
-          <a:bodyPr lIns="0" rIns="0" tIns="0" bIns="0" anchor="ctr">
-            <a:noAutofit/>
-          </a:bodyPr>
-          <a:p>
-            <a:pPr defTabSz="914400">
-              <a:lnSpc>
-                <a:spcPct val="100000"/>
-              </a:lnSpc>
-              <a:tabLst>
-                <a:tab algn="l" pos="0"/>
-              </a:tabLst>
-            </a:pPr>
-            <a:r>
-              <a:rPr b="1" lang="en-US" sz="1000" spc="300" strike="noStrike" u="none">
-                <a:solidFill>
-                  <a:srgbClr val="0e8a6b"/>
                 </a:solidFill>
                 <a:effectLst/>
                 <a:uFillTx/>
                 <a:latin typeface="Calibri"/>
                 <a:ea typeface="Calibri"/>
               </a:rPr>
-              <a:t>Strength</a:t>
+              <a:t>Gap: no DT approach suppresses model drift via an online calibration loop during the attack interval. This work closes that gap.</a:t>
             </a:r>
-            <a:endParaRPr b="0" lang="en-TR" sz="1000" strike="noStrike" u="none">
-              <a:solidFill>
-                <a:srgbClr val="000000"/>
-              </a:solidFill>
-              <a:effectLst/>
-              <a:uFillTx/>
-              <a:latin typeface="Arial"/>
-            </a:endParaRPr>
-          </a:p>
-        </p:txBody>
-      </p:sp>
-      <p:sp>
-        <p:nvSpPr>
-          <p:cNvPr id="188" name="Text 22"/>
-          <p:cNvSpPr/>
-          <p:nvPr/>
-        </p:nvSpPr>
-        <p:spPr>
-          <a:xfrm>
-            <a:off x="8549640" y="2651760"/>
-            <a:ext cx="3154320" cy="822600"/>
-          </a:xfrm>
-          <a:prstGeom prst="rect">
-            <a:avLst/>
-          </a:prstGeom>
-          <a:noFill/>
-          <a:ln w="0">
-            <a:noFill/>
-          </a:ln>
-        </p:spPr>
-        <p:style>
-          <a:lnRef idx="0"/>
-          <a:fillRef idx="0"/>
-          <a:effectRef idx="0"/>
-          <a:fontRef idx="minor"/>
-        </p:style>
-        <p:txBody>
-          <a:bodyPr lIns="0" rIns="0" tIns="0" bIns="0" anchor="ctr">
-            <a:noAutofit/>
-          </a:bodyPr>
-          <a:p>
-            <a:pPr defTabSz="914400">
-              <a:lnSpc>
-                <a:spcPct val="100000"/>
-              </a:lnSpc>
-              <a:tabLst>
-                <a:tab algn="l" pos="0"/>
-              </a:tabLst>
-            </a:pPr>
-            <a:r>
-              <a:rPr b="0" lang="en-US" sz="1200" strike="noStrike" u="none">
-                <a:solidFill>
-                  <a:srgbClr val="334155"/>
-                </a:solidFill>
-                <a:effectLst/>
-                <a:uFillTx/>
-                <a:latin typeface="Calibri"/>
-                <a:ea typeface="Calibri"/>
-              </a:rPr>
-              <a:t>Proactive control possible</a:t>
-            </a:r>
-            <a:endParaRPr b="0" lang="en-TR" sz="1200" strike="noStrike" u="none">
-              <a:solidFill>
-                <a:srgbClr val="000000"/>
-              </a:solidFill>
-              <a:effectLst/>
-              <a:uFillTx/>
-              <a:latin typeface="Arial"/>
-            </a:endParaRPr>
-          </a:p>
-        </p:txBody>
-      </p:sp>
-      <p:sp>
-        <p:nvSpPr>
-          <p:cNvPr id="189" name="Shape 23"/>
-          <p:cNvSpPr/>
-          <p:nvPr/>
-        </p:nvSpPr>
-        <p:spPr>
-          <a:xfrm>
-            <a:off x="8549640" y="3566160"/>
-            <a:ext cx="3154320" cy="4320"/>
+            <a:endParaRPr b="0" lang="en-TR" sz="1250" strike="noStrike" u="none">
+              <a:solidFill>
+                <a:srgbClr val="000000"/>
+              </a:solidFill>
+              <a:effectLst/>
+              <a:uFillTx/>
+              <a:latin typeface="Arial"/>
+            </a:endParaRPr>
+          </a:p>
+        </p:txBody>
+      </p:sp>
+      <p:sp>
+        <p:nvSpPr>
+          <p:cNvPr id="195" name="Shape 28"/>
+          <p:cNvSpPr/>
+          <p:nvPr/>
+        </p:nvSpPr>
+        <p:spPr>
+          <a:xfrm>
+            <a:off x="548640" y="6355080"/>
+            <a:ext cx="11063520" cy="10080"/>
           </a:xfrm>
           <a:prstGeom prst="rect">
             <a:avLst/>
@@ -32303,10 +33480,15 @@
           <a:fontRef idx="minor"/>
         </p:style>
         <p:txBody>
-          <a:bodyPr lIns="90000" rIns="90000" tIns="-40320" bIns="-40320" anchor="t">
-            <a:noAutofit/>
-          </a:bodyPr>
-          <a:p>
+          <a:bodyPr lIns="90000" rIns="90000" tIns="-34200" bIns="-34200" anchor="t">
+            <a:noAutofit/>
+          </a:bodyPr>
+          <a:p>
+            <a:pPr>
+              <a:lnSpc>
+                <a:spcPct val="100000"/>
+              </a:lnSpc>
+            </a:pPr>
             <a:endParaRPr b="0" lang="en-TR" sz="1800" strike="noStrike" u="none">
               <a:solidFill>
                 <a:srgbClr val="000000"/>
@@ -32320,14 +33502,14 @@
       </p:sp>
       <p:sp>
         <p:nvSpPr>
-          <p:cNvPr id="190" name="Text 24"/>
-          <p:cNvSpPr/>
-          <p:nvPr/>
-        </p:nvSpPr>
-        <p:spPr>
-          <a:xfrm>
-            <a:off x="8549640" y="3657600"/>
-            <a:ext cx="3154320" cy="273960"/>
+          <p:cNvPr id="196" name="Text 29"/>
+          <p:cNvSpPr/>
+          <p:nvPr/>
+        </p:nvSpPr>
+        <p:spPr>
+          <a:xfrm>
+            <a:off x="548640" y="6446520"/>
+            <a:ext cx="7314480" cy="273600"/>
           </a:xfrm>
           <a:prstGeom prst="rect">
             <a:avLst/>
@@ -32357,305 +33539,6 @@
               </a:tabLst>
             </a:pPr>
             <a:r>
-              <a:rPr b="1" lang="en-US" sz="1000" spc="300" strike="noStrike" u="none">
-                <a:solidFill>
-                  <a:srgbClr val="c0392b"/>
-                </a:solidFill>
-                <a:effectLst/>
-                <a:uFillTx/>
-                <a:latin typeface="Calibri"/>
-                <a:ea typeface="Calibri"/>
-              </a:rPr>
-              <a:t>Limitation</a:t>
-            </a:r>
-            <a:endParaRPr b="0" lang="en-TR" sz="1000" strike="noStrike" u="none">
-              <a:solidFill>
-                <a:srgbClr val="000000"/>
-              </a:solidFill>
-              <a:effectLst/>
-              <a:uFillTx/>
-              <a:latin typeface="Arial"/>
-            </a:endParaRPr>
-          </a:p>
-        </p:txBody>
-      </p:sp>
-      <p:sp>
-        <p:nvSpPr>
-          <p:cNvPr id="191" name="Text 25"/>
-          <p:cNvSpPr/>
-          <p:nvPr/>
-        </p:nvSpPr>
-        <p:spPr>
-          <a:xfrm>
-            <a:off x="8549640" y="3931920"/>
-            <a:ext cx="3154320" cy="1325520"/>
-          </a:xfrm>
-          <a:prstGeom prst="rect">
-            <a:avLst/>
-          </a:prstGeom>
-          <a:noFill/>
-          <a:ln w="0">
-            <a:noFill/>
-          </a:ln>
-        </p:spPr>
-        <p:style>
-          <a:lnRef idx="0"/>
-          <a:fillRef idx="0"/>
-          <a:effectRef idx="0"/>
-          <a:fontRef idx="minor"/>
-        </p:style>
-        <p:txBody>
-          <a:bodyPr lIns="0" rIns="0" tIns="0" bIns="0" anchor="ctr">
-            <a:noAutofit/>
-          </a:bodyPr>
-          <a:p>
-            <a:pPr defTabSz="914400">
-              <a:lnSpc>
-                <a:spcPct val="100000"/>
-              </a:lnSpc>
-              <a:tabLst>
-                <a:tab algn="l" pos="0"/>
-              </a:tabLst>
-            </a:pPr>
-            <a:r>
-              <a:rPr b="0" lang="en-US" sz="1200" strike="noStrike" u="none">
-                <a:solidFill>
-                  <a:srgbClr val="334155"/>
-                </a:solidFill>
-                <a:effectLst/>
-                <a:uFillTx/>
-                <a:latin typeface="Calibri"/>
-                <a:ea typeface="Calibri"/>
-              </a:rPr>
-              <a:t>Model drift under non-stationary traffic; mirroring error grows unbounded</a:t>
-            </a:r>
-            <a:endParaRPr b="0" lang="en-TR" sz="1200" strike="noStrike" u="none">
-              <a:solidFill>
-                <a:srgbClr val="000000"/>
-              </a:solidFill>
-              <a:effectLst/>
-              <a:uFillTx/>
-              <a:latin typeface="Arial"/>
-            </a:endParaRPr>
-          </a:p>
-        </p:txBody>
-      </p:sp>
-      <p:sp>
-        <p:nvSpPr>
-          <p:cNvPr id="192" name="Shape 26"/>
-          <p:cNvSpPr/>
-          <p:nvPr/>
-        </p:nvSpPr>
-        <p:spPr>
-          <a:xfrm>
-            <a:off x="548640" y="5532120"/>
-            <a:ext cx="11063880" cy="594000"/>
-          </a:xfrm>
-          <a:prstGeom prst="rect">
-            <a:avLst/>
-          </a:prstGeom>
-          <a:solidFill>
-            <a:srgbClr val="0b1e3f"/>
-          </a:solidFill>
-          <a:ln w="12700">
-            <a:solidFill>
-              <a:srgbClr val="0b1e3f"/>
-            </a:solidFill>
-            <a:round/>
-          </a:ln>
-        </p:spPr>
-        <p:style>
-          <a:lnRef idx="0"/>
-          <a:fillRef idx="0"/>
-          <a:effectRef idx="0"/>
-          <a:fontRef idx="minor"/>
-        </p:style>
-        <p:txBody>
-          <a:bodyPr lIns="90000" rIns="90000" tIns="45000" bIns="45000" anchor="t">
-            <a:noAutofit/>
-          </a:bodyPr>
-          <a:p>
-            <a:endParaRPr b="0" lang="en-TR" sz="1800" strike="noStrike" u="none">
-              <a:solidFill>
-                <a:srgbClr val="ffffff"/>
-              </a:solidFill>
-              <a:effectLst/>
-              <a:uFillTx/>
-              <a:latin typeface="Arial"/>
-            </a:endParaRPr>
-          </a:p>
-        </p:txBody>
-      </p:sp>
-      <p:pic>
-        <p:nvPicPr>
-          <p:cNvPr id="193" name="Image 3" descr="preencoded.png"/>
-          <p:cNvPicPr/>
-          <p:nvPr/>
-        </p:nvPicPr>
-        <p:blipFill>
-          <a:blip r:embed="rId4"/>
-          <a:stretch/>
-        </p:blipFill>
-        <p:spPr>
-          <a:xfrm>
-            <a:off x="713160" y="5650920"/>
-            <a:ext cx="365400" cy="365400"/>
-          </a:xfrm>
-          <a:prstGeom prst="rect">
-            <a:avLst/>
-          </a:prstGeom>
-          <a:noFill/>
-          <a:ln w="0">
-            <a:noFill/>
-          </a:ln>
-        </p:spPr>
-      </p:pic>
-      <p:sp>
-        <p:nvSpPr>
-          <p:cNvPr id="194" name="Text 27"/>
-          <p:cNvSpPr/>
-          <p:nvPr/>
-        </p:nvSpPr>
-        <p:spPr>
-          <a:xfrm>
-            <a:off x="1188720" y="5532120"/>
-            <a:ext cx="10332360" cy="594000"/>
-          </a:xfrm>
-          <a:prstGeom prst="rect">
-            <a:avLst/>
-          </a:prstGeom>
-          <a:noFill/>
-          <a:ln w="0">
-            <a:noFill/>
-          </a:ln>
-        </p:spPr>
-        <p:style>
-          <a:lnRef idx="0"/>
-          <a:fillRef idx="0"/>
-          <a:effectRef idx="0"/>
-          <a:fontRef idx="minor"/>
-        </p:style>
-        <p:txBody>
-          <a:bodyPr lIns="0" rIns="0" tIns="0" bIns="0" anchor="ctr">
-            <a:noAutofit/>
-          </a:bodyPr>
-          <a:p>
-            <a:pPr defTabSz="914400">
-              <a:lnSpc>
-                <a:spcPct val="100000"/>
-              </a:lnSpc>
-              <a:tabLst>
-                <a:tab algn="l" pos="0"/>
-              </a:tabLst>
-            </a:pPr>
-            <a:r>
-              <a:rPr b="1" lang="en-US" sz="1250" strike="noStrike" u="none">
-                <a:solidFill>
-                  <a:srgbClr val="ffffff"/>
-                </a:solidFill>
-                <a:effectLst/>
-                <a:uFillTx/>
-                <a:latin typeface="Calibri"/>
-                <a:ea typeface="Calibri"/>
-              </a:rPr>
-              <a:t>Gap: no DT approach suppresses model drift via an online calibration loop during the attack interval. This work closes that gap.</a:t>
-            </a:r>
-            <a:endParaRPr b="0" lang="en-TR" sz="1250" strike="noStrike" u="none">
-              <a:solidFill>
-                <a:srgbClr val="000000"/>
-              </a:solidFill>
-              <a:effectLst/>
-              <a:uFillTx/>
-              <a:latin typeface="Arial"/>
-            </a:endParaRPr>
-          </a:p>
-        </p:txBody>
-      </p:sp>
-      <p:sp>
-        <p:nvSpPr>
-          <p:cNvPr id="195" name="Shape 28"/>
-          <p:cNvSpPr/>
-          <p:nvPr/>
-        </p:nvSpPr>
-        <p:spPr>
-          <a:xfrm>
-            <a:off x="548640" y="6355080"/>
-            <a:ext cx="11063880" cy="10440"/>
-          </a:xfrm>
-          <a:prstGeom prst="rect">
-            <a:avLst/>
-          </a:prstGeom>
-          <a:solidFill>
-            <a:srgbClr val="e2e8f0"/>
-          </a:solidFill>
-          <a:ln w="12700">
-            <a:solidFill>
-              <a:srgbClr val="e2e8f0"/>
-            </a:solidFill>
-            <a:round/>
-          </a:ln>
-        </p:spPr>
-        <p:style>
-          <a:lnRef idx="0"/>
-          <a:fillRef idx="0"/>
-          <a:effectRef idx="0"/>
-          <a:fontRef idx="minor"/>
-        </p:style>
-        <p:txBody>
-          <a:bodyPr lIns="90000" rIns="90000" tIns="-34200" bIns="-34200" anchor="t">
-            <a:noAutofit/>
-          </a:bodyPr>
-          <a:p>
-            <a:endParaRPr b="0" lang="en-TR" sz="1800" strike="noStrike" u="none">
-              <a:solidFill>
-                <a:srgbClr val="000000"/>
-              </a:solidFill>
-              <a:effectLst/>
-              <a:uFillTx/>
-              <a:latin typeface="Arial"/>
-            </a:endParaRPr>
-          </a:p>
-        </p:txBody>
-      </p:sp>
-      <p:sp>
-        <p:nvSpPr>
-          <p:cNvPr id="196" name="Text 29"/>
-          <p:cNvSpPr/>
-          <p:nvPr/>
-        </p:nvSpPr>
-        <p:spPr>
-          <a:xfrm>
-            <a:off x="548640" y="6446520"/>
-            <a:ext cx="7314840" cy="273960"/>
-          </a:xfrm>
-          <a:prstGeom prst="rect">
-            <a:avLst/>
-          </a:prstGeom>
-          <a:noFill/>
-          <a:ln w="0">
-            <a:noFill/>
-          </a:ln>
-        </p:spPr>
-        <p:style>
-          <a:lnRef idx="0"/>
-          <a:fillRef idx="0"/>
-          <a:effectRef idx="0"/>
-          <a:fontRef idx="minor"/>
-        </p:style>
-        <p:txBody>
-          <a:bodyPr lIns="0" rIns="0" tIns="0" bIns="0" anchor="ctr">
-            <a:noAutofit/>
-          </a:bodyPr>
-          <a:p>
-            <a:pPr defTabSz="914400">
-              <a:lnSpc>
-                <a:spcPct val="100000"/>
-              </a:lnSpc>
-              <a:tabLst>
-                <a:tab algn="l" pos="0"/>
-              </a:tabLst>
-            </a:pPr>
-            <a:r>
               <a:rPr b="0" lang="en-US" sz="900" strike="noStrike" u="none">
                 <a:solidFill>
                   <a:srgbClr val="64748b"/>
@@ -32687,7 +33570,7 @@
         <p:spPr>
           <a:xfrm>
             <a:off x="10698480" y="6446520"/>
-            <a:ext cx="914040" cy="273960"/>
+            <a:ext cx="913680" cy="273600"/>
           </a:xfrm>
           <a:prstGeom prst="rect">
             <a:avLst/>
@@ -32785,7 +33668,7 @@
         <p:spPr>
           <a:xfrm>
             <a:off x="548640" y="411480"/>
-            <a:ext cx="10972440" cy="273960"/>
+            <a:ext cx="10972080" cy="273600"/>
           </a:xfrm>
           <a:prstGeom prst="rect">
             <a:avLst/>
@@ -32846,7 +33729,7 @@
         <p:spPr>
           <a:xfrm>
             <a:off x="548640" y="713160"/>
-            <a:ext cx="10972440" cy="776880"/>
+            <a:ext cx="10972080" cy="776520"/>
           </a:xfrm>
           <a:prstGeom prst="rect">
             <a:avLst/>
@@ -32907,7 +33790,7 @@
         <p:spPr>
           <a:xfrm>
             <a:off x="548640" y="1600200"/>
-            <a:ext cx="6400440" cy="4525920"/>
+            <a:ext cx="6400080" cy="4525560"/>
           </a:xfrm>
           <a:prstGeom prst="rect">
             <a:avLst/>
@@ -32933,6 +33816,11 @@
             <a:noAutofit/>
           </a:bodyPr>
           <a:p>
+            <a:pPr>
+              <a:lnSpc>
+                <a:spcPct val="100000"/>
+              </a:lnSpc>
+            </a:pPr>
             <a:endParaRPr b="0" lang="en-TR" sz="1800" strike="noStrike" u="none">
               <a:solidFill>
                 <a:srgbClr val="000000"/>
@@ -32953,7 +33841,7 @@
         <p:spPr>
           <a:xfrm>
             <a:off x="822960" y="1737360"/>
-            <a:ext cx="5943240" cy="319680"/>
+            <a:ext cx="5942880" cy="319320"/>
           </a:xfrm>
           <a:prstGeom prst="rect">
             <a:avLst/>
@@ -33014,7 +33902,7 @@
         <p:spPr>
           <a:xfrm>
             <a:off x="914400" y="2880360"/>
-            <a:ext cx="1828440" cy="1188360"/>
+            <a:ext cx="1828080" cy="1188000"/>
           </a:xfrm>
           <a:prstGeom prst="roundRect">
             <a:avLst>
@@ -33042,6 +33930,11 @@
             <a:noAutofit/>
           </a:bodyPr>
           <a:p>
+            <a:pPr>
+              <a:lnSpc>
+                <a:spcPct val="100000"/>
+              </a:lnSpc>
+            </a:pPr>
             <a:endParaRPr b="0" lang="en-TR" sz="1800" strike="noStrike" u="none">
               <a:solidFill>
                 <a:srgbClr val="ffffff"/>
@@ -33062,7 +33955,7 @@
         <p:spPr>
           <a:xfrm>
             <a:off x="914400" y="2880360"/>
-            <a:ext cx="1828440" cy="1188360"/>
+            <a:ext cx="1828080" cy="1188000"/>
           </a:xfrm>
           <a:prstGeom prst="rect">
             <a:avLst/>
@@ -33153,7 +34046,7 @@
         <p:spPr>
           <a:xfrm>
             <a:off x="4754880" y="2880360"/>
-            <a:ext cx="1828440" cy="1188360"/>
+            <a:ext cx="1828080" cy="1188000"/>
           </a:xfrm>
           <a:prstGeom prst="roundRect">
             <a:avLst>
@@ -33181,6 +34074,11 @@
             <a:noAutofit/>
           </a:bodyPr>
           <a:p>
+            <a:pPr>
+              <a:lnSpc>
+                <a:spcPct val="100000"/>
+              </a:lnSpc>
+            </a:pPr>
             <a:endParaRPr b="0" lang="en-TR" sz="1800" strike="noStrike" u="none">
               <a:solidFill>
                 <a:srgbClr val="ffffff"/>
@@ -33201,7 +34099,7 @@
         <p:spPr>
           <a:xfrm>
             <a:off x="4754880" y="2880360"/>
-            <a:ext cx="1828440" cy="1188360"/>
+            <a:ext cx="1828080" cy="1188000"/>
           </a:xfrm>
           <a:prstGeom prst="rect">
             <a:avLst/>
@@ -33336,7 +34234,7 @@
         <p:spPr>
           <a:xfrm>
             <a:off x="2743200" y="2880360"/>
-            <a:ext cx="2011320" cy="273960"/>
+            <a:ext cx="2010960" cy="273600"/>
           </a:xfrm>
           <a:prstGeom prst="rect">
             <a:avLst/>
@@ -33441,7 +34339,7 @@
         <p:spPr>
           <a:xfrm>
             <a:off x="2743200" y="3794760"/>
-            <a:ext cx="2011320" cy="273960"/>
+            <a:ext cx="2010960" cy="273600"/>
           </a:xfrm>
           <a:prstGeom prst="rect">
             <a:avLst/>
@@ -33502,7 +34400,7 @@
         <p:spPr>
           <a:xfrm>
             <a:off x="822960" y="4389120"/>
-            <a:ext cx="5943240" cy="273960"/>
+            <a:ext cx="5942880" cy="273600"/>
           </a:xfrm>
           <a:prstGeom prst="rect">
             <a:avLst/>
@@ -33563,7 +34461,7 @@
         <p:spPr>
           <a:xfrm>
             <a:off x="822960" y="4709160"/>
-            <a:ext cx="5943240" cy="411120"/>
+            <a:ext cx="5942880" cy="410760"/>
           </a:xfrm>
           <a:prstGeom prst="rect">
             <a:avLst/>
@@ -33624,7 +34522,7 @@
         <p:spPr>
           <a:xfrm>
             <a:off x="822960" y="5212080"/>
-            <a:ext cx="5943240" cy="365400"/>
+            <a:ext cx="5942880" cy="365040"/>
           </a:xfrm>
           <a:prstGeom prst="rect">
             <a:avLst/>
@@ -33685,7 +34583,7 @@
         <p:spPr>
           <a:xfrm>
             <a:off x="7178040" y="1600200"/>
-            <a:ext cx="4571640" cy="4525920"/>
+            <a:ext cx="4571280" cy="4525560"/>
           </a:xfrm>
           <a:prstGeom prst="rect">
             <a:avLst/>
@@ -33711,6 +34609,11 @@
             <a:noAutofit/>
           </a:bodyPr>
           <a:p>
+            <a:pPr>
+              <a:lnSpc>
+                <a:spcPct val="100000"/>
+              </a:lnSpc>
+            </a:pPr>
             <a:endParaRPr b="0" lang="en-TR" sz="1800" strike="noStrike" u="none">
               <a:solidFill>
                 <a:srgbClr val="000000"/>
@@ -33731,7 +34634,7 @@
         <p:spPr>
           <a:xfrm>
             <a:off x="7178040" y="1600200"/>
-            <a:ext cx="63720" cy="4525920"/>
+            <a:ext cx="63360" cy="4525560"/>
           </a:xfrm>
           <a:prstGeom prst="rect">
             <a:avLst/>
@@ -33757,6 +34660,11 @@
             <a:noAutofit/>
           </a:bodyPr>
           <a:p>
+            <a:pPr>
+              <a:lnSpc>
+                <a:spcPct val="100000"/>
+              </a:lnSpc>
+            </a:pPr>
             <a:endParaRPr b="0" lang="en-TR" sz="1800" strike="noStrike" u="none">
               <a:solidFill>
                 <a:srgbClr val="ffffff"/>
@@ -33777,7 +34685,7 @@
         <p:spPr>
           <a:xfrm>
             <a:off x="7452360" y="1737360"/>
-            <a:ext cx="4114440" cy="365400"/>
+            <a:ext cx="4114080" cy="365040"/>
           </a:xfrm>
           <a:prstGeom prst="rect">
             <a:avLst/>
@@ -34388,7 +35296,7 @@
         <p:spPr>
           <a:xfrm>
             <a:off x="7452360" y="4709160"/>
-            <a:ext cx="411120" cy="411120"/>
+            <a:ext cx="410760" cy="410760"/>
           </a:xfrm>
           <a:prstGeom prst="rect">
             <a:avLst/>
@@ -34408,7 +35316,7 @@
         <p:spPr>
           <a:xfrm>
             <a:off x="7955280" y="4709160"/>
-            <a:ext cx="3657240" cy="1188360"/>
+            <a:ext cx="3656880" cy="1188000"/>
           </a:xfrm>
           <a:prstGeom prst="rect">
             <a:avLst/>
@@ -34469,7 +35377,7 @@
         <p:spPr>
           <a:xfrm>
             <a:off x="548640" y="6355080"/>
-            <a:ext cx="11063880" cy="10440"/>
+            <a:ext cx="11063520" cy="10080"/>
           </a:xfrm>
           <a:prstGeom prst="rect">
             <a:avLst/>
@@ -34495,6 +35403,11 @@
             <a:noAutofit/>
           </a:bodyPr>
           <a:p>
+            <a:pPr>
+              <a:lnSpc>
+                <a:spcPct val="100000"/>
+              </a:lnSpc>
+            </a:pPr>
             <a:endParaRPr b="0" lang="en-TR" sz="1800" strike="noStrike" u="none">
               <a:solidFill>
                 <a:srgbClr val="000000"/>
@@ -34515,7 +35428,7 @@
         <p:spPr>
           <a:xfrm>
             <a:off x="548640" y="6446520"/>
-            <a:ext cx="7314840" cy="273960"/>
+            <a:ext cx="7314480" cy="273600"/>
           </a:xfrm>
           <a:prstGeom prst="rect">
             <a:avLst/>
@@ -34576,7 +35489,7 @@
         <p:spPr>
           <a:xfrm>
             <a:off x="10698480" y="6446520"/>
-            <a:ext cx="914040" cy="273960"/>
+            <a:ext cx="913680" cy="273600"/>
           </a:xfrm>
           <a:prstGeom prst="rect">
             <a:avLst/>
@@ -34674,7 +35587,7 @@
         <p:spPr>
           <a:xfrm>
             <a:off x="548640" y="411480"/>
-            <a:ext cx="10972440" cy="273960"/>
+            <a:ext cx="10972080" cy="273600"/>
           </a:xfrm>
           <a:prstGeom prst="rect">
             <a:avLst/>
@@ -34735,7 +35648,7 @@
         <p:spPr>
           <a:xfrm>
             <a:off x="548640" y="713160"/>
-            <a:ext cx="10972440" cy="776880"/>
+            <a:ext cx="10972080" cy="776520"/>
           </a:xfrm>
           <a:prstGeom prst="rect">
             <a:avLst/>
@@ -34796,7 +35709,7 @@
         <p:spPr>
           <a:xfrm>
             <a:off x="548640" y="1645920"/>
-            <a:ext cx="2742840" cy="4297320"/>
+            <a:ext cx="2742480" cy="4296960"/>
           </a:xfrm>
           <a:prstGeom prst="rect">
             <a:avLst/>
@@ -34822,6 +35735,11 @@
             <a:noAutofit/>
           </a:bodyPr>
           <a:p>
+            <a:pPr>
+              <a:lnSpc>
+                <a:spcPct val="100000"/>
+              </a:lnSpc>
+            </a:pPr>
             <a:endParaRPr b="0" lang="en-TR" sz="1800" strike="noStrike" u="none">
               <a:solidFill>
                 <a:srgbClr val="000000"/>
@@ -34842,7 +35760,7 @@
         <p:spPr>
           <a:xfrm>
             <a:off x="548640" y="1645920"/>
-            <a:ext cx="63720" cy="4297320"/>
+            <a:ext cx="63360" cy="4296960"/>
           </a:xfrm>
           <a:prstGeom prst="rect">
             <a:avLst/>
@@ -34868,6 +35786,11 @@
             <a:noAutofit/>
           </a:bodyPr>
           <a:p>
+            <a:pPr>
+              <a:lnSpc>
+                <a:spcPct val="100000"/>
+              </a:lnSpc>
+            </a:pPr>
             <a:endParaRPr b="0" lang="en-TR" sz="1800" strike="noStrike" u="none">
               <a:solidFill>
                 <a:srgbClr val="ffffff"/>
@@ -34892,7 +35815,7 @@
         <p:spPr>
           <a:xfrm>
             <a:off x="1645920" y="1874520"/>
-            <a:ext cx="548280" cy="548280"/>
+            <a:ext cx="547920" cy="547920"/>
           </a:xfrm>
           <a:prstGeom prst="rect">
             <a:avLst/>
@@ -34912,7 +35835,7 @@
         <p:spPr>
           <a:xfrm>
             <a:off x="548640" y="2514600"/>
-            <a:ext cx="2742840" cy="365400"/>
+            <a:ext cx="2742480" cy="365040"/>
           </a:xfrm>
           <a:prstGeom prst="rect">
             <a:avLst/>
@@ -34973,7 +35896,7 @@
         <p:spPr>
           <a:xfrm>
             <a:off x="822960" y="3017520"/>
-            <a:ext cx="2194200" cy="639720"/>
+            <a:ext cx="2193840" cy="639360"/>
           </a:xfrm>
           <a:prstGeom prst="roundRect">
             <a:avLst>
@@ -35001,6 +35924,11 @@
             <a:noAutofit/>
           </a:bodyPr>
           <a:p>
+            <a:pPr>
+              <a:lnSpc>
+                <a:spcPct val="100000"/>
+              </a:lnSpc>
+            </a:pPr>
             <a:endParaRPr b="0" lang="en-TR" sz="1800" strike="noStrike" u="none">
               <a:solidFill>
                 <a:srgbClr val="000000"/>
@@ -35021,7 +35949,7 @@
         <p:spPr>
           <a:xfrm>
             <a:off x="822960" y="3017520"/>
-            <a:ext cx="2194200" cy="639720"/>
+            <a:ext cx="2193840" cy="639360"/>
           </a:xfrm>
           <a:prstGeom prst="rect">
             <a:avLst/>
@@ -35112,7 +36040,7 @@
         <p:spPr>
           <a:xfrm>
             <a:off x="822960" y="3840480"/>
-            <a:ext cx="2194200" cy="639720"/>
+            <a:ext cx="2193840" cy="639360"/>
           </a:xfrm>
           <a:prstGeom prst="roundRect">
             <a:avLst>
@@ -35140,6 +36068,11 @@
             <a:noAutofit/>
           </a:bodyPr>
           <a:p>
+            <a:pPr>
+              <a:lnSpc>
+                <a:spcPct val="100000"/>
+              </a:lnSpc>
+            </a:pPr>
             <a:endParaRPr b="0" lang="en-TR" sz="1800" strike="noStrike" u="none">
               <a:solidFill>
                 <a:srgbClr val="000000"/>
@@ -35160,7 +36093,7 @@
         <p:spPr>
           <a:xfrm>
             <a:off x="822960" y="3840480"/>
-            <a:ext cx="2194200" cy="639720"/>
+            <a:ext cx="2193840" cy="639360"/>
           </a:xfrm>
           <a:prstGeom prst="rect">
             <a:avLst/>
@@ -35251,7 +36184,7 @@
         <p:spPr>
           <a:xfrm>
             <a:off x="640080" y="4754880"/>
-            <a:ext cx="2559960" cy="914040"/>
+            <a:ext cx="2559600" cy="913680"/>
           </a:xfrm>
           <a:prstGeom prst="rect">
             <a:avLst/>
@@ -35342,7 +36275,7 @@
         <p:spPr>
           <a:xfrm>
             <a:off x="4206240" y="1645920"/>
-            <a:ext cx="7406280" cy="4297320"/>
+            <a:ext cx="7405920" cy="4296960"/>
           </a:xfrm>
           <a:prstGeom prst="rect">
             <a:avLst/>
@@ -35368,6 +36301,11 @@
             <a:noAutofit/>
           </a:bodyPr>
           <a:p>
+            <a:pPr>
+              <a:lnSpc>
+                <a:spcPct val="100000"/>
+              </a:lnSpc>
+            </a:pPr>
             <a:endParaRPr b="0" lang="en-TR" sz="1800" strike="noStrike" u="none">
               <a:solidFill>
                 <a:srgbClr val="000000"/>
@@ -35388,7 +36326,7 @@
         <p:spPr>
           <a:xfrm>
             <a:off x="4206240" y="1645920"/>
-            <a:ext cx="63720" cy="4297320"/>
+            <a:ext cx="63360" cy="4296960"/>
           </a:xfrm>
           <a:prstGeom prst="rect">
             <a:avLst/>
@@ -35414,6 +36352,11 @@
             <a:noAutofit/>
           </a:bodyPr>
           <a:p>
+            <a:pPr>
+              <a:lnSpc>
+                <a:spcPct val="100000"/>
+              </a:lnSpc>
+            </a:pPr>
             <a:endParaRPr b="0" lang="en-TR" sz="1800" strike="noStrike" u="none">
               <a:solidFill>
                 <a:srgbClr val="ffffff"/>
@@ -35434,7 +36377,7 @@
         <p:spPr>
           <a:xfrm>
             <a:off x="4480560" y="1783080"/>
-            <a:ext cx="6949080" cy="365400"/>
+            <a:ext cx="6948720" cy="365040"/>
           </a:xfrm>
           <a:prstGeom prst="rect">
             <a:avLst/>
@@ -35495,7 +36438,7 @@
         <p:spPr>
           <a:xfrm>
             <a:off x="10058400" y="1810440"/>
-            <a:ext cx="1279800" cy="319680"/>
+            <a:ext cx="1279440" cy="319320"/>
           </a:xfrm>
           <a:prstGeom prst="rect">
             <a:avLst/>
@@ -35556,7 +36499,7 @@
         <p:spPr>
           <a:xfrm>
             <a:off x="4480560" y="2423160"/>
-            <a:ext cx="2239920" cy="3200040"/>
+            <a:ext cx="2239560" cy="3199680"/>
           </a:xfrm>
           <a:prstGeom prst="roundRect">
             <a:avLst>
@@ -35584,6 +36527,11 @@
             <a:noAutofit/>
           </a:bodyPr>
           <a:p>
+            <a:pPr>
+              <a:lnSpc>
+                <a:spcPct val="100000"/>
+              </a:lnSpc>
+            </a:pPr>
             <a:endParaRPr b="0" lang="en-TR" sz="1800" strike="noStrike" u="none">
               <a:solidFill>
                 <a:srgbClr val="000000"/>
@@ -35604,7 +36552,7 @@
         <p:spPr>
           <a:xfrm>
             <a:off x="4480560" y="2423160"/>
-            <a:ext cx="2239920" cy="456840"/>
+            <a:ext cx="2239560" cy="456480"/>
           </a:xfrm>
           <a:prstGeom prst="rect">
             <a:avLst/>
@@ -35630,6 +36578,11 @@
             <a:noAutofit/>
           </a:bodyPr>
           <a:p>
+            <a:pPr>
+              <a:lnSpc>
+                <a:spcPct val="100000"/>
+              </a:lnSpc>
+            </a:pPr>
             <a:endParaRPr b="0" lang="en-TR" sz="1800" strike="noStrike" u="none">
               <a:solidFill>
                 <a:srgbClr val="ffffff"/>
@@ -35650,7 +36603,7 @@
         <p:spPr>
           <a:xfrm>
             <a:off x="4617720" y="2423160"/>
-            <a:ext cx="1965600" cy="456840"/>
+            <a:ext cx="1965240" cy="456480"/>
           </a:xfrm>
           <a:prstGeom prst="rect">
             <a:avLst/>
@@ -35715,7 +36668,7 @@
         <p:spPr>
           <a:xfrm>
             <a:off x="5280840" y="3200400"/>
-            <a:ext cx="639720" cy="639720"/>
+            <a:ext cx="639360" cy="639360"/>
           </a:xfrm>
           <a:prstGeom prst="rect">
             <a:avLst/>
@@ -35735,7 +36688,7 @@
         <p:spPr>
           <a:xfrm>
             <a:off x="4663440" y="3977640"/>
-            <a:ext cx="1874160" cy="456840"/>
+            <a:ext cx="1873800" cy="456480"/>
           </a:xfrm>
           <a:prstGeom prst="rect">
             <a:avLst/>
@@ -35796,7 +36749,7 @@
         <p:spPr>
           <a:xfrm>
             <a:off x="4663440" y="4526280"/>
-            <a:ext cx="1874160" cy="1005480"/>
+            <a:ext cx="1873800" cy="1005120"/>
           </a:xfrm>
           <a:prstGeom prst="rect">
             <a:avLst/>
@@ -35857,7 +36810,7 @@
         <p:spPr>
           <a:xfrm>
             <a:off x="6858000" y="2423160"/>
-            <a:ext cx="2239920" cy="3200040"/>
+            <a:ext cx="2239560" cy="3199680"/>
           </a:xfrm>
           <a:prstGeom prst="roundRect">
             <a:avLst>
@@ -35885,6 +36838,11 @@
             <a:noAutofit/>
           </a:bodyPr>
           <a:p>
+            <a:pPr>
+              <a:lnSpc>
+                <a:spcPct val="100000"/>
+              </a:lnSpc>
+            </a:pPr>
             <a:endParaRPr b="0" lang="en-TR" sz="1800" strike="noStrike" u="none">
               <a:solidFill>
                 <a:srgbClr val="000000"/>
@@ -35905,7 +36863,7 @@
         <p:spPr>
           <a:xfrm>
             <a:off x="6858000" y="2423160"/>
-            <a:ext cx="2239920" cy="456840"/>
+            <a:ext cx="2239560" cy="456480"/>
           </a:xfrm>
           <a:prstGeom prst="rect">
             <a:avLst/>
@@ -35931,6 +36889,11 @@
             <a:noAutofit/>
           </a:bodyPr>
           <a:p>
+            <a:pPr>
+              <a:lnSpc>
+                <a:spcPct val="100000"/>
+              </a:lnSpc>
+            </a:pPr>
             <a:endParaRPr b="0" lang="en-TR" sz="1800" strike="noStrike" u="none">
               <a:solidFill>
                 <a:srgbClr val="ffffff"/>
@@ -35951,7 +36914,7 @@
         <p:spPr>
           <a:xfrm>
             <a:off x="6995160" y="2423160"/>
-            <a:ext cx="1965600" cy="456840"/>
+            <a:ext cx="1965240" cy="456480"/>
           </a:xfrm>
           <a:prstGeom prst="rect">
             <a:avLst/>
@@ -36016,7 +36979,7 @@
         <p:spPr>
           <a:xfrm>
             <a:off x="7658280" y="3200400"/>
-            <a:ext cx="639720" cy="639720"/>
+            <a:ext cx="639360" cy="639360"/>
           </a:xfrm>
           <a:prstGeom prst="rect">
             <a:avLst/>
@@ -36036,7 +36999,7 @@
         <p:spPr>
           <a:xfrm>
             <a:off x="7040880" y="3977640"/>
-            <a:ext cx="1874160" cy="456840"/>
+            <a:ext cx="1873800" cy="456480"/>
           </a:xfrm>
           <a:prstGeom prst="rect">
             <a:avLst/>
@@ -36097,7 +37060,7 @@
         <p:spPr>
           <a:xfrm>
             <a:off x="7040880" y="4526280"/>
-            <a:ext cx="1874160" cy="1005480"/>
+            <a:ext cx="1873800" cy="1005120"/>
           </a:xfrm>
           <a:prstGeom prst="rect">
             <a:avLst/>
@@ -36158,7 +37121,7 @@
         <p:spPr>
           <a:xfrm>
             <a:off x="9235440" y="2423160"/>
-            <a:ext cx="2239920" cy="3200040"/>
+            <a:ext cx="2239560" cy="3199680"/>
           </a:xfrm>
           <a:prstGeom prst="roundRect">
             <a:avLst>
@@ -36186,6 +37149,11 @@
             <a:noAutofit/>
           </a:bodyPr>
           <a:p>
+            <a:pPr>
+              <a:lnSpc>
+                <a:spcPct val="100000"/>
+              </a:lnSpc>
+            </a:pPr>
             <a:endParaRPr b="0" lang="en-TR" sz="1800" strike="noStrike" u="none">
               <a:solidFill>
                 <a:srgbClr val="000000"/>
@@ -36206,7 +37174,7 @@
         <p:spPr>
           <a:xfrm>
             <a:off x="9235440" y="2423160"/>
-            <a:ext cx="2239920" cy="456840"/>
+            <a:ext cx="2239560" cy="456480"/>
           </a:xfrm>
           <a:prstGeom prst="rect">
             <a:avLst/>
@@ -36232,6 +37200,11 @@
             <a:noAutofit/>
           </a:bodyPr>
           <a:p>
+            <a:pPr>
+              <a:lnSpc>
+                <a:spcPct val="100000"/>
+              </a:lnSpc>
+            </a:pPr>
             <a:endParaRPr b="0" lang="en-TR" sz="1800" strike="noStrike" u="none">
               <a:solidFill>
                 <a:srgbClr val="000000"/>
@@ -36252,7 +37225,7 @@
         <p:spPr>
           <a:xfrm>
             <a:off x="9372600" y="2423160"/>
-            <a:ext cx="1965600" cy="456840"/>
+            <a:ext cx="1965240" cy="456480"/>
           </a:xfrm>
           <a:prstGeom prst="rect">
             <a:avLst/>
@@ -36317,7 +37290,7 @@
         <p:spPr>
           <a:xfrm>
             <a:off x="10035720" y="3200400"/>
-            <a:ext cx="639720" cy="639720"/>
+            <a:ext cx="639360" cy="639360"/>
           </a:xfrm>
           <a:prstGeom prst="rect">
             <a:avLst/>
@@ -36337,7 +37310,7 @@
         <p:spPr>
           <a:xfrm>
             <a:off x="9418320" y="3977640"/>
-            <a:ext cx="1874160" cy="456840"/>
+            <a:ext cx="1873800" cy="456480"/>
           </a:xfrm>
           <a:prstGeom prst="rect">
             <a:avLst/>
@@ -36398,7 +37371,7 @@
         <p:spPr>
           <a:xfrm>
             <a:off x="9418320" y="4526280"/>
-            <a:ext cx="1874160" cy="1005480"/>
+            <a:ext cx="1873800" cy="1005120"/>
           </a:xfrm>
           <a:prstGeom prst="rect">
             <a:avLst/>
@@ -36503,7 +37476,7 @@
         <p:spPr>
           <a:xfrm>
             <a:off x="3337560" y="3063240"/>
-            <a:ext cx="822600" cy="273960"/>
+            <a:ext cx="822240" cy="273600"/>
           </a:xfrm>
           <a:prstGeom prst="rect">
             <a:avLst/>
@@ -36694,7 +37667,7 @@
         <p:spPr>
           <a:xfrm>
             <a:off x="2834640" y="6309360"/>
-            <a:ext cx="4114440" cy="273960"/>
+            <a:ext cx="4114080" cy="273600"/>
           </a:xfrm>
           <a:prstGeom prst="rect">
             <a:avLst/>
@@ -36755,7 +37728,7 @@
         <p:spPr>
           <a:xfrm>
             <a:off x="548640" y="6355080"/>
-            <a:ext cx="11063880" cy="10440"/>
+            <a:ext cx="11063520" cy="10080"/>
           </a:xfrm>
           <a:prstGeom prst="rect">
             <a:avLst/>
@@ -36781,6 +37754,11 @@
             <a:noAutofit/>
           </a:bodyPr>
           <a:p>
+            <a:pPr>
+              <a:lnSpc>
+                <a:spcPct val="100000"/>
+              </a:lnSpc>
+            </a:pPr>
             <a:endParaRPr b="0" lang="en-TR" sz="1800" strike="noStrike" u="none">
               <a:solidFill>
                 <a:srgbClr val="000000"/>
@@ -36801,7 +37779,7 @@
         <p:spPr>
           <a:xfrm>
             <a:off x="548640" y="6446520"/>
-            <a:ext cx="7314840" cy="273960"/>
+            <a:ext cx="7314480" cy="273600"/>
           </a:xfrm>
           <a:prstGeom prst="rect">
             <a:avLst/>
@@ -36862,7 +37840,7 @@
         <p:spPr>
           <a:xfrm>
             <a:off x="10698480" y="6446520"/>
-            <a:ext cx="914040" cy="273960"/>
+            <a:ext cx="913680" cy="273600"/>
           </a:xfrm>
           <a:prstGeom prst="rect">
             <a:avLst/>

--- a/presentation/presentation.pptx
+++ b/presentation/presentation.pptx
@@ -143,84 +143,7 @@
                 <a:uFillTx/>
                 <a:latin typeface="Arial"/>
               </a:rPr>
-              <a:t>Clic</a:t>
-            </a:r>
-            <a:r>
-              <a:rPr b="0" lang="en-TR" sz="2000" strike="noStrike" u="none">
-                <a:solidFill>
-                  <a:srgbClr val="000000"/>
-                </a:solidFill>
-                <a:effectLst/>
-                <a:uFillTx/>
-                <a:latin typeface="Arial"/>
-              </a:rPr>
-              <a:t>k to </a:t>
-            </a:r>
-            <a:r>
-              <a:rPr b="0" lang="en-TR" sz="2000" strike="noStrike" u="none">
-                <a:solidFill>
-                  <a:srgbClr val="000000"/>
-                </a:solidFill>
-                <a:effectLst/>
-                <a:uFillTx/>
-                <a:latin typeface="Arial"/>
-              </a:rPr>
-              <a:t>edit </a:t>
-            </a:r>
-            <a:r>
-              <a:rPr b="0" lang="en-TR" sz="2000" strike="noStrike" u="none">
-                <a:solidFill>
-                  <a:srgbClr val="000000"/>
-                </a:solidFill>
-                <a:effectLst/>
-                <a:uFillTx/>
-                <a:latin typeface="Arial"/>
-              </a:rPr>
-              <a:t>the </a:t>
-            </a:r>
-            <a:r>
-              <a:rPr b="0" lang="en-TR" sz="2000" strike="noStrike" u="none">
-                <a:solidFill>
-                  <a:srgbClr val="000000"/>
-                </a:solidFill>
-                <a:effectLst/>
-                <a:uFillTx/>
-                <a:latin typeface="Arial"/>
-              </a:rPr>
-              <a:t>note</a:t>
-            </a:r>
-            <a:r>
-              <a:rPr b="0" lang="en-TR" sz="2000" strike="noStrike" u="none">
-                <a:solidFill>
-                  <a:srgbClr val="000000"/>
-                </a:solidFill>
-                <a:effectLst/>
-                <a:uFillTx/>
-                <a:latin typeface="Arial"/>
-              </a:rPr>
-              <a:t>s </a:t>
-            </a:r>
-            <a:r>
-              <a:rPr b="0" lang="en-TR" sz="2000" strike="noStrike" u="none">
-                <a:solidFill>
-                  <a:srgbClr val="000000"/>
-                </a:solidFill>
-                <a:effectLst/>
-                <a:uFillTx/>
-                <a:latin typeface="Arial"/>
-              </a:rPr>
-              <a:t>form</a:t>
-            </a:r>
-            <a:r>
-              <a:rPr b="0" lang="en-TR" sz="2000" strike="noStrike" u="none">
-                <a:solidFill>
-                  <a:srgbClr val="000000"/>
-                </a:solidFill>
-                <a:effectLst/>
-                <a:uFillTx/>
-                <a:latin typeface="Arial"/>
-              </a:rPr>
-              <a:t>at</a:t>
+              <a:t>Click to edit the notes format</a:t>
             </a:r>
             <a:endParaRPr b="0" lang="en-TR" sz="2000" strike="noStrike" u="none">
               <a:solidFill>
@@ -462,7 +385,7 @@
             <a:pPr indent="0" algn="r">
               <a:buNone/>
             </a:pPr>
-            <a:fld id="{B58E4E1C-5CA8-41D1-84E7-2025BFBB70CD}" type="slidenum">
+            <a:fld id="{F8577A38-5304-4AFF-9FB8-66DB8996DE31}" type="slidenum">
               <a:rPr b="0" lang="en-TR" sz="1400" strike="noStrike" u="none">
                 <a:solidFill>
                   <a:srgbClr val="000000"/>
@@ -520,7 +443,7 @@
         <p:spPr>
           <a:xfrm>
             <a:off x="685800" y="1143000"/>
-            <a:ext cx="5485680" cy="3085560"/>
+            <a:ext cx="5485320" cy="3085200"/>
           </a:xfrm>
           <a:prstGeom prst="rect">
             <a:avLst/>
@@ -543,7 +466,7 @@
         <p:spPr>
           <a:xfrm>
             <a:off x="685800" y="4400640"/>
-            <a:ext cx="5485680" cy="3599640"/>
+            <a:ext cx="5485320" cy="3599280"/>
           </a:xfrm>
           <a:prstGeom prst="rect">
             <a:avLst/>
@@ -585,7 +508,7 @@
         <p:spPr>
           <a:xfrm>
             <a:off x="3884760" y="8685360"/>
-            <a:ext cx="2971080" cy="457920"/>
+            <a:ext cx="2970720" cy="457560"/>
           </a:xfrm>
           <a:prstGeom prst="rect">
             <a:avLst/>
@@ -629,7 +552,7 @@
                 <a:tab algn="l" pos="0"/>
               </a:tabLst>
             </a:pPr>
-            <a:fld id="{6FBBDD06-1352-4C7F-B447-9F0086BC94B4}" type="slidenum">
+            <a:fld id="{BB6083A6-57EB-4904-94A7-E5235F9AE970}" type="slidenum">
               <a:rPr b="0" lang="en-US" sz="1200" strike="noStrike" u="none">
                 <a:solidFill>
                   <a:schemeClr val="dk1"/>
@@ -687,7 +610,7 @@
         <p:spPr>
           <a:xfrm>
             <a:off x="685800" y="1143000"/>
-            <a:ext cx="5485680" cy="3085560"/>
+            <a:ext cx="5485320" cy="3085200"/>
           </a:xfrm>
           <a:prstGeom prst="rect">
             <a:avLst/>
@@ -710,7 +633,7 @@
         <p:spPr>
           <a:xfrm>
             <a:off x="685800" y="4400640"/>
-            <a:ext cx="5485680" cy="3599640"/>
+            <a:ext cx="5485320" cy="3599280"/>
           </a:xfrm>
           <a:prstGeom prst="rect">
             <a:avLst/>
@@ -752,7 +675,7 @@
         <p:spPr>
           <a:xfrm>
             <a:off x="3884760" y="8685360"/>
-            <a:ext cx="2971080" cy="457920"/>
+            <a:ext cx="2970720" cy="457560"/>
           </a:xfrm>
           <a:prstGeom prst="rect">
             <a:avLst/>
@@ -796,7 +719,7 @@
                 <a:tab algn="l" pos="0"/>
               </a:tabLst>
             </a:pPr>
-            <a:fld id="{64A55F00-CBCA-40B2-B40B-EC541DA7F5F5}" type="slidenum">
+            <a:fld id="{6BDDCDAD-C39B-4695-A70E-F9BEAE4E2078}" type="slidenum">
               <a:rPr b="0" lang="en-US" sz="1200" strike="noStrike" u="none">
                 <a:solidFill>
                   <a:schemeClr val="dk1"/>
@@ -854,7 +777,7 @@
         <p:spPr>
           <a:xfrm>
             <a:off x="685800" y="1143000"/>
-            <a:ext cx="5485680" cy="3085560"/>
+            <a:ext cx="5485320" cy="3085200"/>
           </a:xfrm>
           <a:prstGeom prst="rect">
             <a:avLst/>
@@ -877,7 +800,7 @@
         <p:spPr>
           <a:xfrm>
             <a:off x="685800" y="4400640"/>
-            <a:ext cx="5485680" cy="3599640"/>
+            <a:ext cx="5485320" cy="3599280"/>
           </a:xfrm>
           <a:prstGeom prst="rect">
             <a:avLst/>
@@ -919,7 +842,7 @@
         <p:spPr>
           <a:xfrm>
             <a:off x="3884760" y="8685360"/>
-            <a:ext cx="2971080" cy="457920"/>
+            <a:ext cx="2970720" cy="457560"/>
           </a:xfrm>
           <a:prstGeom prst="rect">
             <a:avLst/>
@@ -963,7 +886,7 @@
                 <a:tab algn="l" pos="0"/>
               </a:tabLst>
             </a:pPr>
-            <a:fld id="{07C758FC-5DE8-4EAE-9884-84222307F8D3}" type="slidenum">
+            <a:fld id="{DDB08AA3-A8EA-4852-AB80-140B66C7B97E}" type="slidenum">
               <a:rPr b="0" lang="en-US" sz="1200" strike="noStrike" u="none">
                 <a:solidFill>
                   <a:schemeClr val="dk1"/>
@@ -1021,7 +944,7 @@
         <p:spPr>
           <a:xfrm>
             <a:off x="685800" y="1143000"/>
-            <a:ext cx="5485680" cy="3085560"/>
+            <a:ext cx="5485320" cy="3085200"/>
           </a:xfrm>
           <a:prstGeom prst="rect">
             <a:avLst/>
@@ -1044,7 +967,7 @@
         <p:spPr>
           <a:xfrm>
             <a:off x="685800" y="4400640"/>
-            <a:ext cx="5485680" cy="3599640"/>
+            <a:ext cx="5485320" cy="3599280"/>
           </a:xfrm>
           <a:prstGeom prst="rect">
             <a:avLst/>
@@ -1086,7 +1009,7 @@
         <p:spPr>
           <a:xfrm>
             <a:off x="3884760" y="8685360"/>
-            <a:ext cx="2971080" cy="457920"/>
+            <a:ext cx="2970720" cy="457560"/>
           </a:xfrm>
           <a:prstGeom prst="rect">
             <a:avLst/>
@@ -1130,7 +1053,7 @@
                 <a:tab algn="l" pos="0"/>
               </a:tabLst>
             </a:pPr>
-            <a:fld id="{1DF3B9C2-4983-48AF-B60D-9EFD85FFC6FD}" type="slidenum">
+            <a:fld id="{D8F84F95-0ED5-4DAE-8C28-A8FE057C6449}" type="slidenum">
               <a:rPr b="0" lang="en-US" sz="1200" strike="noStrike" u="none">
                 <a:solidFill>
                   <a:schemeClr val="dk1"/>
@@ -1188,7 +1111,7 @@
         <p:spPr>
           <a:xfrm>
             <a:off x="685800" y="1143000"/>
-            <a:ext cx="5485680" cy="3085560"/>
+            <a:ext cx="5485320" cy="3085200"/>
           </a:xfrm>
           <a:prstGeom prst="rect">
             <a:avLst/>
@@ -1211,7 +1134,7 @@
         <p:spPr>
           <a:xfrm>
             <a:off x="685800" y="4400640"/>
-            <a:ext cx="5485680" cy="3599640"/>
+            <a:ext cx="5485320" cy="3599280"/>
           </a:xfrm>
           <a:prstGeom prst="rect">
             <a:avLst/>
@@ -1253,7 +1176,7 @@
         <p:spPr>
           <a:xfrm>
             <a:off x="3884760" y="8685360"/>
-            <a:ext cx="2971080" cy="457920"/>
+            <a:ext cx="2970720" cy="457560"/>
           </a:xfrm>
           <a:prstGeom prst="rect">
             <a:avLst/>
@@ -1297,7 +1220,7 @@
                 <a:tab algn="l" pos="0"/>
               </a:tabLst>
             </a:pPr>
-            <a:fld id="{F7AD57DA-C0D4-429F-9C37-EE1F94600CE7}" type="slidenum">
+            <a:fld id="{C9ECBFEE-DFED-4672-BECA-76890433C521}" type="slidenum">
               <a:rPr b="0" lang="en-US" sz="1200" strike="noStrike" u="none">
                 <a:solidFill>
                   <a:schemeClr val="dk1"/>
@@ -1355,7 +1278,7 @@
         <p:spPr>
           <a:xfrm>
             <a:off x="685800" y="1143000"/>
-            <a:ext cx="5485680" cy="3085560"/>
+            <a:ext cx="5485320" cy="3085200"/>
           </a:xfrm>
           <a:prstGeom prst="rect">
             <a:avLst/>
@@ -1378,7 +1301,7 @@
         <p:spPr>
           <a:xfrm>
             <a:off x="685800" y="4400640"/>
-            <a:ext cx="5485680" cy="3599640"/>
+            <a:ext cx="5485320" cy="3599280"/>
           </a:xfrm>
           <a:prstGeom prst="rect">
             <a:avLst/>
@@ -1420,7 +1343,7 @@
         <p:spPr>
           <a:xfrm>
             <a:off x="3884760" y="8685360"/>
-            <a:ext cx="2971080" cy="457920"/>
+            <a:ext cx="2970720" cy="457560"/>
           </a:xfrm>
           <a:prstGeom prst="rect">
             <a:avLst/>
@@ -1464,7 +1387,7 @@
                 <a:tab algn="l" pos="0"/>
               </a:tabLst>
             </a:pPr>
-            <a:fld id="{C72E38FB-5E07-4DFE-8C0B-DEDBFBFAB720}" type="slidenum">
+            <a:fld id="{ED603B83-9042-4F92-BE68-2D1035CFB302}" type="slidenum">
               <a:rPr b="0" lang="en-US" sz="1200" strike="noStrike" u="none">
                 <a:solidFill>
                   <a:schemeClr val="dk1"/>
@@ -1522,7 +1445,7 @@
         <p:spPr>
           <a:xfrm>
             <a:off x="685800" y="1143000"/>
-            <a:ext cx="5485680" cy="3085560"/>
+            <a:ext cx="5485320" cy="3085200"/>
           </a:xfrm>
           <a:prstGeom prst="rect">
             <a:avLst/>
@@ -1545,7 +1468,7 @@
         <p:spPr>
           <a:xfrm>
             <a:off x="685800" y="4400640"/>
-            <a:ext cx="5485680" cy="3599640"/>
+            <a:ext cx="5485320" cy="3599280"/>
           </a:xfrm>
           <a:prstGeom prst="rect">
             <a:avLst/>
@@ -1587,7 +1510,7 @@
         <p:spPr>
           <a:xfrm>
             <a:off x="3884760" y="8685360"/>
-            <a:ext cx="2971080" cy="457920"/>
+            <a:ext cx="2970720" cy="457560"/>
           </a:xfrm>
           <a:prstGeom prst="rect">
             <a:avLst/>
@@ -1631,7 +1554,7 @@
                 <a:tab algn="l" pos="0"/>
               </a:tabLst>
             </a:pPr>
-            <a:fld id="{9124819D-9A4E-4723-9A98-5414D019A421}" type="slidenum">
+            <a:fld id="{11A8B9E8-517A-4481-ABDC-4815CD65E406}" type="slidenum">
               <a:rPr b="0" lang="en-US" sz="1200" strike="noStrike" u="none">
                 <a:solidFill>
                   <a:schemeClr val="dk1"/>
@@ -1689,7 +1612,7 @@
         <p:spPr>
           <a:xfrm>
             <a:off x="685800" y="1143000"/>
-            <a:ext cx="5485680" cy="3085560"/>
+            <a:ext cx="5485320" cy="3085200"/>
           </a:xfrm>
           <a:prstGeom prst="rect">
             <a:avLst/>
@@ -1712,7 +1635,7 @@
         <p:spPr>
           <a:xfrm>
             <a:off x="685800" y="4400640"/>
-            <a:ext cx="5485680" cy="3599640"/>
+            <a:ext cx="5485320" cy="3599280"/>
           </a:xfrm>
           <a:prstGeom prst="rect">
             <a:avLst/>
@@ -1754,7 +1677,7 @@
         <p:spPr>
           <a:xfrm>
             <a:off x="3884760" y="8685360"/>
-            <a:ext cx="2971080" cy="457920"/>
+            <a:ext cx="2970720" cy="457560"/>
           </a:xfrm>
           <a:prstGeom prst="rect">
             <a:avLst/>
@@ -1798,7 +1721,7 @@
                 <a:tab algn="l" pos="0"/>
               </a:tabLst>
             </a:pPr>
-            <a:fld id="{E12238CD-D7B0-482B-8FBD-7030B154CAEF}" type="slidenum">
+            <a:fld id="{4324A678-0F11-4714-B6EF-E27881E03465}" type="slidenum">
               <a:rPr b="0" lang="en-US" sz="1200" strike="noStrike" u="none">
                 <a:solidFill>
                   <a:schemeClr val="dk1"/>
@@ -1856,7 +1779,7 @@
         <p:spPr>
           <a:xfrm>
             <a:off x="685800" y="1143000"/>
-            <a:ext cx="5485680" cy="3085560"/>
+            <a:ext cx="5485320" cy="3085200"/>
           </a:xfrm>
           <a:prstGeom prst="rect">
             <a:avLst/>
@@ -1879,7 +1802,7 @@
         <p:spPr>
           <a:xfrm>
             <a:off x="685800" y="4400640"/>
-            <a:ext cx="5485680" cy="3599640"/>
+            <a:ext cx="5485320" cy="3599280"/>
           </a:xfrm>
           <a:prstGeom prst="rect">
             <a:avLst/>
@@ -1921,7 +1844,7 @@
         <p:spPr>
           <a:xfrm>
             <a:off x="3884760" y="8685360"/>
-            <a:ext cx="2971080" cy="457920"/>
+            <a:ext cx="2970720" cy="457560"/>
           </a:xfrm>
           <a:prstGeom prst="rect">
             <a:avLst/>
@@ -1965,7 +1888,7 @@
                 <a:tab algn="l" pos="0"/>
               </a:tabLst>
             </a:pPr>
-            <a:fld id="{044CDA1F-52EC-4DD9-968C-8AAFDD1DA7DA}" type="slidenum">
+            <a:fld id="{17CF05B4-B818-493F-B534-54EF8DCDCA96}" type="slidenum">
               <a:rPr b="0" lang="en-US" sz="1200" strike="noStrike" u="none">
                 <a:solidFill>
                   <a:schemeClr val="dk1"/>
@@ -2023,7 +1946,7 @@
         <p:spPr>
           <a:xfrm>
             <a:off x="685800" y="1143000"/>
-            <a:ext cx="5485680" cy="3085560"/>
+            <a:ext cx="5485320" cy="3085200"/>
           </a:xfrm>
           <a:prstGeom prst="rect">
             <a:avLst/>
@@ -2046,7 +1969,7 @@
         <p:spPr>
           <a:xfrm>
             <a:off x="685800" y="4400640"/>
-            <a:ext cx="5485680" cy="3599640"/>
+            <a:ext cx="5485320" cy="3599280"/>
           </a:xfrm>
           <a:prstGeom prst="rect">
             <a:avLst/>
@@ -2088,7 +2011,7 @@
         <p:spPr>
           <a:xfrm>
             <a:off x="3884760" y="8685360"/>
-            <a:ext cx="2971080" cy="457920"/>
+            <a:ext cx="2970720" cy="457560"/>
           </a:xfrm>
           <a:prstGeom prst="rect">
             <a:avLst/>
@@ -2132,7 +2055,7 @@
                 <a:tab algn="l" pos="0"/>
               </a:tabLst>
             </a:pPr>
-            <a:fld id="{937F06F7-D5D8-4DD7-A63D-9D3C5344EE72}" type="slidenum">
+            <a:fld id="{38DDB9BB-2339-4595-9586-311CCB71650F}" type="slidenum">
               <a:rPr b="0" lang="en-US" sz="1200" strike="noStrike" u="none">
                 <a:solidFill>
                   <a:schemeClr val="dk1"/>
@@ -2190,7 +2113,7 @@
         <p:spPr>
           <a:xfrm>
             <a:off x="685800" y="1143000"/>
-            <a:ext cx="5485680" cy="3085560"/>
+            <a:ext cx="5485320" cy="3085200"/>
           </a:xfrm>
           <a:prstGeom prst="rect">
             <a:avLst/>
@@ -2213,7 +2136,7 @@
         <p:spPr>
           <a:xfrm>
             <a:off x="685800" y="4400640"/>
-            <a:ext cx="5485680" cy="3599640"/>
+            <a:ext cx="5485320" cy="3599280"/>
           </a:xfrm>
           <a:prstGeom prst="rect">
             <a:avLst/>
@@ -2255,7 +2178,7 @@
         <p:spPr>
           <a:xfrm>
             <a:off x="3884760" y="8685360"/>
-            <a:ext cx="2971080" cy="457920"/>
+            <a:ext cx="2970720" cy="457560"/>
           </a:xfrm>
           <a:prstGeom prst="rect">
             <a:avLst/>
@@ -2299,7 +2222,7 @@
                 <a:tab algn="l" pos="0"/>
               </a:tabLst>
             </a:pPr>
-            <a:fld id="{B0C59A43-D29C-4ED5-858B-FD9B5A942662}" type="slidenum">
+            <a:fld id="{2D3C4782-94C2-4913-B1DA-E554445C48F2}" type="slidenum">
               <a:rPr b="0" lang="en-US" sz="1200" strike="noStrike" u="none">
                 <a:solidFill>
                   <a:schemeClr val="dk1"/>
@@ -2357,7 +2280,7 @@
         <p:spPr>
           <a:xfrm>
             <a:off x="685800" y="1143000"/>
-            <a:ext cx="5485680" cy="3085560"/>
+            <a:ext cx="5485320" cy="3085200"/>
           </a:xfrm>
           <a:prstGeom prst="rect">
             <a:avLst/>
@@ -2380,7 +2303,7 @@
         <p:spPr>
           <a:xfrm>
             <a:off x="685800" y="4400640"/>
-            <a:ext cx="5485680" cy="3599640"/>
+            <a:ext cx="5485320" cy="3599280"/>
           </a:xfrm>
           <a:prstGeom prst="rect">
             <a:avLst/>
@@ -2422,7 +2345,7 @@
         <p:spPr>
           <a:xfrm>
             <a:off x="3884760" y="8685360"/>
-            <a:ext cx="2971080" cy="457920"/>
+            <a:ext cx="2970720" cy="457560"/>
           </a:xfrm>
           <a:prstGeom prst="rect">
             <a:avLst/>
@@ -2466,7 +2389,7 @@
                 <a:tab algn="l" pos="0"/>
               </a:tabLst>
             </a:pPr>
-            <a:fld id="{FD1890F5-3F93-4DF8-92A3-841C704A9904}" type="slidenum">
+            <a:fld id="{C56AF561-A290-4FDB-9E0B-CBDE38E2D17D}" type="slidenum">
               <a:rPr b="0" lang="en-US" sz="1200" strike="noStrike" u="none">
                 <a:solidFill>
                   <a:schemeClr val="dk1"/>
@@ -2524,7 +2447,7 @@
         <p:spPr>
           <a:xfrm>
             <a:off x="685800" y="1143000"/>
-            <a:ext cx="5485680" cy="3085560"/>
+            <a:ext cx="5485320" cy="3085200"/>
           </a:xfrm>
           <a:prstGeom prst="rect">
             <a:avLst/>
@@ -2547,7 +2470,7 @@
         <p:spPr>
           <a:xfrm>
             <a:off x="685800" y="4400640"/>
-            <a:ext cx="5485680" cy="3599640"/>
+            <a:ext cx="5485320" cy="3599280"/>
           </a:xfrm>
           <a:prstGeom prst="rect">
             <a:avLst/>
@@ -2589,7 +2512,7 @@
         <p:spPr>
           <a:xfrm>
             <a:off x="3884760" y="8685360"/>
-            <a:ext cx="2971080" cy="457920"/>
+            <a:ext cx="2970720" cy="457560"/>
           </a:xfrm>
           <a:prstGeom prst="rect">
             <a:avLst/>
@@ -2633,7 +2556,7 @@
                 <a:tab algn="l" pos="0"/>
               </a:tabLst>
             </a:pPr>
-            <a:fld id="{DB71E5D0-028A-4669-80DD-294D2ADBCDA0}" type="slidenum">
+            <a:fld id="{7730EC65-A5CF-4A41-A5C0-996333572110}" type="slidenum">
               <a:rPr b="0" lang="en-US" sz="1200" strike="noStrike" u="none">
                 <a:solidFill>
                   <a:schemeClr val="dk1"/>
@@ -2691,7 +2614,7 @@
         <p:spPr>
           <a:xfrm>
             <a:off x="685800" y="1143000"/>
-            <a:ext cx="5485680" cy="3085560"/>
+            <a:ext cx="5485320" cy="3085200"/>
           </a:xfrm>
           <a:prstGeom prst="rect">
             <a:avLst/>
@@ -2714,7 +2637,7 @@
         <p:spPr>
           <a:xfrm>
             <a:off x="685800" y="4400640"/>
-            <a:ext cx="5485680" cy="3599640"/>
+            <a:ext cx="5485320" cy="3599280"/>
           </a:xfrm>
           <a:prstGeom prst="rect">
             <a:avLst/>
@@ -2756,7 +2679,7 @@
         <p:spPr>
           <a:xfrm>
             <a:off x="3884760" y="8685360"/>
-            <a:ext cx="2971080" cy="457920"/>
+            <a:ext cx="2970720" cy="457560"/>
           </a:xfrm>
           <a:prstGeom prst="rect">
             <a:avLst/>
@@ -2800,7 +2723,7 @@
                 <a:tab algn="l" pos="0"/>
               </a:tabLst>
             </a:pPr>
-            <a:fld id="{6F359BB5-F42C-4B31-8297-F135925E8FCC}" type="slidenum">
+            <a:fld id="{B464A8DF-D2C8-49B3-AD84-758BA85CA3F7}" type="slidenum">
               <a:rPr b="0" lang="en-US" sz="1200" strike="noStrike" u="none">
                 <a:solidFill>
                   <a:schemeClr val="dk1"/>
@@ -2810,7 +2733,7 @@
                 <a:latin typeface="+mn-lt"/>
                 <a:ea typeface="+mn-ea"/>
               </a:rPr>
-              <a:t>1</a:t>
+              <a:t>&lt;number&gt;</a:t>
             </a:fld>
             <a:endParaRPr b="0" lang="en-TR" sz="1200" strike="noStrike" u="none">
               <a:solidFill>
@@ -2858,7 +2781,7 @@
         <p:spPr>
           <a:xfrm>
             <a:off x="685800" y="1143000"/>
-            <a:ext cx="5485680" cy="3085560"/>
+            <a:ext cx="5485320" cy="3085200"/>
           </a:xfrm>
           <a:prstGeom prst="rect">
             <a:avLst/>
@@ -2881,7 +2804,7 @@
         <p:spPr>
           <a:xfrm>
             <a:off x="685800" y="4400640"/>
-            <a:ext cx="5485680" cy="3599640"/>
+            <a:ext cx="5485320" cy="3599280"/>
           </a:xfrm>
           <a:prstGeom prst="rect">
             <a:avLst/>
@@ -2923,7 +2846,7 @@
         <p:spPr>
           <a:xfrm>
             <a:off x="3884760" y="8685360"/>
-            <a:ext cx="2971080" cy="457920"/>
+            <a:ext cx="2970720" cy="457560"/>
           </a:xfrm>
           <a:prstGeom prst="rect">
             <a:avLst/>
@@ -2967,7 +2890,7 @@
                 <a:tab algn="l" pos="0"/>
               </a:tabLst>
             </a:pPr>
-            <a:fld id="{D8666F2C-6447-47EB-BC17-9B5A7A672620}" type="slidenum">
+            <a:fld id="{B747DA34-8623-4B62-8BF9-5AED9D89A86A}" type="slidenum">
               <a:rPr b="0" lang="en-US" sz="1200" strike="noStrike" u="none">
                 <a:solidFill>
                   <a:schemeClr val="dk1"/>
@@ -3025,7 +2948,7 @@
         <p:spPr>
           <a:xfrm>
             <a:off x="685800" y="1143000"/>
-            <a:ext cx="5485680" cy="3085560"/>
+            <a:ext cx="5485320" cy="3085200"/>
           </a:xfrm>
           <a:prstGeom prst="rect">
             <a:avLst/>
@@ -3048,7 +2971,7 @@
         <p:spPr>
           <a:xfrm>
             <a:off x="685800" y="4400640"/>
-            <a:ext cx="5485680" cy="3599640"/>
+            <a:ext cx="5485320" cy="3599280"/>
           </a:xfrm>
           <a:prstGeom prst="rect">
             <a:avLst/>
@@ -3090,7 +3013,7 @@
         <p:spPr>
           <a:xfrm>
             <a:off x="3884760" y="8685360"/>
-            <a:ext cx="2971080" cy="457920"/>
+            <a:ext cx="2970720" cy="457560"/>
           </a:xfrm>
           <a:prstGeom prst="rect">
             <a:avLst/>
@@ -3134,7 +3057,7 @@
                 <a:tab algn="l" pos="0"/>
               </a:tabLst>
             </a:pPr>
-            <a:fld id="{FC9852BB-D454-43D0-AA9D-FD20AA5F7DE3}" type="slidenum">
+            <a:fld id="{ECB320D6-D74A-423A-809E-4991B3FBD7B1}" type="slidenum">
               <a:rPr b="0" lang="en-US" sz="1200" strike="noStrike" u="none">
                 <a:solidFill>
                   <a:schemeClr val="dk1"/>
@@ -3192,7 +3115,7 @@
         <p:spPr>
           <a:xfrm>
             <a:off x="685800" y="1143000"/>
-            <a:ext cx="5485680" cy="3085560"/>
+            <a:ext cx="5485320" cy="3085200"/>
           </a:xfrm>
           <a:prstGeom prst="rect">
             <a:avLst/>
@@ -3215,7 +3138,7 @@
         <p:spPr>
           <a:xfrm>
             <a:off x="685800" y="4400640"/>
-            <a:ext cx="5485680" cy="3599640"/>
+            <a:ext cx="5485320" cy="3599280"/>
           </a:xfrm>
           <a:prstGeom prst="rect">
             <a:avLst/>
@@ -3257,7 +3180,7 @@
         <p:spPr>
           <a:xfrm>
             <a:off x="3884760" y="8685360"/>
-            <a:ext cx="2971080" cy="457920"/>
+            <a:ext cx="2970720" cy="457560"/>
           </a:xfrm>
           <a:prstGeom prst="rect">
             <a:avLst/>
@@ -3301,7 +3224,7 @@
                 <a:tab algn="l" pos="0"/>
               </a:tabLst>
             </a:pPr>
-            <a:fld id="{9982CAB4-C397-4308-A6CC-C7B9439E9847}" type="slidenum">
+            <a:fld id="{2957F088-8DC2-4731-AE45-5E326526FD40}" type="slidenum">
               <a:rPr b="0" lang="en-US" sz="1200" strike="noStrike" u="none">
                 <a:solidFill>
                   <a:schemeClr val="dk1"/>
@@ -3359,7 +3282,7 @@
         <p:spPr>
           <a:xfrm>
             <a:off x="685800" y="1143000"/>
-            <a:ext cx="5485680" cy="3085560"/>
+            <a:ext cx="5485320" cy="3085200"/>
           </a:xfrm>
           <a:prstGeom prst="rect">
             <a:avLst/>
@@ -3382,7 +3305,7 @@
         <p:spPr>
           <a:xfrm>
             <a:off x="685800" y="4400640"/>
-            <a:ext cx="5485680" cy="3599640"/>
+            <a:ext cx="5485320" cy="3599280"/>
           </a:xfrm>
           <a:prstGeom prst="rect">
             <a:avLst/>
@@ -3424,7 +3347,7 @@
         <p:spPr>
           <a:xfrm>
             <a:off x="3884760" y="8685360"/>
-            <a:ext cx="2971080" cy="457920"/>
+            <a:ext cx="2970720" cy="457560"/>
           </a:xfrm>
           <a:prstGeom prst="rect">
             <a:avLst/>
@@ -3468,7 +3391,7 @@
                 <a:tab algn="l" pos="0"/>
               </a:tabLst>
             </a:pPr>
-            <a:fld id="{367E4B6F-9B29-4177-8888-D2D7E5B21E1B}" type="slidenum">
+            <a:fld id="{8E356758-A58A-48B4-BE04-92E344E3BD7C}" type="slidenum">
               <a:rPr b="0" lang="en-US" sz="1200" strike="noStrike" u="none">
                 <a:solidFill>
                   <a:schemeClr val="dk1"/>
@@ -3526,7 +3449,7 @@
         <p:spPr>
           <a:xfrm>
             <a:off x="685800" y="1143000"/>
-            <a:ext cx="5485680" cy="3085560"/>
+            <a:ext cx="5485320" cy="3085200"/>
           </a:xfrm>
           <a:prstGeom prst="rect">
             <a:avLst/>
@@ -3549,7 +3472,7 @@
         <p:spPr>
           <a:xfrm>
             <a:off x="685800" y="4400640"/>
-            <a:ext cx="5485680" cy="3599640"/>
+            <a:ext cx="5485320" cy="3599280"/>
           </a:xfrm>
           <a:prstGeom prst="rect">
             <a:avLst/>
@@ -3591,7 +3514,7 @@
         <p:spPr>
           <a:xfrm>
             <a:off x="3884760" y="8685360"/>
-            <a:ext cx="2971080" cy="457920"/>
+            <a:ext cx="2970720" cy="457560"/>
           </a:xfrm>
           <a:prstGeom prst="rect">
             <a:avLst/>
@@ -3635,7 +3558,7 @@
                 <a:tab algn="l" pos="0"/>
               </a:tabLst>
             </a:pPr>
-            <a:fld id="{8C2E7D0A-1994-4D4A-B92D-3DF1615E8233}" type="slidenum">
+            <a:fld id="{368E55CE-C4A4-452E-B1CE-100075ED9F79}" type="slidenum">
               <a:rPr b="0" lang="en-US" sz="1200" strike="noStrike" u="none">
                 <a:solidFill>
                   <a:schemeClr val="dk1"/>
@@ -3693,7 +3616,7 @@
         <p:spPr>
           <a:xfrm>
             <a:off x="685800" y="1143000"/>
-            <a:ext cx="5485680" cy="3085560"/>
+            <a:ext cx="5485320" cy="3085200"/>
           </a:xfrm>
           <a:prstGeom prst="rect">
             <a:avLst/>
@@ -3716,7 +3639,7 @@
         <p:spPr>
           <a:xfrm>
             <a:off x="685800" y="4400640"/>
-            <a:ext cx="5485680" cy="3599640"/>
+            <a:ext cx="5485320" cy="3599280"/>
           </a:xfrm>
           <a:prstGeom prst="rect">
             <a:avLst/>
@@ -3758,7 +3681,7 @@
         <p:spPr>
           <a:xfrm>
             <a:off x="3884760" y="8685360"/>
-            <a:ext cx="2971080" cy="457920"/>
+            <a:ext cx="2970720" cy="457560"/>
           </a:xfrm>
           <a:prstGeom prst="rect">
             <a:avLst/>
@@ -3802,7 +3725,7 @@
                 <a:tab algn="l" pos="0"/>
               </a:tabLst>
             </a:pPr>
-            <a:fld id="{79444CE8-1AB7-4CA6-AFDD-AFCF24BDFA45}" type="slidenum">
+            <a:fld id="{D69DB542-EDC1-40C8-91C4-52EEE01DFDB2}" type="slidenum">
               <a:rPr b="0" lang="en-US" sz="1200" strike="noStrike" u="none">
                 <a:solidFill>
                   <a:schemeClr val="dk1"/>
@@ -3860,7 +3783,7 @@
         <p:spPr>
           <a:xfrm>
             <a:off x="685800" y="1143000"/>
-            <a:ext cx="5485680" cy="3085560"/>
+            <a:ext cx="5485320" cy="3085200"/>
           </a:xfrm>
           <a:prstGeom prst="rect">
             <a:avLst/>
@@ -3883,7 +3806,7 @@
         <p:spPr>
           <a:xfrm>
             <a:off x="685800" y="4400640"/>
-            <a:ext cx="5485680" cy="3599640"/>
+            <a:ext cx="5485320" cy="3599280"/>
           </a:xfrm>
           <a:prstGeom prst="rect">
             <a:avLst/>
@@ -3925,7 +3848,7 @@
         <p:spPr>
           <a:xfrm>
             <a:off x="3884760" y="8685360"/>
-            <a:ext cx="2971080" cy="457920"/>
+            <a:ext cx="2970720" cy="457560"/>
           </a:xfrm>
           <a:prstGeom prst="rect">
             <a:avLst/>
@@ -3969,7 +3892,7 @@
                 <a:tab algn="l" pos="0"/>
               </a:tabLst>
             </a:pPr>
-            <a:fld id="{5551AD2B-67B0-474C-A3CD-0653C291416E}" type="slidenum">
+            <a:fld id="{CC63A5ED-6E82-42ED-ACE2-2CC2FF6C4C51}" type="slidenum">
               <a:rPr b="0" lang="en-US" sz="1200" strike="noStrike" u="none">
                 <a:solidFill>
                   <a:schemeClr val="dk1"/>
@@ -4391,7 +4314,7 @@
         <p:spPr>
           <a:xfrm>
             <a:off x="11064240" y="5760720"/>
-            <a:ext cx="2193840" cy="2193840"/>
+            <a:ext cx="2193480" cy="2193480"/>
           </a:xfrm>
           <a:prstGeom prst="ellipse">
             <a:avLst/>
@@ -4444,7 +4367,7 @@
         <p:spPr>
           <a:xfrm>
             <a:off x="10332720" y="5029200"/>
-            <a:ext cx="3656880" cy="3656880"/>
+            <a:ext cx="3656520" cy="3656520"/>
           </a:xfrm>
           <a:prstGeom prst="ellipse">
             <a:avLst/>
@@ -4497,7 +4420,7 @@
         <p:spPr>
           <a:xfrm>
             <a:off x="9601200" y="4297680"/>
-            <a:ext cx="5119920" cy="5119920"/>
+            <a:ext cx="5119560" cy="5119560"/>
           </a:xfrm>
           <a:prstGeom prst="ellipse">
             <a:avLst/>
@@ -4550,7 +4473,7 @@
         <p:spPr>
           <a:xfrm>
             <a:off x="8869680" y="3566160"/>
-            <a:ext cx="6582960" cy="6582960"/>
+            <a:ext cx="6582600" cy="6582600"/>
           </a:xfrm>
           <a:prstGeom prst="ellipse">
             <a:avLst/>
@@ -4603,7 +4526,7 @@
         <p:spPr>
           <a:xfrm>
             <a:off x="8138160" y="2834640"/>
-            <a:ext cx="8046000" cy="8046000"/>
+            <a:ext cx="8045640" cy="8045640"/>
           </a:xfrm>
           <a:prstGeom prst="ellipse">
             <a:avLst/>
@@ -4656,7 +4579,7 @@
         <p:spPr>
           <a:xfrm>
             <a:off x="11658600" y="6355080"/>
-            <a:ext cx="410760" cy="410760"/>
+            <a:ext cx="410400" cy="410400"/>
           </a:xfrm>
           <a:prstGeom prst="ellipse">
             <a:avLst/>
@@ -4707,7 +4630,7 @@
         <p:spPr>
           <a:xfrm>
             <a:off x="731520" y="914400"/>
-            <a:ext cx="10057680" cy="365040"/>
+            <a:ext cx="10057320" cy="364680"/>
           </a:xfrm>
           <a:prstGeom prst="rect">
             <a:avLst/>
@@ -4768,7 +4691,7 @@
         <p:spPr>
           <a:xfrm>
             <a:off x="731520" y="1417320"/>
-            <a:ext cx="639360" cy="54000"/>
+            <a:ext cx="639000" cy="53640"/>
           </a:xfrm>
           <a:prstGeom prst="rect">
             <a:avLst/>
@@ -4819,7 +4742,7 @@
         <p:spPr>
           <a:xfrm>
             <a:off x="731520" y="1645920"/>
-            <a:ext cx="10514880" cy="959400"/>
+            <a:ext cx="10514520" cy="959040"/>
           </a:xfrm>
           <a:prstGeom prst="rect">
             <a:avLst/>
@@ -4880,7 +4803,7 @@
         <p:spPr>
           <a:xfrm>
             <a:off x="731520" y="2606040"/>
-            <a:ext cx="10514880" cy="639360"/>
+            <a:ext cx="10514520" cy="639000"/>
           </a:xfrm>
           <a:prstGeom prst="rect">
             <a:avLst/>
@@ -4941,7 +4864,7 @@
         <p:spPr>
           <a:xfrm>
             <a:off x="731520" y="3154680"/>
-            <a:ext cx="10514880" cy="639360"/>
+            <a:ext cx="10514520" cy="639000"/>
           </a:xfrm>
           <a:prstGeom prst="rect">
             <a:avLst/>
@@ -5002,7 +4925,7 @@
         <p:spPr>
           <a:xfrm>
             <a:off x="731520" y="4572000"/>
-            <a:ext cx="63360" cy="1462320"/>
+            <a:ext cx="63000" cy="1461960"/>
           </a:xfrm>
           <a:prstGeom prst="rect">
             <a:avLst/>
@@ -5053,7 +4976,7 @@
         <p:spPr>
           <a:xfrm>
             <a:off x="960120" y="4572000"/>
-            <a:ext cx="7314480" cy="1462320"/>
+            <a:ext cx="7314120" cy="1461960"/>
           </a:xfrm>
           <a:prstGeom prst="rect">
             <a:avLst/>
@@ -5211,7 +5134,7 @@
         <p:spPr>
           <a:xfrm>
             <a:off x="548640" y="411480"/>
-            <a:ext cx="10972080" cy="273600"/>
+            <a:ext cx="10971720" cy="273240"/>
           </a:xfrm>
           <a:prstGeom prst="rect">
             <a:avLst/>
@@ -5272,7 +5195,7 @@
         <p:spPr>
           <a:xfrm>
             <a:off x="548640" y="713160"/>
-            <a:ext cx="10972080" cy="776520"/>
+            <a:ext cx="10971720" cy="776160"/>
           </a:xfrm>
           <a:prstGeom prst="rect">
             <a:avLst/>
@@ -5333,7 +5256,7 @@
         <p:spPr>
           <a:xfrm>
             <a:off x="548640" y="1600200"/>
-            <a:ext cx="5531400" cy="4525560"/>
+            <a:ext cx="5531040" cy="4525200"/>
           </a:xfrm>
           <a:prstGeom prst="rect">
             <a:avLst/>
@@ -5384,7 +5307,7 @@
         <p:spPr>
           <a:xfrm>
             <a:off x="548640" y="1600200"/>
-            <a:ext cx="63360" cy="4525560"/>
+            <a:ext cx="63000" cy="4525200"/>
           </a:xfrm>
           <a:prstGeom prst="rect">
             <a:avLst/>
@@ -5439,7 +5362,7 @@
         <p:spPr>
           <a:xfrm>
             <a:off x="822960" y="1783080"/>
-            <a:ext cx="365040" cy="365040"/>
+            <a:ext cx="364680" cy="364680"/>
           </a:xfrm>
           <a:prstGeom prst="rect">
             <a:avLst/>
@@ -5459,7 +5382,7 @@
         <p:spPr>
           <a:xfrm>
             <a:off x="1325880" y="1783080"/>
-            <a:ext cx="4617000" cy="365040"/>
+            <a:ext cx="4616640" cy="364680"/>
           </a:xfrm>
           <a:prstGeom prst="rect">
             <a:avLst/>
@@ -5520,7 +5443,7 @@
         <p:spPr>
           <a:xfrm>
             <a:off x="822960" y="2377440"/>
-            <a:ext cx="4982760" cy="1325160"/>
+            <a:ext cx="4982400" cy="1324800"/>
           </a:xfrm>
           <a:prstGeom prst="rect">
             <a:avLst/>
@@ -5571,7 +5494,7 @@
         <p:spPr>
           <a:xfrm>
             <a:off x="914400" y="2468880"/>
-            <a:ext cx="4799880" cy="1188000"/>
+            <a:ext cx="4799520" cy="1187640"/>
           </a:xfrm>
           <a:prstGeom prst="rect">
             <a:avLst/>
@@ -5680,7 +5603,7 @@
         <p:spPr>
           <a:xfrm>
             <a:off x="822960" y="3840480"/>
-            <a:ext cx="4982760" cy="1188000"/>
+            <a:ext cx="4982400" cy="1187640"/>
           </a:xfrm>
           <a:prstGeom prst="rect">
             <a:avLst/>
@@ -5781,7 +5704,7 @@
         <p:spPr>
           <a:xfrm>
             <a:off x="822960" y="5212080"/>
-            <a:ext cx="4982760" cy="776520"/>
+            <a:ext cx="4982400" cy="776160"/>
           </a:xfrm>
           <a:prstGeom prst="rect">
             <a:avLst/>
@@ -5832,7 +5755,7 @@
         <p:spPr>
           <a:xfrm>
             <a:off x="960120" y="5212080"/>
-            <a:ext cx="4754160" cy="776520"/>
+            <a:ext cx="4753800" cy="776160"/>
           </a:xfrm>
           <a:prstGeom prst="rect">
             <a:avLst/>
@@ -5893,7 +5816,7 @@
         <p:spPr>
           <a:xfrm>
             <a:off x="6263640" y="1600200"/>
-            <a:ext cx="5531400" cy="4525560"/>
+            <a:ext cx="5531040" cy="4525200"/>
           </a:xfrm>
           <a:prstGeom prst="rect">
             <a:avLst/>
@@ -5944,7 +5867,7 @@
         <p:spPr>
           <a:xfrm>
             <a:off x="6263640" y="1600200"/>
-            <a:ext cx="63360" cy="4525560"/>
+            <a:ext cx="63000" cy="4525200"/>
           </a:xfrm>
           <a:prstGeom prst="rect">
             <a:avLst/>
@@ -5999,7 +5922,7 @@
         <p:spPr>
           <a:xfrm>
             <a:off x="6537960" y="1783080"/>
-            <a:ext cx="365040" cy="365040"/>
+            <a:ext cx="364680" cy="364680"/>
           </a:xfrm>
           <a:prstGeom prst="rect">
             <a:avLst/>
@@ -6019,7 +5942,7 @@
         <p:spPr>
           <a:xfrm>
             <a:off x="7040880" y="1783080"/>
-            <a:ext cx="4617000" cy="365040"/>
+            <a:ext cx="4616640" cy="364680"/>
           </a:xfrm>
           <a:prstGeom prst="rect">
             <a:avLst/>
@@ -6080,7 +6003,7 @@
         <p:spPr>
           <a:xfrm>
             <a:off x="6537960" y="2377440"/>
-            <a:ext cx="4982760" cy="1325160"/>
+            <a:ext cx="4982400" cy="1324800"/>
           </a:xfrm>
           <a:prstGeom prst="rect">
             <a:avLst/>
@@ -6131,7 +6054,7 @@
         <p:spPr>
           <a:xfrm>
             <a:off x="6629400" y="2468880"/>
-            <a:ext cx="4799880" cy="1188000"/>
+            <a:ext cx="4799520" cy="1187640"/>
           </a:xfrm>
           <a:prstGeom prst="rect">
             <a:avLst/>
@@ -6192,7 +6115,7 @@
         <p:spPr>
           <a:xfrm>
             <a:off x="6537960" y="3840480"/>
-            <a:ext cx="4982760" cy="2193840"/>
+            <a:ext cx="4982400" cy="2193480"/>
           </a:xfrm>
           <a:prstGeom prst="rect">
             <a:avLst/>
@@ -6328,7 +6251,7 @@
         <p:spPr>
           <a:xfrm>
             <a:off x="548640" y="6355080"/>
-            <a:ext cx="11063520" cy="10080"/>
+            <a:ext cx="11063160" cy="9720"/>
           </a:xfrm>
           <a:prstGeom prst="rect">
             <a:avLst/>
@@ -6379,7 +6302,7 @@
         <p:spPr>
           <a:xfrm>
             <a:off x="548640" y="6446520"/>
-            <a:ext cx="7314480" cy="273600"/>
+            <a:ext cx="7314120" cy="273240"/>
           </a:xfrm>
           <a:prstGeom prst="rect">
             <a:avLst/>
@@ -6440,7 +6363,7 @@
         <p:spPr>
           <a:xfrm>
             <a:off x="10698480" y="6446520"/>
-            <a:ext cx="913680" cy="273600"/>
+            <a:ext cx="913320" cy="273240"/>
           </a:xfrm>
           <a:prstGeom prst="rect">
             <a:avLst/>
@@ -6538,7 +6461,7 @@
         <p:spPr>
           <a:xfrm>
             <a:off x="548640" y="411480"/>
-            <a:ext cx="10972080" cy="273600"/>
+            <a:ext cx="10971720" cy="273240"/>
           </a:xfrm>
           <a:prstGeom prst="rect">
             <a:avLst/>
@@ -6599,7 +6522,7 @@
         <p:spPr>
           <a:xfrm>
             <a:off x="548640" y="713160"/>
-            <a:ext cx="10972080" cy="776520"/>
+            <a:ext cx="10971720" cy="776160"/>
           </a:xfrm>
           <a:prstGeom prst="rect">
             <a:avLst/>
@@ -6660,7 +6583,7 @@
         <p:spPr>
           <a:xfrm>
             <a:off x="548640" y="1554480"/>
-            <a:ext cx="11063520" cy="1050840"/>
+            <a:ext cx="11063160" cy="1050480"/>
           </a:xfrm>
           <a:prstGeom prst="rect">
             <a:avLst/>
@@ -6711,7 +6634,7 @@
         <p:spPr>
           <a:xfrm>
             <a:off x="548640" y="1554480"/>
-            <a:ext cx="63360" cy="1050840"/>
+            <a:ext cx="63000" cy="1050480"/>
           </a:xfrm>
           <a:prstGeom prst="rect">
             <a:avLst/>
@@ -6762,7 +6685,7 @@
         <p:spPr>
           <a:xfrm>
             <a:off x="777240" y="1627560"/>
-            <a:ext cx="3656880" cy="365040"/>
+            <a:ext cx="3656520" cy="364680"/>
           </a:xfrm>
           <a:prstGeom prst="rect">
             <a:avLst/>
@@ -6823,7 +6746,7 @@
         <p:spPr>
           <a:xfrm>
             <a:off x="777240" y="1993320"/>
-            <a:ext cx="10514880" cy="547920"/>
+            <a:ext cx="10514520" cy="547560"/>
           </a:xfrm>
           <a:prstGeom prst="rect">
             <a:avLst/>
@@ -6884,7 +6807,7 @@
         <p:spPr>
           <a:xfrm>
             <a:off x="548640" y="2743200"/>
-            <a:ext cx="5531400" cy="3382560"/>
+            <a:ext cx="5531040" cy="3382200"/>
           </a:xfrm>
           <a:prstGeom prst="rect">
             <a:avLst/>
@@ -6935,7 +6858,7 @@
         <p:spPr>
           <a:xfrm>
             <a:off x="548640" y="2743200"/>
-            <a:ext cx="63360" cy="3382560"/>
+            <a:ext cx="63000" cy="3382200"/>
           </a:xfrm>
           <a:prstGeom prst="rect">
             <a:avLst/>
@@ -6986,7 +6909,7 @@
         <p:spPr>
           <a:xfrm>
             <a:off x="777240" y="2834640"/>
-            <a:ext cx="5119920" cy="365040"/>
+            <a:ext cx="5119560" cy="364680"/>
           </a:xfrm>
           <a:prstGeom prst="rect">
             <a:avLst/>
@@ -7047,7 +6970,7 @@
         <p:spPr>
           <a:xfrm>
             <a:off x="777240" y="3246120"/>
-            <a:ext cx="5074200" cy="1416600"/>
+            <a:ext cx="5073840" cy="1416240"/>
           </a:xfrm>
           <a:prstGeom prst="rect">
             <a:avLst/>
@@ -7098,7 +7021,7 @@
         <p:spPr>
           <a:xfrm>
             <a:off x="914400" y="3291840"/>
-            <a:ext cx="4845600" cy="1325160"/>
+            <a:ext cx="4845240" cy="1324800"/>
           </a:xfrm>
           <a:prstGeom prst="rect">
             <a:avLst/>
@@ -7249,7 +7172,7 @@
         <p:spPr>
           <a:xfrm>
             <a:off x="777240" y="4800600"/>
-            <a:ext cx="1626840" cy="1142280"/>
+            <a:ext cx="1626480" cy="1141920"/>
           </a:xfrm>
           <a:prstGeom prst="roundRect">
             <a:avLst>
@@ -7302,7 +7225,7 @@
         <p:spPr>
           <a:xfrm>
             <a:off x="777240" y="4846320"/>
-            <a:ext cx="1626840" cy="410760"/>
+            <a:ext cx="1626480" cy="410400"/>
           </a:xfrm>
           <a:prstGeom prst="rect">
             <a:avLst/>
@@ -7363,7 +7286,7 @@
         <p:spPr>
           <a:xfrm>
             <a:off x="777240" y="5212080"/>
-            <a:ext cx="1626840" cy="365040"/>
+            <a:ext cx="1626480" cy="364680"/>
           </a:xfrm>
           <a:prstGeom prst="rect">
             <a:avLst/>
@@ -7424,7 +7347,7 @@
         <p:spPr>
           <a:xfrm>
             <a:off x="822960" y="5577840"/>
-            <a:ext cx="1535400" cy="319320"/>
+            <a:ext cx="1535040" cy="318960"/>
           </a:xfrm>
           <a:prstGeom prst="rect">
             <a:avLst/>
@@ -7485,7 +7408,7 @@
         <p:spPr>
           <a:xfrm>
             <a:off x="2496240" y="4800600"/>
-            <a:ext cx="1626840" cy="1142280"/>
+            <a:ext cx="1626480" cy="1141920"/>
           </a:xfrm>
           <a:prstGeom prst="roundRect">
             <a:avLst>
@@ -7538,7 +7461,7 @@
         <p:spPr>
           <a:xfrm>
             <a:off x="2496240" y="4846320"/>
-            <a:ext cx="1626840" cy="410760"/>
+            <a:ext cx="1626480" cy="410400"/>
           </a:xfrm>
           <a:prstGeom prst="rect">
             <a:avLst/>
@@ -7599,7 +7522,7 @@
         <p:spPr>
           <a:xfrm>
             <a:off x="2496240" y="5212080"/>
-            <a:ext cx="1626840" cy="365040"/>
+            <a:ext cx="1626480" cy="364680"/>
           </a:xfrm>
           <a:prstGeom prst="rect">
             <a:avLst/>
@@ -7660,7 +7583,7 @@
         <p:spPr>
           <a:xfrm>
             <a:off x="2541960" y="5577840"/>
-            <a:ext cx="1535400" cy="319320"/>
+            <a:ext cx="1535040" cy="318960"/>
           </a:xfrm>
           <a:prstGeom prst="rect">
             <a:avLst/>
@@ -7721,7 +7644,7 @@
         <p:spPr>
           <a:xfrm>
             <a:off x="4215240" y="4800600"/>
-            <a:ext cx="1626840" cy="1142280"/>
+            <a:ext cx="1626480" cy="1141920"/>
           </a:xfrm>
           <a:prstGeom prst="roundRect">
             <a:avLst>
@@ -7774,7 +7697,7 @@
         <p:spPr>
           <a:xfrm>
             <a:off x="4215240" y="4846320"/>
-            <a:ext cx="1626840" cy="410760"/>
+            <a:ext cx="1626480" cy="410400"/>
           </a:xfrm>
           <a:prstGeom prst="rect">
             <a:avLst/>
@@ -7835,7 +7758,7 @@
         <p:spPr>
           <a:xfrm>
             <a:off x="4215240" y="5212080"/>
-            <a:ext cx="1626840" cy="365040"/>
+            <a:ext cx="1626480" cy="364680"/>
           </a:xfrm>
           <a:prstGeom prst="rect">
             <a:avLst/>
@@ -7896,7 +7819,7 @@
         <p:spPr>
           <a:xfrm>
             <a:off x="4260960" y="5577840"/>
-            <a:ext cx="1535400" cy="319320"/>
+            <a:ext cx="1535040" cy="318960"/>
           </a:xfrm>
           <a:prstGeom prst="rect">
             <a:avLst/>
@@ -7957,7 +7880,7 @@
         <p:spPr>
           <a:xfrm>
             <a:off x="6263640" y="2743200"/>
-            <a:ext cx="5531400" cy="1599480"/>
+            <a:ext cx="5531040" cy="1599120"/>
           </a:xfrm>
           <a:prstGeom prst="rect">
             <a:avLst/>
@@ -8008,7 +7931,7 @@
         <p:spPr>
           <a:xfrm>
             <a:off x="6263640" y="2743200"/>
-            <a:ext cx="63360" cy="1599480"/>
+            <a:ext cx="63000" cy="1599120"/>
           </a:xfrm>
           <a:prstGeom prst="rect">
             <a:avLst/>
@@ -8059,7 +7982,7 @@
         <p:spPr>
           <a:xfrm>
             <a:off x="6492240" y="2834640"/>
-            <a:ext cx="5165640" cy="365040"/>
+            <a:ext cx="5165280" cy="364680"/>
           </a:xfrm>
           <a:prstGeom prst="rect">
             <a:avLst/>
@@ -8120,7 +8043,7 @@
         <p:spPr>
           <a:xfrm>
             <a:off x="6537960" y="3246120"/>
-            <a:ext cx="5074200" cy="1005120"/>
+            <a:ext cx="5073840" cy="1004760"/>
           </a:xfrm>
           <a:prstGeom prst="rect">
             <a:avLst/>
@@ -8221,7 +8144,7 @@
         <p:spPr>
           <a:xfrm>
             <a:off x="6263640" y="4526280"/>
-            <a:ext cx="5531400" cy="1599480"/>
+            <a:ext cx="5531040" cy="1599120"/>
           </a:xfrm>
           <a:prstGeom prst="rect">
             <a:avLst/>
@@ -8272,7 +8195,7 @@
         <p:spPr>
           <a:xfrm>
             <a:off x="6263640" y="4526280"/>
-            <a:ext cx="63360" cy="1599480"/>
+            <a:ext cx="63000" cy="1599120"/>
           </a:xfrm>
           <a:prstGeom prst="rect">
             <a:avLst/>
@@ -8323,7 +8246,7 @@
         <p:spPr>
           <a:xfrm>
             <a:off x="6492240" y="4617720"/>
-            <a:ext cx="5165640" cy="365040"/>
+            <a:ext cx="5165280" cy="364680"/>
           </a:xfrm>
           <a:prstGeom prst="rect">
             <a:avLst/>
@@ -8384,7 +8307,7 @@
         <p:spPr>
           <a:xfrm>
             <a:off x="6537960" y="5029200"/>
-            <a:ext cx="5074200" cy="1005120"/>
+            <a:ext cx="5073840" cy="1004760"/>
           </a:xfrm>
           <a:prstGeom prst="rect">
             <a:avLst/>
@@ -8485,7 +8408,7 @@
         <p:spPr>
           <a:xfrm>
             <a:off x="548640" y="6355080"/>
-            <a:ext cx="11063520" cy="10080"/>
+            <a:ext cx="11063160" cy="9720"/>
           </a:xfrm>
           <a:prstGeom prst="rect">
             <a:avLst/>
@@ -8536,7 +8459,7 @@
         <p:spPr>
           <a:xfrm>
             <a:off x="548640" y="6446520"/>
-            <a:ext cx="7314480" cy="273600"/>
+            <a:ext cx="7314120" cy="273240"/>
           </a:xfrm>
           <a:prstGeom prst="rect">
             <a:avLst/>
@@ -8597,7 +8520,7 @@
         <p:spPr>
           <a:xfrm>
             <a:off x="10698480" y="6446520"/>
-            <a:ext cx="913680" cy="273600"/>
+            <a:ext cx="913320" cy="273240"/>
           </a:xfrm>
           <a:prstGeom prst="rect">
             <a:avLst/>
@@ -8695,7 +8618,7 @@
         <p:spPr>
           <a:xfrm>
             <a:off x="548640" y="411480"/>
-            <a:ext cx="10972080" cy="273600"/>
+            <a:ext cx="10971720" cy="273240"/>
           </a:xfrm>
           <a:prstGeom prst="rect">
             <a:avLst/>
@@ -8756,7 +8679,7 @@
         <p:spPr>
           <a:xfrm>
             <a:off x="548640" y="713160"/>
-            <a:ext cx="10972080" cy="776520"/>
+            <a:ext cx="10971720" cy="776160"/>
           </a:xfrm>
           <a:prstGeom prst="rect">
             <a:avLst/>
@@ -8817,7 +8740,7 @@
         <p:spPr>
           <a:xfrm>
             <a:off x="548640" y="1600200"/>
-            <a:ext cx="6948720" cy="4525560"/>
+            <a:ext cx="6948360" cy="4525200"/>
           </a:xfrm>
           <a:prstGeom prst="rect">
             <a:avLst/>
@@ -8872,7 +8795,7 @@
         <p:spPr>
           <a:xfrm>
             <a:off x="777240" y="1783080"/>
-            <a:ext cx="365040" cy="365040"/>
+            <a:ext cx="364680" cy="364680"/>
           </a:xfrm>
           <a:prstGeom prst="rect">
             <a:avLst/>
@@ -8892,7 +8815,7 @@
         <p:spPr>
           <a:xfrm>
             <a:off x="1280160" y="1783080"/>
-            <a:ext cx="6034320" cy="365040"/>
+            <a:ext cx="6033960" cy="364680"/>
           </a:xfrm>
           <a:prstGeom prst="rect">
             <a:avLst/>
@@ -8953,7 +8876,7 @@
         <p:spPr>
           <a:xfrm>
             <a:off x="822960" y="2286000"/>
-            <a:ext cx="6491520" cy="3702600"/>
+            <a:ext cx="6491160" cy="3702240"/>
           </a:xfrm>
           <a:prstGeom prst="rect">
             <a:avLst/>
@@ -9281,7 +9204,7 @@
         <p:spPr>
           <a:xfrm>
             <a:off x="7680960" y="1600200"/>
-            <a:ext cx="4114080" cy="4525560"/>
+            <a:ext cx="4113720" cy="4525200"/>
           </a:xfrm>
           <a:prstGeom prst="rect">
             <a:avLst/>
@@ -9332,7 +9255,7 @@
         <p:spPr>
           <a:xfrm>
             <a:off x="7909560" y="1737360"/>
-            <a:ext cx="3748320" cy="319320"/>
+            <a:ext cx="3747960" cy="318960"/>
           </a:xfrm>
           <a:prstGeom prst="rect">
             <a:avLst/>
@@ -9393,7 +9316,7 @@
         <p:spPr>
           <a:xfrm>
             <a:off x="7909560" y="2240280"/>
-            <a:ext cx="3656880" cy="1508040"/>
+            <a:ext cx="3656520" cy="1507680"/>
           </a:xfrm>
           <a:prstGeom prst="roundRect">
             <a:avLst>
@@ -9446,7 +9369,7 @@
         <p:spPr>
           <a:xfrm>
             <a:off x="8046720" y="2313360"/>
-            <a:ext cx="3474000" cy="319320"/>
+            <a:ext cx="3473640" cy="318960"/>
           </a:xfrm>
           <a:prstGeom prst="rect">
             <a:avLst/>
@@ -9507,7 +9430,7 @@
         <p:spPr>
           <a:xfrm>
             <a:off x="8046720" y="2587680"/>
-            <a:ext cx="3474000" cy="502200"/>
+            <a:ext cx="3473640" cy="501840"/>
           </a:xfrm>
           <a:prstGeom prst="rect">
             <a:avLst/>
@@ -9568,7 +9491,7 @@
         <p:spPr>
           <a:xfrm>
             <a:off x="8046720" y="3154680"/>
-            <a:ext cx="3474000" cy="593640"/>
+            <a:ext cx="3473640" cy="593280"/>
           </a:xfrm>
           <a:prstGeom prst="rect">
             <a:avLst/>
@@ -9629,7 +9552,7 @@
         <p:spPr>
           <a:xfrm>
             <a:off x="7909560" y="3931920"/>
-            <a:ext cx="3656880" cy="1508040"/>
+            <a:ext cx="3656520" cy="1507680"/>
           </a:xfrm>
           <a:prstGeom prst="roundRect">
             <a:avLst>
@@ -9682,7 +9605,7 @@
         <p:spPr>
           <a:xfrm>
             <a:off x="8046720" y="4005000"/>
-            <a:ext cx="3474000" cy="319320"/>
+            <a:ext cx="3473640" cy="318960"/>
           </a:xfrm>
           <a:prstGeom prst="rect">
             <a:avLst/>
@@ -9743,7 +9666,7 @@
         <p:spPr>
           <a:xfrm>
             <a:off x="8046720" y="4279320"/>
-            <a:ext cx="3474000" cy="502200"/>
+            <a:ext cx="3473640" cy="501840"/>
           </a:xfrm>
           <a:prstGeom prst="rect">
             <a:avLst/>
@@ -9804,7 +9727,7 @@
         <p:spPr>
           <a:xfrm>
             <a:off x="8046720" y="4846320"/>
-            <a:ext cx="3474000" cy="593640"/>
+            <a:ext cx="3473640" cy="593280"/>
           </a:xfrm>
           <a:prstGeom prst="rect">
             <a:avLst/>
@@ -9865,7 +9788,7 @@
         <p:spPr>
           <a:xfrm>
             <a:off x="7909560" y="5623560"/>
-            <a:ext cx="3656880" cy="365040"/>
+            <a:ext cx="3656520" cy="364680"/>
           </a:xfrm>
           <a:prstGeom prst="rect">
             <a:avLst/>
@@ -9926,7 +9849,7 @@
         <p:spPr>
           <a:xfrm>
             <a:off x="548640" y="6355080"/>
-            <a:ext cx="11063520" cy="10080"/>
+            <a:ext cx="11063160" cy="9720"/>
           </a:xfrm>
           <a:prstGeom prst="rect">
             <a:avLst/>
@@ -9977,7 +9900,7 @@
         <p:spPr>
           <a:xfrm>
             <a:off x="548640" y="6446520"/>
-            <a:ext cx="7314480" cy="273600"/>
+            <a:ext cx="7314120" cy="273240"/>
           </a:xfrm>
           <a:prstGeom prst="rect">
             <a:avLst/>
@@ -10038,7 +9961,7 @@
         <p:spPr>
           <a:xfrm>
             <a:off x="10698480" y="6446520"/>
-            <a:ext cx="913680" cy="273600"/>
+            <a:ext cx="913320" cy="273240"/>
           </a:xfrm>
           <a:prstGeom prst="rect">
             <a:avLst/>
@@ -10136,7 +10059,7 @@
         <p:spPr>
           <a:xfrm>
             <a:off x="548640" y="411480"/>
-            <a:ext cx="10972080" cy="273600"/>
+            <a:ext cx="10971720" cy="273240"/>
           </a:xfrm>
           <a:prstGeom prst="rect">
             <a:avLst/>
@@ -10197,7 +10120,7 @@
         <p:spPr>
           <a:xfrm>
             <a:off x="548640" y="713160"/>
-            <a:ext cx="10972080" cy="776520"/>
+            <a:ext cx="10971720" cy="776160"/>
           </a:xfrm>
           <a:prstGeom prst="rect">
             <a:avLst/>
@@ -10258,7 +10181,7 @@
         <p:spPr>
           <a:xfrm>
             <a:off x="548640" y="1600200"/>
-            <a:ext cx="5531400" cy="4525560"/>
+            <a:ext cx="5531040" cy="4525200"/>
           </a:xfrm>
           <a:prstGeom prst="rect">
             <a:avLst/>
@@ -10309,7 +10232,7 @@
         <p:spPr>
           <a:xfrm>
             <a:off x="548640" y="1600200"/>
-            <a:ext cx="63360" cy="4525560"/>
+            <a:ext cx="63000" cy="4525200"/>
           </a:xfrm>
           <a:prstGeom prst="rect">
             <a:avLst/>
@@ -10364,7 +10287,7 @@
         <p:spPr>
           <a:xfrm>
             <a:off x="822960" y="1783080"/>
-            <a:ext cx="365040" cy="365040"/>
+            <a:ext cx="364680" cy="364680"/>
           </a:xfrm>
           <a:prstGeom prst="rect">
             <a:avLst/>
@@ -10384,7 +10307,7 @@
         <p:spPr>
           <a:xfrm>
             <a:off x="1325880" y="1783080"/>
-            <a:ext cx="4617000" cy="365040"/>
+            <a:ext cx="4616640" cy="364680"/>
           </a:xfrm>
           <a:prstGeom prst="rect">
             <a:avLst/>
@@ -10445,7 +10368,7 @@
         <p:spPr>
           <a:xfrm>
             <a:off x="822960" y="2377440"/>
-            <a:ext cx="4982760" cy="1828080"/>
+            <a:ext cx="4982400" cy="1827720"/>
           </a:xfrm>
           <a:prstGeom prst="rect">
             <a:avLst/>
@@ -10616,7 +10539,7 @@
         <p:spPr>
           <a:xfrm>
             <a:off x="822960" y="4389120"/>
-            <a:ext cx="4982760" cy="319320"/>
+            <a:ext cx="4982400" cy="318960"/>
           </a:xfrm>
           <a:prstGeom prst="rect">
             <a:avLst/>
@@ -10677,7 +10600,7 @@
         <p:spPr>
           <a:xfrm>
             <a:off x="822960" y="4846320"/>
-            <a:ext cx="163800" cy="163800"/>
+            <a:ext cx="163440" cy="163440"/>
           </a:xfrm>
           <a:prstGeom prst="ellipse">
             <a:avLst/>
@@ -10728,7 +10651,7 @@
         <p:spPr>
           <a:xfrm>
             <a:off x="1097280" y="4754880"/>
-            <a:ext cx="2468160" cy="365040"/>
+            <a:ext cx="2467800" cy="364680"/>
           </a:xfrm>
           <a:prstGeom prst="rect">
             <a:avLst/>
@@ -10789,7 +10712,7 @@
         <p:spPr>
           <a:xfrm>
             <a:off x="3566160" y="4754880"/>
-            <a:ext cx="2239560" cy="365040"/>
+            <a:ext cx="2239200" cy="364680"/>
           </a:xfrm>
           <a:prstGeom prst="rect">
             <a:avLst/>
@@ -10850,7 +10773,7 @@
         <p:spPr>
           <a:xfrm>
             <a:off x="822960" y="5303520"/>
-            <a:ext cx="163800" cy="163800"/>
+            <a:ext cx="163440" cy="163440"/>
           </a:xfrm>
           <a:prstGeom prst="ellipse">
             <a:avLst/>
@@ -10901,7 +10824,7 @@
         <p:spPr>
           <a:xfrm>
             <a:off x="1097280" y="5212080"/>
-            <a:ext cx="2468160" cy="365040"/>
+            <a:ext cx="2467800" cy="364680"/>
           </a:xfrm>
           <a:prstGeom prst="rect">
             <a:avLst/>
@@ -10962,7 +10885,7 @@
         <p:spPr>
           <a:xfrm>
             <a:off x="3566160" y="5212080"/>
-            <a:ext cx="2239560" cy="365040"/>
+            <a:ext cx="2239200" cy="364680"/>
           </a:xfrm>
           <a:prstGeom prst="rect">
             <a:avLst/>
@@ -11023,7 +10946,7 @@
         <p:spPr>
           <a:xfrm>
             <a:off x="822960" y="5760720"/>
-            <a:ext cx="163800" cy="163800"/>
+            <a:ext cx="163440" cy="163440"/>
           </a:xfrm>
           <a:prstGeom prst="ellipse">
             <a:avLst/>
@@ -11074,7 +10997,7 @@
         <p:spPr>
           <a:xfrm>
             <a:off x="1097280" y="5669280"/>
-            <a:ext cx="2468160" cy="365040"/>
+            <a:ext cx="2467800" cy="364680"/>
           </a:xfrm>
           <a:prstGeom prst="rect">
             <a:avLst/>
@@ -11135,7 +11058,7 @@
         <p:spPr>
           <a:xfrm>
             <a:off x="3566160" y="5669280"/>
-            <a:ext cx="2239560" cy="365040"/>
+            <a:ext cx="2239200" cy="364680"/>
           </a:xfrm>
           <a:prstGeom prst="rect">
             <a:avLst/>
@@ -11196,7 +11119,7 @@
         <p:spPr>
           <a:xfrm>
             <a:off x="6263640" y="1600200"/>
-            <a:ext cx="5531400" cy="4525560"/>
+            <a:ext cx="5531040" cy="4525200"/>
           </a:xfrm>
           <a:prstGeom prst="rect">
             <a:avLst/>
@@ -11247,7 +11170,7 @@
         <p:spPr>
           <a:xfrm>
             <a:off x="6263640" y="1600200"/>
-            <a:ext cx="63360" cy="4525560"/>
+            <a:ext cx="63000" cy="4525200"/>
           </a:xfrm>
           <a:prstGeom prst="rect">
             <a:avLst/>
@@ -11298,7 +11221,7 @@
         <p:spPr>
           <a:xfrm>
             <a:off x="6537960" y="1783080"/>
-            <a:ext cx="5074200" cy="365040"/>
+            <a:ext cx="5073840" cy="364680"/>
           </a:xfrm>
           <a:prstGeom prst="rect">
             <a:avLst/>
@@ -12940,7 +12863,7 @@
         <p:spPr>
           <a:xfrm>
             <a:off x="548640" y="6355080"/>
-            <a:ext cx="11063520" cy="10080"/>
+            <a:ext cx="11063160" cy="9720"/>
           </a:xfrm>
           <a:prstGeom prst="rect">
             <a:avLst/>
@@ -12991,7 +12914,7 @@
         <p:spPr>
           <a:xfrm>
             <a:off x="548640" y="6446520"/>
-            <a:ext cx="7314480" cy="273600"/>
+            <a:ext cx="7314120" cy="273240"/>
           </a:xfrm>
           <a:prstGeom prst="rect">
             <a:avLst/>
@@ -13052,7 +12975,7 @@
         <p:spPr>
           <a:xfrm>
             <a:off x="10698480" y="6446520"/>
-            <a:ext cx="913680" cy="273600"/>
+            <a:ext cx="913320" cy="273240"/>
           </a:xfrm>
           <a:prstGeom prst="rect">
             <a:avLst/>
@@ -13154,7 +13077,7 @@
         <p:spPr>
           <a:xfrm>
             <a:off x="1112400" y="1371600"/>
-            <a:ext cx="9966600" cy="3832920"/>
+            <a:ext cx="9966240" cy="3832560"/>
           </a:xfrm>
           <a:prstGeom prst="rect">
             <a:avLst/>
@@ -13174,7 +13097,7 @@
         <p:spPr>
           <a:xfrm>
             <a:off x="548640" y="411480"/>
-            <a:ext cx="10972080" cy="273600"/>
+            <a:ext cx="10971720" cy="273240"/>
           </a:xfrm>
           <a:prstGeom prst="rect">
             <a:avLst/>
@@ -13235,7 +13158,7 @@
         <p:spPr>
           <a:xfrm>
             <a:off x="548640" y="713160"/>
-            <a:ext cx="10972080" cy="776520"/>
+            <a:ext cx="10971720" cy="776160"/>
           </a:xfrm>
           <a:prstGeom prst="rect">
             <a:avLst/>
@@ -13296,7 +13219,7 @@
         <p:spPr>
           <a:xfrm>
             <a:off x="548640" y="5257800"/>
-            <a:ext cx="3565440" cy="1050840"/>
+            <a:ext cx="3565080" cy="1050480"/>
           </a:xfrm>
           <a:prstGeom prst="rect">
             <a:avLst/>
@@ -13347,7 +13270,7 @@
         <p:spPr>
           <a:xfrm>
             <a:off x="548640" y="5257800"/>
-            <a:ext cx="63360" cy="1050840"/>
+            <a:ext cx="63000" cy="1050480"/>
           </a:xfrm>
           <a:prstGeom prst="rect">
             <a:avLst/>
@@ -13398,7 +13321,7 @@
         <p:spPr>
           <a:xfrm>
             <a:off x="731520" y="5303520"/>
-            <a:ext cx="3291120" cy="639360"/>
+            <a:ext cx="3290760" cy="639000"/>
           </a:xfrm>
           <a:prstGeom prst="rect">
             <a:avLst/>
@@ -13459,7 +13382,7 @@
         <p:spPr>
           <a:xfrm>
             <a:off x="731520" y="5897880"/>
-            <a:ext cx="3291120" cy="365040"/>
+            <a:ext cx="3290760" cy="364680"/>
           </a:xfrm>
           <a:prstGeom prst="rect">
             <a:avLst/>
@@ -13520,7 +13443,7 @@
         <p:spPr>
           <a:xfrm>
             <a:off x="4297680" y="5257800"/>
-            <a:ext cx="3565440" cy="1050840"/>
+            <a:ext cx="3565080" cy="1050480"/>
           </a:xfrm>
           <a:prstGeom prst="rect">
             <a:avLst/>
@@ -13571,7 +13494,7 @@
         <p:spPr>
           <a:xfrm>
             <a:off x="4297680" y="5257800"/>
-            <a:ext cx="63360" cy="1050840"/>
+            <a:ext cx="63000" cy="1050480"/>
           </a:xfrm>
           <a:prstGeom prst="rect">
             <a:avLst/>
@@ -13622,7 +13545,7 @@
         <p:spPr>
           <a:xfrm>
             <a:off x="4480560" y="5312520"/>
-            <a:ext cx="3291120" cy="273600"/>
+            <a:ext cx="3290760" cy="273240"/>
           </a:xfrm>
           <a:prstGeom prst="rect">
             <a:avLst/>
@@ -13683,7 +13606,7 @@
         <p:spPr>
           <a:xfrm>
             <a:off x="4480560" y="5623560"/>
-            <a:ext cx="1809720" cy="639360"/>
+            <a:ext cx="1809360" cy="639000"/>
           </a:xfrm>
           <a:prstGeom prst="rect">
             <a:avLst/>
@@ -13780,7 +13703,7 @@
         <p:spPr>
           <a:xfrm>
             <a:off x="6291000" y="5623560"/>
-            <a:ext cx="1480680" cy="639360"/>
+            <a:ext cx="1480320" cy="639000"/>
           </a:xfrm>
           <a:prstGeom prst="rect">
             <a:avLst/>
@@ -13877,7 +13800,7 @@
         <p:spPr>
           <a:xfrm>
             <a:off x="8046720" y="5257800"/>
-            <a:ext cx="3565440" cy="1050840"/>
+            <a:ext cx="3565080" cy="1050480"/>
           </a:xfrm>
           <a:prstGeom prst="rect">
             <a:avLst/>
@@ -13928,7 +13851,7 @@
         <p:spPr>
           <a:xfrm>
             <a:off x="8046720" y="5257800"/>
-            <a:ext cx="63360" cy="1050840"/>
+            <a:ext cx="63000" cy="1050480"/>
           </a:xfrm>
           <a:prstGeom prst="rect">
             <a:avLst/>
@@ -13979,7 +13902,7 @@
         <p:spPr>
           <a:xfrm>
             <a:off x="8229600" y="5312520"/>
-            <a:ext cx="3291120" cy="273600"/>
+            <a:ext cx="3290760" cy="273240"/>
           </a:xfrm>
           <a:prstGeom prst="rect">
             <a:avLst/>
@@ -14040,7 +13963,7 @@
         <p:spPr>
           <a:xfrm>
             <a:off x="8229600" y="5586840"/>
-            <a:ext cx="3291120" cy="685080"/>
+            <a:ext cx="3290760" cy="684720"/>
           </a:xfrm>
           <a:prstGeom prst="rect">
             <a:avLst/>
@@ -14101,7 +14024,7 @@
         <p:spPr>
           <a:xfrm>
             <a:off x="548640" y="6355080"/>
-            <a:ext cx="11063520" cy="10080"/>
+            <a:ext cx="11063160" cy="9720"/>
           </a:xfrm>
           <a:prstGeom prst="rect">
             <a:avLst/>
@@ -14152,7 +14075,7 @@
         <p:spPr>
           <a:xfrm>
             <a:off x="548640" y="6446520"/>
-            <a:ext cx="7314480" cy="273600"/>
+            <a:ext cx="7314120" cy="273240"/>
           </a:xfrm>
           <a:prstGeom prst="rect">
             <a:avLst/>
@@ -14213,7 +14136,7 @@
         <p:spPr>
           <a:xfrm>
             <a:off x="10698480" y="6446520"/>
-            <a:ext cx="913680" cy="273600"/>
+            <a:ext cx="913320" cy="273240"/>
           </a:xfrm>
           <a:prstGeom prst="rect">
             <a:avLst/>
@@ -14311,7 +14234,7 @@
         <p:spPr>
           <a:xfrm>
             <a:off x="548640" y="411480"/>
-            <a:ext cx="10972080" cy="273600"/>
+            <a:ext cx="10971720" cy="273240"/>
           </a:xfrm>
           <a:prstGeom prst="rect">
             <a:avLst/>
@@ -14372,7 +14295,7 @@
         <p:spPr>
           <a:xfrm>
             <a:off x="548640" y="713160"/>
-            <a:ext cx="10972080" cy="776520"/>
+            <a:ext cx="10971720" cy="776160"/>
           </a:xfrm>
           <a:prstGeom prst="rect">
             <a:avLst/>
@@ -14433,7 +14356,7 @@
         <p:spPr>
           <a:xfrm>
             <a:off x="548640" y="5257800"/>
-            <a:ext cx="3565440" cy="1050840"/>
+            <a:ext cx="3565080" cy="1050480"/>
           </a:xfrm>
           <a:prstGeom prst="rect">
             <a:avLst/>
@@ -14484,7 +14407,7 @@
         <p:spPr>
           <a:xfrm>
             <a:off x="548640" y="5257800"/>
-            <a:ext cx="63360" cy="1050840"/>
+            <a:ext cx="63000" cy="1050480"/>
           </a:xfrm>
           <a:prstGeom prst="rect">
             <a:avLst/>
@@ -14535,7 +14458,7 @@
         <p:spPr>
           <a:xfrm>
             <a:off x="713160" y="5294520"/>
-            <a:ext cx="3309480" cy="255240"/>
+            <a:ext cx="3309120" cy="254880"/>
           </a:xfrm>
           <a:prstGeom prst="rect">
             <a:avLst/>
@@ -14596,7 +14519,7 @@
         <p:spPr>
           <a:xfrm>
             <a:off x="713160" y="5550480"/>
-            <a:ext cx="1819800" cy="776520"/>
+            <a:ext cx="1819440" cy="776160"/>
           </a:xfrm>
           <a:prstGeom prst="rect">
             <a:avLst/>
@@ -14726,7 +14649,7 @@
         <p:spPr>
           <a:xfrm>
             <a:off x="2533680" y="5550480"/>
-            <a:ext cx="1488960" cy="776520"/>
+            <a:ext cx="1488600" cy="776160"/>
           </a:xfrm>
           <a:prstGeom prst="rect">
             <a:avLst/>
@@ -14856,7 +14779,7 @@
         <p:spPr>
           <a:xfrm>
             <a:off x="4297680" y="5257800"/>
-            <a:ext cx="3565440" cy="1050840"/>
+            <a:ext cx="3565080" cy="1050480"/>
           </a:xfrm>
           <a:prstGeom prst="rect">
             <a:avLst/>
@@ -14907,7 +14830,7 @@
         <p:spPr>
           <a:xfrm>
             <a:off x="4297680" y="5257800"/>
-            <a:ext cx="63360" cy="1050840"/>
+            <a:ext cx="63000" cy="1050480"/>
           </a:xfrm>
           <a:prstGeom prst="rect">
             <a:avLst/>
@@ -14958,7 +14881,7 @@
         <p:spPr>
           <a:xfrm>
             <a:off x="4462200" y="5257800"/>
-            <a:ext cx="3309480" cy="639360"/>
+            <a:ext cx="3309120" cy="639000"/>
           </a:xfrm>
           <a:prstGeom prst="rect">
             <a:avLst/>
@@ -15019,7 +14942,7 @@
         <p:spPr>
           <a:xfrm>
             <a:off x="4462200" y="5806440"/>
-            <a:ext cx="3309480" cy="456480"/>
+            <a:ext cx="3309120" cy="456120"/>
           </a:xfrm>
           <a:prstGeom prst="rect">
             <a:avLst/>
@@ -15080,7 +15003,7 @@
         <p:spPr>
           <a:xfrm>
             <a:off x="8046720" y="5257800"/>
-            <a:ext cx="3565440" cy="1050840"/>
+            <a:ext cx="3565080" cy="1050480"/>
           </a:xfrm>
           <a:prstGeom prst="rect">
             <a:avLst/>
@@ -15131,7 +15054,7 @@
         <p:spPr>
           <a:xfrm>
             <a:off x="8046720" y="5257800"/>
-            <a:ext cx="63360" cy="1050840"/>
+            <a:ext cx="63000" cy="1050480"/>
           </a:xfrm>
           <a:prstGeom prst="rect">
             <a:avLst/>
@@ -15182,7 +15105,7 @@
         <p:spPr>
           <a:xfrm>
             <a:off x="8211240" y="5294520"/>
-            <a:ext cx="3309480" cy="255240"/>
+            <a:ext cx="3309120" cy="254880"/>
           </a:xfrm>
           <a:prstGeom prst="rect">
             <a:avLst/>
@@ -15243,7 +15166,7 @@
         <p:spPr>
           <a:xfrm>
             <a:off x="8211240" y="5550480"/>
-            <a:ext cx="3309480" cy="776520"/>
+            <a:ext cx="3309120" cy="776160"/>
           </a:xfrm>
           <a:prstGeom prst="rect">
             <a:avLst/>
@@ -15344,7 +15267,7 @@
         <p:spPr>
           <a:xfrm>
             <a:off x="548640" y="6355080"/>
-            <a:ext cx="11063520" cy="10080"/>
+            <a:ext cx="11063160" cy="9720"/>
           </a:xfrm>
           <a:prstGeom prst="rect">
             <a:avLst/>
@@ -15395,7 +15318,7 @@
         <p:spPr>
           <a:xfrm>
             <a:off x="548640" y="6446520"/>
-            <a:ext cx="7314480" cy="273600"/>
+            <a:ext cx="7314120" cy="273240"/>
           </a:xfrm>
           <a:prstGeom prst="rect">
             <a:avLst/>
@@ -15456,7 +15379,7 @@
         <p:spPr>
           <a:xfrm>
             <a:off x="10698480" y="6446520"/>
-            <a:ext cx="913680" cy="273600"/>
+            <a:ext cx="913320" cy="273240"/>
           </a:xfrm>
           <a:prstGeom prst="rect">
             <a:avLst/>
@@ -15521,7 +15444,7 @@
         <p:spPr>
           <a:xfrm>
             <a:off x="1149120" y="1363320"/>
-            <a:ext cx="9893160" cy="3804480"/>
+            <a:ext cx="9892800" cy="3804120"/>
           </a:xfrm>
           <a:prstGeom prst="rect">
             <a:avLst/>
@@ -15578,7 +15501,7 @@
         <p:spPr>
           <a:xfrm>
             <a:off x="548640" y="411480"/>
-            <a:ext cx="10972080" cy="273600"/>
+            <a:ext cx="10971720" cy="273240"/>
           </a:xfrm>
           <a:prstGeom prst="rect">
             <a:avLst/>
@@ -15639,7 +15562,7 @@
         <p:spPr>
           <a:xfrm>
             <a:off x="548640" y="713160"/>
-            <a:ext cx="10972080" cy="776520"/>
+            <a:ext cx="10971720" cy="776160"/>
           </a:xfrm>
           <a:prstGeom prst="rect">
             <a:avLst/>
@@ -15700,7 +15623,7 @@
         <p:spPr>
           <a:xfrm>
             <a:off x="548640" y="5257800"/>
-            <a:ext cx="3565440" cy="1050840"/>
+            <a:ext cx="3565080" cy="1050480"/>
           </a:xfrm>
           <a:prstGeom prst="rect">
             <a:avLst/>
@@ -15751,7 +15674,7 @@
         <p:spPr>
           <a:xfrm>
             <a:off x="548640" y="5257800"/>
-            <a:ext cx="63360" cy="1050840"/>
+            <a:ext cx="63000" cy="1050480"/>
           </a:xfrm>
           <a:prstGeom prst="rect">
             <a:avLst/>
@@ -15802,7 +15725,7 @@
         <p:spPr>
           <a:xfrm>
             <a:off x="713160" y="5294520"/>
-            <a:ext cx="3309480" cy="273600"/>
+            <a:ext cx="3309120" cy="273240"/>
           </a:xfrm>
           <a:prstGeom prst="rect">
             <a:avLst/>
@@ -15863,7 +15786,7 @@
         <p:spPr>
           <a:xfrm>
             <a:off x="713160" y="5568840"/>
-            <a:ext cx="3309480" cy="730800"/>
+            <a:ext cx="3309120" cy="730440"/>
           </a:xfrm>
           <a:prstGeom prst="rect">
             <a:avLst/>
@@ -15924,7 +15847,7 @@
         <p:spPr>
           <a:xfrm>
             <a:off x="4297680" y="5257800"/>
-            <a:ext cx="3565440" cy="1050840"/>
+            <a:ext cx="3565080" cy="1050480"/>
           </a:xfrm>
           <a:prstGeom prst="rect">
             <a:avLst/>
@@ -15975,7 +15898,7 @@
         <p:spPr>
           <a:xfrm>
             <a:off x="4297680" y="5257800"/>
-            <a:ext cx="63360" cy="1050840"/>
+            <a:ext cx="63000" cy="1050480"/>
           </a:xfrm>
           <a:prstGeom prst="rect">
             <a:avLst/>
@@ -16026,7 +15949,7 @@
         <p:spPr>
           <a:xfrm>
             <a:off x="4462200" y="5294520"/>
-            <a:ext cx="3309480" cy="273600"/>
+            <a:ext cx="3309120" cy="273240"/>
           </a:xfrm>
           <a:prstGeom prst="rect">
             <a:avLst/>
@@ -16087,7 +16010,7 @@
         <p:spPr>
           <a:xfrm>
             <a:off x="4462200" y="5568840"/>
-            <a:ext cx="3309480" cy="730800"/>
+            <a:ext cx="3309120" cy="730440"/>
           </a:xfrm>
           <a:prstGeom prst="rect">
             <a:avLst/>
@@ -16148,7 +16071,7 @@
         <p:spPr>
           <a:xfrm>
             <a:off x="8046720" y="5257800"/>
-            <a:ext cx="3565440" cy="1050840"/>
+            <a:ext cx="3565080" cy="1050480"/>
           </a:xfrm>
           <a:prstGeom prst="rect">
             <a:avLst/>
@@ -16199,7 +16122,7 @@
         <p:spPr>
           <a:xfrm>
             <a:off x="8046720" y="5257800"/>
-            <a:ext cx="63360" cy="1050840"/>
+            <a:ext cx="63000" cy="1050480"/>
           </a:xfrm>
           <a:prstGeom prst="rect">
             <a:avLst/>
@@ -16250,7 +16173,7 @@
         <p:spPr>
           <a:xfrm>
             <a:off x="8211240" y="5294520"/>
-            <a:ext cx="3309480" cy="273600"/>
+            <a:ext cx="3309120" cy="273240"/>
           </a:xfrm>
           <a:prstGeom prst="rect">
             <a:avLst/>
@@ -16311,7 +16234,7 @@
         <p:spPr>
           <a:xfrm>
             <a:off x="8211240" y="5550480"/>
-            <a:ext cx="3309480" cy="776520"/>
+            <a:ext cx="3309120" cy="776160"/>
           </a:xfrm>
           <a:prstGeom prst="rect">
             <a:avLst/>
@@ -16412,7 +16335,7 @@
         <p:spPr>
           <a:xfrm>
             <a:off x="548640" y="6355080"/>
-            <a:ext cx="11063520" cy="10080"/>
+            <a:ext cx="11063160" cy="9720"/>
           </a:xfrm>
           <a:prstGeom prst="rect">
             <a:avLst/>
@@ -16463,7 +16386,7 @@
         <p:spPr>
           <a:xfrm>
             <a:off x="548640" y="6446520"/>
-            <a:ext cx="7314480" cy="273600"/>
+            <a:ext cx="7314120" cy="273240"/>
           </a:xfrm>
           <a:prstGeom prst="rect">
             <a:avLst/>
@@ -16524,7 +16447,7 @@
         <p:spPr>
           <a:xfrm>
             <a:off x="10698480" y="6446520"/>
-            <a:ext cx="913680" cy="273600"/>
+            <a:ext cx="913320" cy="273240"/>
           </a:xfrm>
           <a:prstGeom prst="rect">
             <a:avLst/>
@@ -16589,7 +16512,7 @@
         <p:spPr>
           <a:xfrm>
             <a:off x="1866960" y="1371600"/>
-            <a:ext cx="8457840" cy="3843720"/>
+            <a:ext cx="8457480" cy="3843360"/>
           </a:xfrm>
           <a:prstGeom prst="rect">
             <a:avLst/>
@@ -16646,7 +16569,7 @@
         <p:spPr>
           <a:xfrm>
             <a:off x="548640" y="411480"/>
-            <a:ext cx="10972080" cy="273600"/>
+            <a:ext cx="10971720" cy="273240"/>
           </a:xfrm>
           <a:prstGeom prst="rect">
             <a:avLst/>
@@ -16707,7 +16630,7 @@
         <p:spPr>
           <a:xfrm>
             <a:off x="548640" y="713160"/>
-            <a:ext cx="10972080" cy="776520"/>
+            <a:ext cx="10971720" cy="776160"/>
           </a:xfrm>
           <a:prstGeom prst="rect">
             <a:avLst/>
@@ -16768,7 +16691,7 @@
         <p:spPr>
           <a:xfrm>
             <a:off x="548640" y="5257800"/>
-            <a:ext cx="3565440" cy="1050840"/>
+            <a:ext cx="3565080" cy="1050480"/>
           </a:xfrm>
           <a:prstGeom prst="rect">
             <a:avLst/>
@@ -16819,7 +16742,7 @@
         <p:spPr>
           <a:xfrm>
             <a:off x="548640" y="5257800"/>
-            <a:ext cx="63360" cy="1050840"/>
+            <a:ext cx="63000" cy="1050480"/>
           </a:xfrm>
           <a:prstGeom prst="rect">
             <a:avLst/>
@@ -16870,7 +16793,7 @@
         <p:spPr>
           <a:xfrm>
             <a:off x="713160" y="5294520"/>
-            <a:ext cx="3309480" cy="273600"/>
+            <a:ext cx="3309120" cy="273240"/>
           </a:xfrm>
           <a:prstGeom prst="rect">
             <a:avLst/>
@@ -16931,7 +16854,7 @@
         <p:spPr>
           <a:xfrm>
             <a:off x="713160" y="5586840"/>
-            <a:ext cx="3309480" cy="410760"/>
+            <a:ext cx="3309120" cy="410400"/>
           </a:xfrm>
           <a:prstGeom prst="rect">
             <a:avLst/>
@@ -16992,7 +16915,7 @@
         <p:spPr>
           <a:xfrm>
             <a:off x="713160" y="6007680"/>
-            <a:ext cx="3309480" cy="273600"/>
+            <a:ext cx="3309120" cy="273240"/>
           </a:xfrm>
           <a:prstGeom prst="rect">
             <a:avLst/>
@@ -17053,7 +16976,7 @@
         <p:spPr>
           <a:xfrm>
             <a:off x="4297680" y="5257800"/>
-            <a:ext cx="3565440" cy="1050840"/>
+            <a:ext cx="3565080" cy="1050480"/>
           </a:xfrm>
           <a:prstGeom prst="rect">
             <a:avLst/>
@@ -17104,7 +17027,7 @@
         <p:spPr>
           <a:xfrm>
             <a:off x="4297680" y="5257800"/>
-            <a:ext cx="63360" cy="1050840"/>
+            <a:ext cx="63000" cy="1050480"/>
           </a:xfrm>
           <a:prstGeom prst="rect">
             <a:avLst/>
@@ -17155,7 +17078,7 @@
         <p:spPr>
           <a:xfrm>
             <a:off x="4462200" y="5294520"/>
-            <a:ext cx="3309480" cy="273600"/>
+            <a:ext cx="3309120" cy="273240"/>
           </a:xfrm>
           <a:prstGeom prst="rect">
             <a:avLst/>
@@ -17216,7 +17139,7 @@
         <p:spPr>
           <a:xfrm>
             <a:off x="4462200" y="5550480"/>
-            <a:ext cx="3309480" cy="776520"/>
+            <a:ext cx="3309120" cy="776160"/>
           </a:xfrm>
           <a:prstGeom prst="rect">
             <a:avLst/>
@@ -17352,7 +17275,7 @@
         <p:spPr>
           <a:xfrm>
             <a:off x="8046720" y="5257800"/>
-            <a:ext cx="3565440" cy="1050840"/>
+            <a:ext cx="3565080" cy="1050480"/>
           </a:xfrm>
           <a:prstGeom prst="rect">
             <a:avLst/>
@@ -17403,7 +17326,7 @@
         <p:spPr>
           <a:xfrm>
             <a:off x="8046720" y="5257800"/>
-            <a:ext cx="63360" cy="1050840"/>
+            <a:ext cx="63000" cy="1050480"/>
           </a:xfrm>
           <a:prstGeom prst="rect">
             <a:avLst/>
@@ -17454,7 +17377,7 @@
         <p:spPr>
           <a:xfrm>
             <a:off x="8211240" y="5294520"/>
-            <a:ext cx="3309480" cy="273600"/>
+            <a:ext cx="3309120" cy="273240"/>
           </a:xfrm>
           <a:prstGeom prst="rect">
             <a:avLst/>
@@ -17515,7 +17438,7 @@
         <p:spPr>
           <a:xfrm>
             <a:off x="8211240" y="5532120"/>
-            <a:ext cx="3309480" cy="410760"/>
+            <a:ext cx="3309120" cy="410400"/>
           </a:xfrm>
           <a:prstGeom prst="rect">
             <a:avLst/>
@@ -17576,7 +17499,7 @@
         <p:spPr>
           <a:xfrm>
             <a:off x="8211240" y="5970960"/>
-            <a:ext cx="3309480" cy="365040"/>
+            <a:ext cx="3309120" cy="364680"/>
           </a:xfrm>
           <a:prstGeom prst="rect">
             <a:avLst/>
@@ -17637,7 +17560,7 @@
         <p:spPr>
           <a:xfrm>
             <a:off x="548640" y="6355080"/>
-            <a:ext cx="11063520" cy="10080"/>
+            <a:ext cx="11063160" cy="9720"/>
           </a:xfrm>
           <a:prstGeom prst="rect">
             <a:avLst/>
@@ -17688,7 +17611,7 @@
         <p:spPr>
           <a:xfrm>
             <a:off x="548640" y="6446520"/>
-            <a:ext cx="7314480" cy="273600"/>
+            <a:ext cx="7314120" cy="273240"/>
           </a:xfrm>
           <a:prstGeom prst="rect">
             <a:avLst/>
@@ -17749,7 +17672,7 @@
         <p:spPr>
           <a:xfrm>
             <a:off x="10698480" y="6446520"/>
-            <a:ext cx="913680" cy="273600"/>
+            <a:ext cx="913320" cy="273240"/>
           </a:xfrm>
           <a:prstGeom prst="rect">
             <a:avLst/>
@@ -17814,7 +17737,7 @@
         <p:spPr>
           <a:xfrm>
             <a:off x="0" y="1371600"/>
-            <a:ext cx="12191400" cy="3482640"/>
+            <a:ext cx="12191040" cy="3482280"/>
           </a:xfrm>
           <a:prstGeom prst="rect">
             <a:avLst/>
@@ -17871,7 +17794,7 @@
         <p:spPr>
           <a:xfrm>
             <a:off x="548640" y="411480"/>
-            <a:ext cx="10972080" cy="273600"/>
+            <a:ext cx="10971720" cy="273240"/>
           </a:xfrm>
           <a:prstGeom prst="rect">
             <a:avLst/>
@@ -17932,7 +17855,7 @@
         <p:spPr>
           <a:xfrm>
             <a:off x="548640" y="713160"/>
-            <a:ext cx="10972080" cy="776520"/>
+            <a:ext cx="10971720" cy="776160"/>
           </a:xfrm>
           <a:prstGeom prst="rect">
             <a:avLst/>
@@ -17993,7 +17916,7 @@
         <p:spPr>
           <a:xfrm>
             <a:off x="548640" y="1600200"/>
-            <a:ext cx="5942880" cy="4525560"/>
+            <a:ext cx="5942520" cy="4525200"/>
           </a:xfrm>
           <a:prstGeom prst="rect">
             <a:avLst/>
@@ -18044,7 +17967,7 @@
         <p:spPr>
           <a:xfrm>
             <a:off x="822960" y="1737360"/>
-            <a:ext cx="5485680" cy="365040"/>
+            <a:ext cx="5485320" cy="364680"/>
           </a:xfrm>
           <a:prstGeom prst="rect">
             <a:avLst/>
@@ -18105,7 +18028,7 @@
         <p:spPr>
           <a:xfrm>
             <a:off x="1005840" y="2240280"/>
-            <a:ext cx="5028480" cy="867960"/>
+            <a:ext cx="5028120" cy="867600"/>
           </a:xfrm>
           <a:prstGeom prst="roundRect">
             <a:avLst>
@@ -18158,7 +18081,7 @@
         <p:spPr>
           <a:xfrm>
             <a:off x="1005840" y="2240280"/>
-            <a:ext cx="5028480" cy="867960"/>
+            <a:ext cx="5028120" cy="867600"/>
           </a:xfrm>
           <a:prstGeom prst="rect">
             <a:avLst/>
@@ -18293,7 +18216,7 @@
         <p:spPr>
           <a:xfrm>
             <a:off x="3611880" y="3154680"/>
-            <a:ext cx="913680" cy="273600"/>
+            <a:ext cx="913320" cy="273240"/>
           </a:xfrm>
           <a:prstGeom prst="rect">
             <a:avLst/>
@@ -18354,7 +18277,7 @@
         <p:spPr>
           <a:xfrm>
             <a:off x="1005840" y="3520440"/>
-            <a:ext cx="5028480" cy="867960"/>
+            <a:ext cx="5028120" cy="867600"/>
           </a:xfrm>
           <a:prstGeom prst="roundRect">
             <a:avLst>
@@ -18407,7 +18330,7 @@
         <p:spPr>
           <a:xfrm>
             <a:off x="1005840" y="3520440"/>
-            <a:ext cx="5028480" cy="867960"/>
+            <a:ext cx="5028120" cy="867600"/>
           </a:xfrm>
           <a:prstGeom prst="rect">
             <a:avLst/>
@@ -18542,7 +18465,7 @@
         <p:spPr>
           <a:xfrm>
             <a:off x="1280160" y="4480560"/>
-            <a:ext cx="1553760" cy="273600"/>
+            <a:ext cx="1553400" cy="273240"/>
           </a:xfrm>
           <a:prstGeom prst="rect">
             <a:avLst/>
@@ -18648,7 +18571,7 @@
         <p:spPr>
           <a:xfrm>
             <a:off x="4069080" y="4480560"/>
-            <a:ext cx="1553760" cy="273600"/>
+            <a:ext cx="1553400" cy="273240"/>
           </a:xfrm>
           <a:prstGeom prst="rect">
             <a:avLst/>
@@ -18709,7 +18632,7 @@
         <p:spPr>
           <a:xfrm>
             <a:off x="1005840" y="4983480"/>
-            <a:ext cx="5028480" cy="867960"/>
+            <a:ext cx="5028120" cy="867600"/>
           </a:xfrm>
           <a:prstGeom prst="roundRect">
             <a:avLst>
@@ -18762,7 +18685,7 @@
         <p:spPr>
           <a:xfrm>
             <a:off x="1005840" y="4983480"/>
-            <a:ext cx="5028480" cy="867960"/>
+            <a:ext cx="5028120" cy="867600"/>
           </a:xfrm>
           <a:prstGeom prst="rect">
             <a:avLst/>
@@ -18853,7 +18776,7 @@
         <p:spPr>
           <a:xfrm>
             <a:off x="6720840" y="1600200"/>
-            <a:ext cx="5074200" cy="4525560"/>
+            <a:ext cx="5073840" cy="4525200"/>
           </a:xfrm>
           <a:prstGeom prst="rect">
             <a:avLst/>
@@ -18904,7 +18827,7 @@
         <p:spPr>
           <a:xfrm>
             <a:off x="6720840" y="1600200"/>
-            <a:ext cx="63360" cy="4525560"/>
+            <a:ext cx="63000" cy="4525200"/>
           </a:xfrm>
           <a:prstGeom prst="rect">
             <a:avLst/>
@@ -18959,7 +18882,7 @@
         <p:spPr>
           <a:xfrm>
             <a:off x="6995160" y="1783080"/>
-            <a:ext cx="365040" cy="365040"/>
+            <a:ext cx="364680" cy="364680"/>
           </a:xfrm>
           <a:prstGeom prst="rect">
             <a:avLst/>
@@ -18979,7 +18902,7 @@
         <p:spPr>
           <a:xfrm>
             <a:off x="7498080" y="1783080"/>
-            <a:ext cx="4159800" cy="365040"/>
+            <a:ext cx="4159440" cy="364680"/>
           </a:xfrm>
           <a:prstGeom prst="rect">
             <a:avLst/>
@@ -19040,7 +18963,7 @@
         <p:spPr>
           <a:xfrm>
             <a:off x="6995160" y="2377440"/>
-            <a:ext cx="4525560" cy="2742480"/>
+            <a:ext cx="4525200" cy="2742120"/>
           </a:xfrm>
           <a:prstGeom prst="rect">
             <a:avLst/>
@@ -19211,7 +19134,7 @@
         <p:spPr>
           <a:xfrm>
             <a:off x="6995160" y="5303520"/>
-            <a:ext cx="4525560" cy="639360"/>
+            <a:ext cx="4525200" cy="639000"/>
           </a:xfrm>
           <a:prstGeom prst="rect">
             <a:avLst/>
@@ -19262,7 +19185,7 @@
         <p:spPr>
           <a:xfrm>
             <a:off x="7132320" y="5303520"/>
-            <a:ext cx="4251240" cy="639360"/>
+            <a:ext cx="4250880" cy="639000"/>
           </a:xfrm>
           <a:prstGeom prst="rect">
             <a:avLst/>
@@ -19323,7 +19246,7 @@
         <p:spPr>
           <a:xfrm>
             <a:off x="548640" y="6355080"/>
-            <a:ext cx="11063520" cy="10080"/>
+            <a:ext cx="11063160" cy="9720"/>
           </a:xfrm>
           <a:prstGeom prst="rect">
             <a:avLst/>
@@ -19374,7 +19297,7 @@
         <p:spPr>
           <a:xfrm>
             <a:off x="548640" y="6446520"/>
-            <a:ext cx="7314480" cy="273600"/>
+            <a:ext cx="7314120" cy="273240"/>
           </a:xfrm>
           <a:prstGeom prst="rect">
             <a:avLst/>
@@ -19435,7 +19358,7 @@
         <p:spPr>
           <a:xfrm>
             <a:off x="10698480" y="6446520"/>
-            <a:ext cx="913680" cy="273600"/>
+            <a:ext cx="913320" cy="273240"/>
           </a:xfrm>
           <a:prstGeom prst="rect">
             <a:avLst/>
@@ -19533,7 +19456,7 @@
         <p:spPr>
           <a:xfrm>
             <a:off x="548640" y="411480"/>
-            <a:ext cx="10972080" cy="273600"/>
+            <a:ext cx="10971720" cy="273240"/>
           </a:xfrm>
           <a:prstGeom prst="rect">
             <a:avLst/>
@@ -19594,7 +19517,7 @@
         <p:spPr>
           <a:xfrm>
             <a:off x="548640" y="713160"/>
-            <a:ext cx="10972080" cy="776520"/>
+            <a:ext cx="10971720" cy="776160"/>
           </a:xfrm>
           <a:prstGeom prst="rect">
             <a:avLst/>
@@ -19655,7 +19578,7 @@
         <p:spPr>
           <a:xfrm>
             <a:off x="548640" y="1600200"/>
-            <a:ext cx="3611160" cy="1416600"/>
+            <a:ext cx="3610800" cy="1416240"/>
           </a:xfrm>
           <a:prstGeom prst="rect">
             <a:avLst/>
@@ -19706,7 +19629,7 @@
         <p:spPr>
           <a:xfrm>
             <a:off x="548640" y="1600200"/>
-            <a:ext cx="63360" cy="1416600"/>
+            <a:ext cx="63000" cy="1416240"/>
           </a:xfrm>
           <a:prstGeom prst="rect">
             <a:avLst/>
@@ -19757,7 +19680,7 @@
         <p:spPr>
           <a:xfrm>
             <a:off x="777240" y="1691640"/>
-            <a:ext cx="3245400" cy="639360"/>
+            <a:ext cx="3245040" cy="639000"/>
           </a:xfrm>
           <a:prstGeom prst="rect">
             <a:avLst/>
@@ -19818,7 +19741,7 @@
         <p:spPr>
           <a:xfrm>
             <a:off x="777240" y="2377440"/>
-            <a:ext cx="3245400" cy="593640"/>
+            <a:ext cx="3245040" cy="593280"/>
           </a:xfrm>
           <a:prstGeom prst="rect">
             <a:avLst/>
@@ -19879,7 +19802,7 @@
         <p:spPr>
           <a:xfrm>
             <a:off x="4434840" y="1600200"/>
-            <a:ext cx="3611160" cy="1416600"/>
+            <a:ext cx="3610800" cy="1416240"/>
           </a:xfrm>
           <a:prstGeom prst="rect">
             <a:avLst/>
@@ -19930,7 +19853,7 @@
         <p:spPr>
           <a:xfrm>
             <a:off x="4434840" y="1600200"/>
-            <a:ext cx="63360" cy="1416600"/>
+            <a:ext cx="63000" cy="1416240"/>
           </a:xfrm>
           <a:prstGeom prst="rect">
             <a:avLst/>
@@ -19981,7 +19904,7 @@
         <p:spPr>
           <a:xfrm>
             <a:off x="4663440" y="1691640"/>
-            <a:ext cx="3245400" cy="639360"/>
+            <a:ext cx="3245040" cy="639000"/>
           </a:xfrm>
           <a:prstGeom prst="rect">
             <a:avLst/>
@@ -20042,7 +19965,7 @@
         <p:spPr>
           <a:xfrm>
             <a:off x="4663440" y="2377440"/>
-            <a:ext cx="3245400" cy="593640"/>
+            <a:ext cx="3245040" cy="593280"/>
           </a:xfrm>
           <a:prstGeom prst="rect">
             <a:avLst/>
@@ -20103,7 +20026,7 @@
         <p:spPr>
           <a:xfrm>
             <a:off x="8321040" y="1600200"/>
-            <a:ext cx="3611160" cy="1416600"/>
+            <a:ext cx="3610800" cy="1416240"/>
           </a:xfrm>
           <a:prstGeom prst="rect">
             <a:avLst/>
@@ -20154,7 +20077,7 @@
         <p:spPr>
           <a:xfrm>
             <a:off x="8321040" y="1600200"/>
-            <a:ext cx="63360" cy="1416600"/>
+            <a:ext cx="63000" cy="1416240"/>
           </a:xfrm>
           <a:prstGeom prst="rect">
             <a:avLst/>
@@ -20205,7 +20128,7 @@
         <p:spPr>
           <a:xfrm>
             <a:off x="8549640" y="1691640"/>
-            <a:ext cx="3245400" cy="639360"/>
+            <a:ext cx="3245040" cy="639000"/>
           </a:xfrm>
           <a:prstGeom prst="rect">
             <a:avLst/>
@@ -20266,7 +20189,7 @@
         <p:spPr>
           <a:xfrm>
             <a:off x="8549640" y="2377440"/>
-            <a:ext cx="3245400" cy="593640"/>
+            <a:ext cx="3245040" cy="593280"/>
           </a:xfrm>
           <a:prstGeom prst="rect">
             <a:avLst/>
@@ -20327,7 +20250,7 @@
         <p:spPr>
           <a:xfrm>
             <a:off x="548640" y="3200400"/>
-            <a:ext cx="11063520" cy="730800"/>
+            <a:ext cx="11063160" cy="730440"/>
           </a:xfrm>
           <a:prstGeom prst="rect">
             <a:avLst/>
@@ -20382,7 +20305,7 @@
         <p:spPr>
           <a:xfrm>
             <a:off x="713160" y="3337560"/>
-            <a:ext cx="456480" cy="456480"/>
+            <a:ext cx="456120" cy="456120"/>
           </a:xfrm>
           <a:prstGeom prst="rect">
             <a:avLst/>
@@ -20402,7 +20325,7 @@
         <p:spPr>
           <a:xfrm>
             <a:off x="1280160" y="3200400"/>
-            <a:ext cx="10240560" cy="730800"/>
+            <a:ext cx="10240200" cy="730440"/>
           </a:xfrm>
           <a:prstGeom prst="rect">
             <a:avLst/>
@@ -20463,7 +20386,7 @@
         <p:spPr>
           <a:xfrm>
             <a:off x="548640" y="4160520"/>
-            <a:ext cx="5485680" cy="1965240"/>
+            <a:ext cx="5485320" cy="1964880"/>
           </a:xfrm>
           <a:prstGeom prst="rect">
             <a:avLst/>
@@ -20514,7 +20437,7 @@
         <p:spPr>
           <a:xfrm>
             <a:off x="548640" y="4160520"/>
-            <a:ext cx="63360" cy="1965240"/>
+            <a:ext cx="63000" cy="1964880"/>
           </a:xfrm>
           <a:prstGeom prst="rect">
             <a:avLst/>
@@ -20565,7 +20488,7 @@
         <p:spPr>
           <a:xfrm>
             <a:off x="777240" y="4297680"/>
-            <a:ext cx="5119920" cy="365040"/>
+            <a:ext cx="5119560" cy="364680"/>
           </a:xfrm>
           <a:prstGeom prst="rect">
             <a:avLst/>
@@ -20626,7 +20549,7 @@
         <p:spPr>
           <a:xfrm>
             <a:off x="777240" y="4709160"/>
-            <a:ext cx="5119920" cy="1370880"/>
+            <a:ext cx="5119560" cy="1370520"/>
           </a:xfrm>
           <a:prstGeom prst="rect">
             <a:avLst/>
@@ -20687,7 +20610,7 @@
         <p:spPr>
           <a:xfrm>
             <a:off x="6263640" y="4160520"/>
-            <a:ext cx="5485680" cy="1965240"/>
+            <a:ext cx="5485320" cy="1964880"/>
           </a:xfrm>
           <a:prstGeom prst="rect">
             <a:avLst/>
@@ -20738,7 +20661,7 @@
         <p:spPr>
           <a:xfrm>
             <a:off x="6263640" y="4160520"/>
-            <a:ext cx="63360" cy="1965240"/>
+            <a:ext cx="63000" cy="1964880"/>
           </a:xfrm>
           <a:prstGeom prst="rect">
             <a:avLst/>
@@ -20789,7 +20712,7 @@
         <p:spPr>
           <a:xfrm>
             <a:off x="6492240" y="4297680"/>
-            <a:ext cx="5119920" cy="365040"/>
+            <a:ext cx="5119560" cy="364680"/>
           </a:xfrm>
           <a:prstGeom prst="rect">
             <a:avLst/>
@@ -20850,7 +20773,7 @@
         <p:spPr>
           <a:xfrm>
             <a:off x="6492240" y="4709160"/>
-            <a:ext cx="5119920" cy="1370880"/>
+            <a:ext cx="5119560" cy="1370520"/>
           </a:xfrm>
           <a:prstGeom prst="rect">
             <a:avLst/>
@@ -20911,7 +20834,7 @@
         <p:spPr>
           <a:xfrm>
             <a:off x="548640" y="6355080"/>
-            <a:ext cx="11063520" cy="10080"/>
+            <a:ext cx="11063160" cy="9720"/>
           </a:xfrm>
           <a:prstGeom prst="rect">
             <a:avLst/>
@@ -20962,7 +20885,7 @@
         <p:spPr>
           <a:xfrm>
             <a:off x="548640" y="6446520"/>
-            <a:ext cx="7314480" cy="273600"/>
+            <a:ext cx="7314120" cy="273240"/>
           </a:xfrm>
           <a:prstGeom prst="rect">
             <a:avLst/>
@@ -21023,7 +20946,7 @@
         <p:spPr>
           <a:xfrm>
             <a:off x="10698480" y="6446520"/>
-            <a:ext cx="913680" cy="273600"/>
+            <a:ext cx="913320" cy="273240"/>
           </a:xfrm>
           <a:prstGeom prst="rect">
             <a:avLst/>
@@ -21121,7 +21044,7 @@
         <p:spPr>
           <a:xfrm>
             <a:off x="548640" y="411480"/>
-            <a:ext cx="10972080" cy="273600"/>
+            <a:ext cx="10971720" cy="273240"/>
           </a:xfrm>
           <a:prstGeom prst="rect">
             <a:avLst/>
@@ -21182,7 +21105,7 @@
         <p:spPr>
           <a:xfrm>
             <a:off x="548640" y="713160"/>
-            <a:ext cx="10972080" cy="776520"/>
+            <a:ext cx="10971720" cy="776160"/>
           </a:xfrm>
           <a:prstGeom prst="rect">
             <a:avLst/>
@@ -21243,7 +21166,7 @@
         <p:spPr>
           <a:xfrm>
             <a:off x="731520" y="1874520"/>
-            <a:ext cx="547920" cy="547920"/>
+            <a:ext cx="547560" cy="547560"/>
           </a:xfrm>
           <a:prstGeom prst="ellipse">
             <a:avLst/>
@@ -21294,7 +21217,7 @@
         <p:spPr>
           <a:xfrm>
             <a:off x="731520" y="1874520"/>
-            <a:ext cx="547920" cy="547920"/>
+            <a:ext cx="547560" cy="547560"/>
           </a:xfrm>
           <a:prstGeom prst="rect">
             <a:avLst/>
@@ -21355,7 +21278,7 @@
         <p:spPr>
           <a:xfrm>
             <a:off x="1508760" y="1828800"/>
-            <a:ext cx="9600480" cy="365040"/>
+            <a:ext cx="9600120" cy="364680"/>
           </a:xfrm>
           <a:prstGeom prst="rect">
             <a:avLst/>
@@ -21416,7 +21339,7 @@
         <p:spPr>
           <a:xfrm>
             <a:off x="1508760" y="2167200"/>
-            <a:ext cx="9600480" cy="319320"/>
+            <a:ext cx="9600120" cy="318960"/>
           </a:xfrm>
           <a:prstGeom prst="rect">
             <a:avLst/>
@@ -21477,7 +21400,7 @@
         <p:spPr>
           <a:xfrm>
             <a:off x="1508760" y="2541960"/>
-            <a:ext cx="9600480" cy="3960"/>
+            <a:ext cx="9600120" cy="3600"/>
           </a:xfrm>
           <a:prstGeom prst="rect">
             <a:avLst/>
@@ -21528,7 +21451,7 @@
         <p:spPr>
           <a:xfrm>
             <a:off x="731520" y="2651760"/>
-            <a:ext cx="547920" cy="547920"/>
+            <a:ext cx="547560" cy="547560"/>
           </a:xfrm>
           <a:prstGeom prst="ellipse">
             <a:avLst/>
@@ -21579,7 +21502,7 @@
         <p:spPr>
           <a:xfrm>
             <a:off x="731520" y="2651760"/>
-            <a:ext cx="547920" cy="547920"/>
+            <a:ext cx="547560" cy="547560"/>
           </a:xfrm>
           <a:prstGeom prst="rect">
             <a:avLst/>
@@ -21640,7 +21563,7 @@
         <p:spPr>
           <a:xfrm>
             <a:off x="1508760" y="2606040"/>
-            <a:ext cx="9600480" cy="365040"/>
+            <a:ext cx="9600120" cy="364680"/>
           </a:xfrm>
           <a:prstGeom prst="rect">
             <a:avLst/>
@@ -21701,7 +21624,7 @@
         <p:spPr>
           <a:xfrm>
             <a:off x="1508760" y="2944440"/>
-            <a:ext cx="9600480" cy="319320"/>
+            <a:ext cx="9600120" cy="318960"/>
           </a:xfrm>
           <a:prstGeom prst="rect">
             <a:avLst/>
@@ -21762,7 +21685,7 @@
         <p:spPr>
           <a:xfrm>
             <a:off x="1508760" y="3319200"/>
-            <a:ext cx="9600480" cy="3960"/>
+            <a:ext cx="9600120" cy="3600"/>
           </a:xfrm>
           <a:prstGeom prst="rect">
             <a:avLst/>
@@ -21813,7 +21736,7 @@
         <p:spPr>
           <a:xfrm>
             <a:off x="731520" y="3429000"/>
-            <a:ext cx="547920" cy="547920"/>
+            <a:ext cx="547560" cy="547560"/>
           </a:xfrm>
           <a:prstGeom prst="ellipse">
             <a:avLst/>
@@ -21864,7 +21787,7 @@
         <p:spPr>
           <a:xfrm>
             <a:off x="731520" y="3429000"/>
-            <a:ext cx="547920" cy="547920"/>
+            <a:ext cx="547560" cy="547560"/>
           </a:xfrm>
           <a:prstGeom prst="rect">
             <a:avLst/>
@@ -21925,7 +21848,7 @@
         <p:spPr>
           <a:xfrm>
             <a:off x="1508760" y="3383280"/>
-            <a:ext cx="9600480" cy="365040"/>
+            <a:ext cx="9600120" cy="364680"/>
           </a:xfrm>
           <a:prstGeom prst="rect">
             <a:avLst/>
@@ -21986,7 +21909,7 @@
         <p:spPr>
           <a:xfrm>
             <a:off x="1508760" y="3721680"/>
-            <a:ext cx="9600480" cy="319320"/>
+            <a:ext cx="9600120" cy="318960"/>
           </a:xfrm>
           <a:prstGeom prst="rect">
             <a:avLst/>
@@ -22047,7 +21970,7 @@
         <p:spPr>
           <a:xfrm>
             <a:off x="1508760" y="4096440"/>
-            <a:ext cx="9600480" cy="3960"/>
+            <a:ext cx="9600120" cy="3600"/>
           </a:xfrm>
           <a:prstGeom prst="rect">
             <a:avLst/>
@@ -22098,7 +22021,7 @@
         <p:spPr>
           <a:xfrm>
             <a:off x="731520" y="4206240"/>
-            <a:ext cx="547920" cy="547920"/>
+            <a:ext cx="547560" cy="547560"/>
           </a:xfrm>
           <a:prstGeom prst="ellipse">
             <a:avLst/>
@@ -22149,7 +22072,7 @@
         <p:spPr>
           <a:xfrm>
             <a:off x="731520" y="4206240"/>
-            <a:ext cx="547920" cy="547920"/>
+            <a:ext cx="547560" cy="547560"/>
           </a:xfrm>
           <a:prstGeom prst="rect">
             <a:avLst/>
@@ -22210,7 +22133,7 @@
         <p:spPr>
           <a:xfrm>
             <a:off x="1508760" y="4160520"/>
-            <a:ext cx="9600480" cy="365040"/>
+            <a:ext cx="9600120" cy="364680"/>
           </a:xfrm>
           <a:prstGeom prst="rect">
             <a:avLst/>
@@ -22271,7 +22194,7 @@
         <p:spPr>
           <a:xfrm>
             <a:off x="1508760" y="4498920"/>
-            <a:ext cx="9600480" cy="319320"/>
+            <a:ext cx="9600120" cy="318960"/>
           </a:xfrm>
           <a:prstGeom prst="rect">
             <a:avLst/>
@@ -22332,7 +22255,7 @@
         <p:spPr>
           <a:xfrm>
             <a:off x="1508760" y="4873680"/>
-            <a:ext cx="9600480" cy="3960"/>
+            <a:ext cx="9600120" cy="3600"/>
           </a:xfrm>
           <a:prstGeom prst="rect">
             <a:avLst/>
@@ -22383,7 +22306,7 @@
         <p:spPr>
           <a:xfrm>
             <a:off x="731520" y="4983480"/>
-            <a:ext cx="547920" cy="547920"/>
+            <a:ext cx="547560" cy="547560"/>
           </a:xfrm>
           <a:prstGeom prst="ellipse">
             <a:avLst/>
@@ -22434,7 +22357,7 @@
         <p:spPr>
           <a:xfrm>
             <a:off x="731520" y="4983480"/>
-            <a:ext cx="547920" cy="547920"/>
+            <a:ext cx="547560" cy="547560"/>
           </a:xfrm>
           <a:prstGeom prst="rect">
             <a:avLst/>
@@ -22495,7 +22418,7 @@
         <p:spPr>
           <a:xfrm>
             <a:off x="1508760" y="4937760"/>
-            <a:ext cx="9600480" cy="365040"/>
+            <a:ext cx="9600120" cy="364680"/>
           </a:xfrm>
           <a:prstGeom prst="rect">
             <a:avLst/>
@@ -22556,7 +22479,7 @@
         <p:spPr>
           <a:xfrm>
             <a:off x="1508760" y="5276160"/>
-            <a:ext cx="9600480" cy="319320"/>
+            <a:ext cx="9600120" cy="318960"/>
           </a:xfrm>
           <a:prstGeom prst="rect">
             <a:avLst/>
@@ -22617,7 +22540,7 @@
         <p:spPr>
           <a:xfrm>
             <a:off x="548640" y="6355080"/>
-            <a:ext cx="11063520" cy="10080"/>
+            <a:ext cx="11063160" cy="9720"/>
           </a:xfrm>
           <a:prstGeom prst="rect">
             <a:avLst/>
@@ -22668,7 +22591,7 @@
         <p:spPr>
           <a:xfrm>
             <a:off x="548640" y="6446520"/>
-            <a:ext cx="7314480" cy="273600"/>
+            <a:ext cx="7314120" cy="273240"/>
           </a:xfrm>
           <a:prstGeom prst="rect">
             <a:avLst/>
@@ -22729,7 +22652,7 @@
         <p:spPr>
           <a:xfrm>
             <a:off x="10698480" y="6446520"/>
-            <a:ext cx="913680" cy="273600"/>
+            <a:ext cx="913320" cy="273240"/>
           </a:xfrm>
           <a:prstGeom prst="rect">
             <a:avLst/>
@@ -22827,7 +22750,7 @@
         <p:spPr>
           <a:xfrm>
             <a:off x="914400" y="2194560"/>
-            <a:ext cx="2376720" cy="2376720"/>
+            <a:ext cx="2376360" cy="2376360"/>
           </a:xfrm>
           <a:prstGeom prst="ellipse">
             <a:avLst/>
@@ -22878,7 +22801,7 @@
         <p:spPr>
           <a:xfrm>
             <a:off x="914400" y="2148840"/>
-            <a:ext cx="2376720" cy="2468160"/>
+            <a:ext cx="2376360" cy="2467800"/>
           </a:xfrm>
           <a:prstGeom prst="rect">
             <a:avLst/>
@@ -22939,7 +22862,7 @@
         <p:spPr>
           <a:xfrm>
             <a:off x="4023360" y="2194560"/>
-            <a:ext cx="63360" cy="2742480"/>
+            <a:ext cx="63000" cy="2742120"/>
           </a:xfrm>
           <a:prstGeom prst="rect">
             <a:avLst/>
@@ -22990,7 +22913,7 @@
         <p:spPr>
           <a:xfrm>
             <a:off x="4297680" y="2194560"/>
-            <a:ext cx="7497360" cy="913680"/>
+            <a:ext cx="7497000" cy="913320"/>
           </a:xfrm>
           <a:prstGeom prst="rect">
             <a:avLst/>
@@ -23051,7 +22974,7 @@
         <p:spPr>
           <a:xfrm>
             <a:off x="4297680" y="3154680"/>
-            <a:ext cx="7497360" cy="1096560"/>
+            <a:ext cx="7497000" cy="1096200"/>
           </a:xfrm>
           <a:prstGeom prst="rect">
             <a:avLst/>
@@ -23112,7 +23035,7 @@
         <p:spPr>
           <a:xfrm>
             <a:off x="4297680" y="4572000"/>
-            <a:ext cx="7497360" cy="1279440"/>
+            <a:ext cx="7497000" cy="1279080"/>
           </a:xfrm>
           <a:prstGeom prst="rect">
             <a:avLst/>
@@ -23270,7 +23193,7 @@
         <p:spPr>
           <a:xfrm>
             <a:off x="548640" y="411480"/>
-            <a:ext cx="10972080" cy="273600"/>
+            <a:ext cx="10971720" cy="273240"/>
           </a:xfrm>
           <a:prstGeom prst="rect">
             <a:avLst/>
@@ -23331,7 +23254,7 @@
         <p:spPr>
           <a:xfrm>
             <a:off x="548640" y="713160"/>
-            <a:ext cx="10972080" cy="776520"/>
+            <a:ext cx="10971720" cy="776160"/>
           </a:xfrm>
           <a:prstGeom prst="rect">
             <a:avLst/>
@@ -23392,7 +23315,7 @@
         <p:spPr>
           <a:xfrm>
             <a:off x="548640" y="1691640"/>
-            <a:ext cx="593640" cy="383400"/>
+            <a:ext cx="593280" cy="383040"/>
           </a:xfrm>
           <a:prstGeom prst="rect">
             <a:avLst/>
@@ -23422,7 +23345,7 @@
               </a:tabLst>
             </a:pPr>
             <a:r>
-              <a:rPr b="1" lang="en-US" sz="1100" strike="noStrike" u="none">
+              <a:rPr b="1" lang="en-US" sz="1000" strike="noStrike" u="none">
                 <a:solidFill>
                   <a:srgbClr val="f4a11a"/>
                 </a:solidFill>
@@ -23433,7 +23356,7 @@
               </a:rPr>
               <a:t>[b1]</a:t>
             </a:r>
-            <a:endParaRPr b="0" lang="en-TR" sz="1100" strike="noStrike" u="none">
+            <a:endParaRPr b="0" lang="en-TR" sz="1000" strike="noStrike" u="none">
               <a:solidFill>
                 <a:srgbClr val="000000"/>
               </a:solidFill>
@@ -23453,7 +23376,7 @@
         <p:spPr>
           <a:xfrm>
             <a:off x="1143000" y="1691640"/>
-            <a:ext cx="4845600" cy="474840"/>
+            <a:ext cx="4845240" cy="474480"/>
           </a:xfrm>
           <a:prstGeom prst="rect">
             <a:avLst/>
@@ -23483,7 +23406,7 @@
               </a:tabLst>
             </a:pPr>
             <a:r>
-              <a:rPr b="0" lang="en-US" sz="1050" strike="noStrike" u="none">
+              <a:rPr b="0" lang="en-US" sz="900" strike="noStrike" u="none">
                 <a:solidFill>
                   <a:srgbClr val="334155"/>
                 </a:solidFill>
@@ -23492,9 +23415,9 @@
                 <a:latin typeface="Calibri"/>
                 <a:ea typeface="Calibri"/>
               </a:rPr>
-              <a:t>D. Rupprecht et al., "Breaking LTE on Layer Two," Proc. IEEE S&amp;P, May 2019, pp. 1121–1136.</a:t>
+              <a:t>A. Tabiban, H. A. Alameddine, M. A. Salahuddin, and R. Boutaba, "Signaling Storm in O-RAN: Challenges and Research Opportunities," IEEE Communications Magazine, vol. 62, no. 6, pp. 58-64, Jun. 2024. doi: 10.1109/MCOM.002.2300317.</a:t>
             </a:r>
-            <a:endParaRPr b="0" lang="en-TR" sz="1050" strike="noStrike" u="none">
+            <a:endParaRPr b="0" lang="en-TR" sz="900" strike="noStrike" u="none">
               <a:solidFill>
                 <a:srgbClr val="000000"/>
               </a:solidFill>
@@ -23514,7 +23437,7 @@
         <p:spPr>
           <a:xfrm>
             <a:off x="548640" y="2167200"/>
-            <a:ext cx="593640" cy="383400"/>
+            <a:ext cx="593280" cy="383040"/>
           </a:xfrm>
           <a:prstGeom prst="rect">
             <a:avLst/>
@@ -23544,7 +23467,7 @@
               </a:tabLst>
             </a:pPr>
             <a:r>
-              <a:rPr b="1" lang="en-US" sz="1100" strike="noStrike" u="none">
+              <a:rPr b="1" lang="en-US" sz="1000" strike="noStrike" u="none">
                 <a:solidFill>
                   <a:srgbClr val="f4a11a"/>
                 </a:solidFill>
@@ -23555,7 +23478,7 @@
               </a:rPr>
               <a:t>[b2]</a:t>
             </a:r>
-            <a:endParaRPr b="0" lang="en-TR" sz="1100" strike="noStrike" u="none">
+            <a:endParaRPr b="0" lang="en-TR" sz="1000" strike="noStrike" u="none">
               <a:solidFill>
                 <a:srgbClr val="000000"/>
               </a:solidFill>
@@ -23575,7 +23498,7 @@
         <p:spPr>
           <a:xfrm>
             <a:off x="1143000" y="2167200"/>
-            <a:ext cx="4845600" cy="474840"/>
+            <a:ext cx="4845240" cy="474480"/>
           </a:xfrm>
           <a:prstGeom prst="rect">
             <a:avLst/>
@@ -23605,7 +23528,7 @@
               </a:tabLst>
             </a:pPr>
             <a:r>
-              <a:rPr b="0" lang="en-US" sz="1050" strike="noStrike" u="none">
+              <a:rPr b="0" lang="en-US" sz="900" strike="noStrike" u="none">
                 <a:solidFill>
                   <a:srgbClr val="334155"/>
                 </a:solidFill>
@@ -23614,9 +23537,9 @@
                 <a:latin typeface="Calibri"/>
                 <a:ea typeface="Calibri"/>
               </a:rPr>
-              <a:t>B. H. Lee et al., "Enhanced Random Access for Massive-MTC," IEEE IoT J., vol. 8, no. 8, 2021.</a:t>
+              <a:t>B. H. Lee, H. S. Lee, S. Moon, and J. W. Lee, "Enhanced Random Access for Massive Machine Type Communications," IEEE Internet of Things Journal, vol. 8, no. 8, pp. 7046-7064, Apr. 2021. doi: 10.1109/JIOT.2020.3038148.</a:t>
             </a:r>
-            <a:endParaRPr b="0" lang="en-TR" sz="1050" strike="noStrike" u="none">
+            <a:endParaRPr b="0" lang="en-TR" sz="900" strike="noStrike" u="none">
               <a:solidFill>
                 <a:srgbClr val="000000"/>
               </a:solidFill>
@@ -23636,7 +23559,7 @@
         <p:spPr>
           <a:xfrm>
             <a:off x="548640" y="2642760"/>
-            <a:ext cx="593640" cy="383400"/>
+            <a:ext cx="593280" cy="383040"/>
           </a:xfrm>
           <a:prstGeom prst="rect">
             <a:avLst/>
@@ -23666,7 +23589,7 @@
               </a:tabLst>
             </a:pPr>
             <a:r>
-              <a:rPr b="1" lang="en-US" sz="1100" strike="noStrike" u="none">
+              <a:rPr b="1" lang="en-US" sz="1000" strike="noStrike" u="none">
                 <a:solidFill>
                   <a:srgbClr val="f4a11a"/>
                 </a:solidFill>
@@ -23677,7 +23600,7 @@
               </a:rPr>
               <a:t>[b3]</a:t>
             </a:r>
-            <a:endParaRPr b="0" lang="en-TR" sz="1100" strike="noStrike" u="none">
+            <a:endParaRPr b="0" lang="en-TR" sz="1000" strike="noStrike" u="none">
               <a:solidFill>
                 <a:srgbClr val="000000"/>
               </a:solidFill>
@@ -23697,7 +23620,7 @@
         <p:spPr>
           <a:xfrm>
             <a:off x="1143000" y="2642760"/>
-            <a:ext cx="4845600" cy="474840"/>
+            <a:ext cx="4845240" cy="474480"/>
           </a:xfrm>
           <a:prstGeom prst="rect">
             <a:avLst/>
@@ -23727,7 +23650,7 @@
               </a:tabLst>
             </a:pPr>
             <a:r>
-              <a:rPr b="0" lang="en-US" sz="1050" strike="noStrike" u="none">
+              <a:rPr b="0" lang="en-US" sz="900" strike="noStrike" u="none">
                 <a:solidFill>
                   <a:srgbClr val="334155"/>
                 </a:solidFill>
@@ -23736,9 +23659,9 @@
                 <a:latin typeface="Calibri"/>
                 <a:ea typeface="Calibri"/>
               </a:rPr>
-              <a:t>M. Grieves and J. Vickers, "Digital Twin: Mitigating Unpredictable Emergent Behavior," Springer, 2017.</a:t>
+              <a:t>M. Grieves and J. Vickers, "Digital Twin: Mitigating Unpredictable, Undesirable Emergent Behavior in Complex Systems," in Transdisciplinary Perspectives on Complex Systems, Springer, 2017, pp. 85-113. doi: 10.1007/978-3-319-38756-7_4.</a:t>
             </a:r>
-            <a:endParaRPr b="0" lang="en-TR" sz="1050" strike="noStrike" u="none">
+            <a:endParaRPr b="0" lang="en-TR" sz="900" strike="noStrike" u="none">
               <a:solidFill>
                 <a:srgbClr val="000000"/>
               </a:solidFill>
@@ -23758,7 +23681,7 @@
         <p:spPr>
           <a:xfrm>
             <a:off x="548640" y="3117960"/>
-            <a:ext cx="593640" cy="383400"/>
+            <a:ext cx="593280" cy="383040"/>
           </a:xfrm>
           <a:prstGeom prst="rect">
             <a:avLst/>
@@ -23788,7 +23711,7 @@
               </a:tabLst>
             </a:pPr>
             <a:r>
-              <a:rPr b="1" lang="en-US" sz="1100" strike="noStrike" u="none">
+              <a:rPr b="1" lang="en-US" sz="1000" strike="noStrike" u="none">
                 <a:solidFill>
                   <a:srgbClr val="f4a11a"/>
                 </a:solidFill>
@@ -23799,7 +23722,7 @@
               </a:rPr>
               <a:t>[b4]</a:t>
             </a:r>
-            <a:endParaRPr b="0" lang="en-TR" sz="1100" strike="noStrike" u="none">
+            <a:endParaRPr b="0" lang="en-TR" sz="1000" strike="noStrike" u="none">
               <a:solidFill>
                 <a:srgbClr val="000000"/>
               </a:solidFill>
@@ -23819,7 +23742,7 @@
         <p:spPr>
           <a:xfrm>
             <a:off x="1143000" y="3117960"/>
-            <a:ext cx="4845600" cy="474840"/>
+            <a:ext cx="4845240" cy="474480"/>
           </a:xfrm>
           <a:prstGeom prst="rect">
             <a:avLst/>
@@ -23849,7 +23772,7 @@
               </a:tabLst>
             </a:pPr>
             <a:r>
-              <a:rPr b="0" lang="en-US" sz="1050" strike="noStrike" u="none">
+              <a:rPr b="0" lang="en-US" sz="900" strike="noStrike" u="none">
                 <a:solidFill>
                   <a:srgbClr val="334155"/>
                 </a:solidFill>
@@ -23858,9 +23781,9 @@
                 <a:latin typeface="Calibri"/>
                 <a:ea typeface="Calibri"/>
               </a:rPr>
-              <a:t>3GPP, "NR; RRC Protocol Specification," TS 38.331, Rel. 17.3.0, 2022.</a:t>
+              <a:t>ETSI, "5G; NR; Radio Resource Control (RRC); Protocol specification," ETSI TS 138 331 V17.3.0, 3GPP TS 38.331 version 17.3.0 Release 17, Jan. 2023.</a:t>
             </a:r>
-            <a:endParaRPr b="0" lang="en-TR" sz="1050" strike="noStrike" u="none">
+            <a:endParaRPr b="0" lang="en-TR" sz="900" strike="noStrike" u="none">
               <a:solidFill>
                 <a:srgbClr val="000000"/>
               </a:solidFill>
@@ -23880,7 +23803,7 @@
         <p:spPr>
           <a:xfrm>
             <a:off x="548640" y="3593520"/>
-            <a:ext cx="593640" cy="383400"/>
+            <a:ext cx="593280" cy="383040"/>
           </a:xfrm>
           <a:prstGeom prst="rect">
             <a:avLst/>
@@ -23910,7 +23833,7 @@
               </a:tabLst>
             </a:pPr>
             <a:r>
-              <a:rPr b="1" lang="en-US" sz="1100" strike="noStrike" u="none">
+              <a:rPr b="1" lang="en-US" sz="1000" strike="noStrike" u="none">
                 <a:solidFill>
                   <a:srgbClr val="f4a11a"/>
                 </a:solidFill>
@@ -23921,7 +23844,7 @@
               </a:rPr>
               <a:t>[b5]</a:t>
             </a:r>
-            <a:endParaRPr b="0" lang="en-TR" sz="1100" strike="noStrike" u="none">
+            <a:endParaRPr b="0" lang="en-TR" sz="1000" strike="noStrike" u="none">
               <a:solidFill>
                 <a:srgbClr val="000000"/>
               </a:solidFill>
@@ -23941,7 +23864,7 @@
         <p:spPr>
           <a:xfrm>
             <a:off x="1143000" y="3593520"/>
-            <a:ext cx="4845600" cy="474840"/>
+            <a:ext cx="4845240" cy="474480"/>
           </a:xfrm>
           <a:prstGeom prst="rect">
             <a:avLst/>
@@ -23971,7 +23894,7 @@
               </a:tabLst>
             </a:pPr>
             <a:r>
-              <a:rPr b="0" lang="en-US" sz="1050" strike="noStrike" u="none">
+              <a:rPr b="0" lang="en-US" sz="900" strike="noStrike" u="none">
                 <a:solidFill>
                   <a:srgbClr val="334155"/>
                 </a:solidFill>
@@ -23980,9 +23903,9 @@
                 <a:latin typeface="Calibri"/>
                 <a:ea typeface="Calibri"/>
               </a:rPr>
-              <a:t>L. Miuccio et al., "Joint Control of Random Access for Massive MTC in 5G NR," IEEE IoT J., vol. 7, no. 6, 2020.</a:t>
+              <a:t>L. Miuccio, D. Panno, and S. Riolo, "Joint Control of Random Access and Dynamic Uplink Resource Dimensioning for Massive MTC in 5G NR Based on SCMA," IEEE Internet of Things Journal, vol. 7, no. 6, pp. 5042-5063, Jun. 2020. doi: 10.1109/JIOT.2020.2974402.</a:t>
             </a:r>
-            <a:endParaRPr b="0" lang="en-TR" sz="1050" strike="noStrike" u="none">
+            <a:endParaRPr b="0" lang="en-TR" sz="900" strike="noStrike" u="none">
               <a:solidFill>
                 <a:srgbClr val="000000"/>
               </a:solidFill>
@@ -24002,7 +23925,7 @@
         <p:spPr>
           <a:xfrm>
             <a:off x="548640" y="4069080"/>
-            <a:ext cx="593640" cy="383400"/>
+            <a:ext cx="593280" cy="383040"/>
           </a:xfrm>
           <a:prstGeom prst="rect">
             <a:avLst/>
@@ -24032,7 +23955,7 @@
               </a:tabLst>
             </a:pPr>
             <a:r>
-              <a:rPr b="1" lang="en-US" sz="1100" strike="noStrike" u="none">
+              <a:rPr b="1" lang="en-US" sz="1000" strike="noStrike" u="none">
                 <a:solidFill>
                   <a:srgbClr val="f4a11a"/>
                 </a:solidFill>
@@ -24043,7 +23966,7 @@
               </a:rPr>
               <a:t>[b6]</a:t>
             </a:r>
-            <a:endParaRPr b="0" lang="en-TR" sz="1100" strike="noStrike" u="none">
+            <a:endParaRPr b="0" lang="en-TR" sz="1000" strike="noStrike" u="none">
               <a:solidFill>
                 <a:srgbClr val="000000"/>
               </a:solidFill>
@@ -24063,7 +23986,7 @@
         <p:spPr>
           <a:xfrm>
             <a:off x="1143000" y="4069080"/>
-            <a:ext cx="4845600" cy="474840"/>
+            <a:ext cx="4845240" cy="474480"/>
           </a:xfrm>
           <a:prstGeom prst="rect">
             <a:avLst/>
@@ -24093,7 +24016,7 @@
               </a:tabLst>
             </a:pPr>
             <a:r>
-              <a:rPr b="0" lang="en-US" sz="1050" strike="noStrike" u="none">
+              <a:rPr b="0" lang="en-US" sz="900" strike="noStrike" u="none">
                 <a:solidFill>
                   <a:srgbClr val="334155"/>
                 </a:solidFill>
@@ -24102,9 +24025,9 @@
                 <a:latin typeface="Calibri"/>
                 <a:ea typeface="Calibri"/>
               </a:rPr>
-              <a:t>M. Kotuliak et al., "Performance Evaluation of 5G NR Non-Standalone Network," IEEE Access, vol. 9, 2021.</a:t>
+              <a:t>J.-B. Seo, W. T. Toor, and H. Jin, "Analysis of Two-Step Random Access Procedure for Cellular Ultra-Reliable Low Latency Communications," IEEE Access, vol. 9, pp. 5972-5985, Jan. 2021. doi: 10.1109/ACCESS.2020.3048824.</a:t>
             </a:r>
-            <a:endParaRPr b="0" lang="en-TR" sz="1050" strike="noStrike" u="none">
+            <a:endParaRPr b="0" lang="en-TR" sz="900" strike="noStrike" u="none">
               <a:solidFill>
                 <a:srgbClr val="000000"/>
               </a:solidFill>
@@ -24124,7 +24047,7 @@
         <p:spPr>
           <a:xfrm>
             <a:off x="6172200" y="1691640"/>
-            <a:ext cx="593640" cy="383400"/>
+            <a:ext cx="593280" cy="383040"/>
           </a:xfrm>
           <a:prstGeom prst="rect">
             <a:avLst/>
@@ -24154,7 +24077,7 @@
               </a:tabLst>
             </a:pPr>
             <a:r>
-              <a:rPr b="1" lang="en-US" sz="1100" strike="noStrike" u="none">
+              <a:rPr b="1" lang="en-US" sz="1000" strike="noStrike" u="none">
                 <a:solidFill>
                   <a:srgbClr val="f4a11a"/>
                 </a:solidFill>
@@ -24165,7 +24088,7 @@
               </a:rPr>
               <a:t>[b7]</a:t>
             </a:r>
-            <a:endParaRPr b="0" lang="en-TR" sz="1100" strike="noStrike" u="none">
+            <a:endParaRPr b="0" lang="en-TR" sz="1000" strike="noStrike" u="none">
               <a:solidFill>
                 <a:srgbClr val="000000"/>
               </a:solidFill>
@@ -24185,7 +24108,7 @@
         <p:spPr>
           <a:xfrm>
             <a:off x="6766560" y="1691640"/>
-            <a:ext cx="4845600" cy="474840"/>
+            <a:ext cx="4845240" cy="474480"/>
           </a:xfrm>
           <a:prstGeom prst="rect">
             <a:avLst/>
@@ -24215,7 +24138,7 @@
               </a:tabLst>
             </a:pPr>
             <a:r>
-              <a:rPr b="0" lang="en-US" sz="1050" strike="noStrike" u="none">
+              <a:rPr b="0" lang="en-US" sz="900" strike="noStrike" u="none">
                 <a:solidFill>
                   <a:srgbClr val="334155"/>
                 </a:solidFill>
@@ -24224,9 +24147,9 @@
                 <a:latin typeface="Calibri"/>
                 <a:ea typeface="Calibri"/>
               </a:rPr>
-              <a:t>S. K. Sharma and X. Wang, "Toward Massive MTC in Ultra-Dense Cellular IoT Networks," IEEE COMST, 2020.</a:t>
+              <a:t>S. K. Sharma and X. Wang, "Toward Massive Machine Type Communications in Ultra-Dense Cellular IoT Networks: Current Issues and Machine Learning-Assisted Solutions," IEEE Communications Surveys &amp; Tutorials, vol. 22, no. 1, pp. 426-471, 2020. doi: 10.1109/COMST.2019.2916177.</a:t>
             </a:r>
-            <a:endParaRPr b="0" lang="en-TR" sz="1050" strike="noStrike" u="none">
+            <a:endParaRPr b="0" lang="en-TR" sz="900" strike="noStrike" u="none">
               <a:solidFill>
                 <a:srgbClr val="000000"/>
               </a:solidFill>
@@ -24246,7 +24169,7 @@
         <p:spPr>
           <a:xfrm>
             <a:off x="6172200" y="2167200"/>
-            <a:ext cx="593640" cy="383400"/>
+            <a:ext cx="593280" cy="383040"/>
           </a:xfrm>
           <a:prstGeom prst="rect">
             <a:avLst/>
@@ -24276,7 +24199,7 @@
               </a:tabLst>
             </a:pPr>
             <a:r>
-              <a:rPr b="1" lang="en-US" sz="1100" strike="noStrike" u="none">
+              <a:rPr b="1" lang="en-US" sz="1000" strike="noStrike" u="none">
                 <a:solidFill>
                   <a:srgbClr val="f4a11a"/>
                 </a:solidFill>
@@ -24287,7 +24210,7 @@
               </a:rPr>
               <a:t>[b8]</a:t>
             </a:r>
-            <a:endParaRPr b="0" lang="en-TR" sz="1100" strike="noStrike" u="none">
+            <a:endParaRPr b="0" lang="en-TR" sz="1000" strike="noStrike" u="none">
               <a:solidFill>
                 <a:srgbClr val="000000"/>
               </a:solidFill>
@@ -24307,7 +24230,7 @@
         <p:spPr>
           <a:xfrm>
             <a:off x="6766560" y="2167200"/>
-            <a:ext cx="4845600" cy="474840"/>
+            <a:ext cx="4845240" cy="474480"/>
           </a:xfrm>
           <a:prstGeom prst="rect">
             <a:avLst/>
@@ -24337,7 +24260,7 @@
               </a:tabLst>
             </a:pPr>
             <a:r>
-              <a:rPr b="0" lang="en-US" sz="1050" strike="noStrike" u="none">
+              <a:rPr b="0" lang="en-US" sz="900" strike="noStrike" u="none">
                 <a:solidFill>
                   <a:srgbClr val="334155"/>
                 </a:solidFill>
@@ -24346,9 +24269,9 @@
                 <a:latin typeface="Calibri"/>
                 <a:ea typeface="Calibri"/>
               </a:rPr>
-              <a:t>R. Dong et al., "Deep Learning for Radio Resource Allocation in 5G," IEEE TWC, vol. 20, no. 4, 2021.</a:t>
+              <a:t>R. Dong, C. She, W. Hardjawana, Y. Li, and B. Vucetic, "Deep Learning for Radio Resource Allocation With Diverse Quality-of-Service Requirements in 5G," IEEE Transactions on Wireless Communications, vol. 20, no. 4, pp. 2309-2324, Apr. 2021. doi: 10.1109/TWC.2020.3041319.</a:t>
             </a:r>
-            <a:endParaRPr b="0" lang="en-TR" sz="1050" strike="noStrike" u="none">
+            <a:endParaRPr b="0" lang="en-TR" sz="900" strike="noStrike" u="none">
               <a:solidFill>
                 <a:srgbClr val="000000"/>
               </a:solidFill>
@@ -24368,7 +24291,7 @@
         <p:spPr>
           <a:xfrm>
             <a:off x="6172200" y="2642760"/>
-            <a:ext cx="593640" cy="383400"/>
+            <a:ext cx="593280" cy="383040"/>
           </a:xfrm>
           <a:prstGeom prst="rect">
             <a:avLst/>
@@ -24398,7 +24321,7 @@
               </a:tabLst>
             </a:pPr>
             <a:r>
-              <a:rPr b="1" lang="en-US" sz="1100" strike="noStrike" u="none">
+              <a:rPr b="1" lang="en-US" sz="1000" strike="noStrike" u="none">
                 <a:solidFill>
                   <a:srgbClr val="f4a11a"/>
                 </a:solidFill>
@@ -24409,7 +24332,7 @@
               </a:rPr>
               <a:t>[b9]</a:t>
             </a:r>
-            <a:endParaRPr b="0" lang="en-TR" sz="1100" strike="noStrike" u="none">
+            <a:endParaRPr b="0" lang="en-TR" sz="1000" strike="noStrike" u="none">
               <a:solidFill>
                 <a:srgbClr val="000000"/>
               </a:solidFill>
@@ -24429,7 +24352,7 @@
         <p:spPr>
           <a:xfrm>
             <a:off x="6766560" y="2642760"/>
-            <a:ext cx="4845600" cy="474840"/>
+            <a:ext cx="4845240" cy="474480"/>
           </a:xfrm>
           <a:prstGeom prst="rect">
             <a:avLst/>
@@ -24459,7 +24382,7 @@
               </a:tabLst>
             </a:pPr>
             <a:r>
-              <a:rPr b="0" lang="en-US" sz="1050" strike="noStrike" u="none">
+              <a:rPr b="0" lang="en-US" sz="900" strike="noStrike" u="none">
                 <a:solidFill>
                   <a:srgbClr val="334155"/>
                 </a:solidFill>
@@ -24468,9 +24391,9 @@
                 <a:latin typeface="Calibri"/>
                 <a:ea typeface="Calibri"/>
               </a:rPr>
-              <a:t>C. Zhang et al., "Deep Learning in Mobile and Wireless Networking: A Survey," IEEE COMST, 2019.</a:t>
+              <a:t>C. Zhang, P. Patras, and H. Haddadi, "Deep Learning in Mobile and Wireless Networking: A Survey," IEEE Communications Surveys &amp; Tutorials, vol. 21, no. 3, pp. 2224-2287, 2019. doi: 10.1109/COMST.2019.2904897.</a:t>
             </a:r>
-            <a:endParaRPr b="0" lang="en-TR" sz="1050" strike="noStrike" u="none">
+            <a:endParaRPr b="0" lang="en-TR" sz="900" strike="noStrike" u="none">
               <a:solidFill>
                 <a:srgbClr val="000000"/>
               </a:solidFill>
@@ -24490,7 +24413,7 @@
         <p:spPr>
           <a:xfrm>
             <a:off x="6172200" y="3117960"/>
-            <a:ext cx="593640" cy="383400"/>
+            <a:ext cx="593280" cy="383040"/>
           </a:xfrm>
           <a:prstGeom prst="rect">
             <a:avLst/>
@@ -24520,7 +24443,7 @@
               </a:tabLst>
             </a:pPr>
             <a:r>
-              <a:rPr b="1" lang="en-US" sz="1100" strike="noStrike" u="none">
+              <a:rPr b="1" lang="en-US" sz="1000" strike="noStrike" u="none">
                 <a:solidFill>
                   <a:srgbClr val="f4a11a"/>
                 </a:solidFill>
@@ -24531,7 +24454,7 @@
               </a:rPr>
               <a:t>[b10]</a:t>
             </a:r>
-            <a:endParaRPr b="0" lang="en-TR" sz="1100" strike="noStrike" u="none">
+            <a:endParaRPr b="0" lang="en-TR" sz="1000" strike="noStrike" u="none">
               <a:solidFill>
                 <a:srgbClr val="000000"/>
               </a:solidFill>
@@ -24551,7 +24474,7 @@
         <p:spPr>
           <a:xfrm>
             <a:off x="6766560" y="3117960"/>
-            <a:ext cx="4845600" cy="474840"/>
+            <a:ext cx="4845240" cy="474480"/>
           </a:xfrm>
           <a:prstGeom prst="rect">
             <a:avLst/>
@@ -24581,7 +24504,7 @@
               </a:tabLst>
             </a:pPr>
             <a:r>
-              <a:rPr b="0" lang="en-US" sz="1050" strike="noStrike" u="none">
+              <a:rPr b="0" lang="en-US" sz="900" strike="noStrike" u="none">
                 <a:solidFill>
                   <a:srgbClr val="334155"/>
                 </a:solidFill>
@@ -24590,9 +24513,9 @@
                 <a:latin typeface="Calibri"/>
                 <a:ea typeface="Calibri"/>
               </a:rPr>
-              <a:t>H. X. Nguyen et al., "Digital Twin for 5G and Beyond," IEEE Commun. Mag., vol. 59, no. 2, 2021.</a:t>
+              <a:t>H. X. Nguyen, R. Trestian, D. To, and M. Tatipamula, "Digital Twin for 5G and Beyond," IEEE Communications Magazine, vol. 59, no. 2, pp. 10-15, Feb. 2021. doi: 10.1109/MCOM.001.2000343.</a:t>
             </a:r>
-            <a:endParaRPr b="0" lang="en-TR" sz="1050" strike="noStrike" u="none">
+            <a:endParaRPr b="0" lang="en-TR" sz="900" strike="noStrike" u="none">
               <a:solidFill>
                 <a:srgbClr val="000000"/>
               </a:solidFill>
@@ -24612,7 +24535,7 @@
         <p:spPr>
           <a:xfrm>
             <a:off x="6172200" y="3593520"/>
-            <a:ext cx="593640" cy="383400"/>
+            <a:ext cx="593280" cy="383040"/>
           </a:xfrm>
           <a:prstGeom prst="rect">
             <a:avLst/>
@@ -24642,7 +24565,7 @@
               </a:tabLst>
             </a:pPr>
             <a:r>
-              <a:rPr b="1" lang="en-US" sz="1100" strike="noStrike" u="none">
+              <a:rPr b="1" lang="en-US" sz="1000" strike="noStrike" u="none">
                 <a:solidFill>
                   <a:srgbClr val="f4a11a"/>
                 </a:solidFill>
@@ -24653,7 +24576,7 @@
               </a:rPr>
               <a:t>[b14]</a:t>
             </a:r>
-            <a:endParaRPr b="0" lang="en-TR" sz="1100" strike="noStrike" u="none">
+            <a:endParaRPr b="0" lang="en-TR" sz="1000" strike="noStrike" u="none">
               <a:solidFill>
                 <a:srgbClr val="000000"/>
               </a:solidFill>
@@ -24673,7 +24596,7 @@
         <p:spPr>
           <a:xfrm>
             <a:off x="6766560" y="3593520"/>
-            <a:ext cx="4845600" cy="474840"/>
+            <a:ext cx="4845240" cy="474480"/>
           </a:xfrm>
           <a:prstGeom prst="rect">
             <a:avLst/>
@@ -24703,7 +24626,7 @@
               </a:tabLst>
             </a:pPr>
             <a:r>
-              <a:rPr b="0" lang="en-US" sz="1050" strike="noStrike" u="none">
+              <a:rPr b="0" lang="en-US" sz="900" strike="noStrike" u="none">
                 <a:solidFill>
                   <a:srgbClr val="334155"/>
                 </a:solidFill>
@@ -24712,9 +24635,9 @@
                 <a:latin typeface="Calibri"/>
                 <a:ea typeface="Calibri"/>
               </a:rPr>
-              <a:t>M. Polese et al., "Understanding O-RAN," IEEE COMST, vol. 25, no. 2, 2023.</a:t>
+              <a:t>M. Polese, L. Bonati, S. D'Oro, S. Basagni, and T. Melodia, "Understanding O-RAN: Architecture, Interfaces, Algorithms, Security, and Research Challenges," IEEE Communications Surveys &amp; Tutorials, vol. 25, no. 2, pp. 1376-1411, 2023. doi: 10.1109/COMST.2023.3239220.</a:t>
             </a:r>
-            <a:endParaRPr b="0" lang="en-TR" sz="1050" strike="noStrike" u="none">
+            <a:endParaRPr b="0" lang="en-TR" sz="900" strike="noStrike" u="none">
               <a:solidFill>
                 <a:srgbClr val="000000"/>
               </a:solidFill>
@@ -24734,7 +24657,7 @@
         <p:spPr>
           <a:xfrm>
             <a:off x="548640" y="6355080"/>
-            <a:ext cx="11063520" cy="10080"/>
+            <a:ext cx="11063160" cy="9720"/>
           </a:xfrm>
           <a:prstGeom prst="rect">
             <a:avLst/>
@@ -24785,7 +24708,7 @@
         <p:spPr>
           <a:xfrm>
             <a:off x="548640" y="6446520"/>
-            <a:ext cx="7314480" cy="273600"/>
+            <a:ext cx="7314120" cy="273240"/>
           </a:xfrm>
           <a:prstGeom prst="rect">
             <a:avLst/>
@@ -24846,7 +24769,7 @@
         <p:spPr>
           <a:xfrm>
             <a:off x="10698480" y="6446520"/>
-            <a:ext cx="913680" cy="273600"/>
+            <a:ext cx="913320" cy="273240"/>
           </a:xfrm>
           <a:prstGeom prst="rect">
             <a:avLst/>
@@ -24944,7 +24867,7 @@
         <p:spPr>
           <a:xfrm>
             <a:off x="548640" y="411480"/>
-            <a:ext cx="10972080" cy="273600"/>
+            <a:ext cx="10971720" cy="273240"/>
           </a:xfrm>
           <a:prstGeom prst="rect">
             <a:avLst/>
@@ -25005,7 +24928,7 @@
         <p:spPr>
           <a:xfrm>
             <a:off x="548640" y="713160"/>
-            <a:ext cx="10972080" cy="776520"/>
+            <a:ext cx="10971720" cy="776160"/>
           </a:xfrm>
           <a:prstGeom prst="rect">
             <a:avLst/>
@@ -25066,7 +24989,7 @@
         <p:spPr>
           <a:xfrm>
             <a:off x="548640" y="1554480"/>
-            <a:ext cx="10972080" cy="456480"/>
+            <a:ext cx="10971720" cy="456120"/>
           </a:xfrm>
           <a:prstGeom prst="rect">
             <a:avLst/>
@@ -25127,7 +25050,7 @@
         <p:spPr>
           <a:xfrm>
             <a:off x="548640" y="2194560"/>
-            <a:ext cx="3565440" cy="1462320"/>
+            <a:ext cx="3565080" cy="1461960"/>
           </a:xfrm>
           <a:prstGeom prst="rect">
             <a:avLst/>
@@ -25178,7 +25101,7 @@
         <p:spPr>
           <a:xfrm>
             <a:off x="548640" y="2194560"/>
-            <a:ext cx="63360" cy="1462320"/>
+            <a:ext cx="63000" cy="1461960"/>
           </a:xfrm>
           <a:prstGeom prst="rect">
             <a:avLst/>
@@ -25229,7 +25152,7 @@
         <p:spPr>
           <a:xfrm>
             <a:off x="777240" y="2331720"/>
-            <a:ext cx="3199680" cy="639360"/>
+            <a:ext cx="3199320" cy="639000"/>
           </a:xfrm>
           <a:prstGeom prst="rect">
             <a:avLst/>
@@ -25290,7 +25213,7 @@
         <p:spPr>
           <a:xfrm>
             <a:off x="777240" y="2971800"/>
-            <a:ext cx="3199680" cy="639360"/>
+            <a:ext cx="3199320" cy="639000"/>
           </a:xfrm>
           <a:prstGeom prst="rect">
             <a:avLst/>
@@ -25351,7 +25274,7 @@
         <p:spPr>
           <a:xfrm>
             <a:off x="4434840" y="2194560"/>
-            <a:ext cx="3565440" cy="1462320"/>
+            <a:ext cx="3565080" cy="1461960"/>
           </a:xfrm>
           <a:prstGeom prst="rect">
             <a:avLst/>
@@ -25402,7 +25325,7 @@
         <p:spPr>
           <a:xfrm>
             <a:off x="4434840" y="2194560"/>
-            <a:ext cx="63360" cy="1462320"/>
+            <a:ext cx="63000" cy="1461960"/>
           </a:xfrm>
           <a:prstGeom prst="rect">
             <a:avLst/>
@@ -25453,7 +25376,7 @@
         <p:spPr>
           <a:xfrm>
             <a:off x="4663440" y="2331720"/>
-            <a:ext cx="3199680" cy="639360"/>
+            <a:ext cx="3199320" cy="639000"/>
           </a:xfrm>
           <a:prstGeom prst="rect">
             <a:avLst/>
@@ -25514,7 +25437,7 @@
         <p:spPr>
           <a:xfrm>
             <a:off x="4663440" y="2971800"/>
-            <a:ext cx="3199680" cy="639360"/>
+            <a:ext cx="3199320" cy="639000"/>
           </a:xfrm>
           <a:prstGeom prst="rect">
             <a:avLst/>
@@ -25575,7 +25498,7 @@
         <p:spPr>
           <a:xfrm>
             <a:off x="8321040" y="2194560"/>
-            <a:ext cx="3565440" cy="1462320"/>
+            <a:ext cx="3565080" cy="1461960"/>
           </a:xfrm>
           <a:prstGeom prst="rect">
             <a:avLst/>
@@ -25626,7 +25549,7 @@
         <p:spPr>
           <a:xfrm>
             <a:off x="8321040" y="2194560"/>
-            <a:ext cx="63360" cy="1462320"/>
+            <a:ext cx="63000" cy="1461960"/>
           </a:xfrm>
           <a:prstGeom prst="rect">
             <a:avLst/>
@@ -25677,7 +25600,7 @@
         <p:spPr>
           <a:xfrm>
             <a:off x="8549640" y="2331720"/>
-            <a:ext cx="3199680" cy="639360"/>
+            <a:ext cx="3199320" cy="639000"/>
           </a:xfrm>
           <a:prstGeom prst="rect">
             <a:avLst/>
@@ -25738,7 +25661,7 @@
         <p:spPr>
           <a:xfrm>
             <a:off x="8549640" y="2971800"/>
-            <a:ext cx="3199680" cy="639360"/>
+            <a:ext cx="3199320" cy="639000"/>
           </a:xfrm>
           <a:prstGeom prst="rect">
             <a:avLst/>
@@ -25799,7 +25722,7 @@
         <p:spPr>
           <a:xfrm>
             <a:off x="548640" y="3931920"/>
-            <a:ext cx="7314480" cy="365040"/>
+            <a:ext cx="7314120" cy="364680"/>
           </a:xfrm>
           <a:prstGeom prst="rect">
             <a:avLst/>
@@ -25860,7 +25783,7 @@
         <p:spPr>
           <a:xfrm>
             <a:off x="548640" y="4389120"/>
-            <a:ext cx="3565440" cy="867960"/>
+            <a:ext cx="3565080" cy="867600"/>
           </a:xfrm>
           <a:prstGeom prst="rect">
             <a:avLst/>
@@ -25911,7 +25834,7 @@
         <p:spPr>
           <a:xfrm>
             <a:off x="777240" y="4480560"/>
-            <a:ext cx="3199680" cy="365040"/>
+            <a:ext cx="3199320" cy="364680"/>
           </a:xfrm>
           <a:prstGeom prst="rect">
             <a:avLst/>
@@ -25972,7 +25895,7 @@
         <p:spPr>
           <a:xfrm>
             <a:off x="777240" y="4846320"/>
-            <a:ext cx="3199680" cy="365040"/>
+            <a:ext cx="3199320" cy="364680"/>
           </a:xfrm>
           <a:prstGeom prst="rect">
             <a:avLst/>
@@ -26033,7 +25956,7 @@
         <p:spPr>
           <a:xfrm>
             <a:off x="4434840" y="4389120"/>
-            <a:ext cx="3565440" cy="867960"/>
+            <a:ext cx="3565080" cy="867600"/>
           </a:xfrm>
           <a:prstGeom prst="rect">
             <a:avLst/>
@@ -26084,7 +26007,7 @@
         <p:spPr>
           <a:xfrm>
             <a:off x="4663440" y="4480560"/>
-            <a:ext cx="3199680" cy="365040"/>
+            <a:ext cx="3199320" cy="364680"/>
           </a:xfrm>
           <a:prstGeom prst="rect">
             <a:avLst/>
@@ -26145,7 +26068,7 @@
         <p:spPr>
           <a:xfrm>
             <a:off x="4663440" y="4846320"/>
-            <a:ext cx="3199680" cy="365040"/>
+            <a:ext cx="3199320" cy="364680"/>
           </a:xfrm>
           <a:prstGeom prst="rect">
             <a:avLst/>
@@ -26206,7 +26129,7 @@
         <p:spPr>
           <a:xfrm>
             <a:off x="8321040" y="4389120"/>
-            <a:ext cx="3565440" cy="867960"/>
+            <a:ext cx="3565080" cy="867600"/>
           </a:xfrm>
           <a:prstGeom prst="rect">
             <a:avLst/>
@@ -26257,7 +26180,7 @@
         <p:spPr>
           <a:xfrm>
             <a:off x="8549640" y="4480560"/>
-            <a:ext cx="3199680" cy="365040"/>
+            <a:ext cx="3199320" cy="364680"/>
           </a:xfrm>
           <a:prstGeom prst="rect">
             <a:avLst/>
@@ -26318,7 +26241,7 @@
         <p:spPr>
           <a:xfrm>
             <a:off x="8549640" y="4846320"/>
-            <a:ext cx="3199680" cy="365040"/>
+            <a:ext cx="3199320" cy="364680"/>
           </a:xfrm>
           <a:prstGeom prst="rect">
             <a:avLst/>
@@ -26379,7 +26302,7 @@
         <p:spPr>
           <a:xfrm>
             <a:off x="548640" y="5532120"/>
-            <a:ext cx="11063520" cy="593640"/>
+            <a:ext cx="11063160" cy="593280"/>
           </a:xfrm>
           <a:prstGeom prst="rect">
             <a:avLst/>
@@ -26434,7 +26357,7 @@
         <p:spPr>
           <a:xfrm>
             <a:off x="713160" y="5650920"/>
-            <a:ext cx="365040" cy="365040"/>
+            <a:ext cx="364680" cy="364680"/>
           </a:xfrm>
           <a:prstGeom prst="rect">
             <a:avLst/>
@@ -26454,7 +26377,7 @@
         <p:spPr>
           <a:xfrm>
             <a:off x="1188720" y="5532120"/>
-            <a:ext cx="10332000" cy="593640"/>
+            <a:ext cx="10331640" cy="593280"/>
           </a:xfrm>
           <a:prstGeom prst="rect">
             <a:avLst/>
@@ -26515,7 +26438,7 @@
         <p:spPr>
           <a:xfrm>
             <a:off x="548640" y="6355080"/>
-            <a:ext cx="11063520" cy="10080"/>
+            <a:ext cx="11063160" cy="9720"/>
           </a:xfrm>
           <a:prstGeom prst="rect">
             <a:avLst/>
@@ -26566,7 +26489,7 @@
         <p:spPr>
           <a:xfrm>
             <a:off x="548640" y="6446520"/>
-            <a:ext cx="7314480" cy="273600"/>
+            <a:ext cx="7314120" cy="273240"/>
           </a:xfrm>
           <a:prstGeom prst="rect">
             <a:avLst/>
@@ -26627,7 +26550,7 @@
         <p:spPr>
           <a:xfrm>
             <a:off x="10698480" y="6446520"/>
-            <a:ext cx="913680" cy="273600"/>
+            <a:ext cx="913320" cy="273240"/>
           </a:xfrm>
           <a:prstGeom prst="rect">
             <a:avLst/>
@@ -26725,7 +26648,7 @@
         <p:spPr>
           <a:xfrm>
             <a:off x="548640" y="411480"/>
-            <a:ext cx="10972080" cy="273600"/>
+            <a:ext cx="10971720" cy="273240"/>
           </a:xfrm>
           <a:prstGeom prst="rect">
             <a:avLst/>
@@ -26786,7 +26709,7 @@
         <p:spPr>
           <a:xfrm>
             <a:off x="548640" y="713160"/>
-            <a:ext cx="10972080" cy="776520"/>
+            <a:ext cx="10971720" cy="776160"/>
           </a:xfrm>
           <a:prstGeom prst="rect">
             <a:avLst/>
@@ -26847,7 +26770,7 @@
         <p:spPr>
           <a:xfrm>
             <a:off x="548640" y="1600200"/>
-            <a:ext cx="6125760" cy="4525560"/>
+            <a:ext cx="6125400" cy="4525200"/>
           </a:xfrm>
           <a:prstGeom prst="rect">
             <a:avLst/>
@@ -26898,7 +26821,7 @@
         <p:spPr>
           <a:xfrm>
             <a:off x="548640" y="1600200"/>
-            <a:ext cx="63360" cy="4525560"/>
+            <a:ext cx="63000" cy="4525200"/>
           </a:xfrm>
           <a:prstGeom prst="rect">
             <a:avLst/>
@@ -26949,7 +26872,7 @@
         <p:spPr>
           <a:xfrm>
             <a:off x="822960" y="1737360"/>
-            <a:ext cx="5668560" cy="365040"/>
+            <a:ext cx="5668200" cy="364680"/>
           </a:xfrm>
           <a:prstGeom prst="rect">
             <a:avLst/>
@@ -27010,7 +26933,7 @@
         <p:spPr>
           <a:xfrm>
             <a:off x="822960" y="2103120"/>
-            <a:ext cx="5668560" cy="639360"/>
+            <a:ext cx="5668200" cy="639000"/>
           </a:xfrm>
           <a:prstGeom prst="rect">
             <a:avLst/>
@@ -27071,7 +26994,7 @@
         <p:spPr>
           <a:xfrm>
             <a:off x="822960" y="2834640"/>
-            <a:ext cx="5668560" cy="319320"/>
+            <a:ext cx="5668200" cy="318960"/>
           </a:xfrm>
           <a:prstGeom prst="rect">
             <a:avLst/>
@@ -27132,7 +27055,7 @@
         <p:spPr>
           <a:xfrm>
             <a:off x="822960" y="3154680"/>
-            <a:ext cx="5668560" cy="2010960"/>
+            <a:ext cx="5668200" cy="2010600"/>
           </a:xfrm>
           <a:prstGeom prst="rect">
             <a:avLst/>
@@ -27338,7 +27261,7 @@
         <p:spPr>
           <a:xfrm>
             <a:off x="822960" y="5394960"/>
-            <a:ext cx="5577120" cy="593640"/>
+            <a:ext cx="5576760" cy="593280"/>
           </a:xfrm>
           <a:prstGeom prst="rect">
             <a:avLst/>
@@ -27389,7 +27312,7 @@
         <p:spPr>
           <a:xfrm>
             <a:off x="960120" y="5394960"/>
-            <a:ext cx="5348520" cy="593640"/>
+            <a:ext cx="5348160" cy="593280"/>
           </a:xfrm>
           <a:prstGeom prst="rect">
             <a:avLst/>
@@ -27450,7 +27373,7 @@
         <p:spPr>
           <a:xfrm>
             <a:off x="6903720" y="1600200"/>
-            <a:ext cx="4708440" cy="4525560"/>
+            <a:ext cx="4708080" cy="4525200"/>
           </a:xfrm>
           <a:prstGeom prst="rect">
             <a:avLst/>
@@ -27501,7 +27424,7 @@
         <p:spPr>
           <a:xfrm>
             <a:off x="7178040" y="1737360"/>
-            <a:ext cx="4251240" cy="319320"/>
+            <a:ext cx="4250880" cy="318960"/>
           </a:xfrm>
           <a:prstGeom prst="rect">
             <a:avLst/>
@@ -27562,7 +27485,7 @@
         <p:spPr>
           <a:xfrm>
             <a:off x="7086600" y="2103120"/>
-            <a:ext cx="1279440" cy="365040"/>
+            <a:ext cx="1279080" cy="364680"/>
           </a:xfrm>
           <a:prstGeom prst="roundRect">
             <a:avLst>
@@ -27615,7 +27538,7 @@
         <p:spPr>
           <a:xfrm>
             <a:off x="7086600" y="2103120"/>
-            <a:ext cx="1279440" cy="365040"/>
+            <a:ext cx="1279080" cy="364680"/>
           </a:xfrm>
           <a:prstGeom prst="rect">
             <a:avLst/>
@@ -27676,7 +27599,7 @@
         <p:spPr>
           <a:xfrm>
             <a:off x="9966960" y="2103120"/>
-            <a:ext cx="1279440" cy="365040"/>
+            <a:ext cx="1279080" cy="364680"/>
           </a:xfrm>
           <a:prstGeom prst="roundRect">
             <a:avLst>
@@ -27729,7 +27652,7 @@
         <p:spPr>
           <a:xfrm>
             <a:off x="9966960" y="2103120"/>
-            <a:ext cx="1279440" cy="365040"/>
+            <a:ext cx="1279080" cy="364680"/>
           </a:xfrm>
           <a:prstGeom prst="rect">
             <a:avLst/>
@@ -27878,7 +27801,7 @@
         <p:spPr>
           <a:xfrm>
             <a:off x="7726680" y="2496240"/>
-            <a:ext cx="2879640" cy="227880"/>
+            <a:ext cx="2879280" cy="227520"/>
           </a:xfrm>
           <a:prstGeom prst="rect">
             <a:avLst/>
@@ -27983,7 +27906,7 @@
         <p:spPr>
           <a:xfrm>
             <a:off x="7726680" y="3182040"/>
-            <a:ext cx="2879640" cy="227880"/>
+            <a:ext cx="2879280" cy="227520"/>
           </a:xfrm>
           <a:prstGeom prst="rect">
             <a:avLst/>
@@ -28088,7 +28011,7 @@
         <p:spPr>
           <a:xfrm>
             <a:off x="7726680" y="3867840"/>
-            <a:ext cx="2879640" cy="227880"/>
+            <a:ext cx="2879280" cy="227520"/>
           </a:xfrm>
           <a:prstGeom prst="rect">
             <a:avLst/>
@@ -28193,7 +28116,7 @@
         <p:spPr>
           <a:xfrm>
             <a:off x="7726680" y="4553640"/>
-            <a:ext cx="2879640" cy="227880"/>
+            <a:ext cx="2879280" cy="227520"/>
           </a:xfrm>
           <a:prstGeom prst="rect">
             <a:avLst/>
@@ -28298,7 +28221,7 @@
         <p:spPr>
           <a:xfrm>
             <a:off x="8618400" y="5806440"/>
-            <a:ext cx="1279440" cy="319320"/>
+            <a:ext cx="1279080" cy="318960"/>
           </a:xfrm>
           <a:prstGeom prst="roundRect">
             <a:avLst>
@@ -28351,7 +28274,7 @@
         <p:spPr>
           <a:xfrm>
             <a:off x="8618400" y="5806440"/>
-            <a:ext cx="1279440" cy="319320"/>
+            <a:ext cx="1279080" cy="318960"/>
           </a:xfrm>
           <a:prstGeom prst="rect">
             <a:avLst/>
@@ -28412,7 +28335,7 @@
         <p:spPr>
           <a:xfrm>
             <a:off x="548640" y="6355080"/>
-            <a:ext cx="11063520" cy="10080"/>
+            <a:ext cx="11063160" cy="9720"/>
           </a:xfrm>
           <a:prstGeom prst="rect">
             <a:avLst/>
@@ -28463,7 +28386,7 @@
         <p:spPr>
           <a:xfrm>
             <a:off x="548640" y="6446520"/>
-            <a:ext cx="7314480" cy="273600"/>
+            <a:ext cx="7314120" cy="273240"/>
           </a:xfrm>
           <a:prstGeom prst="rect">
             <a:avLst/>
@@ -28524,7 +28447,7 @@
         <p:spPr>
           <a:xfrm>
             <a:off x="10698480" y="6446520"/>
-            <a:ext cx="913680" cy="273600"/>
+            <a:ext cx="913320" cy="273240"/>
           </a:xfrm>
           <a:prstGeom prst="rect">
             <a:avLst/>
@@ -28622,7 +28545,7 @@
         <p:spPr>
           <a:xfrm>
             <a:off x="548640" y="411480"/>
-            <a:ext cx="10972080" cy="273600"/>
+            <a:ext cx="10971720" cy="273240"/>
           </a:xfrm>
           <a:prstGeom prst="rect">
             <a:avLst/>
@@ -28683,7 +28606,7 @@
         <p:spPr>
           <a:xfrm>
             <a:off x="548640" y="713160"/>
-            <a:ext cx="10972080" cy="776520"/>
+            <a:ext cx="10971720" cy="776160"/>
           </a:xfrm>
           <a:prstGeom prst="rect">
             <a:avLst/>
@@ -28744,7 +28667,7 @@
         <p:spPr>
           <a:xfrm>
             <a:off x="548640" y="1600200"/>
-            <a:ext cx="5942880" cy="4525560"/>
+            <a:ext cx="5942520" cy="4525200"/>
           </a:xfrm>
           <a:prstGeom prst="rect">
             <a:avLst/>
@@ -28795,7 +28718,7 @@
         <p:spPr>
           <a:xfrm>
             <a:off x="548640" y="1600200"/>
-            <a:ext cx="63360" cy="4525560"/>
+            <a:ext cx="63000" cy="4525200"/>
           </a:xfrm>
           <a:prstGeom prst="rect">
             <a:avLst/>
@@ -28850,7 +28773,7 @@
         <p:spPr>
           <a:xfrm>
             <a:off x="822960" y="1783080"/>
-            <a:ext cx="410760" cy="410760"/>
+            <a:ext cx="410400" cy="410400"/>
           </a:xfrm>
           <a:prstGeom prst="rect">
             <a:avLst/>
@@ -28870,7 +28793,7 @@
         <p:spPr>
           <a:xfrm>
             <a:off x="1325880" y="1783080"/>
-            <a:ext cx="5028480" cy="410760"/>
+            <a:ext cx="5028120" cy="410400"/>
           </a:xfrm>
           <a:prstGeom prst="rect">
             <a:avLst/>
@@ -28931,7 +28854,7 @@
         <p:spPr>
           <a:xfrm>
             <a:off x="822960" y="2377440"/>
-            <a:ext cx="5394240" cy="2376720"/>
+            <a:ext cx="5393880" cy="2376360"/>
           </a:xfrm>
           <a:prstGeom prst="rect">
             <a:avLst/>
@@ -29137,7 +29060,7 @@
         <p:spPr>
           <a:xfrm>
             <a:off x="822960" y="4846320"/>
-            <a:ext cx="5394240" cy="365040"/>
+            <a:ext cx="5393880" cy="364680"/>
           </a:xfrm>
           <a:prstGeom prst="rect">
             <a:avLst/>
@@ -29198,7 +29121,7 @@
         <p:spPr>
           <a:xfrm>
             <a:off x="822960" y="5394960"/>
-            <a:ext cx="5394240" cy="593640"/>
+            <a:ext cx="5393880" cy="593280"/>
           </a:xfrm>
           <a:prstGeom prst="rect">
             <a:avLst/>
@@ -29249,7 +29172,7 @@
         <p:spPr>
           <a:xfrm>
             <a:off x="960120" y="5394960"/>
-            <a:ext cx="5119920" cy="593640"/>
+            <a:ext cx="5119560" cy="593280"/>
           </a:xfrm>
           <a:prstGeom prst="rect">
             <a:avLst/>
@@ -29310,7 +29233,7 @@
         <p:spPr>
           <a:xfrm>
             <a:off x="6766560" y="1600200"/>
-            <a:ext cx="4845600" cy="4525560"/>
+            <a:ext cx="4845240" cy="4525200"/>
           </a:xfrm>
           <a:prstGeom prst="rect">
             <a:avLst/>
@@ -29361,7 +29284,7 @@
         <p:spPr>
           <a:xfrm>
             <a:off x="7040880" y="1737360"/>
-            <a:ext cx="4388400" cy="319320"/>
+            <a:ext cx="4388040" cy="318960"/>
           </a:xfrm>
           <a:prstGeom prst="rect">
             <a:avLst/>
@@ -29422,7 +29345,7 @@
         <p:spPr>
           <a:xfrm>
             <a:off x="8183880" y="2194560"/>
-            <a:ext cx="2010960" cy="776520"/>
+            <a:ext cx="2010600" cy="776160"/>
           </a:xfrm>
           <a:prstGeom prst="roundRect">
             <a:avLst>
@@ -29475,7 +29398,7 @@
         <p:spPr>
           <a:xfrm>
             <a:off x="8183880" y="2194560"/>
-            <a:ext cx="2010960" cy="776520"/>
+            <a:ext cx="2010600" cy="776160"/>
           </a:xfrm>
           <a:prstGeom prst="rect">
             <a:avLst/>
@@ -29566,7 +29489,7 @@
         <p:spPr>
           <a:xfrm>
             <a:off x="7909560" y="3611880"/>
-            <a:ext cx="2559600" cy="867960"/>
+            <a:ext cx="2559240" cy="867600"/>
           </a:xfrm>
           <a:prstGeom prst="roundRect">
             <a:avLst>
@@ -29619,7 +29542,7 @@
         <p:spPr>
           <a:xfrm>
             <a:off x="7909560" y="3611880"/>
-            <a:ext cx="2559600" cy="867960"/>
+            <a:ext cx="2559240" cy="867600"/>
           </a:xfrm>
           <a:prstGeom prst="rect">
             <a:avLst/>
@@ -29710,7 +29633,7 @@
         <p:spPr>
           <a:xfrm>
             <a:off x="8001000" y="5120640"/>
-            <a:ext cx="2376720" cy="776520"/>
+            <a:ext cx="2376360" cy="776160"/>
           </a:xfrm>
           <a:prstGeom prst="roundRect">
             <a:avLst>
@@ -29763,7 +29686,7 @@
         <p:spPr>
           <a:xfrm>
             <a:off x="8001000" y="5120640"/>
-            <a:ext cx="2376720" cy="776520"/>
+            <a:ext cx="2376360" cy="776160"/>
           </a:xfrm>
           <a:prstGeom prst="rect">
             <a:avLst/>
@@ -29868,7 +29791,7 @@
         <p:spPr>
           <a:xfrm>
             <a:off x="8092440" y="3063240"/>
-            <a:ext cx="913680" cy="273600"/>
+            <a:ext cx="913320" cy="273240"/>
           </a:xfrm>
           <a:prstGeom prst="rect">
             <a:avLst/>
@@ -29929,7 +29852,7 @@
         <p:spPr>
           <a:xfrm>
             <a:off x="9372600" y="3063240"/>
-            <a:ext cx="1828080" cy="273600"/>
+            <a:ext cx="1827720" cy="273240"/>
           </a:xfrm>
           <a:prstGeom prst="rect">
             <a:avLst/>
@@ -30035,7 +29958,7 @@
         <p:spPr>
           <a:xfrm>
             <a:off x="9281160" y="4617720"/>
-            <a:ext cx="1096560" cy="273600"/>
+            <a:ext cx="1096200" cy="273240"/>
           </a:xfrm>
           <a:prstGeom prst="rect">
             <a:avLst/>
@@ -30096,7 +30019,7 @@
         <p:spPr>
           <a:xfrm>
             <a:off x="548640" y="6355080"/>
-            <a:ext cx="11063520" cy="10080"/>
+            <a:ext cx="11063160" cy="9720"/>
           </a:xfrm>
           <a:prstGeom prst="rect">
             <a:avLst/>
@@ -30147,7 +30070,7 @@
         <p:spPr>
           <a:xfrm>
             <a:off x="548640" y="6446520"/>
-            <a:ext cx="7314480" cy="273600"/>
+            <a:ext cx="7314120" cy="273240"/>
           </a:xfrm>
           <a:prstGeom prst="rect">
             <a:avLst/>
@@ -30208,7 +30131,7 @@
         <p:spPr>
           <a:xfrm>
             <a:off x="10698480" y="6446520"/>
-            <a:ext cx="913680" cy="273600"/>
+            <a:ext cx="913320" cy="273240"/>
           </a:xfrm>
           <a:prstGeom prst="rect">
             <a:avLst/>
@@ -30306,7 +30229,7 @@
         <p:spPr>
           <a:xfrm>
             <a:off x="548640" y="411480"/>
-            <a:ext cx="10972080" cy="273600"/>
+            <a:ext cx="10971720" cy="273240"/>
           </a:xfrm>
           <a:prstGeom prst="rect">
             <a:avLst/>
@@ -30367,7 +30290,7 @@
         <p:spPr>
           <a:xfrm>
             <a:off x="548640" y="713160"/>
-            <a:ext cx="10972080" cy="776520"/>
+            <a:ext cx="10971720" cy="776160"/>
           </a:xfrm>
           <a:prstGeom prst="rect">
             <a:avLst/>
@@ -30428,7 +30351,7 @@
         <p:spPr>
           <a:xfrm>
             <a:off x="548640" y="1554480"/>
-            <a:ext cx="10972080" cy="365040"/>
+            <a:ext cx="10971720" cy="364680"/>
           </a:xfrm>
           <a:prstGeom prst="rect">
             <a:avLst/>
@@ -30532,7 +30455,7 @@
         <p:spPr>
           <a:xfrm>
             <a:off x="594360" y="2788920"/>
-            <a:ext cx="273600" cy="273600"/>
+            <a:ext cx="273240" cy="273240"/>
           </a:xfrm>
           <a:prstGeom prst="ellipse">
             <a:avLst/>
@@ -30583,7 +30506,7 @@
         <p:spPr>
           <a:xfrm>
             <a:off x="-548640" y="3154680"/>
-            <a:ext cx="2559600" cy="456480"/>
+            <a:ext cx="2559240" cy="456120"/>
           </a:xfrm>
           <a:prstGeom prst="rect">
             <a:avLst/>
@@ -30644,7 +30567,7 @@
         <p:spPr>
           <a:xfrm>
             <a:off x="3803760" y="2788920"/>
-            <a:ext cx="273600" cy="273600"/>
+            <a:ext cx="273240" cy="273240"/>
           </a:xfrm>
           <a:prstGeom prst="ellipse">
             <a:avLst/>
@@ -30695,7 +30618,7 @@
         <p:spPr>
           <a:xfrm>
             <a:off x="2660760" y="3154680"/>
-            <a:ext cx="2559600" cy="456480"/>
+            <a:ext cx="2559240" cy="456120"/>
           </a:xfrm>
           <a:prstGeom prst="rect">
             <a:avLst/>
@@ -30756,7 +30679,7 @@
         <p:spPr>
           <a:xfrm>
             <a:off x="7013520" y="2788920"/>
-            <a:ext cx="273600" cy="273600"/>
+            <a:ext cx="273240" cy="273240"/>
           </a:xfrm>
           <a:prstGeom prst="ellipse">
             <a:avLst/>
@@ -30807,7 +30730,7 @@
         <p:spPr>
           <a:xfrm>
             <a:off x="5870520" y="3154680"/>
-            <a:ext cx="2559600" cy="456480"/>
+            <a:ext cx="2559240" cy="456120"/>
           </a:xfrm>
           <a:prstGeom prst="rect">
             <a:avLst/>
@@ -30868,7 +30791,7 @@
         <p:spPr>
           <a:xfrm>
             <a:off x="10437120" y="2788920"/>
-            <a:ext cx="273600" cy="273600"/>
+            <a:ext cx="273240" cy="273240"/>
           </a:xfrm>
           <a:prstGeom prst="ellipse">
             <a:avLst/>
@@ -30919,7 +30842,7 @@
         <p:spPr>
           <a:xfrm>
             <a:off x="9294120" y="3154680"/>
-            <a:ext cx="2559600" cy="456480"/>
+            <a:ext cx="2559240" cy="456120"/>
           </a:xfrm>
           <a:prstGeom prst="rect">
             <a:avLst/>
@@ -30980,7 +30903,7 @@
         <p:spPr>
           <a:xfrm>
             <a:off x="7150680" y="2286000"/>
-            <a:ext cx="3422880" cy="456480"/>
+            <a:ext cx="3422520" cy="456120"/>
           </a:xfrm>
           <a:prstGeom prst="rect">
             <a:avLst/>
@@ -31034,7 +30957,7 @@
         <p:spPr>
           <a:xfrm>
             <a:off x="7150680" y="2331720"/>
-            <a:ext cx="3422880" cy="410760"/>
+            <a:ext cx="3422520" cy="410400"/>
           </a:xfrm>
           <a:prstGeom prst="rect">
             <a:avLst/>
@@ -31095,7 +31018,7 @@
         <p:spPr>
           <a:xfrm>
             <a:off x="548640" y="3931920"/>
-            <a:ext cx="5485680" cy="2102400"/>
+            <a:ext cx="5485320" cy="2102040"/>
           </a:xfrm>
           <a:prstGeom prst="rect">
             <a:avLst/>
@@ -31146,7 +31069,7 @@
         <p:spPr>
           <a:xfrm>
             <a:off x="548640" y="3931920"/>
-            <a:ext cx="63360" cy="2102400"/>
+            <a:ext cx="63000" cy="2102040"/>
           </a:xfrm>
           <a:prstGeom prst="rect">
             <a:avLst/>
@@ -31197,7 +31120,7 @@
         <p:spPr>
           <a:xfrm>
             <a:off x="777240" y="4069080"/>
-            <a:ext cx="5119920" cy="365040"/>
+            <a:ext cx="5119560" cy="364680"/>
           </a:xfrm>
           <a:prstGeom prst="rect">
             <a:avLst/>
@@ -31258,7 +31181,7 @@
         <p:spPr>
           <a:xfrm>
             <a:off x="777240" y="4480560"/>
-            <a:ext cx="5119920" cy="1462320"/>
+            <a:ext cx="5119560" cy="1461960"/>
           </a:xfrm>
           <a:prstGeom prst="rect">
             <a:avLst/>
@@ -31319,7 +31242,7 @@
         <p:spPr>
           <a:xfrm>
             <a:off x="6263640" y="3931920"/>
-            <a:ext cx="5485680" cy="2102400"/>
+            <a:ext cx="5485320" cy="2102040"/>
           </a:xfrm>
           <a:prstGeom prst="rect">
             <a:avLst/>
@@ -31370,7 +31293,7 @@
         <p:spPr>
           <a:xfrm>
             <a:off x="6263640" y="3931920"/>
-            <a:ext cx="63360" cy="2102400"/>
+            <a:ext cx="63000" cy="2102040"/>
           </a:xfrm>
           <a:prstGeom prst="rect">
             <a:avLst/>
@@ -31421,7 +31344,7 @@
         <p:spPr>
           <a:xfrm>
             <a:off x="6492240" y="4069080"/>
-            <a:ext cx="5119920" cy="365040"/>
+            <a:ext cx="5119560" cy="364680"/>
           </a:xfrm>
           <a:prstGeom prst="rect">
             <a:avLst/>
@@ -31482,7 +31405,7 @@
         <p:spPr>
           <a:xfrm>
             <a:off x="6492240" y="4480560"/>
-            <a:ext cx="5119920" cy="1462320"/>
+            <a:ext cx="5119560" cy="1461960"/>
           </a:xfrm>
           <a:prstGeom prst="rect">
             <a:avLst/>
@@ -31521,7 +31444,7 @@
                 <a:latin typeface="Calibri"/>
                 <a:ea typeface="Calibri"/>
               </a:rPr>
-              <a:t>Kotuliak et al. (2021): RACH exceeded delay budget under high load in commercial 5G NR deployments [b6].</a:t>
+              <a:t>Seo et al. (2021): Random access delay requirements can be violated when the RA procedure enters unstable or saturated operating regions.</a:t>
             </a:r>
             <a:endParaRPr b="0" lang="en-TR" sz="1200" strike="noStrike" u="none">
               <a:solidFill>
@@ -31532,6 +31455,72 @@
               <a:latin typeface="Arial"/>
             </a:endParaRPr>
           </a:p>
+          <a:p>
+            <a:pPr defTabSz="914400">
+              <a:lnSpc>
+                <a:spcPct val="100000"/>
+              </a:lnSpc>
+              <a:tabLst>
+                <a:tab algn="l" pos="0"/>
+              </a:tabLst>
+            </a:pPr>
+            <a:endParaRPr b="0" lang="en-TR" sz="1200" strike="noStrike" u="none">
+              <a:solidFill>
+                <a:srgbClr val="000000"/>
+              </a:solidFill>
+              <a:effectLst/>
+              <a:uFillTx/>
+              <a:latin typeface="Arial"/>
+            </a:endParaRPr>
+          </a:p>
+          <a:p>
+            <a:pPr defTabSz="914400">
+              <a:lnSpc>
+                <a:spcPct val="100000"/>
+              </a:lnSpc>
+              <a:tabLst>
+                <a:tab algn="l" pos="0"/>
+              </a:tabLst>
+            </a:pPr>
+            <a:r>
+              <a:rPr b="0" lang="en-US" sz="1200" strike="noStrike" u="none">
+                <a:solidFill>
+                  <a:srgbClr val="334155"/>
+                </a:solidFill>
+                <a:effectLst/>
+                <a:uFillTx/>
+                <a:latin typeface="Calibri"/>
+                <a:ea typeface="Calibri"/>
+              </a:rPr>
+              <a:t>This supports the claim that reactive ACB/UAC is too late under bursty overload: once congestion is observed, delay and drops may already be unavoidable.</a:t>
+            </a:r>
+            <a:endParaRPr b="0" lang="en-TR" sz="1200" strike="noStrike" u="none">
+              <a:solidFill>
+                <a:srgbClr val="000000"/>
+              </a:solidFill>
+              <a:effectLst/>
+              <a:uFillTx/>
+              <a:latin typeface="Arial"/>
+            </a:endParaRPr>
+          </a:p>
+          <a:p>
+            <a:pPr defTabSz="914400">
+              <a:lnSpc>
+                <a:spcPct val="100000"/>
+              </a:lnSpc>
+              <a:tabLst>
+                <a:tab algn="l" pos="0"/>
+              </a:tabLst>
+            </a:pPr>
+            <a:endParaRPr b="0" lang="en-TR" sz="1200" strike="noStrike" u="none">
+              <a:solidFill>
+                <a:srgbClr val="000000"/>
+              </a:solidFill>
+              <a:effectLst/>
+              <a:uFillTx/>
+              <a:latin typeface="Arial"/>
+            </a:endParaRPr>
+          </a:p>
         </p:txBody>
       </p:sp>
       <p:sp>
@@ -31543,7 +31532,7 @@
         <p:spPr>
           <a:xfrm>
             <a:off x="548640" y="6355080"/>
-            <a:ext cx="11063520" cy="10080"/>
+            <a:ext cx="11063160" cy="9720"/>
           </a:xfrm>
           <a:prstGeom prst="rect">
             <a:avLst/>
@@ -31594,7 +31583,7 @@
         <p:spPr>
           <a:xfrm>
             <a:off x="548640" y="6446520"/>
-            <a:ext cx="7314480" cy="273600"/>
+            <a:ext cx="7314120" cy="273240"/>
           </a:xfrm>
           <a:prstGeom prst="rect">
             <a:avLst/>
@@ -31655,7 +31644,7 @@
         <p:spPr>
           <a:xfrm>
             <a:off x="10698480" y="6446520"/>
-            <a:ext cx="913680" cy="273600"/>
+            <a:ext cx="913320" cy="273240"/>
           </a:xfrm>
           <a:prstGeom prst="rect">
             <a:avLst/>
@@ -31753,7 +31742,7 @@
         <p:spPr>
           <a:xfrm>
             <a:off x="548640" y="411480"/>
-            <a:ext cx="10972080" cy="273600"/>
+            <a:ext cx="10971720" cy="273240"/>
           </a:xfrm>
           <a:prstGeom prst="rect">
             <a:avLst/>
@@ -31814,7 +31803,7 @@
         <p:spPr>
           <a:xfrm>
             <a:off x="548640" y="713160"/>
-            <a:ext cx="10972080" cy="776520"/>
+            <a:ext cx="10971720" cy="776160"/>
           </a:xfrm>
           <a:prstGeom prst="rect">
             <a:avLst/>
@@ -31875,7 +31864,7 @@
         <p:spPr>
           <a:xfrm>
             <a:off x="548640" y="1691640"/>
-            <a:ext cx="3611160" cy="3656880"/>
+            <a:ext cx="3610800" cy="3656520"/>
           </a:xfrm>
           <a:prstGeom prst="rect">
             <a:avLst/>
@@ -31923,7 +31912,7 @@
         <p:spPr>
           <a:xfrm>
             <a:off x="548640" y="1691640"/>
-            <a:ext cx="3611160" cy="502200"/>
+            <a:ext cx="3610800" cy="501840"/>
           </a:xfrm>
           <a:prstGeom prst="rect">
             <a:avLst/>
@@ -31978,7 +31967,7 @@
         <p:spPr>
           <a:xfrm>
             <a:off x="777240" y="1801440"/>
-            <a:ext cx="291960" cy="291960"/>
+            <a:ext cx="291600" cy="291600"/>
           </a:xfrm>
           <a:prstGeom prst="rect">
             <a:avLst/>
@@ -31998,7 +31987,7 @@
         <p:spPr>
           <a:xfrm>
             <a:off x="1143000" y="1691640"/>
-            <a:ext cx="2971080" cy="502200"/>
+            <a:ext cx="2970720" cy="501840"/>
           </a:xfrm>
           <a:prstGeom prst="rect">
             <a:avLst/>
@@ -32059,7 +32048,7 @@
         <p:spPr>
           <a:xfrm>
             <a:off x="777240" y="2437560"/>
-            <a:ext cx="3153960" cy="254160"/>
+            <a:ext cx="3153600" cy="254520"/>
           </a:xfrm>
           <a:prstGeom prst="rect">
             <a:avLst/>
@@ -32120,7 +32109,7 @@
         <p:spPr>
           <a:xfrm>
             <a:off x="777240" y="2651760"/>
-            <a:ext cx="3153960" cy="822240"/>
+            <a:ext cx="3153600" cy="821880"/>
           </a:xfrm>
           <a:prstGeom prst="rect">
             <a:avLst/>
@@ -32181,7 +32170,7 @@
         <p:spPr>
           <a:xfrm>
             <a:off x="777240" y="3566160"/>
-            <a:ext cx="3153960" cy="3960"/>
+            <a:ext cx="3153600" cy="3600"/>
           </a:xfrm>
           <a:prstGeom prst="rect">
             <a:avLst/>
@@ -32232,7 +32221,7 @@
         <p:spPr>
           <a:xfrm>
             <a:off x="777240" y="3657600"/>
-            <a:ext cx="3153960" cy="273600"/>
+            <a:ext cx="3153600" cy="273240"/>
           </a:xfrm>
           <a:prstGeom prst="rect">
             <a:avLst/>
@@ -32293,7 +32282,7 @@
         <p:spPr>
           <a:xfrm>
             <a:off x="777240" y="3931920"/>
-            <a:ext cx="3153960" cy="1325160"/>
+            <a:ext cx="3153600" cy="1324800"/>
           </a:xfrm>
           <a:prstGeom prst="rect">
             <a:avLst/>
@@ -32354,7 +32343,7 @@
         <p:spPr>
           <a:xfrm>
             <a:off x="4434840" y="1691640"/>
-            <a:ext cx="3611160" cy="3656880"/>
+            <a:ext cx="3610800" cy="3656520"/>
           </a:xfrm>
           <a:prstGeom prst="rect">
             <a:avLst/>
@@ -32405,7 +32394,7 @@
         <p:spPr>
           <a:xfrm>
             <a:off x="4434840" y="1691640"/>
-            <a:ext cx="3611160" cy="502200"/>
+            <a:ext cx="3610800" cy="501840"/>
           </a:xfrm>
           <a:prstGeom prst="rect">
             <a:avLst/>
@@ -32460,7 +32449,7 @@
         <p:spPr>
           <a:xfrm>
             <a:off x="4663440" y="1801440"/>
-            <a:ext cx="291960" cy="291960"/>
+            <a:ext cx="291600" cy="291600"/>
           </a:xfrm>
           <a:prstGeom prst="rect">
             <a:avLst/>
@@ -32480,7 +32469,7 @@
         <p:spPr>
           <a:xfrm>
             <a:off x="5029200" y="1691640"/>
-            <a:ext cx="2971080" cy="502200"/>
+            <a:ext cx="2970720" cy="501840"/>
           </a:xfrm>
           <a:prstGeom prst="rect">
             <a:avLst/>
@@ -32541,7 +32530,7 @@
         <p:spPr>
           <a:xfrm>
             <a:off x="4663440" y="2377440"/>
-            <a:ext cx="3153960" cy="273600"/>
+            <a:ext cx="3153600" cy="273240"/>
           </a:xfrm>
           <a:prstGeom prst="rect">
             <a:avLst/>
@@ -32602,7 +32591,7 @@
         <p:spPr>
           <a:xfrm>
             <a:off x="4663440" y="2651760"/>
-            <a:ext cx="3153960" cy="822240"/>
+            <a:ext cx="3153600" cy="821880"/>
           </a:xfrm>
           <a:prstGeom prst="rect">
             <a:avLst/>
@@ -32663,7 +32652,7 @@
         <p:spPr>
           <a:xfrm>
             <a:off x="4663440" y="3566160"/>
-            <a:ext cx="3153960" cy="3960"/>
+            <a:ext cx="3153600" cy="3600"/>
           </a:xfrm>
           <a:prstGeom prst="rect">
             <a:avLst/>
@@ -32714,7 +32703,7 @@
         <p:spPr>
           <a:xfrm>
             <a:off x="4663440" y="3657600"/>
-            <a:ext cx="3153960" cy="273600"/>
+            <a:ext cx="3153600" cy="273240"/>
           </a:xfrm>
           <a:prstGeom prst="rect">
             <a:avLst/>
@@ -32760,12 +32749,8 @@
                 <a:srgbClr val="000000"/>
               </a:solidFill>
               <a:effectLst/>
-              <a:highlight>
-                <a:srgbClr val="ffff00"/>
-              </a:highlight>
-              <a:uFillTx/>
-              <a:latin typeface="Arial"/>
-              <a:ea typeface="Arial Unicode MS"/>
+              <a:uFillTx/>
+              <a:latin typeface="Arial"/>
             </a:endParaRPr>
           </a:p>
         </p:txBody>
@@ -32779,7 +32764,7 @@
         <p:spPr>
           <a:xfrm>
             <a:off x="4663440" y="3931920"/>
-            <a:ext cx="3153960" cy="1325160"/>
+            <a:ext cx="3153600" cy="1324800"/>
           </a:xfrm>
           <a:prstGeom prst="rect">
             <a:avLst/>
@@ -32840,7 +32825,7 @@
         <p:spPr>
           <a:xfrm>
             <a:off x="8321040" y="1691640"/>
-            <a:ext cx="3611160" cy="3656880"/>
+            <a:ext cx="3610800" cy="3656520"/>
           </a:xfrm>
           <a:prstGeom prst="rect">
             <a:avLst/>
@@ -32891,7 +32876,7 @@
         <p:spPr>
           <a:xfrm>
             <a:off x="8321040" y="1691640"/>
-            <a:ext cx="3611160" cy="502200"/>
+            <a:ext cx="3610800" cy="501840"/>
           </a:xfrm>
           <a:prstGeom prst="rect">
             <a:avLst/>
@@ -32946,7 +32931,7 @@
         <p:spPr>
           <a:xfrm>
             <a:off x="8549640" y="1801440"/>
-            <a:ext cx="291960" cy="291960"/>
+            <a:ext cx="291600" cy="291600"/>
           </a:xfrm>
           <a:prstGeom prst="rect">
             <a:avLst/>
@@ -32966,7 +32951,7 @@
         <p:spPr>
           <a:xfrm>
             <a:off x="8915400" y="1691640"/>
-            <a:ext cx="2971080" cy="502200"/>
+            <a:ext cx="2970720" cy="501840"/>
           </a:xfrm>
           <a:prstGeom prst="rect">
             <a:avLst/>
@@ -33027,7 +33012,7 @@
         <p:spPr>
           <a:xfrm>
             <a:off x="8549640" y="2377440"/>
-            <a:ext cx="3153960" cy="273600"/>
+            <a:ext cx="3153600" cy="273240"/>
           </a:xfrm>
           <a:prstGeom prst="rect">
             <a:avLst/>
@@ -33088,7 +33073,7 @@
         <p:spPr>
           <a:xfrm>
             <a:off x="8549640" y="2651760"/>
-            <a:ext cx="3153960" cy="822240"/>
+            <a:ext cx="3153600" cy="821880"/>
           </a:xfrm>
           <a:prstGeom prst="rect">
             <a:avLst/>
@@ -33149,7 +33134,7 @@
         <p:spPr>
           <a:xfrm>
             <a:off x="8549640" y="3566160"/>
-            <a:ext cx="3153960" cy="3960"/>
+            <a:ext cx="3153600" cy="3600"/>
           </a:xfrm>
           <a:prstGeom prst="rect">
             <a:avLst/>
@@ -33200,7 +33185,7 @@
         <p:spPr>
           <a:xfrm>
             <a:off x="8549640" y="3657600"/>
-            <a:ext cx="3153960" cy="273600"/>
+            <a:ext cx="3153600" cy="273240"/>
           </a:xfrm>
           <a:prstGeom prst="rect">
             <a:avLst/>
@@ -33261,7 +33246,7 @@
         <p:spPr>
           <a:xfrm>
             <a:off x="8549640" y="3931920"/>
-            <a:ext cx="3153960" cy="1325160"/>
+            <a:ext cx="3153600" cy="1324800"/>
           </a:xfrm>
           <a:prstGeom prst="rect">
             <a:avLst/>
@@ -33322,7 +33307,7 @@
         <p:spPr>
           <a:xfrm>
             <a:off x="548640" y="5532120"/>
-            <a:ext cx="11063520" cy="593640"/>
+            <a:ext cx="11063160" cy="593280"/>
           </a:xfrm>
           <a:prstGeom prst="rect">
             <a:avLst/>
@@ -33377,7 +33362,7 @@
         <p:spPr>
           <a:xfrm>
             <a:off x="713160" y="5650920"/>
-            <a:ext cx="365040" cy="365040"/>
+            <a:ext cx="364680" cy="364680"/>
           </a:xfrm>
           <a:prstGeom prst="rect">
             <a:avLst/>
@@ -33397,7 +33382,7 @@
         <p:spPr>
           <a:xfrm>
             <a:off x="1188720" y="5532120"/>
-            <a:ext cx="10332000" cy="593640"/>
+            <a:ext cx="10331640" cy="593280"/>
           </a:xfrm>
           <a:prstGeom prst="rect">
             <a:avLst/>
@@ -33458,7 +33443,7 @@
         <p:spPr>
           <a:xfrm>
             <a:off x="548640" y="6355080"/>
-            <a:ext cx="11063520" cy="10080"/>
+            <a:ext cx="11063160" cy="9720"/>
           </a:xfrm>
           <a:prstGeom prst="rect">
             <a:avLst/>
@@ -33509,7 +33494,7 @@
         <p:spPr>
           <a:xfrm>
             <a:off x="548640" y="6446520"/>
-            <a:ext cx="7314480" cy="273600"/>
+            <a:ext cx="7314120" cy="273240"/>
           </a:xfrm>
           <a:prstGeom prst="rect">
             <a:avLst/>
@@ -33570,7 +33555,7 @@
         <p:spPr>
           <a:xfrm>
             <a:off x="10698480" y="6446520"/>
-            <a:ext cx="913680" cy="273600"/>
+            <a:ext cx="913320" cy="273240"/>
           </a:xfrm>
           <a:prstGeom prst="rect">
             <a:avLst/>
@@ -33668,7 +33653,7 @@
         <p:spPr>
           <a:xfrm>
             <a:off x="548640" y="411480"/>
-            <a:ext cx="10972080" cy="273600"/>
+            <a:ext cx="10971720" cy="273240"/>
           </a:xfrm>
           <a:prstGeom prst="rect">
             <a:avLst/>
@@ -33729,7 +33714,7 @@
         <p:spPr>
           <a:xfrm>
             <a:off x="548640" y="713160"/>
-            <a:ext cx="10972080" cy="776520"/>
+            <a:ext cx="10971720" cy="776160"/>
           </a:xfrm>
           <a:prstGeom prst="rect">
             <a:avLst/>
@@ -33790,7 +33775,7 @@
         <p:spPr>
           <a:xfrm>
             <a:off x="548640" y="1600200"/>
-            <a:ext cx="6400080" cy="4525560"/>
+            <a:ext cx="6399720" cy="4525200"/>
           </a:xfrm>
           <a:prstGeom prst="rect">
             <a:avLst/>
@@ -33841,7 +33826,7 @@
         <p:spPr>
           <a:xfrm>
             <a:off x="822960" y="1737360"/>
-            <a:ext cx="5942880" cy="319320"/>
+            <a:ext cx="5942520" cy="318960"/>
           </a:xfrm>
           <a:prstGeom prst="rect">
             <a:avLst/>
@@ -33902,7 +33887,7 @@
         <p:spPr>
           <a:xfrm>
             <a:off x="914400" y="2880360"/>
-            <a:ext cx="1828080" cy="1188000"/>
+            <a:ext cx="1827720" cy="1187640"/>
           </a:xfrm>
           <a:prstGeom prst="roundRect">
             <a:avLst>
@@ -33955,7 +33940,7 @@
         <p:spPr>
           <a:xfrm>
             <a:off x="914400" y="2880360"/>
-            <a:ext cx="1828080" cy="1188000"/>
+            <a:ext cx="1827720" cy="1187640"/>
           </a:xfrm>
           <a:prstGeom prst="rect">
             <a:avLst/>
@@ -34046,7 +34031,7 @@
         <p:spPr>
           <a:xfrm>
             <a:off x="4754880" y="2880360"/>
-            <a:ext cx="1828080" cy="1188000"/>
+            <a:ext cx="1827720" cy="1187640"/>
           </a:xfrm>
           <a:prstGeom prst="roundRect">
             <a:avLst>
@@ -34099,7 +34084,7 @@
         <p:spPr>
           <a:xfrm>
             <a:off x="4754880" y="2880360"/>
-            <a:ext cx="1828080" cy="1188000"/>
+            <a:ext cx="1827720" cy="1187640"/>
           </a:xfrm>
           <a:prstGeom prst="rect">
             <a:avLst/>
@@ -34234,7 +34219,7 @@
         <p:spPr>
           <a:xfrm>
             <a:off x="2743200" y="2880360"/>
-            <a:ext cx="2010960" cy="273600"/>
+            <a:ext cx="2010600" cy="273240"/>
           </a:xfrm>
           <a:prstGeom prst="rect">
             <a:avLst/>
@@ -34339,7 +34324,7 @@
         <p:spPr>
           <a:xfrm>
             <a:off x="2743200" y="3794760"/>
-            <a:ext cx="2010960" cy="273600"/>
+            <a:ext cx="2010600" cy="273240"/>
           </a:xfrm>
           <a:prstGeom prst="rect">
             <a:avLst/>
@@ -34400,7 +34385,7 @@
         <p:spPr>
           <a:xfrm>
             <a:off x="822960" y="4389120"/>
-            <a:ext cx="5942880" cy="273600"/>
+            <a:ext cx="5942520" cy="273240"/>
           </a:xfrm>
           <a:prstGeom prst="rect">
             <a:avLst/>
@@ -34461,7 +34446,7 @@
         <p:spPr>
           <a:xfrm>
             <a:off x="822960" y="4709160"/>
-            <a:ext cx="5942880" cy="410760"/>
+            <a:ext cx="5942520" cy="410400"/>
           </a:xfrm>
           <a:prstGeom prst="rect">
             <a:avLst/>
@@ -34522,7 +34507,7 @@
         <p:spPr>
           <a:xfrm>
             <a:off x="822960" y="5212080"/>
-            <a:ext cx="5942880" cy="365040"/>
+            <a:ext cx="5942520" cy="364680"/>
           </a:xfrm>
           <a:prstGeom prst="rect">
             <a:avLst/>
@@ -34583,7 +34568,7 @@
         <p:spPr>
           <a:xfrm>
             <a:off x="7178040" y="1600200"/>
-            <a:ext cx="4571280" cy="4525560"/>
+            <a:ext cx="4570920" cy="4525200"/>
           </a:xfrm>
           <a:prstGeom prst="rect">
             <a:avLst/>
@@ -34634,7 +34619,7 @@
         <p:spPr>
           <a:xfrm>
             <a:off x="7178040" y="1600200"/>
-            <a:ext cx="63360" cy="4525560"/>
+            <a:ext cx="63000" cy="4525200"/>
           </a:xfrm>
           <a:prstGeom prst="rect">
             <a:avLst/>
@@ -34685,7 +34670,7 @@
         <p:spPr>
           <a:xfrm>
             <a:off x="7452360" y="1737360"/>
-            <a:ext cx="4114080" cy="365040"/>
+            <a:ext cx="4113720" cy="364680"/>
           </a:xfrm>
           <a:prstGeom prst="rect">
             <a:avLst/>
@@ -35296,7 +35281,7 @@
         <p:spPr>
           <a:xfrm>
             <a:off x="7452360" y="4709160"/>
-            <a:ext cx="410760" cy="410760"/>
+            <a:ext cx="410400" cy="410400"/>
           </a:xfrm>
           <a:prstGeom prst="rect">
             <a:avLst/>
@@ -35316,7 +35301,7 @@
         <p:spPr>
           <a:xfrm>
             <a:off x="7955280" y="4709160"/>
-            <a:ext cx="3656880" cy="1188000"/>
+            <a:ext cx="3656520" cy="1187640"/>
           </a:xfrm>
           <a:prstGeom prst="rect">
             <a:avLst/>
@@ -35377,7 +35362,7 @@
         <p:spPr>
           <a:xfrm>
             <a:off x="548640" y="6355080"/>
-            <a:ext cx="11063520" cy="10080"/>
+            <a:ext cx="11063160" cy="9720"/>
           </a:xfrm>
           <a:prstGeom prst="rect">
             <a:avLst/>
@@ -35428,7 +35413,7 @@
         <p:spPr>
           <a:xfrm>
             <a:off x="548640" y="6446520"/>
-            <a:ext cx="7314480" cy="273600"/>
+            <a:ext cx="7314120" cy="273240"/>
           </a:xfrm>
           <a:prstGeom prst="rect">
             <a:avLst/>
@@ -35489,7 +35474,7 @@
         <p:spPr>
           <a:xfrm>
             <a:off x="10698480" y="6446520"/>
-            <a:ext cx="913680" cy="273600"/>
+            <a:ext cx="913320" cy="273240"/>
           </a:xfrm>
           <a:prstGeom prst="rect">
             <a:avLst/>
@@ -35587,7 +35572,7 @@
         <p:spPr>
           <a:xfrm>
             <a:off x="548640" y="411480"/>
-            <a:ext cx="10972080" cy="273600"/>
+            <a:ext cx="10971720" cy="273240"/>
           </a:xfrm>
           <a:prstGeom prst="rect">
             <a:avLst/>
@@ -35648,7 +35633,7 @@
         <p:spPr>
           <a:xfrm>
             <a:off x="548640" y="713160"/>
-            <a:ext cx="10972080" cy="776520"/>
+            <a:ext cx="10971720" cy="776160"/>
           </a:xfrm>
           <a:prstGeom prst="rect">
             <a:avLst/>
@@ -35709,7 +35694,7 @@
         <p:spPr>
           <a:xfrm>
             <a:off x="548640" y="1645920"/>
-            <a:ext cx="2742480" cy="4296960"/>
+            <a:ext cx="2742120" cy="4296600"/>
           </a:xfrm>
           <a:prstGeom prst="rect">
             <a:avLst/>
@@ -35760,7 +35745,7 @@
         <p:spPr>
           <a:xfrm>
             <a:off x="548640" y="1645920"/>
-            <a:ext cx="63360" cy="4296960"/>
+            <a:ext cx="63000" cy="4296600"/>
           </a:xfrm>
           <a:prstGeom prst="rect">
             <a:avLst/>
@@ -35815,7 +35800,7 @@
         <p:spPr>
           <a:xfrm>
             <a:off x="1645920" y="1874520"/>
-            <a:ext cx="547920" cy="547920"/>
+            <a:ext cx="547560" cy="547560"/>
           </a:xfrm>
           <a:prstGeom prst="rect">
             <a:avLst/>
@@ -35835,7 +35820,7 @@
         <p:spPr>
           <a:xfrm>
             <a:off x="548640" y="2514600"/>
-            <a:ext cx="2742480" cy="365040"/>
+            <a:ext cx="2742120" cy="364680"/>
           </a:xfrm>
           <a:prstGeom prst="rect">
             <a:avLst/>
@@ -35896,7 +35881,7 @@
         <p:spPr>
           <a:xfrm>
             <a:off x="822960" y="3017520"/>
-            <a:ext cx="2193840" cy="639360"/>
+            <a:ext cx="2193480" cy="639000"/>
           </a:xfrm>
           <a:prstGeom prst="roundRect">
             <a:avLst>
@@ -35949,7 +35934,7 @@
         <p:spPr>
           <a:xfrm>
             <a:off x="822960" y="3017520"/>
-            <a:ext cx="2193840" cy="639360"/>
+            <a:ext cx="2193480" cy="639000"/>
           </a:xfrm>
           <a:prstGeom prst="rect">
             <a:avLst/>
@@ -36040,7 +36025,7 @@
         <p:spPr>
           <a:xfrm>
             <a:off x="822960" y="3840480"/>
-            <a:ext cx="2193840" cy="639360"/>
+            <a:ext cx="2193480" cy="639000"/>
           </a:xfrm>
           <a:prstGeom prst="roundRect">
             <a:avLst>
@@ -36093,7 +36078,7 @@
         <p:spPr>
           <a:xfrm>
             <a:off x="822960" y="3840480"/>
-            <a:ext cx="2193840" cy="639360"/>
+            <a:ext cx="2193480" cy="639000"/>
           </a:xfrm>
           <a:prstGeom prst="rect">
             <a:avLst/>
@@ -36184,7 +36169,7 @@
         <p:spPr>
           <a:xfrm>
             <a:off x="640080" y="4754880"/>
-            <a:ext cx="2559600" cy="913680"/>
+            <a:ext cx="2559240" cy="913320"/>
           </a:xfrm>
           <a:prstGeom prst="rect">
             <a:avLst/>
@@ -36275,7 +36260,7 @@
         <p:spPr>
           <a:xfrm>
             <a:off x="4206240" y="1645920"/>
-            <a:ext cx="7405920" cy="4296960"/>
+            <a:ext cx="7405560" cy="4296600"/>
           </a:xfrm>
           <a:prstGeom prst="rect">
             <a:avLst/>
@@ -36326,7 +36311,7 @@
         <p:spPr>
           <a:xfrm>
             <a:off x="4206240" y="1645920"/>
-            <a:ext cx="63360" cy="4296960"/>
+            <a:ext cx="63000" cy="4296600"/>
           </a:xfrm>
           <a:prstGeom prst="rect">
             <a:avLst/>
@@ -36377,7 +36362,7 @@
         <p:spPr>
           <a:xfrm>
             <a:off x="4480560" y="1783080"/>
-            <a:ext cx="6948720" cy="365040"/>
+            <a:ext cx="6948360" cy="364680"/>
           </a:xfrm>
           <a:prstGeom prst="rect">
             <a:avLst/>
@@ -36438,7 +36423,7 @@
         <p:spPr>
           <a:xfrm>
             <a:off x="10058400" y="1810440"/>
-            <a:ext cx="1279440" cy="319320"/>
+            <a:ext cx="1279080" cy="318960"/>
           </a:xfrm>
           <a:prstGeom prst="rect">
             <a:avLst/>
@@ -36499,7 +36484,7 @@
         <p:spPr>
           <a:xfrm>
             <a:off x="4480560" y="2423160"/>
-            <a:ext cx="2239560" cy="3199680"/>
+            <a:ext cx="2239200" cy="3199320"/>
           </a:xfrm>
           <a:prstGeom prst="roundRect">
             <a:avLst>
@@ -36552,7 +36537,7 @@
         <p:spPr>
           <a:xfrm>
             <a:off x="4480560" y="2423160"/>
-            <a:ext cx="2239560" cy="456480"/>
+            <a:ext cx="2239200" cy="456120"/>
           </a:xfrm>
           <a:prstGeom prst="rect">
             <a:avLst/>
@@ -36603,7 +36588,7 @@
         <p:spPr>
           <a:xfrm>
             <a:off x="4617720" y="2423160"/>
-            <a:ext cx="1965240" cy="456480"/>
+            <a:ext cx="1964880" cy="456120"/>
           </a:xfrm>
           <a:prstGeom prst="rect">
             <a:avLst/>
@@ -36668,7 +36653,7 @@
         <p:spPr>
           <a:xfrm>
             <a:off x="5280840" y="3200400"/>
-            <a:ext cx="639360" cy="639360"/>
+            <a:ext cx="639000" cy="639000"/>
           </a:xfrm>
           <a:prstGeom prst="rect">
             <a:avLst/>
@@ -36688,7 +36673,7 @@
         <p:spPr>
           <a:xfrm>
             <a:off x="4663440" y="3977640"/>
-            <a:ext cx="1873800" cy="456480"/>
+            <a:ext cx="1873440" cy="456120"/>
           </a:xfrm>
           <a:prstGeom prst="rect">
             <a:avLst/>
@@ -36749,7 +36734,7 @@
         <p:spPr>
           <a:xfrm>
             <a:off x="4663440" y="4526280"/>
-            <a:ext cx="1873800" cy="1005120"/>
+            <a:ext cx="1873440" cy="1004760"/>
           </a:xfrm>
           <a:prstGeom prst="rect">
             <a:avLst/>
@@ -36810,7 +36795,7 @@
         <p:spPr>
           <a:xfrm>
             <a:off x="6858000" y="2423160"/>
-            <a:ext cx="2239560" cy="3199680"/>
+            <a:ext cx="2239200" cy="3199320"/>
           </a:xfrm>
           <a:prstGeom prst="roundRect">
             <a:avLst>
@@ -36863,7 +36848,7 @@
         <p:spPr>
           <a:xfrm>
             <a:off x="6858000" y="2423160"/>
-            <a:ext cx="2239560" cy="456480"/>
+            <a:ext cx="2239200" cy="456120"/>
           </a:xfrm>
           <a:prstGeom prst="rect">
             <a:avLst/>
@@ -36914,7 +36899,7 @@
         <p:spPr>
           <a:xfrm>
             <a:off x="6995160" y="2423160"/>
-            <a:ext cx="1965240" cy="456480"/>
+            <a:ext cx="1964880" cy="456120"/>
           </a:xfrm>
           <a:prstGeom prst="rect">
             <a:avLst/>
@@ -36979,7 +36964,7 @@
         <p:spPr>
           <a:xfrm>
             <a:off x="7658280" y="3200400"/>
-            <a:ext cx="639360" cy="639360"/>
+            <a:ext cx="639000" cy="639000"/>
           </a:xfrm>
           <a:prstGeom prst="rect">
             <a:avLst/>
@@ -36999,7 +36984,7 @@
         <p:spPr>
           <a:xfrm>
             <a:off x="7040880" y="3977640"/>
-            <a:ext cx="1873800" cy="456480"/>
+            <a:ext cx="1873440" cy="456120"/>
           </a:xfrm>
           <a:prstGeom prst="rect">
             <a:avLst/>
@@ -37060,7 +37045,7 @@
         <p:spPr>
           <a:xfrm>
             <a:off x="7040880" y="4526280"/>
-            <a:ext cx="1873800" cy="1005120"/>
+            <a:ext cx="1873440" cy="1004760"/>
           </a:xfrm>
           <a:prstGeom prst="rect">
             <a:avLst/>
@@ -37121,7 +37106,7 @@
         <p:spPr>
           <a:xfrm>
             <a:off x="9235440" y="2423160"/>
-            <a:ext cx="2239560" cy="3199680"/>
+            <a:ext cx="2239200" cy="3199320"/>
           </a:xfrm>
           <a:prstGeom prst="roundRect">
             <a:avLst>
@@ -37174,7 +37159,7 @@
         <p:spPr>
           <a:xfrm>
             <a:off x="9235440" y="2423160"/>
-            <a:ext cx="2239560" cy="456480"/>
+            <a:ext cx="2239200" cy="456120"/>
           </a:xfrm>
           <a:prstGeom prst="rect">
             <a:avLst/>
@@ -37225,7 +37210,7 @@
         <p:spPr>
           <a:xfrm>
             <a:off x="9372600" y="2423160"/>
-            <a:ext cx="1965240" cy="456480"/>
+            <a:ext cx="1964880" cy="456120"/>
           </a:xfrm>
           <a:prstGeom prst="rect">
             <a:avLst/>
@@ -37290,7 +37275,7 @@
         <p:spPr>
           <a:xfrm>
             <a:off x="10035720" y="3200400"/>
-            <a:ext cx="639360" cy="639360"/>
+            <a:ext cx="639000" cy="639000"/>
           </a:xfrm>
           <a:prstGeom prst="rect">
             <a:avLst/>
@@ -37310,7 +37295,7 @@
         <p:spPr>
           <a:xfrm>
             <a:off x="9418320" y="3977640"/>
-            <a:ext cx="1873800" cy="456480"/>
+            <a:ext cx="1873440" cy="456120"/>
           </a:xfrm>
           <a:prstGeom prst="rect">
             <a:avLst/>
@@ -37371,7 +37356,7 @@
         <p:spPr>
           <a:xfrm>
             <a:off x="9418320" y="4526280"/>
-            <a:ext cx="1873800" cy="1005120"/>
+            <a:ext cx="1873440" cy="1004760"/>
           </a:xfrm>
           <a:prstGeom prst="rect">
             <a:avLst/>
@@ -37476,7 +37461,7 @@
         <p:spPr>
           <a:xfrm>
             <a:off x="3337560" y="3063240"/>
-            <a:ext cx="822240" cy="273600"/>
+            <a:ext cx="821880" cy="273240"/>
           </a:xfrm>
           <a:prstGeom prst="rect">
             <a:avLst/>
@@ -37667,7 +37652,7 @@
         <p:spPr>
           <a:xfrm>
             <a:off x="2834640" y="6309360"/>
-            <a:ext cx="4114080" cy="273600"/>
+            <a:ext cx="4113720" cy="273240"/>
           </a:xfrm>
           <a:prstGeom prst="rect">
             <a:avLst/>
@@ -37728,7 +37713,7 @@
         <p:spPr>
           <a:xfrm>
             <a:off x="548640" y="6355080"/>
-            <a:ext cx="11063520" cy="10080"/>
+            <a:ext cx="11063160" cy="9720"/>
           </a:xfrm>
           <a:prstGeom prst="rect">
             <a:avLst/>
@@ -37779,7 +37764,7 @@
         <p:spPr>
           <a:xfrm>
             <a:off x="548640" y="6446520"/>
-            <a:ext cx="7314480" cy="273600"/>
+            <a:ext cx="7314120" cy="273240"/>
           </a:xfrm>
           <a:prstGeom prst="rect">
             <a:avLst/>
@@ -37840,7 +37825,7 @@
         <p:spPr>
           <a:xfrm>
             <a:off x="10698480" y="6446520"/>
-            <a:ext cx="913680" cy="273600"/>
+            <a:ext cx="913320" cy="273240"/>
           </a:xfrm>
           <a:prstGeom prst="rect">
             <a:avLst/>
